--- a/Estudo_Viabilidade_Retrofit_HVAC_Novo_Shopping.pptx
+++ b/Estudo_Viabilidade_Retrofit_HVAC_Novo_Shopping.pptx
@@ -3438,6 +3438,10 @@
           </a:solidFill>
           <a:ln/>
         </p:spPr>
+        <p:txBody>
+          <a:bodyPr/>
+          <a:p/>
+        </p:txBody>
       </p:sp>
       <p:sp>
         <p:nvSpPr>
@@ -3458,6 +3462,10 @@
           </a:solidFill>
           <a:ln/>
         </p:spPr>
+        <p:txBody>
+          <a:bodyPr/>
+          <a:p/>
+        </p:txBody>
       </p:sp>
       <p:sp>
         <p:nvSpPr>
@@ -3478,6 +3486,10 @@
           </a:solidFill>
           <a:ln/>
         </p:spPr>
+        <p:txBody>
+          <a:bodyPr/>
+          <a:p/>
+        </p:txBody>
       </p:sp>
       <p:sp>
         <p:nvSpPr>
@@ -3579,6 +3591,10 @@
             <a:prstDash val="solid"/>
           </a:ln>
         </p:spPr>
+        <p:txBody>
+          <a:bodyPr/>
+          <a:p/>
+        </p:txBody>
       </p:sp>
       <p:sp>
         <p:nvSpPr>
@@ -4116,25 +4132,9 @@
                     <a:bodyPr/>
                     <a:lstStyle/>
                     <a:p>
-                      <a:pPr algn="ctr" indent="0" marL="0">
-                        <a:buNone/>
-                      </a:pPr>
                       <a:r>
-                        <a:rPr lang="en-US" sz="1150" dirty="0">
-                          <a:solidFill>
-                            <a:srgbClr val="1E2761"/>
-                          </a:solidFill>
-                          <a:latin typeface="Calibri" pitchFamily="34" charset="0"/>
-                          <a:ea typeface="Calibri" pitchFamily="34" charset="-122"/>
-                          <a:cs typeface="Calibri" pitchFamily="34" charset="-120"/>
-                        </a:rPr>
                         <a:t>237.000 kWh</a:t>
                       </a:r>
-                      <a:endParaRPr lang="en-US" sz="1150" dirty="0">
-                        <a:latin typeface="Calibri" charset="0"/>
-                        <a:ea typeface="Calibri" charset="0"/>
-                        <a:cs typeface="Calibri" charset="0"/>
-                      </a:endParaRPr>
                     </a:p>
                   </a:txBody>
                   <a:tcPr marL="91440" marR="91440" marT="45720" marB="45720" anchor="ctr">
@@ -4160,25 +4160,9 @@
                     <a:bodyPr/>
                     <a:lstStyle/>
                     <a:p>
-                      <a:pPr algn="ctr" indent="0" marL="0">
-                        <a:buNone/>
-                      </a:pPr>
                       <a:r>
-                        <a:rPr lang="en-US" sz="1150" dirty="0">
-                          <a:solidFill>
-                            <a:srgbClr val="1E2761"/>
-                          </a:solidFill>
-                          <a:latin typeface="Calibri" pitchFamily="34" charset="0"/>
-                          <a:ea typeface="Calibri" pitchFamily="34" charset="-122"/>
-                          <a:cs typeface="Calibri" pitchFamily="34" charset="-120"/>
-                        </a:rPr>
                         <a:t>212.813 kWh</a:t>
                       </a:r>
-                      <a:endParaRPr lang="en-US" sz="1150" dirty="0">
-                        <a:latin typeface="Calibri" charset="0"/>
-                        <a:ea typeface="Calibri" charset="0"/>
-                        <a:cs typeface="Calibri" charset="0"/>
-                      </a:endParaRPr>
                     </a:p>
                   </a:txBody>
                   <a:tcPr marL="91440" marR="91440" marT="45720" marB="45720" anchor="ctr">
@@ -4204,25 +4188,9 @@
                     <a:bodyPr/>
                     <a:lstStyle/>
                     <a:p>
-                      <a:pPr algn="ctr" indent="0" marL="0">
-                        <a:buNone/>
-                      </a:pPr>
                       <a:r>
-                        <a:rPr lang="en-US" sz="1150" dirty="0">
-                          <a:solidFill>
-                            <a:srgbClr val="1E2761"/>
-                          </a:solidFill>
-                          <a:latin typeface="Calibri" pitchFamily="34" charset="0"/>
-                          <a:ea typeface="Calibri" pitchFamily="34" charset="-122"/>
-                          <a:cs typeface="Calibri" pitchFamily="34" charset="-120"/>
-                        </a:rPr>
                         <a:t>24.187 kWh</a:t>
                       </a:r>
-                      <a:endParaRPr lang="en-US" sz="1150" dirty="0">
-                        <a:latin typeface="Calibri" charset="0"/>
-                        <a:ea typeface="Calibri" charset="0"/>
-                        <a:cs typeface="Calibri" charset="0"/>
-                      </a:endParaRPr>
                     </a:p>
                   </a:txBody>
                   <a:tcPr marL="91440" marR="91440" marT="45720" marB="45720" anchor="ctr">
@@ -4248,25 +4216,9 @@
                     <a:bodyPr/>
                     <a:lstStyle/>
                     <a:p>
-                      <a:pPr algn="ctr" indent="0" marL="0">
-                        <a:buNone/>
-                      </a:pPr>
                       <a:r>
-                        <a:rPr lang="en-US" sz="1150" b="1" dirty="0">
-                          <a:solidFill>
-                            <a:srgbClr val="028090"/>
-                          </a:solidFill>
-                          <a:latin typeface="Calibri" pitchFamily="34" charset="0"/>
-                          <a:ea typeface="Calibri" pitchFamily="34" charset="-122"/>
-                          <a:cs typeface="Calibri" pitchFamily="34" charset="-120"/>
-                        </a:rPr>
                         <a:t>-10,2%</a:t>
                       </a:r>
-                      <a:endParaRPr lang="en-US" sz="1150" dirty="0">
-                        <a:latin typeface="Calibri" charset="0"/>
-                        <a:ea typeface="Calibri" charset="0"/>
-                        <a:cs typeface="Calibri" charset="0"/>
-                      </a:endParaRPr>
                     </a:p>
                   </a:txBody>
                   <a:tcPr marL="91440" marR="91440" marT="45720" marB="45720" anchor="ctr">
@@ -4338,25 +4290,9 @@
                     <a:bodyPr/>
                     <a:lstStyle/>
                     <a:p>
-                      <a:pPr algn="ctr" indent="0" marL="0">
-                        <a:buNone/>
-                      </a:pPr>
                       <a:r>
-                        <a:rPr lang="en-US" sz="1150" dirty="0">
-                          <a:solidFill>
-                            <a:srgbClr val="1E2761"/>
-                          </a:solidFill>
-                          <a:latin typeface="Calibri" pitchFamily="34" charset="0"/>
-                          <a:ea typeface="Calibri" pitchFamily="34" charset="-122"/>
-                          <a:cs typeface="Calibri" pitchFamily="34" charset="-120"/>
-                        </a:rPr>
                         <a:t>2.843.999 kWh</a:t>
                       </a:r>
-                      <a:endParaRPr lang="en-US" sz="1150" dirty="0">
-                        <a:latin typeface="Calibri" charset="0"/>
-                        <a:ea typeface="Calibri" charset="0"/>
-                        <a:cs typeface="Calibri" charset="0"/>
-                      </a:endParaRPr>
                     </a:p>
                   </a:txBody>
                   <a:tcPr marL="91440" marR="91440" marT="45720" marB="45720" anchor="ctr">
@@ -4382,25 +4318,9 @@
                     <a:bodyPr/>
                     <a:lstStyle/>
                     <a:p>
-                      <a:pPr algn="ctr" indent="0" marL="0">
-                        <a:buNone/>
-                      </a:pPr>
                       <a:r>
-                        <a:rPr lang="en-US" sz="1150" dirty="0">
-                          <a:solidFill>
-                            <a:srgbClr val="1E2761"/>
-                          </a:solidFill>
-                          <a:latin typeface="Calibri" pitchFamily="34" charset="0"/>
-                          <a:ea typeface="Calibri" pitchFamily="34" charset="-122"/>
-                          <a:cs typeface="Calibri" pitchFamily="34" charset="-120"/>
-                        </a:rPr>
                         <a:t>2.553.751 kWh</a:t>
                       </a:r>
-                      <a:endParaRPr lang="en-US" sz="1150" dirty="0">
-                        <a:latin typeface="Calibri" charset="0"/>
-                        <a:ea typeface="Calibri" charset="0"/>
-                        <a:cs typeface="Calibri" charset="0"/>
-                      </a:endParaRPr>
                     </a:p>
                   </a:txBody>
                   <a:tcPr marL="91440" marR="91440" marT="45720" marB="45720" anchor="ctr">
@@ -4426,25 +4346,9 @@
                     <a:bodyPr/>
                     <a:lstStyle/>
                     <a:p>
-                      <a:pPr algn="ctr" indent="0" marL="0">
-                        <a:buNone/>
-                      </a:pPr>
                       <a:r>
-                        <a:rPr lang="en-US" sz="1150" dirty="0">
-                          <a:solidFill>
-                            <a:srgbClr val="1E2761"/>
-                          </a:solidFill>
-                          <a:latin typeface="Calibri" pitchFamily="34" charset="0"/>
-                          <a:ea typeface="Calibri" pitchFamily="34" charset="-122"/>
-                          <a:cs typeface="Calibri" pitchFamily="34" charset="-120"/>
-                        </a:rPr>
                         <a:t>290.249 kWh</a:t>
                       </a:r>
-                      <a:endParaRPr lang="en-US" sz="1150" dirty="0">
-                        <a:latin typeface="Calibri" charset="0"/>
-                        <a:ea typeface="Calibri" charset="0"/>
-                        <a:cs typeface="Calibri" charset="0"/>
-                      </a:endParaRPr>
                     </a:p>
                   </a:txBody>
                   <a:tcPr marL="91440" marR="91440" marT="45720" marB="45720" anchor="ctr">
@@ -4470,25 +4374,9 @@
                     <a:bodyPr/>
                     <a:lstStyle/>
                     <a:p>
-                      <a:pPr algn="ctr" indent="0" marL="0">
-                        <a:buNone/>
-                      </a:pPr>
                       <a:r>
-                        <a:rPr lang="en-US" sz="1150" b="1" dirty="0">
-                          <a:solidFill>
-                            <a:srgbClr val="028090"/>
-                          </a:solidFill>
-                          <a:latin typeface="Calibri" pitchFamily="34" charset="0"/>
-                          <a:ea typeface="Calibri" pitchFamily="34" charset="-122"/>
-                          <a:cs typeface="Calibri" pitchFamily="34" charset="-120"/>
-                        </a:rPr>
                         <a:t>-10,2%</a:t>
                       </a:r>
-                      <a:endParaRPr lang="en-US" sz="1150" dirty="0">
-                        <a:latin typeface="Calibri" charset="0"/>
-                        <a:ea typeface="Calibri" charset="0"/>
-                        <a:cs typeface="Calibri" charset="0"/>
-                      </a:endParaRPr>
                     </a:p>
                   </a:txBody>
                   <a:tcPr marL="91440" marR="91440" marT="45720" marB="45720" anchor="ctr">
@@ -4560,25 +4448,9 @@
                     <a:bodyPr/>
                     <a:lstStyle/>
                     <a:p>
-                      <a:pPr algn="ctr" indent="0" marL="0">
-                        <a:buNone/>
-                      </a:pPr>
                       <a:r>
-                        <a:rPr lang="en-US" sz="1150" dirty="0">
-                          <a:solidFill>
-                            <a:srgbClr val="1E2761"/>
-                          </a:solidFill>
-                          <a:latin typeface="Calibri" pitchFamily="34" charset="0"/>
-                          <a:ea typeface="Calibri" pitchFamily="34" charset="-122"/>
-                          <a:cs typeface="Calibri" pitchFamily="34" charset="-120"/>
-                        </a:rPr>
                         <a:t>R$ 177.749,96</a:t>
                       </a:r>
-                      <a:endParaRPr lang="en-US" sz="1150" dirty="0">
-                        <a:latin typeface="Calibri" charset="0"/>
-                        <a:ea typeface="Calibri" charset="0"/>
-                        <a:cs typeface="Calibri" charset="0"/>
-                      </a:endParaRPr>
                     </a:p>
                   </a:txBody>
                   <a:tcPr marL="91440" marR="91440" marT="45720" marB="45720" anchor="ctr">
@@ -4604,25 +4476,9 @@
                     <a:bodyPr/>
                     <a:lstStyle/>
                     <a:p>
-                      <a:pPr algn="ctr" indent="0" marL="0">
-                        <a:buNone/>
-                      </a:pPr>
                       <a:r>
-                        <a:rPr lang="en-US" sz="1150" dirty="0">
-                          <a:solidFill>
-                            <a:srgbClr val="1E2761"/>
-                          </a:solidFill>
-                          <a:latin typeface="Calibri" pitchFamily="34" charset="0"/>
-                          <a:ea typeface="Calibri" pitchFamily="34" charset="-122"/>
-                          <a:cs typeface="Calibri" pitchFamily="34" charset="-120"/>
-                        </a:rPr>
                         <a:t>R$ 159.609,43</a:t>
                       </a:r>
-                      <a:endParaRPr lang="en-US" sz="1150" dirty="0">
-                        <a:latin typeface="Calibri" charset="0"/>
-                        <a:ea typeface="Calibri" charset="0"/>
-                        <a:cs typeface="Calibri" charset="0"/>
-                      </a:endParaRPr>
                     </a:p>
                   </a:txBody>
                   <a:tcPr marL="91440" marR="91440" marT="45720" marB="45720" anchor="ctr">
@@ -4648,25 +4504,9 @@
                     <a:bodyPr/>
                     <a:lstStyle/>
                     <a:p>
-                      <a:pPr algn="ctr" indent="0" marL="0">
-                        <a:buNone/>
-                      </a:pPr>
                       <a:r>
-                        <a:rPr lang="en-US" sz="1150" dirty="0">
-                          <a:solidFill>
-                            <a:srgbClr val="1E2761"/>
-                          </a:solidFill>
-                          <a:latin typeface="Calibri" pitchFamily="34" charset="0"/>
-                          <a:ea typeface="Calibri" pitchFamily="34" charset="-122"/>
-                          <a:cs typeface="Calibri" pitchFamily="34" charset="-120"/>
-                        </a:rPr>
-                        <a:t>R$ 18.140,53</a:t>
+                        <a:t>R$ 18.140,54</a:t>
                       </a:r>
-                      <a:endParaRPr lang="en-US" sz="1150" dirty="0">
-                        <a:latin typeface="Calibri" charset="0"/>
-                        <a:ea typeface="Calibri" charset="0"/>
-                        <a:cs typeface="Calibri" charset="0"/>
-                      </a:endParaRPr>
                     </a:p>
                   </a:txBody>
                   <a:tcPr marL="91440" marR="91440" marT="45720" marB="45720" anchor="ctr">
@@ -4692,25 +4532,9 @@
                     <a:bodyPr/>
                     <a:lstStyle/>
                     <a:p>
-                      <a:pPr algn="ctr" indent="0" marL="0">
-                        <a:buNone/>
-                      </a:pPr>
                       <a:r>
-                        <a:rPr lang="en-US" sz="1150" b="1" dirty="0">
-                          <a:solidFill>
-                            <a:srgbClr val="028090"/>
-                          </a:solidFill>
-                          <a:latin typeface="Calibri" pitchFamily="34" charset="0"/>
-                          <a:ea typeface="Calibri" pitchFamily="34" charset="-122"/>
-                          <a:cs typeface="Calibri" pitchFamily="34" charset="-120"/>
-                        </a:rPr>
                         <a:t>-10,2%</a:t>
                       </a:r>
-                      <a:endParaRPr lang="en-US" sz="1150" dirty="0">
-                        <a:latin typeface="Calibri" charset="0"/>
-                        <a:ea typeface="Calibri" charset="0"/>
-                        <a:cs typeface="Calibri" charset="0"/>
-                      </a:endParaRPr>
                     </a:p>
                   </a:txBody>
                   <a:tcPr marL="91440" marR="91440" marT="45720" marB="45720" anchor="ctr">
@@ -4782,25 +4606,9 @@
                     <a:bodyPr/>
                     <a:lstStyle/>
                     <a:p>
-                      <a:pPr algn="ctr" indent="0" marL="0">
-                        <a:buNone/>
-                      </a:pPr>
                       <a:r>
-                        <a:rPr lang="en-US" sz="1150" dirty="0">
-                          <a:solidFill>
-                            <a:srgbClr val="1E2761"/>
-                          </a:solidFill>
-                          <a:latin typeface="Calibri" pitchFamily="34" charset="0"/>
-                          <a:ea typeface="Calibri" pitchFamily="34" charset="-122"/>
-                          <a:cs typeface="Calibri" pitchFamily="34" charset="-120"/>
-                        </a:rPr>
                         <a:t>R$ 2.132.999,57</a:t>
                       </a:r>
-                      <a:endParaRPr lang="en-US" sz="1150" dirty="0">
-                        <a:latin typeface="Calibri" charset="0"/>
-                        <a:ea typeface="Calibri" charset="0"/>
-                        <a:cs typeface="Calibri" charset="0"/>
-                      </a:endParaRPr>
                     </a:p>
                   </a:txBody>
                   <a:tcPr marL="91440" marR="91440" marT="45720" marB="45720" anchor="ctr">
@@ -4826,25 +4634,9 @@
                     <a:bodyPr/>
                     <a:lstStyle/>
                     <a:p>
-                      <a:pPr algn="ctr" indent="0" marL="0">
-                        <a:buNone/>
-                      </a:pPr>
                       <a:r>
-                        <a:rPr lang="en-US" sz="1150" dirty="0">
-                          <a:solidFill>
-                            <a:srgbClr val="1E2761"/>
-                          </a:solidFill>
-                          <a:latin typeface="Calibri" pitchFamily="34" charset="0"/>
-                          <a:ea typeface="Calibri" pitchFamily="34" charset="-122"/>
-                          <a:cs typeface="Calibri" pitchFamily="34" charset="-120"/>
-                        </a:rPr>
                         <a:t>R$ 1.915.313,15</a:t>
                       </a:r>
-                      <a:endParaRPr lang="en-US" sz="1150" dirty="0">
-                        <a:latin typeface="Calibri" charset="0"/>
-                        <a:ea typeface="Calibri" charset="0"/>
-                        <a:cs typeface="Calibri" charset="0"/>
-                      </a:endParaRPr>
                     </a:p>
                   </a:txBody>
                   <a:tcPr marL="91440" marR="91440" marT="45720" marB="45720" anchor="ctr">
@@ -4870,25 +4662,9 @@
                     <a:bodyPr/>
                     <a:lstStyle/>
                     <a:p>
-                      <a:pPr algn="ctr" indent="0" marL="0">
-                        <a:buNone/>
-                      </a:pPr>
                       <a:r>
-                        <a:rPr lang="en-US" sz="1150" dirty="0">
-                          <a:solidFill>
-                            <a:srgbClr val="1E2761"/>
-                          </a:solidFill>
-                          <a:latin typeface="Calibri" pitchFamily="34" charset="0"/>
-                          <a:ea typeface="Calibri" pitchFamily="34" charset="-122"/>
-                          <a:cs typeface="Calibri" pitchFamily="34" charset="-120"/>
-                        </a:rPr>
                         <a:t>R$ 217.686,42</a:t>
                       </a:r>
-                      <a:endParaRPr lang="en-US" sz="1150" dirty="0">
-                        <a:latin typeface="Calibri" charset="0"/>
-                        <a:ea typeface="Calibri" charset="0"/>
-                        <a:cs typeface="Calibri" charset="0"/>
-                      </a:endParaRPr>
                     </a:p>
                   </a:txBody>
                   <a:tcPr marL="91440" marR="91440" marT="45720" marB="45720" anchor="ctr">
@@ -4914,25 +4690,9 @@
                     <a:bodyPr/>
                     <a:lstStyle/>
                     <a:p>
-                      <a:pPr algn="ctr" indent="0" marL="0">
-                        <a:buNone/>
-                      </a:pPr>
                       <a:r>
-                        <a:rPr lang="en-US" sz="1150" b="1" dirty="0">
-                          <a:solidFill>
-                            <a:srgbClr val="028090"/>
-                          </a:solidFill>
-                          <a:latin typeface="Calibri" pitchFamily="34" charset="0"/>
-                          <a:ea typeface="Calibri" pitchFamily="34" charset="-122"/>
-                          <a:cs typeface="Calibri" pitchFamily="34" charset="-120"/>
-                        </a:rPr>
                         <a:t>-10,2%</a:t>
                       </a:r>
-                      <a:endParaRPr lang="en-US" sz="1150" dirty="0">
-                        <a:latin typeface="Calibri" charset="0"/>
-                        <a:ea typeface="Calibri" charset="0"/>
-                        <a:cs typeface="Calibri" charset="0"/>
-                      </a:endParaRPr>
                     </a:p>
                   </a:txBody>
                   <a:tcPr marL="91440" marR="91440" marT="45720" marB="45720" anchor="ctr">
@@ -5245,6 +5005,10 @@
             </a:outerShdw>
           </a:effectLst>
         </p:spPr>
+        <p:txBody>
+          <a:bodyPr/>
+          <a:p/>
+        </p:txBody>
       </p:sp>
       <p:sp>
         <p:nvSpPr>
@@ -5352,6 +5116,10 @@
             </a:outerShdw>
           </a:effectLst>
         </p:spPr>
+        <p:txBody>
+          <a:bodyPr/>
+          <a:p/>
+        </p:txBody>
       </p:sp>
       <p:sp>
         <p:nvSpPr>
@@ -5378,15 +5146,7 @@
               <a:buNone/>
             </a:pPr>
             <a:r>
-              <a:rPr lang="en-US" sz="2200" b="1" dirty="0">
-                <a:solidFill>
-                  <a:srgbClr val="028090"/>
-                </a:solidFill>
-                <a:latin typeface="Cambria" pitchFamily="34" charset="0"/>
-                <a:ea typeface="Cambria" pitchFamily="34" charset="-122"/>
-                <a:cs typeface="Cambria" pitchFamily="34" charset="-120"/>
-              </a:rPr>
-              <a:t>16,6 meses</a:t>
+              <a:t>16,5 meses</a:t>
             </a:r>
             <a:endParaRPr lang="en-US" sz="2200" dirty="0"/>
           </a:p>
@@ -5459,6 +5219,10 @@
             </a:outerShdw>
           </a:effectLst>
         </p:spPr>
+        <p:txBody>
+          <a:bodyPr/>
+          <a:p/>
+        </p:txBody>
       </p:sp>
       <p:sp>
         <p:nvSpPr>
@@ -5485,15 +5249,7 @@
               <a:buNone/>
             </a:pPr>
             <a:r>
-              <a:rPr lang="en-US" sz="2200" b="1" dirty="0">
-                <a:solidFill>
-                  <a:srgbClr val="1E2761"/>
-                </a:solidFill>
-                <a:latin typeface="Cambria" pitchFamily="34" charset="0"/>
-                <a:ea typeface="Cambria" pitchFamily="34" charset="-122"/>
-                <a:cs typeface="Cambria" pitchFamily="34" charset="-120"/>
-              </a:rPr>
-              <a:t>+261,6%</a:t>
+              <a:t>+262,8%</a:t>
             </a:r>
             <a:endParaRPr lang="en-US" sz="2200" dirty="0"/>
           </a:p>
@@ -5566,6 +5322,10 @@
             </a:outerShdw>
           </a:effectLst>
         </p:spPr>
+        <p:txBody>
+          <a:bodyPr/>
+          <a:p/>
+        </p:txBody>
       </p:sp>
       <p:sp>
         <p:nvSpPr>
@@ -5592,15 +5352,7 @@
               <a:buNone/>
             </a:pPr>
             <a:r>
-              <a:rPr lang="en-US" sz="2200" b="1" dirty="0">
-                <a:solidFill>
-                  <a:srgbClr val="028090"/>
-                </a:solidFill>
-                <a:latin typeface="Cambria" pitchFamily="34" charset="0"/>
-                <a:ea typeface="Cambria" pitchFamily="34" charset="-122"/>
-                <a:cs typeface="Cambria" pitchFamily="34" charset="-120"/>
-              </a:rPr>
-              <a:t>R$ 483.710</a:t>
+              <a:t>R$ 484.710</a:t>
             </a:r>
             <a:endParaRPr lang="en-US" sz="2200" dirty="0"/>
           </a:p>
@@ -5721,6 +5473,10 @@
           </a:solidFill>
           <a:ln/>
         </p:spPr>
+        <p:txBody>
+          <a:bodyPr/>
+          <a:p/>
+        </p:txBody>
       </p:sp>
       <p:sp>
         <p:nvSpPr>
@@ -5822,6 +5578,10 @@
             <a:prstDash val="solid"/>
           </a:ln>
         </p:spPr>
+        <p:txBody>
+          <a:bodyPr/>
+          <a:p/>
+        </p:txBody>
       </p:sp>
       <p:sp>
         <p:nvSpPr>
@@ -5923,6 +5683,10 @@
             <a:prstDash val="solid"/>
           </a:ln>
         </p:spPr>
+        <p:txBody>
+          <a:bodyPr/>
+          <a:p/>
+        </p:txBody>
       </p:sp>
       <p:sp>
         <p:nvSpPr>
@@ -6172,6 +5936,10 @@
           </a:solidFill>
           <a:ln/>
         </p:spPr>
+        <p:txBody>
+          <a:bodyPr/>
+          <a:p/>
+        </p:txBody>
       </p:sp>
       <p:sp>
         <p:nvSpPr>
@@ -6198,14 +5966,6 @@
               <a:buNone/>
             </a:pPr>
             <a:r>
-              <a:rPr lang="en-US" sz="3400" b="1" dirty="0">
-                <a:solidFill>
-                  <a:srgbClr val="00A896"/>
-                </a:solidFill>
-                <a:latin typeface="Cambria" pitchFamily="34" charset="0"/>
-                <a:ea typeface="Cambria" pitchFamily="34" charset="-122"/>
-                <a:cs typeface="Cambria" pitchFamily="34" charset="-120"/>
-              </a:rPr>
               <a:t>25,0 tCO2/ano</a:t>
             </a:r>
             <a:endParaRPr lang="en-US" sz="3400" dirty="0"/>
@@ -6273,6 +6033,10 @@
             <a:prstDash val="solid"/>
           </a:ln>
         </p:spPr>
+        <p:txBody>
+          <a:bodyPr/>
+          <a:p/>
+        </p:txBody>
       </p:sp>
       <p:sp>
         <p:nvSpPr>
@@ -6301,52 +6065,18 @@
               </a:lnSpc>
               <a:buNone/>
             </a:pPr>
-            <a:r>
-              <a:rPr lang="en-US" sz="1250" b="1" dirty="0">
-                <a:solidFill>
-                  <a:srgbClr val="FFFFFF"/>
-                </a:solidFill>
-                <a:latin typeface="Calibri" pitchFamily="34" charset="0"/>
-                <a:ea typeface="Calibri" pitchFamily="34" charset="-122"/>
-                <a:cs typeface="Calibri" pitchFamily="34" charset="-120"/>
-              </a:rPr>
-              <a:t>290.249 kWh/ano </a:t>
-            </a:r>
             <a:pPr indent="0" marL="0">
               <a:lnSpc>
                 <a:spcPct val="150000"/>
               </a:lnSpc>
               <a:buNone/>
             </a:pPr>
-            <a:r>
-              <a:rPr lang="en-US" sz="1250" dirty="0">
-                <a:solidFill>
-                  <a:srgbClr val="CADCFC"/>
-                </a:solidFill>
-                <a:latin typeface="Calibri" pitchFamily="34" charset="0"/>
-                <a:ea typeface="Calibri" pitchFamily="34" charset="-122"/>
-                <a:cs typeface="Calibri" pitchFamily="34" charset="-120"/>
-              </a:rPr>
-              <a:t>de energia economizada
-</a:t>
-            </a:r>
             <a:pPr indent="0" marL="0">
               <a:lnSpc>
                 <a:spcPct val="150000"/>
               </a:lnSpc>
               <a:buNone/>
             </a:pPr>
-            <a:r>
-              <a:rPr lang="en-US" sz="1250" b="1" dirty="0">
-                <a:solidFill>
-                  <a:srgbClr val="FFFFFF"/>
-                </a:solidFill>
-                <a:latin typeface="Calibri" pitchFamily="34" charset="0"/>
-                <a:ea typeface="Calibri" pitchFamily="34" charset="-122"/>
-                <a:cs typeface="Calibri" pitchFamily="34" charset="-120"/>
-              </a:rPr>
-              <a:t>0,086 kg CO2/kWh </a:t>
-            </a:r>
             <a:pPr indent="0" marL="0">
               <a:lnSpc>
                 <a:spcPct val="150000"/>
@@ -6354,29 +6084,166 @@
               <a:buNone/>
             </a:pPr>
             <a:r>
-              <a:rPr lang="en-US" sz="1250" dirty="0">
-                <a:solidFill>
-                  <a:srgbClr val="CADCFC"/>
+              <a:t>290.249 kWh/ano de energia economizada</a:t>
+            </a:r>
+            <a:br/>
+            <a:r>
+              <a:t>0,086 kg CO2/kWh fator de emissão (SIN / MCTI)</a:t>
+            </a:r>
+            <a:endParaRPr lang="en-US" sz="1250" dirty="0"/>
+          </a:p>
+        </p:txBody>
+      </p:sp>
+      <p:sp>
+        <p:nvSpPr>
+          <p:cNvPr id="8" name="Shape 6"/>
+          <p:cNvSpPr/>
+          <p:nvPr/>
+        </p:nvSpPr>
+        <p:spPr>
+          <a:xfrm>
+            <a:off x="6126480" y="1371600"/>
+            <a:ext cx="640080" cy="640080"/>
+          </a:xfrm>
+          <a:prstGeom prst="ellipse">
+            <a:avLst/>
+          </a:prstGeom>
+          <a:solidFill>
+            <a:srgbClr val="00A896"/>
+          </a:solidFill>
+          <a:ln/>
+        </p:spPr>
+        <p:txBody>
+          <a:bodyPr/>
+          <a:p/>
+        </p:txBody>
+      </p:sp>
+      <p:sp>
+        <p:nvSpPr>
+          <p:cNvPr id="9" name="Text 7"/>
+          <p:cNvSpPr txBox="1"/>
+          <p:nvPr/>
+        </p:nvSpPr>
+        <p:spPr>
+          <a:xfrm>
+            <a:off x="6126480" y="1371600"/>
+            <a:ext cx="640080" cy="640080"/>
+          </a:xfrm>
+          <a:prstGeom prst="rect">
+            <a:avLst/>
+          </a:prstGeom>
+          <a:noFill/>
+          <a:ln/>
+        </p:spPr>
+        <p:txBody>
+          <a:bodyPr wrap="square" lIns="0" tIns="0" rIns="0" bIns="0" rtlCol="0" anchor="ctr"/>
+          <a:lstStyle/>
+          <a:p>
+            <a:pPr algn="ctr" indent="0" marL="0">
+              <a:buNone/>
+            </a:pPr>
+            <a:r>
+              <a:rPr lang="en-US" sz="1800" b="1" dirty="0">
+                <a:solidFill>
+                  <a:srgbClr val="FFFFFF"/>
                 </a:solidFill>
                 <a:latin typeface="Calibri" pitchFamily="34" charset="0"/>
                 <a:ea typeface="Calibri" pitchFamily="34" charset="-122"/>
                 <a:cs typeface="Calibri" pitchFamily="34" charset="-120"/>
               </a:rPr>
-              <a:t>fator de emissão (SIN / MCTI)</a:t>
-            </a:r>
-            <a:endParaRPr lang="en-US" sz="1250" dirty="0"/>
-          </a:p>
-        </p:txBody>
-      </p:sp>
-      <p:sp>
-        <p:nvSpPr>
-          <p:cNvPr id="8" name="Shape 6"/>
+              <a:t>1.560</a:t>
+            </a:r>
+            <a:endParaRPr lang="en-US" sz="1800" dirty="0"/>
+          </a:p>
+        </p:txBody>
+      </p:sp>
+      <p:sp>
+        <p:nvSpPr>
+          <p:cNvPr id="10" name="Text 8"/>
+          <p:cNvSpPr txBox="1"/>
+          <p:nvPr/>
+        </p:nvSpPr>
+        <p:spPr>
+          <a:xfrm>
+            <a:off x="6949440" y="1353312"/>
+            <a:ext cx="4572000" cy="365760"/>
+          </a:xfrm>
+          <a:prstGeom prst="rect">
+            <a:avLst/>
+          </a:prstGeom>
+          <a:noFill/>
+          <a:ln/>
+        </p:spPr>
+        <p:txBody>
+          <a:bodyPr wrap="square" lIns="0" tIns="0" rIns="0" bIns="0" rtlCol="0" anchor="ctr"/>
+          <a:lstStyle/>
+          <a:p>
+            <a:pPr indent="0" marL="0">
+              <a:buNone/>
+            </a:pPr>
+            <a:r>
+              <a:rPr lang="en-US" sz="1600" b="1" dirty="0">
+                <a:solidFill>
+                  <a:srgbClr val="1E2761"/>
+                </a:solidFill>
+                <a:latin typeface="Cambria" pitchFamily="34" charset="0"/>
+                <a:ea typeface="Cambria" pitchFamily="34" charset="-122"/>
+                <a:cs typeface="Cambria" pitchFamily="34" charset="-120"/>
+              </a:rPr>
+              <a:t>~1.560 árvores</a:t>
+            </a:r>
+            <a:endParaRPr lang="en-US" sz="1600" dirty="0"/>
+          </a:p>
+        </p:txBody>
+      </p:sp>
+      <p:sp>
+        <p:nvSpPr>
+          <p:cNvPr id="11" name="Text 9"/>
+          <p:cNvSpPr txBox="1"/>
+          <p:nvPr/>
+        </p:nvSpPr>
+        <p:spPr>
+          <a:xfrm>
+            <a:off x="6949440" y="1691640"/>
+            <a:ext cx="4572000" cy="594360"/>
+          </a:xfrm>
+          <a:prstGeom prst="rect">
+            <a:avLst/>
+          </a:prstGeom>
+          <a:noFill/>
+          <a:ln/>
+        </p:spPr>
+        <p:txBody>
+          <a:bodyPr wrap="square" lIns="0" tIns="0" rIns="0" bIns="0" rtlCol="0" anchor="ctr"/>
+          <a:lstStyle/>
+          <a:p>
+            <a:pPr indent="0" marL="0">
+              <a:buNone/>
+            </a:pPr>
+            <a:r>
+              <a:rPr lang="en-US" sz="1150" dirty="0">
+                <a:solidFill>
+                  <a:srgbClr val="5A6472"/>
+                </a:solidFill>
+                <a:latin typeface="Calibri" pitchFamily="34" charset="0"/>
+                <a:ea typeface="Calibri" pitchFamily="34" charset="-122"/>
+                <a:cs typeface="Calibri" pitchFamily="34" charset="-120"/>
+              </a:rPr>
+              <a:t>plantadas e preservadas por ano para absorver o mesmo volume de carbono</a:t>
+            </a:r>
+            <a:endParaRPr lang="en-US" sz="1150" dirty="0"/>
+          </a:p>
+        </p:txBody>
+      </p:sp>
+      <p:sp>
+        <p:nvSpPr>
+          <p:cNvPr id="12" name="Shape 10"/>
           <p:cNvSpPr/>
           <p:nvPr/>
         </p:nvSpPr>
         <p:spPr>
           <a:xfrm>
-            <a:off x="6126480" y="1371600"/>
+            <a:off x="6126480" y="2788920"/>
             <a:ext cx="640080" cy="640080"/>
           </a:xfrm>
           <a:prstGeom prst="ellipse">
@@ -6387,16 +6254,20 @@
           </a:solidFill>
           <a:ln/>
         </p:spPr>
-      </p:sp>
-      <p:sp>
-        <p:nvSpPr>
-          <p:cNvPr id="9" name="Text 7"/>
+        <p:txBody>
+          <a:bodyPr/>
+          <a:p/>
+        </p:txBody>
+      </p:sp>
+      <p:sp>
+        <p:nvSpPr>
+          <p:cNvPr id="13" name="Text 11"/>
           <p:cNvSpPr txBox="1"/>
           <p:nvPr/>
         </p:nvSpPr>
         <p:spPr>
           <a:xfrm>
-            <a:off x="6126480" y="1371600"/>
+            <a:off x="6126480" y="2788920"/>
             <a:ext cx="640080" cy="640080"/>
           </a:xfrm>
           <a:prstGeom prst="rect">
@@ -6421,7 +6292,7 @@
                 <a:ea typeface="Calibri" pitchFamily="34" charset="-122"/>
                 <a:cs typeface="Calibri" pitchFamily="34" charset="-120"/>
               </a:rPr>
-              <a:t>1.560</a:t>
+              <a:t>54</a:t>
             </a:r>
             <a:endParaRPr lang="en-US" sz="1800" dirty="0"/>
           </a:p>
@@ -6429,13 +6300,13 @@
       </p:sp>
       <p:sp>
         <p:nvSpPr>
-          <p:cNvPr id="10" name="Text 8"/>
+          <p:cNvPr id="14" name="Text 12"/>
           <p:cNvSpPr txBox="1"/>
           <p:nvPr/>
         </p:nvSpPr>
         <p:spPr>
           <a:xfrm>
-            <a:off x="6949440" y="1353312"/>
+            <a:off x="6949440" y="2770632"/>
             <a:ext cx="4572000" cy="365760"/>
           </a:xfrm>
           <a:prstGeom prst="rect">
@@ -6460,7 +6331,7 @@
                 <a:ea typeface="Cambria" pitchFamily="34" charset="-122"/>
                 <a:cs typeface="Cambria" pitchFamily="34" charset="-120"/>
               </a:rPr>
-              <a:t>~1.560 árvores</a:t>
+              <a:t>~54 veículos</a:t>
             </a:r>
             <a:endParaRPr lang="en-US" sz="1600" dirty="0"/>
           </a:p>
@@ -6468,13 +6339,13 @@
       </p:sp>
       <p:sp>
         <p:nvSpPr>
-          <p:cNvPr id="11" name="Text 9"/>
+          <p:cNvPr id="15" name="Text 13"/>
           <p:cNvSpPr txBox="1"/>
           <p:nvPr/>
         </p:nvSpPr>
         <p:spPr>
           <a:xfrm>
-            <a:off x="6949440" y="1691640"/>
+            <a:off x="6949440" y="3108960"/>
             <a:ext cx="4572000" cy="594360"/>
           </a:xfrm>
           <a:prstGeom prst="rect">
@@ -6499,7 +6370,7 @@
                 <a:ea typeface="Calibri" pitchFamily="34" charset="-122"/>
                 <a:cs typeface="Calibri" pitchFamily="34" charset="-120"/>
               </a:rPr>
-              <a:t>plantadas e preservadas por ano para absorver o mesmo volume de carbono</a:t>
+              <a:t>de passeio a combustão retirados de circulação nas avenidas de Ribeirão Preto</a:t>
             </a:r>
             <a:endParaRPr lang="en-US" sz="1150" dirty="0"/>
           </a:p>
@@ -6507,13 +6378,13 @@
       </p:sp>
       <p:sp>
         <p:nvSpPr>
-          <p:cNvPr id="12" name="Shape 10"/>
+          <p:cNvPr id="16" name="Shape 14"/>
           <p:cNvSpPr/>
           <p:nvPr/>
         </p:nvSpPr>
         <p:spPr>
           <a:xfrm>
-            <a:off x="6126480" y="2788920"/>
+            <a:off x="6126480" y="4206240"/>
             <a:ext cx="640080" cy="640080"/>
           </a:xfrm>
           <a:prstGeom prst="ellipse">
@@ -6524,143 +6395,10 @@
           </a:solidFill>
           <a:ln/>
         </p:spPr>
-      </p:sp>
-      <p:sp>
-        <p:nvSpPr>
-          <p:cNvPr id="13" name="Text 11"/>
-          <p:cNvSpPr txBox="1"/>
-          <p:nvPr/>
-        </p:nvSpPr>
-        <p:spPr>
-          <a:xfrm>
-            <a:off x="6126480" y="2788920"/>
-            <a:ext cx="640080" cy="640080"/>
-          </a:xfrm>
-          <a:prstGeom prst="rect">
-            <a:avLst/>
-          </a:prstGeom>
-          <a:noFill/>
-          <a:ln/>
-        </p:spPr>
-        <p:txBody>
-          <a:bodyPr wrap="square" lIns="0" tIns="0" rIns="0" bIns="0" rtlCol="0" anchor="ctr"/>
-          <a:lstStyle/>
-          <a:p>
-            <a:pPr algn="ctr" indent="0" marL="0">
-              <a:buNone/>
-            </a:pPr>
-            <a:r>
-              <a:rPr lang="en-US" sz="1800" b="1" dirty="0">
-                <a:solidFill>
-                  <a:srgbClr val="FFFFFF"/>
-                </a:solidFill>
-                <a:latin typeface="Calibri" pitchFamily="34" charset="0"/>
-                <a:ea typeface="Calibri" pitchFamily="34" charset="-122"/>
-                <a:cs typeface="Calibri" pitchFamily="34" charset="-120"/>
-              </a:rPr>
-              <a:t>54</a:t>
-            </a:r>
-            <a:endParaRPr lang="en-US" sz="1800" dirty="0"/>
-          </a:p>
-        </p:txBody>
-      </p:sp>
-      <p:sp>
-        <p:nvSpPr>
-          <p:cNvPr id="14" name="Text 12"/>
-          <p:cNvSpPr txBox="1"/>
-          <p:nvPr/>
-        </p:nvSpPr>
-        <p:spPr>
-          <a:xfrm>
-            <a:off x="6949440" y="2770632"/>
-            <a:ext cx="4572000" cy="365760"/>
-          </a:xfrm>
-          <a:prstGeom prst="rect">
-            <a:avLst/>
-          </a:prstGeom>
-          <a:noFill/>
-          <a:ln/>
-        </p:spPr>
-        <p:txBody>
-          <a:bodyPr wrap="square" lIns="0" tIns="0" rIns="0" bIns="0" rtlCol="0" anchor="ctr"/>
-          <a:lstStyle/>
-          <a:p>
-            <a:pPr indent="0" marL="0">
-              <a:buNone/>
-            </a:pPr>
-            <a:r>
-              <a:rPr lang="en-US" sz="1600" b="1" dirty="0">
-                <a:solidFill>
-                  <a:srgbClr val="1E2761"/>
-                </a:solidFill>
-                <a:latin typeface="Cambria" pitchFamily="34" charset="0"/>
-                <a:ea typeface="Cambria" pitchFamily="34" charset="-122"/>
-                <a:cs typeface="Cambria" pitchFamily="34" charset="-120"/>
-              </a:rPr>
-              <a:t>~54 veículos</a:t>
-            </a:r>
-            <a:endParaRPr lang="en-US" sz="1600" dirty="0"/>
-          </a:p>
-        </p:txBody>
-      </p:sp>
-      <p:sp>
-        <p:nvSpPr>
-          <p:cNvPr id="15" name="Text 13"/>
-          <p:cNvSpPr txBox="1"/>
-          <p:nvPr/>
-        </p:nvSpPr>
-        <p:spPr>
-          <a:xfrm>
-            <a:off x="6949440" y="3108960"/>
-            <a:ext cx="4572000" cy="594360"/>
-          </a:xfrm>
-          <a:prstGeom prst="rect">
-            <a:avLst/>
-          </a:prstGeom>
-          <a:noFill/>
-          <a:ln/>
-        </p:spPr>
-        <p:txBody>
-          <a:bodyPr wrap="square" lIns="0" tIns="0" rIns="0" bIns="0" rtlCol="0" anchor="ctr"/>
-          <a:lstStyle/>
-          <a:p>
-            <a:pPr indent="0" marL="0">
-              <a:buNone/>
-            </a:pPr>
-            <a:r>
-              <a:rPr lang="en-US" sz="1150" dirty="0">
-                <a:solidFill>
-                  <a:srgbClr val="5A6472"/>
-                </a:solidFill>
-                <a:latin typeface="Calibri" pitchFamily="34" charset="0"/>
-                <a:ea typeface="Calibri" pitchFamily="34" charset="-122"/>
-                <a:cs typeface="Calibri" pitchFamily="34" charset="-120"/>
-              </a:rPr>
-              <a:t>de passeio a combustão retirados de circulação nas avenidas de Ribeirão Preto</a:t>
-            </a:r>
-            <a:endParaRPr lang="en-US" sz="1150" dirty="0"/>
-          </a:p>
-        </p:txBody>
-      </p:sp>
-      <p:sp>
-        <p:nvSpPr>
-          <p:cNvPr id="16" name="Shape 14"/>
-          <p:cNvSpPr/>
-          <p:nvPr/>
-        </p:nvSpPr>
-        <p:spPr>
-          <a:xfrm>
-            <a:off x="6126480" y="4206240"/>
-            <a:ext cx="640080" cy="640080"/>
-          </a:xfrm>
-          <a:prstGeom prst="ellipse">
-            <a:avLst/>
-          </a:prstGeom>
-          <a:solidFill>
-            <a:srgbClr val="00A896"/>
-          </a:solidFill>
-          <a:ln/>
-        </p:spPr>
+        <p:txBody>
+          <a:bodyPr/>
+          <a:p/>
+        </p:txBody>
       </p:sp>
       <p:sp>
         <p:nvSpPr>
@@ -6989,6 +6727,10 @@
             <a:prstDash val="solid"/>
           </a:ln>
         </p:spPr>
+        <p:txBody>
+          <a:bodyPr/>
+          <a:p/>
+        </p:txBody>
       </p:sp>
       <p:sp>
         <p:nvSpPr>
@@ -7009,6 +6751,10 @@
           </a:solidFill>
           <a:ln/>
         </p:spPr>
+        <p:txBody>
+          <a:bodyPr/>
+          <a:p/>
+        </p:txBody>
       </p:sp>
       <p:sp>
         <p:nvSpPr>
@@ -7109,6 +6855,10 @@
           </a:solidFill>
           <a:ln/>
         </p:spPr>
+        <p:txBody>
+          <a:bodyPr/>
+          <a:p/>
+        </p:txBody>
       </p:sp>
       <p:sp>
         <p:nvSpPr>
@@ -7207,6 +6957,10 @@
           </a:solidFill>
           <a:ln/>
         </p:spPr>
+        <p:txBody>
+          <a:bodyPr/>
+          <a:p/>
+        </p:txBody>
       </p:sp>
       <p:sp>
         <p:nvSpPr>
@@ -7307,6 +7061,10 @@
           </a:solidFill>
           <a:ln/>
         </p:spPr>
+        <p:txBody>
+          <a:bodyPr/>
+          <a:p/>
+        </p:txBody>
       </p:sp>
       <p:sp>
         <p:nvSpPr>
@@ -7405,6 +7163,10 @@
           </a:solidFill>
           <a:ln/>
         </p:spPr>
+        <p:txBody>
+          <a:bodyPr/>
+          <a:p/>
+        </p:txBody>
       </p:sp>
       <p:sp>
         <p:nvSpPr>
@@ -7505,6 +7267,10 @@
           </a:solidFill>
           <a:ln/>
         </p:spPr>
+        <p:txBody>
+          <a:bodyPr/>
+          <a:p/>
+        </p:txBody>
       </p:sp>
       <p:sp>
         <p:nvSpPr>
@@ -7603,6 +7369,10 @@
           </a:solidFill>
           <a:ln/>
         </p:spPr>
+        <p:txBody>
+          <a:bodyPr/>
+          <a:p/>
+        </p:txBody>
       </p:sp>
       <p:sp>
         <p:nvSpPr>
@@ -7703,6 +7473,10 @@
           </a:solidFill>
           <a:ln/>
         </p:spPr>
+        <p:txBody>
+          <a:bodyPr/>
+          <a:p/>
+        </p:txBody>
       </p:sp>
       <p:sp>
         <p:nvSpPr>
@@ -7801,6 +7575,10 @@
           </a:solidFill>
           <a:ln/>
         </p:spPr>
+        <p:txBody>
+          <a:bodyPr/>
+          <a:p/>
+        </p:txBody>
       </p:sp>
       <p:sp>
         <p:nvSpPr>
@@ -7901,6 +7679,10 @@
           </a:solidFill>
           <a:ln/>
         </p:spPr>
+        <p:txBody>
+          <a:bodyPr/>
+          <a:p/>
+        </p:txBody>
       </p:sp>
       <p:sp>
         <p:nvSpPr>
@@ -8157,6 +7939,10 @@
             </a:outerShdw>
           </a:effectLst>
         </p:spPr>
+        <p:txBody>
+          <a:bodyPr/>
+          <a:p/>
+        </p:txBody>
       </p:sp>
       <p:sp>
         <p:nvSpPr>
@@ -8177,6 +7963,10 @@
           </a:solidFill>
           <a:ln/>
         </p:spPr>
+        <p:txBody>
+          <a:bodyPr/>
+          <a:p/>
+        </p:txBody>
       </p:sp>
       <p:sp>
         <p:nvSpPr>
@@ -8323,6 +8113,10 @@
             </a:outerShdw>
           </a:effectLst>
         </p:spPr>
+        <p:txBody>
+          <a:bodyPr/>
+          <a:p/>
+        </p:txBody>
       </p:sp>
       <p:sp>
         <p:nvSpPr>
@@ -8343,6 +8137,10 @@
           </a:solidFill>
           <a:ln/>
         </p:spPr>
+        <p:txBody>
+          <a:bodyPr/>
+          <a:p/>
+        </p:txBody>
       </p:sp>
       <p:sp>
         <p:nvSpPr>
@@ -8489,6 +8287,10 @@
             </a:outerShdw>
           </a:effectLst>
         </p:spPr>
+        <p:txBody>
+          <a:bodyPr/>
+          <a:p/>
+        </p:txBody>
       </p:sp>
       <p:sp>
         <p:nvSpPr>
@@ -8509,6 +8311,10 @@
           </a:solidFill>
           <a:ln/>
         </p:spPr>
+        <p:txBody>
+          <a:bodyPr/>
+          <a:p/>
+        </p:txBody>
       </p:sp>
       <p:sp>
         <p:nvSpPr>
@@ -8756,6 +8562,10 @@
           </a:solidFill>
           <a:ln/>
         </p:spPr>
+        <p:txBody>
+          <a:bodyPr/>
+          <a:p/>
+        </p:txBody>
       </p:sp>
       <p:sp>
         <p:nvSpPr>
@@ -8776,6 +8586,10 @@
           </a:solidFill>
           <a:ln/>
         </p:spPr>
+        <p:txBody>
+          <a:bodyPr/>
+          <a:p/>
+        </p:txBody>
       </p:sp>
       <p:sp>
         <p:nvSpPr>
@@ -8843,87 +8657,30 @@
               </a:lnSpc>
               <a:buNone/>
             </a:pPr>
-            <a:r>
-              <a:rPr lang="en-US" sz="1500" dirty="0">
-                <a:solidFill>
-                  <a:srgbClr val="CADCFC"/>
-                </a:solidFill>
-                <a:latin typeface="Calibri" pitchFamily="34" charset="0"/>
-                <a:ea typeface="Calibri" pitchFamily="34" charset="-122"/>
-                <a:cs typeface="Calibri" pitchFamily="34" charset="-120"/>
-              </a:rPr>
-              <a:t>Projeto tecnicamente maduro, financeiramente de altíssimo retorno e ambientalmente responsável.
-</a:t>
-            </a:r>
             <a:pPr indent="0" marL="0">
               <a:lnSpc>
                 <a:spcPct val="140000"/>
               </a:lnSpc>
               <a:buNone/>
             </a:pPr>
-            <a:r>
-              <a:rPr lang="en-US" sz="1500" b="1" dirty="0">
-                <a:solidFill>
-                  <a:srgbClr val="00A896"/>
-                </a:solidFill>
-                <a:latin typeface="Calibri" pitchFamily="34" charset="0"/>
-                <a:ea typeface="Calibri" pitchFamily="34" charset="-122"/>
-                <a:cs typeface="Calibri" pitchFamily="34" charset="-120"/>
-              </a:rPr>
-              <a:t>Investimento de R$ 301.000,00 </a:t>
-            </a:r>
             <a:pPr indent="0" marL="0">
               <a:lnSpc>
                 <a:spcPct val="140000"/>
               </a:lnSpc>
               <a:buNone/>
             </a:pPr>
-            <a:r>
-              <a:rPr lang="en-US" sz="1500" dirty="0">
-                <a:solidFill>
-                  <a:srgbClr val="CADCFC"/>
-                </a:solidFill>
-                <a:latin typeface="Calibri" pitchFamily="34" charset="0"/>
-                <a:ea typeface="Calibri" pitchFamily="34" charset="-122"/>
-                <a:cs typeface="Calibri" pitchFamily="34" charset="-120"/>
-              </a:rPr>
-              <a:t>com retorno garantido em </a:t>
-            </a:r>
             <a:pPr indent="0" marL="0">
               <a:lnSpc>
                 <a:spcPct val="140000"/>
               </a:lnSpc>
               <a:buNone/>
             </a:pPr>
-            <a:r>
-              <a:rPr lang="en-US" sz="1500" b="1" dirty="0">
-                <a:solidFill>
-                  <a:srgbClr val="00A896"/>
-                </a:solidFill>
-                <a:latin typeface="Calibri" pitchFamily="34" charset="0"/>
-                <a:ea typeface="Calibri" pitchFamily="34" charset="-122"/>
-                <a:cs typeface="Calibri" pitchFamily="34" charset="-120"/>
-              </a:rPr>
-              <a:t>16,6 meses.
-</a:t>
-            </a:r>
             <a:pPr indent="0" marL="0">
               <a:lnSpc>
                 <a:spcPct val="140000"/>
               </a:lnSpc>
               <a:buNone/>
             </a:pPr>
-            <a:r>
-              <a:rPr lang="en-US" sz="1500" b="1" dirty="0">
-                <a:solidFill>
-                  <a:srgbClr val="00A896"/>
-                </a:solidFill>
-                <a:latin typeface="Calibri" pitchFamily="34" charset="0"/>
-                <a:ea typeface="Calibri" pitchFamily="34" charset="-122"/>
-                <a:cs typeface="Calibri" pitchFamily="34" charset="-120"/>
-              </a:rPr>
-              <a:t>Redução permanente de R$ 217.686,42/ano </a:t>
-            </a:r>
             <a:pPr indent="0" marL="0">
               <a:lnSpc>
                 <a:spcPct val="140000"/>
@@ -8931,30 +8688,133 @@
               <a:buNone/>
             </a:pPr>
             <a:r>
-              <a:rPr lang="en-US" sz="1500" dirty="0">
-                <a:solidFill>
-                  <a:srgbClr val="CADCFC"/>
+              <a:t>Projeto tecnicamente maduro, financeiramente de altíssimo retorno e ambientalmente responsável.</a:t>
+            </a:r>
+            <a:br/>
+            <a:br/>
+            <a:r>
+              <a:t>Investimento de R$ 301.000,00 com retorno garantido em 16,5 meses.</a:t>
+            </a:r>
+            <a:br/>
+            <a:r>
+              <a:t>Redução permanente de R$ 217.686,42/ano no custo operacional de energia elétrica.</a:t>
+            </a:r>
+            <a:endParaRPr lang="en-US" sz="1500" dirty="0"/>
+          </a:p>
+        </p:txBody>
+      </p:sp>
+      <p:sp>
+        <p:nvSpPr>
+          <p:cNvPr id="6" name="Text 4"/>
+          <p:cNvSpPr txBox="1"/>
+          <p:nvPr/>
+        </p:nvSpPr>
+        <p:spPr>
+          <a:xfrm>
+            <a:off x="640080" y="3337560"/>
+            <a:ext cx="7315200" cy="365760"/>
+          </a:xfrm>
+          <a:prstGeom prst="rect">
+            <a:avLst/>
+          </a:prstGeom>
+          <a:noFill/>
+          <a:ln/>
+        </p:spPr>
+        <p:txBody>
+          <a:bodyPr wrap="square" lIns="0" tIns="0" rIns="0" bIns="0" rtlCol="0" anchor="ctr"/>
+          <a:lstStyle/>
+          <a:p>
+            <a:pPr indent="0" marL="0">
+              <a:buNone/>
+            </a:pPr>
+            <a:r>
+              <a:rPr lang="en-US" sz="1600" b="1" dirty="0">
+                <a:solidFill>
+                  <a:srgbClr val="00A896"/>
+                </a:solidFill>
+                <a:latin typeface="Cambria" pitchFamily="34" charset="0"/>
+                <a:ea typeface="Cambria" pitchFamily="34" charset="-122"/>
+                <a:cs typeface="Cambria" pitchFamily="34" charset="-120"/>
+              </a:rPr>
+              <a:t>Próximos Passos Recomendados</a:t>
+            </a:r>
+            <a:endParaRPr lang="en-US" sz="1600" dirty="0"/>
+          </a:p>
+        </p:txBody>
+      </p:sp>
+      <p:sp>
+        <p:nvSpPr>
+          <p:cNvPr id="7" name="Shape 5"/>
+          <p:cNvSpPr/>
+          <p:nvPr/>
+        </p:nvSpPr>
+        <p:spPr>
+          <a:xfrm>
+            <a:off x="640080" y="3840480"/>
+            <a:ext cx="411480" cy="411480"/>
+          </a:xfrm>
+          <a:prstGeom prst="ellipse">
+            <a:avLst/>
+          </a:prstGeom>
+          <a:solidFill>
+            <a:srgbClr val="00A896"/>
+          </a:solidFill>
+          <a:ln/>
+        </p:spPr>
+        <p:txBody>
+          <a:bodyPr/>
+          <a:p/>
+        </p:txBody>
+      </p:sp>
+      <p:sp>
+        <p:nvSpPr>
+          <p:cNvPr id="8" name="Text 6"/>
+          <p:cNvSpPr txBox="1"/>
+          <p:nvPr/>
+        </p:nvSpPr>
+        <p:spPr>
+          <a:xfrm>
+            <a:off x="640080" y="3840480"/>
+            <a:ext cx="411480" cy="411480"/>
+          </a:xfrm>
+          <a:prstGeom prst="rect">
+            <a:avLst/>
+          </a:prstGeom>
+          <a:noFill/>
+          <a:ln/>
+        </p:spPr>
+        <p:txBody>
+          <a:bodyPr wrap="square" lIns="0" tIns="0" rIns="0" bIns="0" rtlCol="0" anchor="ctr"/>
+          <a:lstStyle/>
+          <a:p>
+            <a:pPr algn="ctr" indent="0" marL="0">
+              <a:buNone/>
+            </a:pPr>
+            <a:r>
+              <a:rPr lang="en-US" sz="1200" b="1" dirty="0">
+                <a:solidFill>
+                  <a:srgbClr val="FFFFFF"/>
                 </a:solidFill>
                 <a:latin typeface="Calibri" pitchFamily="34" charset="0"/>
                 <a:ea typeface="Calibri" pitchFamily="34" charset="-122"/>
                 <a:cs typeface="Calibri" pitchFamily="34" charset="-120"/>
               </a:rPr>
-              <a:t>no custo operacional de energia elétrica.</a:t>
-            </a:r>
-            <a:endParaRPr lang="en-US" sz="1500" dirty="0"/>
-          </a:p>
-        </p:txBody>
-      </p:sp>
-      <p:sp>
-        <p:nvSpPr>
-          <p:cNvPr id="6" name="Text 4"/>
+              <a:t>1</a:t>
+            </a:r>
+            <a:endParaRPr lang="en-US" sz="1200" dirty="0"/>
+          </a:p>
+        </p:txBody>
+      </p:sp>
+      <p:sp>
+        <p:nvSpPr>
+          <p:cNvPr id="9" name="Text 7"/>
           <p:cNvSpPr txBox="1"/>
           <p:nvPr/>
         </p:nvSpPr>
         <p:spPr>
           <a:xfrm>
-            <a:off x="640080" y="3337560"/>
-            <a:ext cx="7315200" cy="365760"/>
+            <a:off x="1234440" y="3858768"/>
+            <a:ext cx="9875520" cy="384048"/>
           </a:xfrm>
           <a:prstGeom prst="rect">
             <a:avLst/>
@@ -8970,29 +8830,29 @@
               <a:buNone/>
             </a:pPr>
             <a:r>
-              <a:rPr lang="en-US" sz="1600" b="1" dirty="0">
-                <a:solidFill>
-                  <a:srgbClr val="00A896"/>
-                </a:solidFill>
-                <a:latin typeface="Cambria" pitchFamily="34" charset="0"/>
-                <a:ea typeface="Cambria" pitchFamily="34" charset="-122"/>
-                <a:cs typeface="Cambria" pitchFamily="34" charset="-120"/>
-              </a:rPr>
-              <a:t>Próximos Passos Recomendados</a:t>
-            </a:r>
-            <a:endParaRPr lang="en-US" sz="1600" dirty="0"/>
-          </a:p>
-        </p:txBody>
-      </p:sp>
-      <p:sp>
-        <p:nvSpPr>
-          <p:cNvPr id="7" name="Shape 5"/>
+              <a:rPr lang="en-US" sz="1350" dirty="0">
+                <a:solidFill>
+                  <a:srgbClr val="FFFFFF"/>
+                </a:solidFill>
+                <a:latin typeface="Calibri" pitchFamily="34" charset="0"/>
+                <a:ea typeface="Calibri" pitchFamily="34" charset="-122"/>
+                <a:cs typeface="Calibri" pitchFamily="34" charset="-120"/>
+              </a:rPr>
+              <a:t>Aprovação da proposta executiva pela Diretoria e Conselho Gestor.</a:t>
+            </a:r>
+            <a:endParaRPr lang="en-US" sz="1350" dirty="0"/>
+          </a:p>
+        </p:txBody>
+      </p:sp>
+      <p:sp>
+        <p:nvSpPr>
+          <p:cNvPr id="10" name="Shape 8"/>
           <p:cNvSpPr/>
           <p:nvPr/>
         </p:nvSpPr>
         <p:spPr>
           <a:xfrm>
-            <a:off x="640080" y="3840480"/>
+            <a:off x="640080" y="4434840"/>
             <a:ext cx="411480" cy="411480"/>
           </a:xfrm>
           <a:prstGeom prst="ellipse">
@@ -9003,16 +8863,20 @@
           </a:solidFill>
           <a:ln/>
         </p:spPr>
-      </p:sp>
-      <p:sp>
-        <p:nvSpPr>
-          <p:cNvPr id="8" name="Text 6"/>
+        <p:txBody>
+          <a:bodyPr/>
+          <a:p/>
+        </p:txBody>
+      </p:sp>
+      <p:sp>
+        <p:nvSpPr>
+          <p:cNvPr id="11" name="Text 9"/>
           <p:cNvSpPr txBox="1"/>
           <p:nvPr/>
         </p:nvSpPr>
         <p:spPr>
           <a:xfrm>
-            <a:off x="640080" y="3840480"/>
+            <a:off x="640080" y="4434840"/>
             <a:ext cx="411480" cy="411480"/>
           </a:xfrm>
           <a:prstGeom prst="rect">
@@ -9037,7 +8901,7 @@
                 <a:ea typeface="Calibri" pitchFamily="34" charset="-122"/>
                 <a:cs typeface="Calibri" pitchFamily="34" charset="-120"/>
               </a:rPr>
-              <a:t>1</a:t>
+              <a:t>2</a:t>
             </a:r>
             <a:endParaRPr lang="en-US" sz="1200" dirty="0"/>
           </a:p>
@@ -9045,13 +8909,13 @@
       </p:sp>
       <p:sp>
         <p:nvSpPr>
-          <p:cNvPr id="9" name="Text 7"/>
+          <p:cNvPr id="12" name="Text 10"/>
           <p:cNvSpPr txBox="1"/>
           <p:nvPr/>
         </p:nvSpPr>
         <p:spPr>
           <a:xfrm>
-            <a:off x="1234440" y="3858768"/>
+            <a:off x="1234440" y="4453128"/>
             <a:ext cx="9875520" cy="384048"/>
           </a:xfrm>
           <a:prstGeom prst="rect">
@@ -9076,7 +8940,7 @@
                 <a:ea typeface="Calibri" pitchFamily="34" charset="-122"/>
                 <a:cs typeface="Calibri" pitchFamily="34" charset="-120"/>
               </a:rPr>
-              <a:t>Aprovação da proposta executiva pela Diretoria e Conselho Gestor.</a:t>
+              <a:t>Assinatura do contrato de fornecimento e serviços.</a:t>
             </a:r>
             <a:endParaRPr lang="en-US" sz="1350" dirty="0"/>
           </a:p>
@@ -9084,13 +8948,13 @@
       </p:sp>
       <p:sp>
         <p:nvSpPr>
-          <p:cNvPr id="10" name="Shape 8"/>
+          <p:cNvPr id="13" name="Shape 11"/>
           <p:cNvSpPr/>
           <p:nvPr/>
         </p:nvSpPr>
         <p:spPr>
           <a:xfrm>
-            <a:off x="640080" y="4434840"/>
+            <a:off x="640080" y="5029200"/>
             <a:ext cx="411480" cy="411480"/>
           </a:xfrm>
           <a:prstGeom prst="ellipse">
@@ -9101,104 +8965,10 @@
           </a:solidFill>
           <a:ln/>
         </p:spPr>
-      </p:sp>
-      <p:sp>
-        <p:nvSpPr>
-          <p:cNvPr id="11" name="Text 9"/>
-          <p:cNvSpPr txBox="1"/>
-          <p:nvPr/>
-        </p:nvSpPr>
-        <p:spPr>
-          <a:xfrm>
-            <a:off x="640080" y="4434840"/>
-            <a:ext cx="411480" cy="411480"/>
-          </a:xfrm>
-          <a:prstGeom prst="rect">
-            <a:avLst/>
-          </a:prstGeom>
-          <a:noFill/>
-          <a:ln/>
-        </p:spPr>
-        <p:txBody>
-          <a:bodyPr wrap="square" lIns="0" tIns="0" rIns="0" bIns="0" rtlCol="0" anchor="ctr"/>
-          <a:lstStyle/>
-          <a:p>
-            <a:pPr algn="ctr" indent="0" marL="0">
-              <a:buNone/>
-            </a:pPr>
-            <a:r>
-              <a:rPr lang="en-US" sz="1200" b="1" dirty="0">
-                <a:solidFill>
-                  <a:srgbClr val="FFFFFF"/>
-                </a:solidFill>
-                <a:latin typeface="Calibri" pitchFamily="34" charset="0"/>
-                <a:ea typeface="Calibri" pitchFamily="34" charset="-122"/>
-                <a:cs typeface="Calibri" pitchFamily="34" charset="-120"/>
-              </a:rPr>
-              <a:t>2</a:t>
-            </a:r>
-            <a:endParaRPr lang="en-US" sz="1200" dirty="0"/>
-          </a:p>
-        </p:txBody>
-      </p:sp>
-      <p:sp>
-        <p:nvSpPr>
-          <p:cNvPr id="12" name="Text 10"/>
-          <p:cNvSpPr txBox="1"/>
-          <p:nvPr/>
-        </p:nvSpPr>
-        <p:spPr>
-          <a:xfrm>
-            <a:off x="1234440" y="4453128"/>
-            <a:ext cx="9875520" cy="384048"/>
-          </a:xfrm>
-          <a:prstGeom prst="rect">
-            <a:avLst/>
-          </a:prstGeom>
-          <a:noFill/>
-          <a:ln/>
-        </p:spPr>
-        <p:txBody>
-          <a:bodyPr wrap="square" lIns="0" tIns="0" rIns="0" bIns="0" rtlCol="0" anchor="ctr"/>
-          <a:lstStyle/>
-          <a:p>
-            <a:pPr indent="0" marL="0">
-              <a:buNone/>
-            </a:pPr>
-            <a:r>
-              <a:rPr lang="en-US" sz="1350" dirty="0">
-                <a:solidFill>
-                  <a:srgbClr val="FFFFFF"/>
-                </a:solidFill>
-                <a:latin typeface="Calibri" pitchFamily="34" charset="0"/>
-                <a:ea typeface="Calibri" pitchFamily="34" charset="-122"/>
-                <a:cs typeface="Calibri" pitchFamily="34" charset="-120"/>
-              </a:rPr>
-              <a:t>Assinatura do contrato de fornecimento e serviços.</a:t>
-            </a:r>
-            <a:endParaRPr lang="en-US" sz="1350" dirty="0"/>
-          </a:p>
-        </p:txBody>
-      </p:sp>
-      <p:sp>
-        <p:nvSpPr>
-          <p:cNvPr id="13" name="Shape 11"/>
-          <p:cNvSpPr/>
-          <p:nvPr/>
-        </p:nvSpPr>
-        <p:spPr>
-          <a:xfrm>
-            <a:off x="640080" y="5029200"/>
-            <a:ext cx="411480" cy="411480"/>
-          </a:xfrm>
-          <a:prstGeom prst="ellipse">
-            <a:avLst/>
-          </a:prstGeom>
-          <a:solidFill>
-            <a:srgbClr val="00A896"/>
-          </a:solidFill>
-          <a:ln/>
-        </p:spPr>
+        <p:txBody>
+          <a:bodyPr/>
+          <a:p/>
+        </p:txBody>
       </p:sp>
       <p:sp>
         <p:nvSpPr>
@@ -9300,6 +9070,10 @@
             <a:prstDash val="solid"/>
           </a:ln>
         </p:spPr>
+        <p:txBody>
+          <a:bodyPr/>
+          <a:p/>
+        </p:txBody>
       </p:sp>
       <p:sp>
         <p:nvSpPr>
@@ -9501,6 +9275,10 @@
             </a:outerShdw>
           </a:effectLst>
         </p:spPr>
+        <p:txBody>
+          <a:bodyPr/>
+          <a:p/>
+        </p:txBody>
       </p:sp>
       <p:sp>
         <p:nvSpPr>
@@ -9608,6 +9386,10 @@
             </a:outerShdw>
           </a:effectLst>
         </p:spPr>
+        <p:txBody>
+          <a:bodyPr/>
+          <a:p/>
+        </p:txBody>
       </p:sp>
       <p:sp>
         <p:nvSpPr>
@@ -9634,14 +9416,6 @@
               <a:buNone/>
             </a:pPr>
             <a:r>
-              <a:rPr lang="en-US" sz="2200" b="1" dirty="0">
-                <a:solidFill>
-                  <a:srgbClr val="028090"/>
-                </a:solidFill>
-                <a:latin typeface="Cambria" pitchFamily="34" charset="0"/>
-                <a:ea typeface="Cambria" pitchFamily="34" charset="-122"/>
-                <a:cs typeface="Cambria" pitchFamily="34" charset="-120"/>
-              </a:rPr>
               <a:t>R$ 217.686 /ano</a:t>
             </a:r>
             <a:endParaRPr lang="en-US" sz="2200" dirty="0"/>
@@ -9715,6 +9489,10 @@
             </a:outerShdw>
           </a:effectLst>
         </p:spPr>
+        <p:txBody>
+          <a:bodyPr/>
+          <a:p/>
+        </p:txBody>
       </p:sp>
       <p:sp>
         <p:nvSpPr>
@@ -9822,6 +9600,10 @@
             </a:outerShdw>
           </a:effectLst>
         </p:spPr>
+        <p:txBody>
+          <a:bodyPr/>
+          <a:p/>
+        </p:txBody>
       </p:sp>
       <p:sp>
         <p:nvSpPr>
@@ -9848,15 +9630,7 @@
               <a:buNone/>
             </a:pPr>
             <a:r>
-              <a:rPr lang="en-US" sz="2200" b="1" dirty="0">
-                <a:solidFill>
-                  <a:srgbClr val="028090"/>
-                </a:solidFill>
-                <a:latin typeface="Cambria" pitchFamily="34" charset="0"/>
-                <a:ea typeface="Cambria" pitchFamily="34" charset="-122"/>
-                <a:cs typeface="Cambria" pitchFamily="34" charset="-120"/>
-              </a:rPr>
-              <a:t>16,6 meses</a:t>
+              <a:t>16,5 meses</a:t>
             </a:r>
             <a:endParaRPr lang="en-US" sz="2200" dirty="0"/>
           </a:p>
@@ -9929,6 +9703,10 @@
             </a:outerShdw>
           </a:effectLst>
         </p:spPr>
+        <p:txBody>
+          <a:bodyPr/>
+          <a:p/>
+        </p:txBody>
       </p:sp>
       <p:sp>
         <p:nvSpPr>
@@ -10036,6 +9814,10 @@
             </a:outerShdw>
           </a:effectLst>
         </p:spPr>
+        <p:txBody>
+          <a:bodyPr/>
+          <a:p/>
+        </p:txBody>
       </p:sp>
       <p:sp>
         <p:nvSpPr>
@@ -10062,15 +9844,7 @@
               <a:buNone/>
             </a:pPr>
             <a:r>
-              <a:rPr lang="en-US" sz="2200" b="1" dirty="0">
-                <a:solidFill>
-                  <a:srgbClr val="1E2761"/>
-                </a:solidFill>
-                <a:latin typeface="Cambria" pitchFamily="34" charset="0"/>
-                <a:ea typeface="Cambria" pitchFamily="34" charset="-122"/>
-                <a:cs typeface="Cambria" pitchFamily="34" charset="-120"/>
-              </a:rPr>
-              <a:t>R$ 483.710</a:t>
+              <a:t>R$ 484.710</a:t>
             </a:r>
             <a:endParaRPr lang="en-US" sz="2200" dirty="0"/>
           </a:p>
@@ -10143,6 +9917,10 @@
             </a:outerShdw>
           </a:effectLst>
         </p:spPr>
+        <p:txBody>
+          <a:bodyPr/>
+          <a:p/>
+        </p:txBody>
       </p:sp>
       <p:sp>
         <p:nvSpPr>
@@ -10169,14 +9947,6 @@
               <a:buNone/>
             </a:pPr>
             <a:r>
-              <a:rPr lang="en-US" sz="2200" b="1" dirty="0">
-                <a:solidFill>
-                  <a:srgbClr val="1E2761"/>
-                </a:solidFill>
-                <a:latin typeface="Cambria" pitchFamily="34" charset="0"/>
-                <a:ea typeface="Cambria" pitchFamily="34" charset="-122"/>
-                <a:cs typeface="Cambria" pitchFamily="34" charset="-120"/>
-              </a:rPr>
               <a:t>290.249 kWh/ano</a:t>
             </a:r>
             <a:endParaRPr lang="en-US" sz="2200" dirty="0"/>
@@ -10250,6 +10020,10 @@
             </a:outerShdw>
           </a:effectLst>
         </p:spPr>
+        <p:txBody>
+          <a:bodyPr/>
+          <a:p/>
+        </p:txBody>
       </p:sp>
       <p:sp>
         <p:nvSpPr>
@@ -10276,14 +10050,6 @@
               <a:buNone/>
             </a:pPr>
             <a:r>
-              <a:rPr lang="en-US" sz="2200" b="1" dirty="0">
-                <a:solidFill>
-                  <a:srgbClr val="028090"/>
-                </a:solidFill>
-                <a:latin typeface="Cambria" pitchFamily="34" charset="0"/>
-                <a:ea typeface="Cambria" pitchFamily="34" charset="-122"/>
-                <a:cs typeface="Cambria" pitchFamily="34" charset="-120"/>
-              </a:rPr>
               <a:t>25,0 tCO2/ano</a:t>
             </a:r>
             <a:endParaRPr lang="en-US" sz="2200" dirty="0"/>
@@ -10536,6 +10302,10 @@
           </a:solidFill>
           <a:ln/>
         </p:spPr>
+        <p:txBody>
+          <a:bodyPr/>
+          <a:p/>
+        </p:txBody>
       </p:sp>
       <p:sp>
         <p:nvSpPr>
@@ -10673,6 +10443,10 @@
           </a:solidFill>
           <a:ln/>
         </p:spPr>
+        <p:txBody>
+          <a:bodyPr/>
+          <a:p/>
+        </p:txBody>
       </p:sp>
       <p:sp>
         <p:nvSpPr>
@@ -10810,6 +10584,10 @@
           </a:solidFill>
           <a:ln/>
         </p:spPr>
+        <p:txBody>
+          <a:bodyPr/>
+          <a:p/>
+        </p:txBody>
       </p:sp>
       <p:sp>
         <p:nvSpPr>
@@ -10947,6 +10725,10 @@
           </a:solidFill>
           <a:ln/>
         </p:spPr>
+        <p:txBody>
+          <a:bodyPr/>
+          <a:p/>
+        </p:txBody>
       </p:sp>
       <p:sp>
         <p:nvSpPr>
@@ -11086,6 +10868,10 @@
           </a:solidFill>
           <a:ln/>
         </p:spPr>
+        <p:txBody>
+          <a:bodyPr/>
+          <a:p/>
+        </p:txBody>
       </p:sp>
       <p:sp>
         <p:nvSpPr>
@@ -11226,6 +11012,10 @@
             <a:prstDash val="solid"/>
           </a:ln>
         </p:spPr>
+        <p:txBody>
+          <a:bodyPr/>
+          <a:p/>
+        </p:txBody>
       </p:sp>
       <p:sp>
         <p:nvSpPr>
@@ -11327,6 +11117,10 @@
             <a:prstDash val="solid"/>
           </a:ln>
         </p:spPr>
+        <p:txBody>
+          <a:bodyPr/>
+          <a:p/>
+        </p:txBody>
       </p:sp>
       <p:sp>
         <p:nvSpPr>
@@ -11428,6 +11222,10 @@
             <a:prstDash val="solid"/>
           </a:ln>
         </p:spPr>
+        <p:txBody>
+          <a:bodyPr/>
+          <a:p/>
+        </p:txBody>
       </p:sp>
       <p:sp>
         <p:nvSpPr>
@@ -11684,6 +11482,10 @@
             </a:outerShdw>
           </a:effectLst>
         </p:spPr>
+        <p:txBody>
+          <a:bodyPr/>
+          <a:p/>
+        </p:txBody>
       </p:sp>
       <p:sp>
         <p:nvSpPr>
@@ -11830,6 +11632,10 @@
             </a:outerShdw>
           </a:effectLst>
         </p:spPr>
+        <p:txBody>
+          <a:bodyPr/>
+          <a:p/>
+        </p:txBody>
       </p:sp>
       <p:sp>
         <p:nvSpPr>
@@ -11976,6 +11782,10 @@
             </a:outerShdw>
           </a:effectLst>
         </p:spPr>
+        <p:txBody>
+          <a:bodyPr/>
+          <a:p/>
+        </p:txBody>
       </p:sp>
       <p:sp>
         <p:nvSpPr>
@@ -12122,6 +11932,10 @@
             </a:outerShdw>
           </a:effectLst>
         </p:spPr>
+        <p:txBody>
+          <a:bodyPr/>
+          <a:p/>
+        </p:txBody>
       </p:sp>
       <p:sp>
         <p:nvSpPr>
@@ -12652,6 +12466,10 @@
           </a:solidFill>
           <a:ln/>
         </p:spPr>
+        <p:txBody>
+          <a:bodyPr/>
+          <a:p/>
+        </p:txBody>
       </p:sp>
       <p:sp>
         <p:nvSpPr>
@@ -12728,6 +12546,10 @@
           </a:solidFill>
           <a:ln/>
         </p:spPr>
+        <p:txBody>
+          <a:bodyPr/>
+          <a:p/>
+        </p:txBody>
       </p:sp>
       <p:sp>
         <p:nvSpPr>
@@ -12804,6 +12626,10 @@
           </a:solidFill>
           <a:ln/>
         </p:spPr>
+        <p:txBody>
+          <a:bodyPr/>
+          <a:p/>
+        </p:txBody>
       </p:sp>
       <p:sp>
         <p:nvSpPr>
@@ -12967,6 +12793,10 @@
             <a:prstDash val="solid"/>
           </a:ln>
         </p:spPr>
+        <p:txBody>
+          <a:bodyPr/>
+          <a:p/>
+        </p:txBody>
       </p:sp>
       <p:sp>
         <p:nvSpPr>
@@ -15444,6 +15274,10 @@
           </a:solidFill>
           <a:ln/>
         </p:spPr>
+        <p:txBody>
+          <a:bodyPr/>
+          <a:p/>
+        </p:txBody>
       </p:sp>
       <p:sp>
         <p:nvSpPr>
@@ -15559,6 +15393,10 @@
           </a:solidFill>
           <a:ln/>
         </p:spPr>
+        <p:txBody>
+          <a:bodyPr/>
+          <a:p/>
+        </p:txBody>
       </p:sp>
       <p:sp>
         <p:nvSpPr>
@@ -15587,17 +15425,6 @@
               </a:lnSpc>
               <a:buNone/>
             </a:pPr>
-            <a:r>
-              <a:rPr lang="en-US" sz="1150" b="1" dirty="0">
-                <a:solidFill>
-                  <a:srgbClr val="FFFFFF"/>
-                </a:solidFill>
-                <a:latin typeface="Calibri" pitchFamily="34" charset="0"/>
-                <a:ea typeface="Calibri" pitchFamily="34" charset="-122"/>
-                <a:cs typeface="Calibri" pitchFamily="34" charset="-120"/>
-              </a:rPr>
-              <a:t>Escala linear por máquina retrofitada: </a:t>
-            </a:r>
             <a:pPr indent="0" marL="0">
               <a:lnSpc>
                 <a:spcPct val="135000"/>
@@ -15605,15 +15432,7 @@
               <a:buNone/>
             </a:pPr>
             <a:r>
-              <a:rPr lang="en-US" sz="1150" dirty="0">
-                <a:solidFill>
-                  <a:srgbClr val="CADCFC"/>
-                </a:solidFill>
-                <a:latin typeface="Calibri" pitchFamily="34" charset="0"/>
-                <a:ea typeface="Calibri" pitchFamily="34" charset="-122"/>
-                <a:cs typeface="Calibri" pitchFamily="34" charset="-120"/>
-              </a:rPr>
-              <a:t>cada climatizador gera R$ 477,38/mês (R$ 5.728,59/ano) de economia líquida individual — 10 máquinas = R$ 57.285,90/ano; 38 máquinas (parque total) = R$ 217.686,42/ano.</a:t>
+              <a:t>Escala linear por máquina retrofitada: cada climatizador gera R$ 477,38/mês (R$ 5.728,59/ano) de economia líquida individual — 10 máquinas = R$ 57.285,90/ano; 38 máquinas (parque total) = R$ 217.686,42/ano.</a:t>
             </a:r>
             <a:endParaRPr lang="en-US" sz="1150" dirty="0"/>
           </a:p>
@@ -15796,6 +15615,10 @@
             </a:outerShdw>
           </a:effectLst>
         </p:spPr>
+        <p:txBody>
+          <a:bodyPr/>
+          <a:p/>
+        </p:txBody>
       </p:sp>
       <p:sp>
         <p:nvSpPr>
@@ -15903,6 +15726,10 @@
             </a:outerShdw>
           </a:effectLst>
         </p:spPr>
+        <p:txBody>
+          <a:bodyPr/>
+          <a:p/>
+        </p:txBody>
       </p:sp>
       <p:sp>
         <p:nvSpPr>
@@ -16010,6 +15837,10 @@
             </a:outerShdw>
           </a:effectLst>
         </p:spPr>
+        <p:txBody>
+          <a:bodyPr/>
+          <a:p/>
+        </p:txBody>
       </p:sp>
       <p:sp>
         <p:nvSpPr>
@@ -16117,6 +15948,10 @@
             </a:outerShdw>
           </a:effectLst>
         </p:spPr>
+        <p:txBody>
+          <a:bodyPr/>
+          <a:p/>
+        </p:txBody>
       </p:sp>
       <p:sp>
         <p:nvSpPr>
@@ -16224,6 +16059,10 @@
             </a:outerShdw>
           </a:effectLst>
         </p:spPr>
+        <p:txBody>
+          <a:bodyPr/>
+          <a:p/>
+        </p:txBody>
       </p:sp>
       <p:sp>
         <p:nvSpPr>
@@ -17641,6 +17480,10 @@
           </a:solidFill>
           <a:ln/>
         </p:spPr>
+        <p:txBody>
+          <a:bodyPr/>
+          <a:p/>
+        </p:txBody>
       </p:sp>
       <p:sp>
         <p:nvSpPr>
@@ -19496,6 +19339,10 @@
           </a:solidFill>
           <a:ln/>
         </p:spPr>
+        <p:txBody>
+          <a:bodyPr/>
+          <a:p/>
+        </p:txBody>
       </p:sp>
       <p:sp>
         <p:nvSpPr>
@@ -19594,6 +19441,10 @@
           </a:solidFill>
           <a:ln/>
         </p:spPr>
+        <p:txBody>
+          <a:bodyPr/>
+          <a:p/>
+        </p:txBody>
       </p:sp>
       <p:sp>
         <p:nvSpPr>
@@ -19692,6 +19543,10 @@
           </a:solidFill>
           <a:ln/>
         </p:spPr>
+        <p:txBody>
+          <a:bodyPr/>
+          <a:p/>
+        </p:txBody>
       </p:sp>
       <p:sp>
         <p:nvSpPr>

--- a/Estudo_Viabilidade_Retrofit_HVAC_Novo_Shopping.pptx
+++ b/Estudo_Viabilidade_Retrofit_HVAC_Novo_Shopping.pptx
@@ -4,6 +4,9 @@
   <p:sldMasterIdLst>
     <p:sldMasterId id="2147483648" r:id="rId1"/>
   </p:sldMasterIdLst>
+  <p:notesMasterIdLst>
+    <p:notesMasterId r:id="rId17"/>
+  </p:notesMasterIdLst>
   <p:sldIdLst>
     <p:sldId id="256" r:id="rId2"/>
     <p:sldId id="257" r:id="rId3"/>
@@ -21,9 +24,6 @@
     <p:sldId id="269" r:id="rId15"/>
     <p:sldId id="270" r:id="rId16"/>
   </p:sldIdLst>
-  <p:notesMasterIdLst>
-    <p:notesMasterId r:id="rId17"/>
-  </p:notesMasterIdLst>
   <p:sldSz cx="12192000" cy="6858000"/>
   <p:notesSz cx="6858000" cy="12192000"/>
   <p:defaultTextStyle>
@@ -118,13 +118,20 @@
       </a:defRPr>
     </a:lvl9pPr>
   </p:defaultTextStyle>
+  <p:extLst>
+    <p:ext uri="{EFAFB233-063F-42B5-8137-9DF3F51BA10A}">
+      <p15:sldGuideLst xmlns:p15="http://schemas.microsoft.com/office/powerpoint/2012/main"/>
+    </p:ext>
+  </p:extLst>
 </p:presentation>
 </file>
 
 <file path=ppt/charts/chart1.xml><?xml version="1.0" encoding="utf-8"?>
-<c:chartSpace xmlns:c="http://schemas.openxmlformats.org/drawingml/2006/chart" xmlns:a="http://schemas.openxmlformats.org/drawingml/2006/main" xmlns:r="http://schemas.openxmlformats.org/officeDocument/2006/relationships">
+<c:chartSpace xmlns:c="http://schemas.openxmlformats.org/drawingml/2006/chart" xmlns:a="http://schemas.openxmlformats.org/drawingml/2006/main" xmlns:r="http://schemas.openxmlformats.org/officeDocument/2006/relationships" xmlns:c16r2="http://schemas.microsoft.com/office/drawing/2015/06/chart">
   <c:date1904 val="0"/>
+  <c:lang val="pt-BR"/>
   <c:roundedCorners val="1"/>
+  <c:style val="2"/>
   <c:chart>
     <c:autoTitleDeleted val="1"/>
     <c:plotArea>
@@ -156,18 +163,26 @@
           <c:invertIfNegative val="0"/>
           <c:dLbls>
             <c:numFmt formatCode="#,##0" sourceLinked="0"/>
+            <c:spPr>
+              <a:noFill/>
+              <a:ln>
+                <a:noFill/>
+              </a:ln>
+              <a:effectLst/>
+            </c:spPr>
             <c:txPr>
               <a:bodyPr/>
               <a:lstStyle/>
               <a:p>
                 <a:pPr>
-                  <a:defRPr b="0" i="0" strike="noStrike" sz="800" u="none">
+                  <a:defRPr sz="800" b="0" i="0" u="none" strike="noStrike">
                     <a:solidFill>
                       <a:srgbClr val="1E2761"/>
                     </a:solidFill>
                     <a:latin typeface="Arial"/>
                   </a:defRPr>
                 </a:pPr>
+                <a:endParaRPr lang="pt-BR"/>
               </a:p>
             </c:txPr>
             <c:showLegendKey val="0"/>
@@ -177,28 +192,31 @@
             <c:showPercent val="0"/>
             <c:showBubbleSize val="0"/>
             <c:showLeaderLines val="0"/>
+            <c:extLst>
+              <c:ext xmlns:c15="http://schemas.microsoft.com/office/drawing/2012/chart" uri="{CE6537A1-D6FC-4f65-9D91-7224C49458BB}">
+                <c15:showLeaderLines val="0"/>
+              </c:ext>
+            </c:extLst>
           </c:dLbls>
           <c:cat>
-            <c:multiLvlStrRef>
+            <c:strRef>
               <c:f>Sheet1!$A$2:$A$5</c:f>
-              <c:multiLvlStrCache>
+              <c:strCache>
                 <c:ptCount val="4"/>
-                <c:lvl>
-                  <c:pt idx="0">
-                    <c:v>0,65</c:v>
-                  </c:pt>
-                  <c:pt idx="1">
-                    <c:v>0,75</c:v>
-                  </c:pt>
-                  <c:pt idx="2">
-                    <c:v>0,85</c:v>
-                  </c:pt>
-                  <c:pt idx="3">
-                    <c:v>1,00</c:v>
-                  </c:pt>
-                </c:lvl>
-              </c:multiLvlStrCache>
-            </c:multiLvlStrRef>
+                <c:pt idx="0">
+                  <c:v>0,65</c:v>
+                </c:pt>
+                <c:pt idx="1">
+                  <c:v>0,75</c:v>
+                </c:pt>
+                <c:pt idx="2">
+                  <c:v>0,85</c:v>
+                </c:pt>
+                <c:pt idx="3">
+                  <c:v>1,00</c:v>
+                </c:pt>
+              </c:strCache>
+            </c:strRef>
           </c:cat>
           <c:val>
             <c:numRef>
@@ -221,36 +239,23 @@
               </c:numCache>
             </c:numRef>
           </c:val>
+          <c:extLst>
+            <c:ext xmlns:c16="http://schemas.microsoft.com/office/drawing/2014/chart" uri="{C3380CC4-5D6E-409C-BE32-E72D297353CC}">
+              <c16:uniqueId val="{00000000-FE6A-4C3B-9607-A21C9BDC018E}"/>
+            </c:ext>
+          </c:extLst>
         </c:ser>
         <c:dLbls>
-          <c:numFmt formatCode="#,##0" sourceLinked="0"/>
-          <c:txPr>
-            <a:bodyPr/>
-            <a:lstStyle/>
-            <a:p>
-              <a:pPr>
-                <a:defRPr b="0" i="0" strike="noStrike" sz="800" u="none">
-                  <a:solidFill>
-                    <a:srgbClr val="1E2761"/>
-                  </a:solidFill>
-                  <a:latin typeface="Arial"/>
-                </a:defRPr>
-              </a:pPr>
-            </a:p>
-          </c:txPr>
           <c:showLegendKey val="0"/>
           <c:showVal val="1"/>
           <c:showCatName val="0"/>
           <c:showSerName val="0"/>
           <c:showPercent val="0"/>
           <c:showBubbleSize val="0"/>
-          <c:showLeaderLines val="0"/>
         </c:dLbls>
         <c:gapWidth val="150"/>
-        <c:overlap val="0"/>
         <c:axId val="2094734554"/>
         <c:axId val="2094734552"/>
-        <c:axId val="2094734556"/>
       </c:barChart>
       <c:catAx>
         <c:axId val="2094734554"/>
@@ -284,13 +289,14 @@
                 <a:latin typeface="Arial"/>
               </a:defRPr>
             </a:pPr>
-            <a:endParaRPr lang="en-US"/>
+            <a:endParaRPr lang="pt-BR"/>
           </a:p>
         </c:txPr>
         <c:crossAx val="2094734552"/>
         <c:crosses val="autoZero"/>
         <c:auto val="1"/>
         <c:lblAlgn val="ctr"/>
+        <c:lblOffset val="100"/>
         <c:noMultiLvlLbl val="1"/>
       </c:catAx>
       <c:valAx>
@@ -336,7 +342,7 @@
                 <a:latin typeface="Arial"/>
               </a:defRPr>
             </a:pPr>
-            <a:endParaRPr lang="en-US"/>
+            <a:endParaRPr lang="pt-BR"/>
           </a:p>
         </c:txPr>
         <c:crossAx val="2094734554"/>
@@ -353,6 +359,7 @@
     </c:plotArea>
     <c:plotVisOnly val="1"/>
     <c:dispBlanksAs val="span"/>
+    <c:showDLblsOverMax val="1"/>
   </c:chart>
   <c:spPr>
     <a:noFill/>
@@ -368,9 +375,11 @@
 </file>
 
 <file path=ppt/charts/chart2.xml><?xml version="1.0" encoding="utf-8"?>
-<c:chartSpace xmlns:c="http://schemas.openxmlformats.org/drawingml/2006/chart" xmlns:a="http://schemas.openxmlformats.org/drawingml/2006/main" xmlns:r="http://schemas.openxmlformats.org/officeDocument/2006/relationships">
+<c:chartSpace xmlns:c="http://schemas.openxmlformats.org/drawingml/2006/chart" xmlns:a="http://schemas.openxmlformats.org/drawingml/2006/main" xmlns:r="http://schemas.openxmlformats.org/officeDocument/2006/relationships" xmlns:c16r2="http://schemas.microsoft.com/office/drawing/2015/06/chart">
   <c:date1904 val="0"/>
+  <c:lang val="pt-BR"/>
   <c:roundedCorners val="1"/>
+  <c:style val="2"/>
   <c:chart>
     <c:autoTitleDeleted val="1"/>
     <c:plotArea>
@@ -402,18 +411,26 @@
           <c:invertIfNegative val="0"/>
           <c:dLbls>
             <c:numFmt formatCode="#,##0" sourceLinked="0"/>
+            <c:spPr>
+              <a:noFill/>
+              <a:ln>
+                <a:noFill/>
+              </a:ln>
+              <a:effectLst/>
+            </c:spPr>
             <c:txPr>
               <a:bodyPr/>
               <a:lstStyle/>
               <a:p>
                 <a:pPr>
-                  <a:defRPr b="0" i="0" strike="noStrike" sz="800" u="none">
+                  <a:defRPr sz="800" b="0" i="0" u="none" strike="noStrike">
                     <a:solidFill>
                       <a:srgbClr val="1E2761"/>
                     </a:solidFill>
                     <a:latin typeface="Arial"/>
                   </a:defRPr>
                 </a:pPr>
+                <a:endParaRPr lang="pt-BR"/>
               </a:p>
             </c:txPr>
             <c:showLegendKey val="0"/>
@@ -423,28 +440,31 @@
             <c:showPercent val="0"/>
             <c:showBubbleSize val="0"/>
             <c:showLeaderLines val="0"/>
+            <c:extLst>
+              <c:ext xmlns:c15="http://schemas.microsoft.com/office/drawing/2012/chart" uri="{CE6537A1-D6FC-4f65-9D91-7224C49458BB}">
+                <c15:showLeaderLines val="0"/>
+              </c:ext>
+            </c:extLst>
           </c:dLbls>
           <c:cat>
-            <c:multiLvlStrRef>
+            <c:strRef>
               <c:f>Sheet1!$A$2:$A$5</c:f>
-              <c:multiLvlStrCache>
+              <c:strCache>
                 <c:ptCount val="4"/>
-                <c:lvl>
-                  <c:pt idx="0">
-                    <c:v>30%</c:v>
-                  </c:pt>
-                  <c:pt idx="1">
-                    <c:v>40%</c:v>
-                  </c:pt>
-                  <c:pt idx="2">
-                    <c:v>50% (padrão)</c:v>
-                  </c:pt>
-                  <c:pt idx="3">
-                    <c:v>60%</c:v>
-                  </c:pt>
-                </c:lvl>
-              </c:multiLvlStrCache>
-            </c:multiLvlStrRef>
+                <c:pt idx="0">
+                  <c:v>30%</c:v>
+                </c:pt>
+                <c:pt idx="1">
+                  <c:v>40%</c:v>
+                </c:pt>
+                <c:pt idx="2">
+                  <c:v>50% (padrão)</c:v>
+                </c:pt>
+                <c:pt idx="3">
+                  <c:v>60%</c:v>
+                </c:pt>
+              </c:strCache>
+            </c:strRef>
           </c:cat>
           <c:val>
             <c:numRef>
@@ -467,36 +487,23 @@
               </c:numCache>
             </c:numRef>
           </c:val>
+          <c:extLst>
+            <c:ext xmlns:c16="http://schemas.microsoft.com/office/drawing/2014/chart" uri="{C3380CC4-5D6E-409C-BE32-E72D297353CC}">
+              <c16:uniqueId val="{00000000-8B01-4E49-AE8C-6974100D1152}"/>
+            </c:ext>
+          </c:extLst>
         </c:ser>
         <c:dLbls>
-          <c:numFmt formatCode="#,##0" sourceLinked="0"/>
-          <c:txPr>
-            <a:bodyPr/>
-            <a:lstStyle/>
-            <a:p>
-              <a:pPr>
-                <a:defRPr b="0" i="0" strike="noStrike" sz="800" u="none">
-                  <a:solidFill>
-                    <a:srgbClr val="1E2761"/>
-                  </a:solidFill>
-                  <a:latin typeface="Arial"/>
-                </a:defRPr>
-              </a:pPr>
-            </a:p>
-          </c:txPr>
           <c:showLegendKey val="0"/>
           <c:showVal val="1"/>
           <c:showCatName val="0"/>
           <c:showSerName val="0"/>
           <c:showPercent val="0"/>
           <c:showBubbleSize val="0"/>
-          <c:showLeaderLines val="0"/>
         </c:dLbls>
         <c:gapWidth val="150"/>
-        <c:overlap val="0"/>
         <c:axId val="2094734554"/>
         <c:axId val="2094734552"/>
-        <c:axId val="2094734556"/>
       </c:barChart>
       <c:catAx>
         <c:axId val="2094734554"/>
@@ -530,13 +537,14 @@
                 <a:latin typeface="Arial"/>
               </a:defRPr>
             </a:pPr>
-            <a:endParaRPr lang="en-US"/>
+            <a:endParaRPr lang="pt-BR"/>
           </a:p>
         </c:txPr>
         <c:crossAx val="2094734552"/>
         <c:crosses val="autoZero"/>
         <c:auto val="1"/>
         <c:lblAlgn val="ctr"/>
+        <c:lblOffset val="100"/>
         <c:noMultiLvlLbl val="1"/>
       </c:catAx>
       <c:valAx>
@@ -582,7 +590,7 @@
                 <a:latin typeface="Arial"/>
               </a:defRPr>
             </a:pPr>
-            <a:endParaRPr lang="en-US"/>
+            <a:endParaRPr lang="pt-BR"/>
           </a:p>
         </c:txPr>
         <c:crossAx val="2094734554"/>
@@ -599,6 +607,7 @@
     </c:plotArea>
     <c:plotVisOnly val="1"/>
     <c:dispBlanksAs val="span"/>
+    <c:showDLblsOverMax val="1"/>
   </c:chart>
   <c:spPr>
     <a:noFill/>
@@ -614,9 +623,11 @@
 </file>
 
 <file path=ppt/charts/chart3.xml><?xml version="1.0" encoding="utf-8"?>
-<c:chartSpace xmlns:c="http://schemas.openxmlformats.org/drawingml/2006/chart" xmlns:a="http://schemas.openxmlformats.org/drawingml/2006/main" xmlns:r="http://schemas.openxmlformats.org/officeDocument/2006/relationships">
+<c:chartSpace xmlns:c="http://schemas.openxmlformats.org/drawingml/2006/chart" xmlns:a="http://schemas.openxmlformats.org/drawingml/2006/main" xmlns:r="http://schemas.openxmlformats.org/officeDocument/2006/relationships" xmlns:c16r2="http://schemas.microsoft.com/office/drawing/2015/06/chart">
   <c:date1904 val="0"/>
+  <c:lang val="pt-BR"/>
   <c:roundedCorners val="1"/>
+  <c:style val="2"/>
   <c:chart>
     <c:autoTitleDeleted val="1"/>
     <c:plotArea>
@@ -646,40 +657,15 @@
             <a:effectLst/>
           </c:spPr>
           <c:invertIfNegative val="0"/>
-          <c:dLbls>
-            <c:numFmt formatCode="#,##0" sourceLinked="0"/>
-            <c:txPr>
-              <a:bodyPr/>
-              <a:lstStyle/>
-              <a:p>
-                <a:pPr>
-                  <a:defRPr b="0" i="0" strike="noStrike" sz="1000" u="none">
-                    <a:solidFill>
-                      <a:srgbClr val="1E2761"/>
-                    </a:solidFill>
-                    <a:latin typeface="Arial"/>
-                  </a:defRPr>
-                </a:pPr>
-              </a:p>
-            </c:txPr>
-            <c:showLegendKey val="0"/>
-            <c:showVal val="1"/>
-            <c:showCatName val="0"/>
-            <c:showSerName val="0"/>
-            <c:showPercent val="0"/>
-            <c:showBubbleSize val="0"/>
-            <c:showLeaderLines val="0"/>
-          </c:dLbls>
           <c:dPt>
             <c:idx val="0"/>
             <c:invertIfNegative val="0"/>
             <c:bubble3D val="0"/>
-            <c:spPr>
-              <a:solidFill>
-                <a:srgbClr val="C0392B"/>
-              </a:solidFill>
-              <a:effectLst/>
-            </c:spPr>
+            <c:extLst>
+              <c:ext xmlns:c16="http://schemas.microsoft.com/office/drawing/2014/chart" uri="{C3380CC4-5D6E-409C-BE32-E72D297353CC}">
+                <c16:uniqueId val="{00000001-4BC6-454D-ADFC-B3DCA8CFA418}"/>
+              </c:ext>
+            </c:extLst>
           </c:dPt>
           <c:dPt>
             <c:idx val="1"/>
@@ -691,22 +677,62 @@
               </a:solidFill>
               <a:effectLst/>
             </c:spPr>
+            <c:extLst>
+              <c:ext xmlns:c16="http://schemas.microsoft.com/office/drawing/2014/chart" uri="{C3380CC4-5D6E-409C-BE32-E72D297353CC}">
+                <c16:uniqueId val="{00000003-4BC6-454D-ADFC-B3DCA8CFA418}"/>
+              </c:ext>
+            </c:extLst>
           </c:dPt>
+          <c:dLbls>
+            <c:numFmt formatCode="#,##0" sourceLinked="0"/>
+            <c:spPr>
+              <a:noFill/>
+              <a:ln>
+                <a:noFill/>
+              </a:ln>
+              <a:effectLst/>
+            </c:spPr>
+            <c:txPr>
+              <a:bodyPr/>
+              <a:lstStyle/>
+              <a:p>
+                <a:pPr>
+                  <a:defRPr sz="1000" b="0" i="0" u="none" strike="noStrike">
+                    <a:solidFill>
+                      <a:srgbClr val="1E2761"/>
+                    </a:solidFill>
+                    <a:latin typeface="Arial"/>
+                  </a:defRPr>
+                </a:pPr>
+                <a:endParaRPr lang="pt-BR"/>
+              </a:p>
+            </c:txPr>
+            <c:showLegendKey val="0"/>
+            <c:showVal val="1"/>
+            <c:showCatName val="0"/>
+            <c:showSerName val="0"/>
+            <c:showPercent val="0"/>
+            <c:showBubbleSize val="0"/>
+            <c:showLeaderLines val="0"/>
+            <c:extLst>
+              <c:ext xmlns:c15="http://schemas.microsoft.com/office/drawing/2012/chart" uri="{CE6537A1-D6FC-4f65-9D91-7224C49458BB}">
+                <c15:showLeaderLines val="0"/>
+              </c:ext>
+            </c:extLst>
+          </c:dLbls>
           <c:cat>
-            <c:multiLvlStrRef>
+            <c:strRef>
               <c:f>Sheet1!$A$2:$A$3</c:f>
-              <c:multiLvlStrCache>
+              <c:strCache>
                 <c:ptCount val="2"/>
-                <c:lvl>
-                  <c:pt idx="0">
-                    <c:v>Antes</c:v>
-                  </c:pt>
-                  <c:pt idx="1">
-                    <c:v>Com CLP</c:v>
-                  </c:pt>
-                </c:lvl>
-              </c:multiLvlStrCache>
-            </c:multiLvlStrRef>
+                <c:pt idx="0">
+                  <c:v>Antes</c:v>
+                </c:pt>
+                <c:pt idx="1">
+                  <c:v>Com CLP</c:v>
+                </c:pt>
+              </c:strCache>
+            </c:strRef>
           </c:cat>
           <c:val>
             <c:numRef>
@@ -723,36 +749,23 @@
               </c:numCache>
             </c:numRef>
           </c:val>
+          <c:extLst>
+            <c:ext xmlns:c16="http://schemas.microsoft.com/office/drawing/2014/chart" uri="{C3380CC4-5D6E-409C-BE32-E72D297353CC}">
+              <c16:uniqueId val="{00000004-4BC6-454D-ADFC-B3DCA8CFA418}"/>
+            </c:ext>
+          </c:extLst>
         </c:ser>
         <c:dLbls>
-          <c:numFmt formatCode="#,##0" sourceLinked="0"/>
-          <c:txPr>
-            <a:bodyPr/>
-            <a:lstStyle/>
-            <a:p>
-              <a:pPr>
-                <a:defRPr b="0" i="0" strike="noStrike" sz="1000" u="none">
-                  <a:solidFill>
-                    <a:srgbClr val="1E2761"/>
-                  </a:solidFill>
-                  <a:latin typeface="Arial"/>
-                </a:defRPr>
-              </a:pPr>
-            </a:p>
-          </c:txPr>
           <c:showLegendKey val="0"/>
           <c:showVal val="1"/>
           <c:showCatName val="0"/>
           <c:showSerName val="0"/>
           <c:showPercent val="0"/>
           <c:showBubbleSize val="0"/>
-          <c:showLeaderLines val="0"/>
         </c:dLbls>
         <c:gapWidth val="150"/>
-        <c:overlap val="0"/>
         <c:axId val="2094734554"/>
         <c:axId val="2094734552"/>
-        <c:axId val="2094734556"/>
       </c:barChart>
       <c:catAx>
         <c:axId val="2094734554"/>
@@ -786,13 +799,14 @@
                 <a:latin typeface="Arial"/>
               </a:defRPr>
             </a:pPr>
-            <a:endParaRPr lang="en-US"/>
+            <a:endParaRPr lang="pt-BR"/>
           </a:p>
         </c:txPr>
         <c:crossAx val="2094734552"/>
         <c:crosses val="autoZero"/>
         <c:auto val="1"/>
         <c:lblAlgn val="ctr"/>
+        <c:lblOffset val="100"/>
         <c:noMultiLvlLbl val="1"/>
       </c:catAx>
       <c:valAx>
@@ -839,7 +853,7 @@
                 <a:latin typeface="Arial"/>
               </a:defRPr>
             </a:pPr>
-            <a:endParaRPr lang="en-US"/>
+            <a:endParaRPr lang="pt-BR"/>
           </a:p>
         </c:txPr>
         <c:crossAx val="2094734554"/>
@@ -856,6 +870,7 @@
     </c:plotArea>
     <c:plotVisOnly val="1"/>
     <c:dispBlanksAs val="span"/>
+    <c:showDLblsOverMax val="1"/>
   </c:chart>
   <c:spPr>
     <a:noFill/>
@@ -871,9 +886,11 @@
 </file>
 
 <file path=ppt/charts/chart4.xml><?xml version="1.0" encoding="utf-8"?>
-<c:chartSpace xmlns:c="http://schemas.openxmlformats.org/drawingml/2006/chart" xmlns:a="http://schemas.openxmlformats.org/drawingml/2006/main" xmlns:r="http://schemas.openxmlformats.org/officeDocument/2006/relationships">
+<c:chartSpace xmlns:c="http://schemas.openxmlformats.org/drawingml/2006/chart" xmlns:a="http://schemas.openxmlformats.org/drawingml/2006/main" xmlns:r="http://schemas.openxmlformats.org/officeDocument/2006/relationships" xmlns:c16r2="http://schemas.microsoft.com/office/drawing/2015/06/chart">
   <c:date1904 val="0"/>
+  <c:lang val="pt-BR"/>
   <c:roundedCorners val="1"/>
+  <c:style val="2"/>
   <c:chart>
     <c:autoTitleDeleted val="1"/>
     <c:plotArea>
@@ -903,40 +920,15 @@
             <a:effectLst/>
           </c:spPr>
           <c:invertIfNegative val="0"/>
-          <c:dLbls>
-            <c:numFmt formatCode="#,##0" sourceLinked="0"/>
-            <c:txPr>
-              <a:bodyPr/>
-              <a:lstStyle/>
-              <a:p>
-                <a:pPr>
-                  <a:defRPr b="0" i="0" strike="noStrike" sz="1000" u="none">
-                    <a:solidFill>
-                      <a:srgbClr val="1E2761"/>
-                    </a:solidFill>
-                    <a:latin typeface="Arial"/>
-                  </a:defRPr>
-                </a:pPr>
-              </a:p>
-            </c:txPr>
-            <c:showLegendKey val="0"/>
-            <c:showVal val="1"/>
-            <c:showCatName val="0"/>
-            <c:showSerName val="0"/>
-            <c:showPercent val="0"/>
-            <c:showBubbleSize val="0"/>
-            <c:showLeaderLines val="0"/>
-          </c:dLbls>
           <c:dPt>
             <c:idx val="0"/>
             <c:invertIfNegative val="0"/>
             <c:bubble3D val="0"/>
-            <c:spPr>
-              <a:solidFill>
-                <a:srgbClr val="C0392B"/>
-              </a:solidFill>
-              <a:effectLst/>
-            </c:spPr>
+            <c:extLst>
+              <c:ext xmlns:c16="http://schemas.microsoft.com/office/drawing/2014/chart" uri="{C3380CC4-5D6E-409C-BE32-E72D297353CC}">
+                <c16:uniqueId val="{00000001-228E-4C1E-BBF3-9FAB6423CDD5}"/>
+              </c:ext>
+            </c:extLst>
           </c:dPt>
           <c:dPt>
             <c:idx val="1"/>
@@ -948,22 +940,62 @@
               </a:solidFill>
               <a:effectLst/>
             </c:spPr>
+            <c:extLst>
+              <c:ext xmlns:c16="http://schemas.microsoft.com/office/drawing/2014/chart" uri="{C3380CC4-5D6E-409C-BE32-E72D297353CC}">
+                <c16:uniqueId val="{00000003-228E-4C1E-BBF3-9FAB6423CDD5}"/>
+              </c:ext>
+            </c:extLst>
           </c:dPt>
+          <c:dLbls>
+            <c:numFmt formatCode="#,##0" sourceLinked="0"/>
+            <c:spPr>
+              <a:noFill/>
+              <a:ln>
+                <a:noFill/>
+              </a:ln>
+              <a:effectLst/>
+            </c:spPr>
+            <c:txPr>
+              <a:bodyPr/>
+              <a:lstStyle/>
+              <a:p>
+                <a:pPr>
+                  <a:defRPr sz="1000" b="0" i="0" u="none" strike="noStrike">
+                    <a:solidFill>
+                      <a:srgbClr val="1E2761"/>
+                    </a:solidFill>
+                    <a:latin typeface="Arial"/>
+                  </a:defRPr>
+                </a:pPr>
+                <a:endParaRPr lang="pt-BR"/>
+              </a:p>
+            </c:txPr>
+            <c:showLegendKey val="0"/>
+            <c:showVal val="1"/>
+            <c:showCatName val="0"/>
+            <c:showSerName val="0"/>
+            <c:showPercent val="0"/>
+            <c:showBubbleSize val="0"/>
+            <c:showLeaderLines val="0"/>
+            <c:extLst>
+              <c:ext xmlns:c15="http://schemas.microsoft.com/office/drawing/2012/chart" uri="{CE6537A1-D6FC-4f65-9D91-7224C49458BB}">
+                <c15:showLeaderLines val="0"/>
+              </c:ext>
+            </c:extLst>
+          </c:dLbls>
           <c:cat>
-            <c:multiLvlStrRef>
+            <c:strRef>
               <c:f>Sheet1!$A$2:$A$3</c:f>
-              <c:multiLvlStrCache>
+              <c:strCache>
                 <c:ptCount val="2"/>
-                <c:lvl>
-                  <c:pt idx="0">
-                    <c:v>Antes</c:v>
-                  </c:pt>
-                  <c:pt idx="1">
-                    <c:v>Com CLP</c:v>
-                  </c:pt>
-                </c:lvl>
-              </c:multiLvlStrCache>
-            </c:multiLvlStrRef>
+                <c:pt idx="0">
+                  <c:v>Antes</c:v>
+                </c:pt>
+                <c:pt idx="1">
+                  <c:v>Com CLP</c:v>
+                </c:pt>
+              </c:strCache>
+            </c:strRef>
           </c:cat>
           <c:val>
             <c:numRef>
@@ -972,7 +1004,7 @@
                 <c:formatCode>General</c:formatCode>
                 <c:ptCount val="2"/>
                 <c:pt idx="0">
-                  <c:v>2132999.57</c:v>
+                  <c:v>2132999.5699999998</c:v>
                 </c:pt>
                 <c:pt idx="1">
                   <c:v>1915313.15</c:v>
@@ -980,36 +1012,23 @@
               </c:numCache>
             </c:numRef>
           </c:val>
+          <c:extLst>
+            <c:ext xmlns:c16="http://schemas.microsoft.com/office/drawing/2014/chart" uri="{C3380CC4-5D6E-409C-BE32-E72D297353CC}">
+              <c16:uniqueId val="{00000004-228E-4C1E-BBF3-9FAB6423CDD5}"/>
+            </c:ext>
+          </c:extLst>
         </c:ser>
         <c:dLbls>
-          <c:numFmt formatCode="#,##0" sourceLinked="0"/>
-          <c:txPr>
-            <a:bodyPr/>
-            <a:lstStyle/>
-            <a:p>
-              <a:pPr>
-                <a:defRPr b="0" i="0" strike="noStrike" sz="1000" u="none">
-                  <a:solidFill>
-                    <a:srgbClr val="1E2761"/>
-                  </a:solidFill>
-                  <a:latin typeface="Arial"/>
-                </a:defRPr>
-              </a:pPr>
-            </a:p>
-          </c:txPr>
           <c:showLegendKey val="0"/>
           <c:showVal val="1"/>
           <c:showCatName val="0"/>
           <c:showSerName val="0"/>
           <c:showPercent val="0"/>
           <c:showBubbleSize val="0"/>
-          <c:showLeaderLines val="0"/>
         </c:dLbls>
         <c:gapWidth val="150"/>
-        <c:overlap val="0"/>
         <c:axId val="2094734554"/>
         <c:axId val="2094734552"/>
-        <c:axId val="2094734556"/>
       </c:barChart>
       <c:catAx>
         <c:axId val="2094734554"/>
@@ -1043,13 +1062,14 @@
                 <a:latin typeface="Arial"/>
               </a:defRPr>
             </a:pPr>
-            <a:endParaRPr lang="en-US"/>
+            <a:endParaRPr lang="pt-BR"/>
           </a:p>
         </c:txPr>
         <c:crossAx val="2094734552"/>
         <c:crosses val="autoZero"/>
         <c:auto val="1"/>
         <c:lblAlgn val="ctr"/>
+        <c:lblOffset val="100"/>
         <c:noMultiLvlLbl val="1"/>
       </c:catAx>
       <c:valAx>
@@ -1096,7 +1116,7 @@
                 <a:latin typeface="Arial"/>
               </a:defRPr>
             </a:pPr>
-            <a:endParaRPr lang="en-US"/>
+            <a:endParaRPr lang="pt-BR"/>
           </a:p>
         </c:txPr>
         <c:crossAx val="2094734554"/>
@@ -1113,6 +1133,7 @@
     </c:plotArea>
     <c:plotVisOnly val="1"/>
     <c:dispBlanksAs val="span"/>
+    <c:showDLblsOverMax val="1"/>
   </c:chart>
   <c:spPr>
     <a:noFill/>
@@ -1128,14 +1149,17 @@
 </file>
 
 <file path=ppt/charts/chart5.xml><?xml version="1.0" encoding="utf-8"?>
-<c:chartSpace xmlns:c="http://schemas.openxmlformats.org/drawingml/2006/chart" xmlns:a="http://schemas.openxmlformats.org/drawingml/2006/main" xmlns:r="http://schemas.openxmlformats.org/officeDocument/2006/relationships">
+<c:chartSpace xmlns:c="http://schemas.openxmlformats.org/drawingml/2006/chart" xmlns:a="http://schemas.openxmlformats.org/drawingml/2006/main" xmlns:r="http://schemas.openxmlformats.org/officeDocument/2006/relationships" xmlns:c16r2="http://schemas.microsoft.com/office/drawing/2015/06/chart">
   <c:date1904 val="0"/>
+  <c:lang val="pt-BR"/>
   <c:roundedCorners val="1"/>
+  <c:style val="2"/>
   <c:chart>
     <c:autoTitleDeleted val="1"/>
     <c:plotArea>
       <c:layout/>
       <c:lineChart>
+        <c:grouping val="standard"/>
         <c:varyColors val="0"/>
         <c:ser>
           <c:idx val="0"/>
@@ -1152,9 +1176,6 @@
             </c:strRef>
           </c:tx>
           <c:spPr>
-            <a:solidFill>
-              <a:srgbClr val="028090"/>
-            </a:solidFill>
             <a:ln w="38100" cap="flat">
               <a:solidFill>
                 <a:srgbClr val="028090"/>
@@ -1164,31 +1185,6 @@
             </a:ln>
             <a:effectLst/>
           </c:spPr>
-          <c:invertIfNegative val="0"/>
-          <c:dLbls>
-            <c:numFmt formatCode="#,##0" sourceLinked="0"/>
-            <c:txPr>
-              <a:bodyPr/>
-              <a:lstStyle/>
-              <a:p>
-                <a:pPr>
-                  <a:defRPr b="0" i="0" strike="noStrike" sz="1200" u="none">
-                    <a:solidFill>
-                      <a:srgbClr val="000000"/>
-                    </a:solidFill>
-                    <a:latin typeface="Arial"/>
-                  </a:defRPr>
-                </a:pPr>
-              </a:p>
-            </c:txPr>
-            <c:showLegendKey val="0"/>
-            <c:showVal val="0"/>
-            <c:showCatName val="0"/>
-            <c:showSerName val="0"/>
-            <c:showPercent val="0"/>
-            <c:showBubbleSize val="0"/>
-            <c:showLeaderLines val="0"/>
-          </c:dLbls>
           <c:marker>
             <c:symbol val="circle"/>
             <c:size val="6"/>
@@ -1207,38 +1203,36 @@
             </c:spPr>
           </c:marker>
           <c:cat>
-            <c:multiLvlStrRef>
+            <c:strRef>
               <c:f>Sheet1!$A$2:$A$9</c:f>
-              <c:multiLvlStrCache>
+              <c:strCache>
                 <c:ptCount val="8"/>
-                <c:lvl>
-                  <c:pt idx="0">
-                    <c:v>Mês 0</c:v>
-                  </c:pt>
-                  <c:pt idx="1">
-                    <c:v>Mês 6</c:v>
-                  </c:pt>
-                  <c:pt idx="2">
-                    <c:v>Mês 12</c:v>
-                  </c:pt>
-                  <c:pt idx="3">
-                    <c:v>Mês 16,6</c:v>
-                  </c:pt>
-                  <c:pt idx="4">
-                    <c:v>Mês 24</c:v>
-                  </c:pt>
-                  <c:pt idx="5">
-                    <c:v>Mês 36</c:v>
-                  </c:pt>
-                  <c:pt idx="6">
-                    <c:v>Mês 48</c:v>
-                  </c:pt>
-                  <c:pt idx="7">
-                    <c:v>Mês 60</c:v>
-                  </c:pt>
-                </c:lvl>
-              </c:multiLvlStrCache>
-            </c:multiLvlStrRef>
+                <c:pt idx="0">
+                  <c:v>Mês 0</c:v>
+                </c:pt>
+                <c:pt idx="1">
+                  <c:v>Mês 6</c:v>
+                </c:pt>
+                <c:pt idx="2">
+                  <c:v>Mês 12</c:v>
+                </c:pt>
+                <c:pt idx="3">
+                  <c:v>Mês 16,6</c:v>
+                </c:pt>
+                <c:pt idx="4">
+                  <c:v>Mês 24</c:v>
+                </c:pt>
+                <c:pt idx="5">
+                  <c:v>Mês 36</c:v>
+                </c:pt>
+                <c:pt idx="6">
+                  <c:v>Mês 48</c:v>
+                </c:pt>
+                <c:pt idx="7">
+                  <c:v>Mês 60</c:v>
+                </c:pt>
+              </c:strCache>
+            </c:strRef>
           </c:cat>
           <c:val>
             <c:numRef>
@@ -1265,7 +1259,7 @@
                   <c:v>352059.08</c:v>
                 </c:pt>
                 <c:pt idx="6">
-                  <c:v>569745.44</c:v>
+                  <c:v>569745.43999999994</c:v>
                 </c:pt>
                 <c:pt idx="7">
                   <c:v>787432.1</c:v>
@@ -1274,35 +1268,24 @@
             </c:numRef>
           </c:val>
           <c:smooth val="0"/>
+          <c:extLst>
+            <c:ext xmlns:c16="http://schemas.microsoft.com/office/drawing/2014/chart" uri="{C3380CC4-5D6E-409C-BE32-E72D297353CC}">
+              <c16:uniqueId val="{00000000-549B-4796-8495-AC12A673BB45}"/>
+            </c:ext>
+          </c:extLst>
         </c:ser>
         <c:dLbls>
-          <c:numFmt formatCode="#,##0" sourceLinked="0"/>
-          <c:txPr>
-            <a:bodyPr/>
-            <a:lstStyle/>
-            <a:p>
-              <a:pPr>
-                <a:defRPr b="0" i="0" strike="noStrike" sz="1200" u="none">
-                  <a:solidFill>
-                    <a:srgbClr val="000000"/>
-                  </a:solidFill>
-                  <a:latin typeface="Arial"/>
-                </a:defRPr>
-              </a:pPr>
-            </a:p>
-          </c:txPr>
           <c:showLegendKey val="0"/>
           <c:showVal val="0"/>
           <c:showCatName val="0"/>
           <c:showSerName val="0"/>
           <c:showPercent val="0"/>
           <c:showBubbleSize val="0"/>
-          <c:showLeaderLines val="0"/>
         </c:dLbls>
         <c:marker val="1"/>
+        <c:smooth val="0"/>
         <c:axId val="2094734554"/>
         <c:axId val="2094734552"/>
-        <c:axId val="2094734556"/>
       </c:lineChart>
       <c:catAx>
         <c:axId val="2094734554"/>
@@ -1336,13 +1319,14 @@
                 <a:latin typeface="Arial"/>
               </a:defRPr>
             </a:pPr>
-            <a:endParaRPr lang="en-US"/>
+            <a:endParaRPr lang="pt-BR"/>
           </a:p>
         </c:txPr>
         <c:crossAx val="2094734552"/>
         <c:crosses val="autoZero"/>
         <c:auto val="1"/>
         <c:lblAlgn val="ctr"/>
+        <c:lblOffset val="100"/>
         <c:noMultiLvlLbl val="1"/>
       </c:catAx>
       <c:valAx>
@@ -1388,7 +1372,7 @@
                 <a:latin typeface="Arial"/>
               </a:defRPr>
             </a:pPr>
-            <a:endParaRPr lang="en-US"/>
+            <a:endParaRPr lang="pt-BR"/>
           </a:p>
         </c:txPr>
         <c:crossAx val="2094734554"/>
@@ -1405,6 +1389,7 @@
     </c:plotArea>
     <c:plotVisOnly val="1"/>
     <c:dispBlanksAs val="span"/>
+    <c:showDLblsOverMax val="1"/>
   </c:chart>
   <c:spPr>
     <a:noFill/>
@@ -1441,234 +1426,10 @@
           <a:chExt cx="0" cy="0"/>
         </a:xfrm>
       </p:grpSpPr>
-      <p:sp>
-        <p:nvSpPr>
-          <p:cNvPr id="2" name="Header Placeholder 1"/>
-          <p:cNvSpPr>
-            <a:spLocks noGrp="1"/>
-          </p:cNvSpPr>
-          <p:nvPr>
-            <p:ph type="hdr" sz="quarter"/>
-          </p:nvPr>
-        </p:nvSpPr>
-        <p:spPr>
-          <a:xfrm>
-            <a:off x="0" y="0"/>
-            <a:ext cx="2971800" cy="458788"/>
-          </a:xfrm>
-          <a:prstGeom prst="rect">
-            <a:avLst/>
-          </a:prstGeom>
-        </p:spPr>
-        <p:txBody>
-          <a:bodyPr vert="horz" lIns="91440" tIns="45720" rIns="91440" bIns="45720" rtlCol="0"/>
-          <a:lstStyle>
-            <a:lvl1pPr algn="l">
-              <a:defRPr sz="1200"/>
-            </a:lvl1pPr>
-          </a:lstStyle>
-          <a:p>
-            <a:endParaRPr lang="en-US"/>
-          </a:p>
-        </p:txBody>
-      </p:sp>
-      <p:sp>
-        <p:nvSpPr>
-          <p:cNvPr id="3" name="Date Placeholder 2"/>
-          <p:cNvSpPr>
-            <a:spLocks noGrp="1"/>
-          </p:cNvSpPr>
-          <p:nvPr>
-            <p:ph type="dt" idx="1"/>
-          </p:nvPr>
-        </p:nvSpPr>
-        <p:spPr>
-          <a:xfrm>
-            <a:off x="3884613" y="0"/>
-            <a:ext cx="2971800" cy="458788"/>
-          </a:xfrm>
-          <a:prstGeom prst="rect">
-            <a:avLst/>
-          </a:prstGeom>
-        </p:spPr>
-        <p:txBody>
-          <a:bodyPr vert="horz" lIns="91440" tIns="45720" rIns="91440" bIns="45720" rtlCol="0"/>
-          <a:lstStyle>
-            <a:lvl1pPr algn="r">
-              <a:defRPr sz="1200"/>
-            </a:lvl1pPr>
-          </a:lstStyle>
-          <a:p>
-            <a:fld id="{5282F153-3F37-0F45-9E97-73ACFA13230C}" type="datetimeFigureOut">
-              <a:rPr lang="en-US"/>
-              <a:t>7/23/19</a:t>
-            </a:fld>
-            <a:endParaRPr lang="en-US"/>
-          </a:p>
-        </p:txBody>
-      </p:sp>
-      <p:sp>
-        <p:nvSpPr>
-          <p:cNvPr id="4" name="Slide Image Placeholder 3"/>
-          <p:cNvSpPr>
-            <a:spLocks noGrp="1" noRot="1" noChangeAspect="1"/>
-          </p:cNvSpPr>
-          <p:nvPr>
-            <p:ph type="sldImg" idx="2"/>
-          </p:nvPr>
-        </p:nvSpPr>
-        <p:spPr>
-          <a:xfrm>
-            <a:off x="685800" y="1143000"/>
-            <a:ext cx="5486400" cy="3086100"/>
-          </a:xfrm>
-          <a:prstGeom prst="rect">
-            <a:avLst/>
-          </a:prstGeom>
-          <a:noFill/>
-          <a:ln w="12700">
-            <a:solidFill>
-              <a:prstClr val="black"/>
-            </a:solidFill>
-          </a:ln>
-        </p:spPr>
-        <p:txBody>
-          <a:bodyPr vert="horz" lIns="91440" tIns="45720" rIns="91440" bIns="45720" rtlCol="0" anchor="ctr"/>
-          <a:lstStyle/>
-          <a:p>
-            <a:endParaRPr lang="en-US"/>
-          </a:p>
-        </p:txBody>
-      </p:sp>
-      <p:sp>
-        <p:nvSpPr>
-          <p:cNvPr id="5" name="Notes Placeholder 4"/>
-          <p:cNvSpPr>
-            <a:spLocks noGrp="1"/>
-          </p:cNvSpPr>
-          <p:nvPr>
-            <p:ph type="body" sz="quarter" idx="3"/>
-          </p:nvPr>
-        </p:nvSpPr>
-        <p:spPr>
-          <a:xfrm>
-            <a:off x="685800" y="4400550"/>
-            <a:ext cx="5486400" cy="3600450"/>
-          </a:xfrm>
-          <a:prstGeom prst="rect">
-            <a:avLst/>
-          </a:prstGeom>
-        </p:spPr>
-        <p:txBody>
-          <a:bodyPr vert="horz" lIns="91440" tIns="45720" rIns="91440" bIns="45720" rtlCol="0"/>
-          <a:lstStyle/>
-          <a:p>
-            <a:pPr lvl="0"/>
-            <a:r>
-              <a:rPr lang="en-US"/>
-              <a:t>Click to edit Master text styles</a:t>
-            </a:r>
-          </a:p>
-          <a:p>
-            <a:pPr lvl="1"/>
-            <a:r>
-              <a:rPr lang="en-US"/>
-              <a:t>Second level</a:t>
-            </a:r>
-          </a:p>
-          <a:p>
-            <a:pPr lvl="2"/>
-            <a:r>
-              <a:rPr lang="en-US"/>
-              <a:t>Third level</a:t>
-            </a:r>
-          </a:p>
-          <a:p>
-            <a:pPr lvl="3"/>
-            <a:r>
-              <a:rPr lang="en-US"/>
-              <a:t>Fourth level</a:t>
-            </a:r>
-          </a:p>
-          <a:p>
-            <a:pPr lvl="4"/>
-            <a:r>
-              <a:rPr lang="en-US"/>
-              <a:t>Fifth level</a:t>
-            </a:r>
-          </a:p>
-        </p:txBody>
-      </p:sp>
-      <p:sp>
-        <p:nvSpPr>
-          <p:cNvPr id="6" name="Footer Placeholder 5"/>
-          <p:cNvSpPr>
-            <a:spLocks noGrp="1"/>
-          </p:cNvSpPr>
-          <p:nvPr>
-            <p:ph type="ftr" sz="quarter" idx="4"/>
-          </p:nvPr>
-        </p:nvSpPr>
-        <p:spPr>
-          <a:xfrm>
-            <a:off x="0" y="8685213"/>
-            <a:ext cx="2971800" cy="458787"/>
-          </a:xfrm>
-          <a:prstGeom prst="rect">
-            <a:avLst/>
-          </a:prstGeom>
-        </p:spPr>
-        <p:txBody>
-          <a:bodyPr vert="horz" lIns="91440" tIns="45720" rIns="91440" bIns="45720" rtlCol="0" anchor="b"/>
-          <a:lstStyle>
-            <a:lvl1pPr algn="l">
-              <a:defRPr sz="1200"/>
-            </a:lvl1pPr>
-          </a:lstStyle>
-          <a:p>
-            <a:endParaRPr lang="en-US"/>
-          </a:p>
-        </p:txBody>
-      </p:sp>
-      <p:sp>
-        <p:nvSpPr>
-          <p:cNvPr id="7" name="Slide Number Placeholder 6"/>
-          <p:cNvSpPr>
-            <a:spLocks noGrp="1"/>
-          </p:cNvSpPr>
-          <p:nvPr>
-            <p:ph type="sldNum" sz="quarter" idx="5"/>
-          </p:nvPr>
-        </p:nvSpPr>
-        <p:spPr>
-          <a:xfrm>
-            <a:off x="3884613" y="8685213"/>
-            <a:ext cx="2971800" cy="458787"/>
-          </a:xfrm>
-          <a:prstGeom prst="rect">
-            <a:avLst/>
-          </a:prstGeom>
-        </p:spPr>
-        <p:txBody>
-          <a:bodyPr vert="horz" lIns="91440" tIns="45720" rIns="91440" bIns="45720" rtlCol="0" anchor="b"/>
-          <a:lstStyle>
-            <a:lvl1pPr algn="r">
-              <a:defRPr sz="1200"/>
-            </a:lvl1pPr>
-          </a:lstStyle>
-          <a:p>
-            <a:fld id="{CE5E9CC1-C706-0F49-92D6-E571CC5EEA8F}" type="slidenum">
-              <a:rPr lang="en-US"/>
-              <a:t>‹#›</a:t>
-            </a:fld>
-            <a:endParaRPr lang="en-US"/>
-          </a:p>
-        </p:txBody>
-      </p:sp>
     </p:spTree>
     <p:extLst>
       <p:ext uri="{BB962C8B-B14F-4D97-AF65-F5344CB8AC3E}">
-        <p14:creationId xmlns:p14="http://schemas.microsoft.com/office/powerpoint/2010/main" val="1024086991"/>
+        <p14:creationId xmlns:p14="http://schemas.microsoft.com/office/powerpoint/2010/main" val="2327364467"/>
       </p:ext>
     </p:extLst>
   </p:cSld>
@@ -1812,10 +1573,6 @@
           <a:bodyPr/>
           <a:lstStyle/>
           <a:p>
-            <a:r>
-              <a:rPr lang="en-US" dirty="0"/>
-              <a:t/>
-            </a:r>
             <a:endParaRPr lang="en-US" dirty="0"/>
           </a:p>
         </p:txBody>
@@ -1900,10 +1657,6 @@
           <a:bodyPr/>
           <a:lstStyle/>
           <a:p>
-            <a:r>
-              <a:rPr lang="en-US" dirty="0"/>
-              <a:t/>
-            </a:r>
             <a:endParaRPr lang="en-US" dirty="0"/>
           </a:p>
         </p:txBody>
@@ -1988,10 +1741,6 @@
           <a:bodyPr/>
           <a:lstStyle/>
           <a:p>
-            <a:r>
-              <a:rPr lang="en-US" dirty="0"/>
-              <a:t/>
-            </a:r>
             <a:endParaRPr lang="en-US" dirty="0"/>
           </a:p>
         </p:txBody>
@@ -2076,10 +1825,6 @@
           <a:bodyPr/>
           <a:lstStyle/>
           <a:p>
-            <a:r>
-              <a:rPr lang="en-US" dirty="0"/>
-              <a:t/>
-            </a:r>
             <a:endParaRPr lang="en-US" dirty="0"/>
           </a:p>
         </p:txBody>
@@ -2164,10 +1909,6 @@
           <a:bodyPr/>
           <a:lstStyle/>
           <a:p>
-            <a:r>
-              <a:rPr lang="en-US" dirty="0"/>
-              <a:t/>
-            </a:r>
             <a:endParaRPr lang="en-US" dirty="0"/>
           </a:p>
         </p:txBody>
@@ -2252,10 +1993,6 @@
           <a:bodyPr/>
           <a:lstStyle/>
           <a:p>
-            <a:r>
-              <a:rPr lang="en-US" dirty="0"/>
-              <a:t/>
-            </a:r>
             <a:endParaRPr lang="en-US" dirty="0"/>
           </a:p>
         </p:txBody>
@@ -2340,10 +2077,6 @@
           <a:bodyPr/>
           <a:lstStyle/>
           <a:p>
-            <a:r>
-              <a:rPr lang="en-US" dirty="0"/>
-              <a:t/>
-            </a:r>
             <a:endParaRPr lang="en-US" dirty="0"/>
           </a:p>
         </p:txBody>
@@ -2428,10 +2161,6 @@
           <a:bodyPr/>
           <a:lstStyle/>
           <a:p>
-            <a:r>
-              <a:rPr lang="en-US" dirty="0"/>
-              <a:t/>
-            </a:r>
             <a:endParaRPr lang="en-US" dirty="0"/>
           </a:p>
         </p:txBody>
@@ -2516,10 +2245,6 @@
           <a:bodyPr/>
           <a:lstStyle/>
           <a:p>
-            <a:r>
-              <a:rPr lang="en-US" dirty="0"/>
-              <a:t/>
-            </a:r>
             <a:endParaRPr lang="en-US" dirty="0"/>
           </a:p>
         </p:txBody>
@@ -2604,10 +2329,6 @@
           <a:bodyPr/>
           <a:lstStyle/>
           <a:p>
-            <a:r>
-              <a:rPr lang="en-US" dirty="0"/>
-              <a:t/>
-            </a:r>
             <a:endParaRPr lang="en-US" dirty="0"/>
           </a:p>
         </p:txBody>
@@ -2692,10 +2413,6 @@
           <a:bodyPr/>
           <a:lstStyle/>
           <a:p>
-            <a:r>
-              <a:rPr lang="en-US" dirty="0"/>
-              <a:t/>
-            </a:r>
             <a:endParaRPr lang="en-US" dirty="0"/>
           </a:p>
         </p:txBody>
@@ -2780,10 +2497,6 @@
           <a:bodyPr/>
           <a:lstStyle/>
           <a:p>
-            <a:r>
-              <a:rPr lang="en-US" dirty="0"/>
-              <a:t/>
-            </a:r>
             <a:endParaRPr lang="en-US" dirty="0"/>
           </a:p>
         </p:txBody>
@@ -2868,10 +2581,6 @@
           <a:bodyPr/>
           <a:lstStyle/>
           <a:p>
-            <a:r>
-              <a:rPr lang="en-US" dirty="0"/>
-              <a:t/>
-            </a:r>
             <a:endParaRPr lang="en-US" dirty="0"/>
           </a:p>
         </p:txBody>
@@ -2956,10 +2665,6 @@
           <a:bodyPr/>
           <a:lstStyle/>
           <a:p>
-            <a:r>
-              <a:rPr lang="en-US" dirty="0"/>
-              <a:t/>
-            </a:r>
             <a:endParaRPr lang="en-US" dirty="0"/>
           </a:p>
         </p:txBody>
@@ -3044,10 +2749,6 @@
           <a:bodyPr/>
           <a:lstStyle/>
           <a:p>
-            <a:r>
-              <a:rPr lang="en-US" dirty="0"/>
-              <a:t/>
-            </a:r>
             <a:endParaRPr lang="en-US" dirty="0"/>
           </a:p>
         </p:txBody>
@@ -3121,6 +2822,11 @@
 <file path=ppt/slideMasters/slideMaster1.xml><?xml version="1.0" encoding="utf-8"?>
 <p:sldMaster xmlns:a="http://schemas.openxmlformats.org/drawingml/2006/main" xmlns:r="http://schemas.openxmlformats.org/officeDocument/2006/relationships" xmlns:p="http://schemas.openxmlformats.org/presentationml/2006/main">
   <p:cSld>
+    <p:bg>
+      <p:bgRef idx="1001">
+        <a:schemeClr val="bg1"/>
+      </p:bgRef>
+    </p:bg>
     <p:spTree>
       <p:nvGrpSpPr>
         <p:cNvPr id="1" name=""/>
@@ -3403,6 +3109,7 @@
         <a:solidFill>
           <a:srgbClr val="1E2761"/>
         </a:solidFill>
+        <a:effectLst/>
       </p:bgPr>
     </p:bg>
     <p:spTree>
@@ -3438,10 +3145,6 @@
           </a:solidFill>
           <a:ln/>
         </p:spPr>
-        <p:txBody>
-          <a:bodyPr/>
-          <a:p/>
-        </p:txBody>
       </p:sp>
       <p:sp>
         <p:nvSpPr>
@@ -3462,10 +3165,6 @@
           </a:solidFill>
           <a:ln/>
         </p:spPr>
-        <p:txBody>
-          <a:bodyPr/>
-          <a:p/>
-        </p:txBody>
       </p:sp>
       <p:sp>
         <p:nvSpPr>
@@ -3486,10 +3185,6 @@
           </a:solidFill>
           <a:ln/>
         </p:spPr>
-        <p:txBody>
-          <a:bodyPr/>
-          <a:p/>
-        </p:txBody>
       </p:sp>
       <p:sp>
         <p:nvSpPr>
@@ -3512,7 +3207,7 @@
           <a:bodyPr wrap="square" lIns="0" tIns="0" rIns="0" bIns="0" rtlCol="0" anchor="ctr"/>
           <a:lstStyle/>
           <a:p>
-            <a:pPr indent="0" marL="0">
+            <a:pPr marL="0" indent="0">
               <a:buNone/>
             </a:pPr>
             <a:r>
@@ -3551,7 +3246,7 @@
           <a:bodyPr wrap="square" lIns="0" tIns="0" rIns="0" bIns="0" rtlCol="0" anchor="ctr"/>
           <a:lstStyle/>
           <a:p>
-            <a:pPr indent="0" marL="0">
+            <a:pPr marL="0" indent="0">
               <a:buNone/>
             </a:pPr>
             <a:r>
@@ -3591,10 +3286,6 @@
             <a:prstDash val="solid"/>
           </a:ln>
         </p:spPr>
-        <p:txBody>
-          <a:bodyPr/>
-          <a:p/>
-        </p:txBody>
       </p:sp>
       <p:sp>
         <p:nvSpPr>
@@ -3617,7 +3308,7 @@
           <a:bodyPr wrap="square" lIns="0" tIns="0" rIns="0" bIns="0" rtlCol="0" anchor="ctr"/>
           <a:lstStyle/>
           <a:p>
-            <a:pPr indent="0" marL="0">
+            <a:pPr marL="0" indent="0">
               <a:lnSpc>
                 <a:spcPct val="135000"/>
               </a:lnSpc>
@@ -3634,12 +3325,6 @@
               </a:rPr>
               <a:t>Cliente: </a:t>
             </a:r>
-            <a:pPr indent="0" marL="0">
-              <a:lnSpc>
-                <a:spcPct val="135000"/>
-              </a:lnSpc>
-              <a:buNone/>
-            </a:pPr>
             <a:r>
               <a:rPr lang="en-US" sz="1300" dirty="0">
                 <a:solidFill>
@@ -3652,12 +3337,6 @@
               <a:t>Novo Shopping Center — Setor de Engenharia e Manutenção
 </a:t>
             </a:r>
-            <a:pPr indent="0" marL="0">
-              <a:lnSpc>
-                <a:spcPct val="135000"/>
-              </a:lnSpc>
-              <a:buNone/>
-            </a:pPr>
             <a:r>
               <a:rPr lang="en-US" sz="1300" b="1" dirty="0">
                 <a:solidFill>
@@ -3669,12 +3348,6 @@
               </a:rPr>
               <a:t>Elaboração Técnica: </a:t>
             </a:r>
-            <a:pPr indent="0" marL="0">
-              <a:lnSpc>
-                <a:spcPct val="135000"/>
-              </a:lnSpc>
-              <a:buNone/>
-            </a:pPr>
             <a:r>
               <a:rPr lang="en-US" sz="1300" dirty="0">
                 <a:solidFill>
@@ -3687,12 +3360,6 @@
               <a:t>3D Ar Condicionado — Engenharia Térmica &amp; Automação Industrial
 </a:t>
             </a:r>
-            <a:pPr indent="0" marL="0">
-              <a:lnSpc>
-                <a:spcPct val="135000"/>
-              </a:lnSpc>
-              <a:buNone/>
-            </a:pPr>
             <a:r>
               <a:rPr lang="en-US" sz="1300" b="1" dirty="0">
                 <a:solidFill>
@@ -3704,12 +3371,6 @@
               </a:rPr>
               <a:t>Responsável Técnico: </a:t>
             </a:r>
-            <a:pPr indent="0" marL="0">
-              <a:lnSpc>
-                <a:spcPct val="135000"/>
-              </a:lnSpc>
-              <a:buNone/>
-            </a:pPr>
             <a:r>
               <a:rPr lang="en-US" sz="1300" dirty="0">
                 <a:solidFill>
@@ -3722,12 +3383,6 @@
               <a:t>Eng. Victor Hugo Mota de Almeida
 </a:t>
             </a:r>
-            <a:pPr indent="0" marL="0">
-              <a:lnSpc>
-                <a:spcPct val="135000"/>
-              </a:lnSpc>
-              <a:buNone/>
-            </a:pPr>
             <a:r>
               <a:rPr lang="en-US" sz="1300" b="1" dirty="0">
                 <a:solidFill>
@@ -3739,12 +3394,6 @@
               </a:rPr>
               <a:t>Local / Data: </a:t>
             </a:r>
-            <a:pPr indent="0" marL="0">
-              <a:lnSpc>
-                <a:spcPct val="135000"/>
-              </a:lnSpc>
-              <a:buNone/>
-            </a:pPr>
             <a:r>
               <a:rPr lang="en-US" sz="1300" dirty="0">
                 <a:solidFill>
@@ -3776,6 +3425,7 @@
         <a:solidFill>
           <a:srgbClr val="F4F6FA"/>
         </a:solidFill>
+        <a:effectLst/>
       </p:bgPr>
     </p:bg>
     <p:spTree>
@@ -3813,7 +3463,7 @@
           <a:bodyPr wrap="square" lIns="0" tIns="0" rIns="0" bIns="0" rtlCol="0" anchor="ctr"/>
           <a:lstStyle/>
           <a:p>
-            <a:pPr indent="0" marL="0">
+            <a:pPr marL="0" indent="0">
               <a:buNone/>
             </a:pPr>
             <a:r>
@@ -3840,7 +3490,7 @@
           <p:nvPr>
             <p:extLst>
               <p:ext uri="{D42A27DB-BD31-4B8C-83A1-F6EECF244321}">
-                <p14:modId xmlns:p14="http://schemas.microsoft.com/office/powerpoint/2010/main" val="1579011935"/>
+                <p14:modId xmlns:p14="http://schemas.microsoft.com/office/powerpoint/2010/main" val="1557127870"/>
               </p:ext>
             </p:extLst>
           </p:nvPr>
@@ -3854,11 +3504,41 @@
             <a:tbl>
               <a:tblPr/>
               <a:tblGrid>
-                <a:gridCol w="3200400"/>
-                <a:gridCol w="2194560"/>
-                <a:gridCol w="2194560"/>
-                <a:gridCol w="2011680"/>
-                <a:gridCol w="1673352"/>
+                <a:gridCol w="3200400">
+                  <a:extLst>
+                    <a:ext uri="{9D8B030D-6E8A-4147-A177-3AD203B41FA5}">
+                      <a16:colId xmlns:a16="http://schemas.microsoft.com/office/drawing/2014/main" val="20000"/>
+                    </a:ext>
+                  </a:extLst>
+                </a:gridCol>
+                <a:gridCol w="2194560">
+                  <a:extLst>
+                    <a:ext uri="{9D8B030D-6E8A-4147-A177-3AD203B41FA5}">
+                      <a16:colId xmlns:a16="http://schemas.microsoft.com/office/drawing/2014/main" val="20001"/>
+                    </a:ext>
+                  </a:extLst>
+                </a:gridCol>
+                <a:gridCol w="2194560">
+                  <a:extLst>
+                    <a:ext uri="{9D8B030D-6E8A-4147-A177-3AD203B41FA5}">
+                      <a16:colId xmlns:a16="http://schemas.microsoft.com/office/drawing/2014/main" val="20002"/>
+                    </a:ext>
+                  </a:extLst>
+                </a:gridCol>
+                <a:gridCol w="2011680">
+                  <a:extLst>
+                    <a:ext uri="{9D8B030D-6E8A-4147-A177-3AD203B41FA5}">
+                      <a16:colId xmlns:a16="http://schemas.microsoft.com/office/drawing/2014/main" val="20003"/>
+                    </a:ext>
+                  </a:extLst>
+                </a:gridCol>
+                <a:gridCol w="1673352">
+                  <a:extLst>
+                    <a:ext uri="{9D8B030D-6E8A-4147-A177-3AD203B41FA5}">
+                      <a16:colId xmlns:a16="http://schemas.microsoft.com/office/drawing/2014/main" val="20004"/>
+                    </a:ext>
+                  </a:extLst>
+                </a:gridCol>
               </a:tblGrid>
               <a:tr h="365760">
                 <a:tc>
@@ -3866,7 +3546,7 @@
                     <a:bodyPr/>
                     <a:lstStyle/>
                     <a:p>
-                      <a:pPr indent="0" marL="0">
+                      <a:pPr marL="0" indent="0">
                         <a:buNone/>
                       </a:pPr>
                       <a:r>
@@ -3887,7 +3567,7 @@
                       </a:endParaRPr>
                     </a:p>
                   </a:txBody>
-                  <a:tcPr marL="91440" marR="91440" marT="45720" marB="45720" anchor="ctr">
+                  <a:tcPr anchor="ctr">
                     <a:lnL w="0" cap="flat" cmpd="sng" algn="ctr">
                       <a:noFill/>
                     </a:lnL>
@@ -3910,7 +3590,7 @@
                     <a:bodyPr/>
                     <a:lstStyle/>
                     <a:p>
-                      <a:pPr indent="0" marL="0">
+                      <a:pPr marL="0" indent="0">
                         <a:buNone/>
                       </a:pPr>
                       <a:r>
@@ -3931,7 +3611,7 @@
                       </a:endParaRPr>
                     </a:p>
                   </a:txBody>
-                  <a:tcPr marL="91440" marR="91440" marT="45720" marB="45720" anchor="ctr">
+                  <a:tcPr anchor="ctr">
                     <a:lnL w="0" cap="flat" cmpd="sng" algn="ctr">
                       <a:noFill/>
                     </a:lnL>
@@ -3954,7 +3634,7 @@
                     <a:bodyPr/>
                     <a:lstStyle/>
                     <a:p>
-                      <a:pPr indent="0" marL="0">
+                      <a:pPr marL="0" indent="0">
                         <a:buNone/>
                       </a:pPr>
                       <a:r>
@@ -3975,7 +3655,7 @@
                       </a:endParaRPr>
                     </a:p>
                   </a:txBody>
-                  <a:tcPr marL="91440" marR="91440" marT="45720" marB="45720" anchor="ctr">
+                  <a:tcPr anchor="ctr">
                     <a:lnL w="0" cap="flat" cmpd="sng" algn="ctr">
                       <a:noFill/>
                     </a:lnL>
@@ -3998,7 +3678,7 @@
                     <a:bodyPr/>
                     <a:lstStyle/>
                     <a:p>
-                      <a:pPr indent="0" marL="0">
+                      <a:pPr marL="0" indent="0">
                         <a:buNone/>
                       </a:pPr>
                       <a:r>
@@ -4019,7 +3699,7 @@
                       </a:endParaRPr>
                     </a:p>
                   </a:txBody>
-                  <a:tcPr marL="91440" marR="91440" marT="45720" marB="45720" anchor="ctr">
+                  <a:tcPr anchor="ctr">
                     <a:lnL w="0" cap="flat" cmpd="sng" algn="ctr">
                       <a:noFill/>
                     </a:lnL>
@@ -4042,7 +3722,7 @@
                     <a:bodyPr/>
                     <a:lstStyle/>
                     <a:p>
-                      <a:pPr indent="0" marL="0">
+                      <a:pPr marL="0" indent="0">
                         <a:buNone/>
                       </a:pPr>
                       <a:r>
@@ -4063,7 +3743,7 @@
                       </a:endParaRPr>
                     </a:p>
                   </a:txBody>
-                  <a:tcPr marL="91440" marR="91440" marT="45720" marB="45720" anchor="ctr">
+                  <a:tcPr anchor="ctr">
                     <a:lnL w="0" cap="flat" cmpd="sng" algn="ctr">
                       <a:noFill/>
                     </a:lnL>
@@ -4081,6 +3761,11 @@
                     </a:solidFill>
                   </a:tcPr>
                 </a:tc>
+                <a:extLst>
+                  <a:ext uri="{0D108BD9-81ED-4DB2-BD59-A6C34878D82A}">
+                    <a16:rowId xmlns:a16="http://schemas.microsoft.com/office/drawing/2014/main" val="10000"/>
+                  </a:ext>
+                </a:extLst>
               </a:tr>
               <a:tr h="365760">
                 <a:tc>
@@ -4088,7 +3773,7 @@
                     <a:bodyPr/>
                     <a:lstStyle/>
                     <a:p>
-                      <a:pPr algn="l" indent="0" marL="0">
+                      <a:pPr marL="0" indent="0" algn="l">
                         <a:buNone/>
                       </a:pPr>
                       <a:r>
@@ -4109,7 +3794,7 @@
                       </a:endParaRPr>
                     </a:p>
                   </a:txBody>
-                  <a:tcPr marL="91440" marR="91440" marT="45720" marB="45720" anchor="ctr">
+                  <a:tcPr anchor="ctr">
                     <a:lnL w="0" cap="flat" cmpd="sng" algn="ctr">
                       <a:noFill/>
                     </a:lnL>
@@ -4132,12 +3817,28 @@
                     <a:bodyPr/>
                     <a:lstStyle/>
                     <a:p>
+                      <a:pPr marL="0" indent="0" algn="ctr">
+                        <a:buNone/>
+                      </a:pPr>
                       <a:r>
+                        <a:rPr lang="en-US" sz="1150">
+                          <a:solidFill>
+                            <a:srgbClr val="1E2761"/>
+                          </a:solidFill>
+                          <a:latin typeface="Calibri" pitchFamily="34" charset="0"/>
+                          <a:ea typeface="Calibri" pitchFamily="34" charset="-122"/>
+                          <a:cs typeface="Calibri" pitchFamily="34" charset="-120"/>
+                        </a:rPr>
                         <a:t>237.000 kWh</a:t>
                       </a:r>
+                      <a:endParaRPr lang="en-US" sz="1150" dirty="0">
+                        <a:latin typeface="Calibri" charset="0"/>
+                        <a:ea typeface="Calibri" charset="0"/>
+                        <a:cs typeface="Calibri" charset="0"/>
+                      </a:endParaRPr>
                     </a:p>
                   </a:txBody>
-                  <a:tcPr marL="91440" marR="91440" marT="45720" marB="45720" anchor="ctr">
+                  <a:tcPr anchor="ctr">
                     <a:lnL w="0" cap="flat" cmpd="sng" algn="ctr">
                       <a:noFill/>
                     </a:lnL>
@@ -4160,12 +3861,28 @@
                     <a:bodyPr/>
                     <a:lstStyle/>
                     <a:p>
+                      <a:pPr marL="0" indent="0" algn="ctr">
+                        <a:buNone/>
+                      </a:pPr>
                       <a:r>
+                        <a:rPr lang="en-US" sz="1150">
+                          <a:solidFill>
+                            <a:srgbClr val="1E2761"/>
+                          </a:solidFill>
+                          <a:latin typeface="Calibri" pitchFamily="34" charset="0"/>
+                          <a:ea typeface="Calibri" pitchFamily="34" charset="-122"/>
+                          <a:cs typeface="Calibri" pitchFamily="34" charset="-120"/>
+                        </a:rPr>
                         <a:t>212.813 kWh</a:t>
                       </a:r>
+                      <a:endParaRPr lang="en-US" sz="1150" dirty="0">
+                        <a:latin typeface="Calibri" charset="0"/>
+                        <a:ea typeface="Calibri" charset="0"/>
+                        <a:cs typeface="Calibri" charset="0"/>
+                      </a:endParaRPr>
                     </a:p>
                   </a:txBody>
-                  <a:tcPr marL="91440" marR="91440" marT="45720" marB="45720" anchor="ctr">
+                  <a:tcPr anchor="ctr">
                     <a:lnL w="0" cap="flat" cmpd="sng" algn="ctr">
                       <a:noFill/>
                     </a:lnL>
@@ -4188,12 +3905,28 @@
                     <a:bodyPr/>
                     <a:lstStyle/>
                     <a:p>
+                      <a:pPr marL="0" indent="0" algn="ctr">
+                        <a:buNone/>
+                      </a:pPr>
                       <a:r>
+                        <a:rPr lang="en-US" sz="1150">
+                          <a:solidFill>
+                            <a:srgbClr val="1E2761"/>
+                          </a:solidFill>
+                          <a:latin typeface="Calibri" pitchFamily="34" charset="0"/>
+                          <a:ea typeface="Calibri" pitchFamily="34" charset="-122"/>
+                          <a:cs typeface="Calibri" pitchFamily="34" charset="-120"/>
+                        </a:rPr>
                         <a:t>24.187 kWh</a:t>
                       </a:r>
+                      <a:endParaRPr lang="en-US" sz="1150" dirty="0">
+                        <a:latin typeface="Calibri" charset="0"/>
+                        <a:ea typeface="Calibri" charset="0"/>
+                        <a:cs typeface="Calibri" charset="0"/>
+                      </a:endParaRPr>
                     </a:p>
                   </a:txBody>
-                  <a:tcPr marL="91440" marR="91440" marT="45720" marB="45720" anchor="ctr">
+                  <a:tcPr anchor="ctr">
                     <a:lnL w="0" cap="flat" cmpd="sng" algn="ctr">
                       <a:noFill/>
                     </a:lnL>
@@ -4216,12 +3949,28 @@
                     <a:bodyPr/>
                     <a:lstStyle/>
                     <a:p>
+                      <a:pPr marL="0" indent="0" algn="ctr">
+                        <a:buNone/>
+                      </a:pPr>
                       <a:r>
+                        <a:rPr lang="en-US" sz="1150" b="1">
+                          <a:solidFill>
+                            <a:srgbClr val="028090"/>
+                          </a:solidFill>
+                          <a:latin typeface="Calibri" pitchFamily="34" charset="0"/>
+                          <a:ea typeface="Calibri" pitchFamily="34" charset="-122"/>
+                          <a:cs typeface="Calibri" pitchFamily="34" charset="-120"/>
+                        </a:rPr>
                         <a:t>-10,2%</a:t>
                       </a:r>
+                      <a:endParaRPr lang="en-US" sz="1150" dirty="0">
+                        <a:latin typeface="Calibri" charset="0"/>
+                        <a:ea typeface="Calibri" charset="0"/>
+                        <a:cs typeface="Calibri" charset="0"/>
+                      </a:endParaRPr>
                     </a:p>
                   </a:txBody>
-                  <a:tcPr marL="91440" marR="91440" marT="45720" marB="45720" anchor="ctr">
+                  <a:tcPr anchor="ctr">
                     <a:lnL w="0" cap="flat" cmpd="sng" algn="ctr">
                       <a:noFill/>
                     </a:lnL>
@@ -4239,6 +3988,11 @@
                     </a:solidFill>
                   </a:tcPr>
                 </a:tc>
+                <a:extLst>
+                  <a:ext uri="{0D108BD9-81ED-4DB2-BD59-A6C34878D82A}">
+                    <a16:rowId xmlns:a16="http://schemas.microsoft.com/office/drawing/2014/main" val="10001"/>
+                  </a:ext>
+                </a:extLst>
               </a:tr>
               <a:tr h="365760">
                 <a:tc>
@@ -4246,7 +4000,7 @@
                     <a:bodyPr/>
                     <a:lstStyle/>
                     <a:p>
-                      <a:pPr algn="l" indent="0" marL="0">
+                      <a:pPr marL="0" indent="0" algn="l">
                         <a:buNone/>
                       </a:pPr>
                       <a:r>
@@ -4267,7 +4021,7 @@
                       </a:endParaRPr>
                     </a:p>
                   </a:txBody>
-                  <a:tcPr marL="91440" marR="91440" marT="45720" marB="45720" anchor="ctr">
+                  <a:tcPr anchor="ctr">
                     <a:lnL w="0" cap="flat" cmpd="sng" algn="ctr">
                       <a:noFill/>
                     </a:lnL>
@@ -4290,12 +4044,28 @@
                     <a:bodyPr/>
                     <a:lstStyle/>
                     <a:p>
+                      <a:pPr marL="0" indent="0" algn="ctr">
+                        <a:buNone/>
+                      </a:pPr>
                       <a:r>
+                        <a:rPr lang="en-US" sz="1150">
+                          <a:solidFill>
+                            <a:srgbClr val="1E2761"/>
+                          </a:solidFill>
+                          <a:latin typeface="Calibri" pitchFamily="34" charset="0"/>
+                          <a:ea typeface="Calibri" pitchFamily="34" charset="-122"/>
+                          <a:cs typeface="Calibri" pitchFamily="34" charset="-120"/>
+                        </a:rPr>
                         <a:t>2.843.999 kWh</a:t>
                       </a:r>
+                      <a:endParaRPr lang="en-US" sz="1150" dirty="0">
+                        <a:latin typeface="Calibri" charset="0"/>
+                        <a:ea typeface="Calibri" charset="0"/>
+                        <a:cs typeface="Calibri" charset="0"/>
+                      </a:endParaRPr>
                     </a:p>
                   </a:txBody>
-                  <a:tcPr marL="91440" marR="91440" marT="45720" marB="45720" anchor="ctr">
+                  <a:tcPr anchor="ctr">
                     <a:lnL w="0" cap="flat" cmpd="sng" algn="ctr">
                       <a:noFill/>
                     </a:lnL>
@@ -4318,12 +4088,28 @@
                     <a:bodyPr/>
                     <a:lstStyle/>
                     <a:p>
+                      <a:pPr marL="0" indent="0" algn="ctr">
+                        <a:buNone/>
+                      </a:pPr>
                       <a:r>
+                        <a:rPr lang="en-US" sz="1150">
+                          <a:solidFill>
+                            <a:srgbClr val="1E2761"/>
+                          </a:solidFill>
+                          <a:latin typeface="Calibri" pitchFamily="34" charset="0"/>
+                          <a:ea typeface="Calibri" pitchFamily="34" charset="-122"/>
+                          <a:cs typeface="Calibri" pitchFamily="34" charset="-120"/>
+                        </a:rPr>
                         <a:t>2.553.751 kWh</a:t>
                       </a:r>
+                      <a:endParaRPr lang="en-US" sz="1150" dirty="0">
+                        <a:latin typeface="Calibri" charset="0"/>
+                        <a:ea typeface="Calibri" charset="0"/>
+                        <a:cs typeface="Calibri" charset="0"/>
+                      </a:endParaRPr>
                     </a:p>
                   </a:txBody>
-                  <a:tcPr marL="91440" marR="91440" marT="45720" marB="45720" anchor="ctr">
+                  <a:tcPr anchor="ctr">
                     <a:lnL w="0" cap="flat" cmpd="sng" algn="ctr">
                       <a:noFill/>
                     </a:lnL>
@@ -4346,12 +4132,28 @@
                     <a:bodyPr/>
                     <a:lstStyle/>
                     <a:p>
+                      <a:pPr marL="0" indent="0" algn="ctr">
+                        <a:buNone/>
+                      </a:pPr>
                       <a:r>
+                        <a:rPr lang="en-US" sz="1150">
+                          <a:solidFill>
+                            <a:srgbClr val="1E2761"/>
+                          </a:solidFill>
+                          <a:latin typeface="Calibri" pitchFamily="34" charset="0"/>
+                          <a:ea typeface="Calibri" pitchFamily="34" charset="-122"/>
+                          <a:cs typeface="Calibri" pitchFamily="34" charset="-120"/>
+                        </a:rPr>
                         <a:t>290.249 kWh</a:t>
                       </a:r>
+                      <a:endParaRPr lang="en-US" sz="1150" dirty="0">
+                        <a:latin typeface="Calibri" charset="0"/>
+                        <a:ea typeface="Calibri" charset="0"/>
+                        <a:cs typeface="Calibri" charset="0"/>
+                      </a:endParaRPr>
                     </a:p>
                   </a:txBody>
-                  <a:tcPr marL="91440" marR="91440" marT="45720" marB="45720" anchor="ctr">
+                  <a:tcPr anchor="ctr">
                     <a:lnL w="0" cap="flat" cmpd="sng" algn="ctr">
                       <a:noFill/>
                     </a:lnL>
@@ -4374,12 +4176,28 @@
                     <a:bodyPr/>
                     <a:lstStyle/>
                     <a:p>
+                      <a:pPr marL="0" indent="0" algn="ctr">
+                        <a:buNone/>
+                      </a:pPr>
                       <a:r>
+                        <a:rPr lang="en-US" sz="1150" b="1">
+                          <a:solidFill>
+                            <a:srgbClr val="028090"/>
+                          </a:solidFill>
+                          <a:latin typeface="Calibri" pitchFamily="34" charset="0"/>
+                          <a:ea typeface="Calibri" pitchFamily="34" charset="-122"/>
+                          <a:cs typeface="Calibri" pitchFamily="34" charset="-120"/>
+                        </a:rPr>
                         <a:t>-10,2%</a:t>
                       </a:r>
+                      <a:endParaRPr lang="en-US" sz="1150" dirty="0">
+                        <a:latin typeface="Calibri" charset="0"/>
+                        <a:ea typeface="Calibri" charset="0"/>
+                        <a:cs typeface="Calibri" charset="0"/>
+                      </a:endParaRPr>
                     </a:p>
                   </a:txBody>
-                  <a:tcPr marL="91440" marR="91440" marT="45720" marB="45720" anchor="ctr">
+                  <a:tcPr anchor="ctr">
                     <a:lnL w="0" cap="flat" cmpd="sng" algn="ctr">
                       <a:noFill/>
                     </a:lnL>
@@ -4397,6 +4215,11 @@
                     </a:solidFill>
                   </a:tcPr>
                 </a:tc>
+                <a:extLst>
+                  <a:ext uri="{0D108BD9-81ED-4DB2-BD59-A6C34878D82A}">
+                    <a16:rowId xmlns:a16="http://schemas.microsoft.com/office/drawing/2014/main" val="10002"/>
+                  </a:ext>
+                </a:extLst>
               </a:tr>
               <a:tr h="365760">
                 <a:tc>
@@ -4404,7 +4227,7 @@
                     <a:bodyPr/>
                     <a:lstStyle/>
                     <a:p>
-                      <a:pPr algn="l" indent="0" marL="0">
+                      <a:pPr marL="0" indent="0" algn="l">
                         <a:buNone/>
                       </a:pPr>
                       <a:r>
@@ -4425,7 +4248,7 @@
                       </a:endParaRPr>
                     </a:p>
                   </a:txBody>
-                  <a:tcPr marL="91440" marR="91440" marT="45720" marB="45720" anchor="ctr">
+                  <a:tcPr anchor="ctr">
                     <a:lnL w="0" cap="flat" cmpd="sng" algn="ctr">
                       <a:noFill/>
                     </a:lnL>
@@ -4448,12 +4271,28 @@
                     <a:bodyPr/>
                     <a:lstStyle/>
                     <a:p>
+                      <a:pPr marL="0" indent="0" algn="ctr">
+                        <a:buNone/>
+                      </a:pPr>
                       <a:r>
+                        <a:rPr lang="en-US" sz="1150">
+                          <a:solidFill>
+                            <a:srgbClr val="1E2761"/>
+                          </a:solidFill>
+                          <a:latin typeface="Calibri" pitchFamily="34" charset="0"/>
+                          <a:ea typeface="Calibri" pitchFamily="34" charset="-122"/>
+                          <a:cs typeface="Calibri" pitchFamily="34" charset="-120"/>
+                        </a:rPr>
                         <a:t>R$ 177.749,96</a:t>
                       </a:r>
+                      <a:endParaRPr lang="en-US" sz="1150" dirty="0">
+                        <a:latin typeface="Calibri" charset="0"/>
+                        <a:ea typeface="Calibri" charset="0"/>
+                        <a:cs typeface="Calibri" charset="0"/>
+                      </a:endParaRPr>
                     </a:p>
                   </a:txBody>
-                  <a:tcPr marL="91440" marR="91440" marT="45720" marB="45720" anchor="ctr">
+                  <a:tcPr anchor="ctr">
                     <a:lnL w="0" cap="flat" cmpd="sng" algn="ctr">
                       <a:noFill/>
                     </a:lnL>
@@ -4476,12 +4315,28 @@
                     <a:bodyPr/>
                     <a:lstStyle/>
                     <a:p>
+                      <a:pPr marL="0" indent="0" algn="ctr">
+                        <a:buNone/>
+                      </a:pPr>
                       <a:r>
+                        <a:rPr lang="en-US" sz="1150">
+                          <a:solidFill>
+                            <a:srgbClr val="1E2761"/>
+                          </a:solidFill>
+                          <a:latin typeface="Calibri" pitchFamily="34" charset="0"/>
+                          <a:ea typeface="Calibri" pitchFamily="34" charset="-122"/>
+                          <a:cs typeface="Calibri" pitchFamily="34" charset="-120"/>
+                        </a:rPr>
                         <a:t>R$ 159.609,43</a:t>
                       </a:r>
+                      <a:endParaRPr lang="en-US" sz="1150" dirty="0">
+                        <a:latin typeface="Calibri" charset="0"/>
+                        <a:ea typeface="Calibri" charset="0"/>
+                        <a:cs typeface="Calibri" charset="0"/>
+                      </a:endParaRPr>
                     </a:p>
                   </a:txBody>
-                  <a:tcPr marL="91440" marR="91440" marT="45720" marB="45720" anchor="ctr">
+                  <a:tcPr anchor="ctr">
                     <a:lnL w="0" cap="flat" cmpd="sng" algn="ctr">
                       <a:noFill/>
                     </a:lnL>
@@ -4504,12 +4359,28 @@
                     <a:bodyPr/>
                     <a:lstStyle/>
                     <a:p>
+                      <a:pPr marL="0" indent="0" algn="ctr">
+                        <a:buNone/>
+                      </a:pPr>
                       <a:r>
+                        <a:rPr lang="en-US" sz="1150">
+                          <a:solidFill>
+                            <a:srgbClr val="1E2761"/>
+                          </a:solidFill>
+                          <a:latin typeface="Calibri" pitchFamily="34" charset="0"/>
+                          <a:ea typeface="Calibri" pitchFamily="34" charset="-122"/>
+                          <a:cs typeface="Calibri" pitchFamily="34" charset="-120"/>
+                        </a:rPr>
                         <a:t>R$ 18.140,54</a:t>
                       </a:r>
+                      <a:endParaRPr lang="en-US" sz="1150" dirty="0">
+                        <a:latin typeface="Calibri" charset="0"/>
+                        <a:ea typeface="Calibri" charset="0"/>
+                        <a:cs typeface="Calibri" charset="0"/>
+                      </a:endParaRPr>
                     </a:p>
                   </a:txBody>
-                  <a:tcPr marL="91440" marR="91440" marT="45720" marB="45720" anchor="ctr">
+                  <a:tcPr anchor="ctr">
                     <a:lnL w="0" cap="flat" cmpd="sng" algn="ctr">
                       <a:noFill/>
                     </a:lnL>
@@ -4532,12 +4403,28 @@
                     <a:bodyPr/>
                     <a:lstStyle/>
                     <a:p>
+                      <a:pPr marL="0" indent="0" algn="ctr">
+                        <a:buNone/>
+                      </a:pPr>
                       <a:r>
+                        <a:rPr lang="en-US" sz="1150" b="1">
+                          <a:solidFill>
+                            <a:srgbClr val="028090"/>
+                          </a:solidFill>
+                          <a:latin typeface="Calibri" pitchFamily="34" charset="0"/>
+                          <a:ea typeface="Calibri" pitchFamily="34" charset="-122"/>
+                          <a:cs typeface="Calibri" pitchFamily="34" charset="-120"/>
+                        </a:rPr>
                         <a:t>-10,2%</a:t>
                       </a:r>
+                      <a:endParaRPr lang="en-US" sz="1150" dirty="0">
+                        <a:latin typeface="Calibri" charset="0"/>
+                        <a:ea typeface="Calibri" charset="0"/>
+                        <a:cs typeface="Calibri" charset="0"/>
+                      </a:endParaRPr>
                     </a:p>
                   </a:txBody>
-                  <a:tcPr marL="91440" marR="91440" marT="45720" marB="45720" anchor="ctr">
+                  <a:tcPr anchor="ctr">
                     <a:lnL w="0" cap="flat" cmpd="sng" algn="ctr">
                       <a:noFill/>
                     </a:lnL>
@@ -4555,6 +4442,11 @@
                     </a:solidFill>
                   </a:tcPr>
                 </a:tc>
+                <a:extLst>
+                  <a:ext uri="{0D108BD9-81ED-4DB2-BD59-A6C34878D82A}">
+                    <a16:rowId xmlns:a16="http://schemas.microsoft.com/office/drawing/2014/main" val="10003"/>
+                  </a:ext>
+                </a:extLst>
               </a:tr>
               <a:tr h="365760">
                 <a:tc>
@@ -4562,7 +4454,7 @@
                     <a:bodyPr/>
                     <a:lstStyle/>
                     <a:p>
-                      <a:pPr algn="l" indent="0" marL="0">
+                      <a:pPr marL="0" indent="0" algn="l">
                         <a:buNone/>
                       </a:pPr>
                       <a:r>
@@ -4583,7 +4475,7 @@
                       </a:endParaRPr>
                     </a:p>
                   </a:txBody>
-                  <a:tcPr marL="91440" marR="91440" marT="45720" marB="45720" anchor="ctr">
+                  <a:tcPr anchor="ctr">
                     <a:lnL w="0" cap="flat" cmpd="sng" algn="ctr">
                       <a:noFill/>
                     </a:lnL>
@@ -4606,12 +4498,28 @@
                     <a:bodyPr/>
                     <a:lstStyle/>
                     <a:p>
+                      <a:pPr marL="0" indent="0" algn="ctr">
+                        <a:buNone/>
+                      </a:pPr>
                       <a:r>
+                        <a:rPr lang="en-US" sz="1150">
+                          <a:solidFill>
+                            <a:srgbClr val="1E2761"/>
+                          </a:solidFill>
+                          <a:latin typeface="Calibri" pitchFamily="34" charset="0"/>
+                          <a:ea typeface="Calibri" pitchFamily="34" charset="-122"/>
+                          <a:cs typeface="Calibri" pitchFamily="34" charset="-120"/>
+                        </a:rPr>
                         <a:t>R$ 2.132.999,57</a:t>
                       </a:r>
+                      <a:endParaRPr lang="en-US" sz="1150" dirty="0">
+                        <a:latin typeface="Calibri" charset="0"/>
+                        <a:ea typeface="Calibri" charset="0"/>
+                        <a:cs typeface="Calibri" charset="0"/>
+                      </a:endParaRPr>
                     </a:p>
                   </a:txBody>
-                  <a:tcPr marL="91440" marR="91440" marT="45720" marB="45720" anchor="ctr">
+                  <a:tcPr anchor="ctr">
                     <a:lnL w="0" cap="flat" cmpd="sng" algn="ctr">
                       <a:noFill/>
                     </a:lnL>
@@ -4634,12 +4542,28 @@
                     <a:bodyPr/>
                     <a:lstStyle/>
                     <a:p>
+                      <a:pPr marL="0" indent="0" algn="ctr">
+                        <a:buNone/>
+                      </a:pPr>
                       <a:r>
+                        <a:rPr lang="en-US" sz="1150">
+                          <a:solidFill>
+                            <a:srgbClr val="1E2761"/>
+                          </a:solidFill>
+                          <a:latin typeface="Calibri" pitchFamily="34" charset="0"/>
+                          <a:ea typeface="Calibri" pitchFamily="34" charset="-122"/>
+                          <a:cs typeface="Calibri" pitchFamily="34" charset="-120"/>
+                        </a:rPr>
                         <a:t>R$ 1.915.313,15</a:t>
                       </a:r>
+                      <a:endParaRPr lang="en-US" sz="1150" dirty="0">
+                        <a:latin typeface="Calibri" charset="0"/>
+                        <a:ea typeface="Calibri" charset="0"/>
+                        <a:cs typeface="Calibri" charset="0"/>
+                      </a:endParaRPr>
                     </a:p>
                   </a:txBody>
-                  <a:tcPr marL="91440" marR="91440" marT="45720" marB="45720" anchor="ctr">
+                  <a:tcPr anchor="ctr">
                     <a:lnL w="0" cap="flat" cmpd="sng" algn="ctr">
                       <a:noFill/>
                     </a:lnL>
@@ -4662,12 +4586,28 @@
                     <a:bodyPr/>
                     <a:lstStyle/>
                     <a:p>
+                      <a:pPr marL="0" indent="0" algn="ctr">
+                        <a:buNone/>
+                      </a:pPr>
                       <a:r>
+                        <a:rPr lang="en-US" sz="1150">
+                          <a:solidFill>
+                            <a:srgbClr val="1E2761"/>
+                          </a:solidFill>
+                          <a:latin typeface="Calibri" pitchFamily="34" charset="0"/>
+                          <a:ea typeface="Calibri" pitchFamily="34" charset="-122"/>
+                          <a:cs typeface="Calibri" pitchFamily="34" charset="-120"/>
+                        </a:rPr>
                         <a:t>R$ 217.686,42</a:t>
                       </a:r>
+                      <a:endParaRPr lang="en-US" sz="1150" dirty="0">
+                        <a:latin typeface="Calibri" charset="0"/>
+                        <a:ea typeface="Calibri" charset="0"/>
+                        <a:cs typeface="Calibri" charset="0"/>
+                      </a:endParaRPr>
                     </a:p>
                   </a:txBody>
-                  <a:tcPr marL="91440" marR="91440" marT="45720" marB="45720" anchor="ctr">
+                  <a:tcPr anchor="ctr">
                     <a:lnL w="0" cap="flat" cmpd="sng" algn="ctr">
                       <a:noFill/>
                     </a:lnL>
@@ -4690,12 +4630,28 @@
                     <a:bodyPr/>
                     <a:lstStyle/>
                     <a:p>
+                      <a:pPr marL="0" indent="0" algn="ctr">
+                        <a:buNone/>
+                      </a:pPr>
                       <a:r>
+                        <a:rPr lang="en-US" sz="1150" b="1">
+                          <a:solidFill>
+                            <a:srgbClr val="028090"/>
+                          </a:solidFill>
+                          <a:latin typeface="Calibri" pitchFamily="34" charset="0"/>
+                          <a:ea typeface="Calibri" pitchFamily="34" charset="-122"/>
+                          <a:cs typeface="Calibri" pitchFamily="34" charset="-120"/>
+                        </a:rPr>
                         <a:t>-10,2%</a:t>
                       </a:r>
+                      <a:endParaRPr lang="en-US" sz="1150" dirty="0">
+                        <a:latin typeface="Calibri" charset="0"/>
+                        <a:ea typeface="Calibri" charset="0"/>
+                        <a:cs typeface="Calibri" charset="0"/>
+                      </a:endParaRPr>
                     </a:p>
                   </a:txBody>
-                  <a:tcPr marL="91440" marR="91440" marT="45720" marB="45720" anchor="ctr">
+                  <a:tcPr anchor="ctr">
                     <a:lnL w="0" cap="flat" cmpd="sng" algn="ctr">
                       <a:noFill/>
                     </a:lnL>
@@ -4713,6 +4669,11 @@
                     </a:solidFill>
                   </a:tcPr>
                 </a:tc>
+                <a:extLst>
+                  <a:ext uri="{0D108BD9-81ED-4DB2-BD59-A6C34878D82A}">
+                    <a16:rowId xmlns:a16="http://schemas.microsoft.com/office/drawing/2014/main" val="10004"/>
+                  </a:ext>
+                </a:extLst>
               </a:tr>
             </a:tbl>
           </a:graphicData>
@@ -4739,7 +4700,7 @@
           <a:bodyPr wrap="square" lIns="0" tIns="0" rIns="0" bIns="0" rtlCol="0" anchor="ctr"/>
           <a:lstStyle/>
           <a:p>
-            <a:pPr indent="0" marL="0">
+            <a:pPr marL="0" indent="0">
               <a:buNone/>
             </a:pPr>
             <a:r>
@@ -4759,7 +4720,7 @@
       </p:sp>
       <p:graphicFrame>
         <p:nvGraphicFramePr>
-          <p:cNvPr id="5" name="Chart 0" descr=""/>
+          <p:cNvPr id="5" name="Chart 0"/>
           <p:cNvGraphicFramePr/>
           <p:nvPr/>
         </p:nvGraphicFramePr>
@@ -4767,9 +4728,9 @@
           <a:off x="548640" y="3429000"/>
           <a:ext cx="5394960" cy="2651760"/>
         </p:xfrm>
-        <a:graphic xmlns:a="http://schemas.openxmlformats.org/drawingml/2006/main">
+        <a:graphic>
           <a:graphicData uri="http://schemas.openxmlformats.org/drawingml/2006/chart">
-            <c:chart xmlns:c="http://schemas.openxmlformats.org/drawingml/2006/chart" r:id="rId1"/>
+            <c:chart xmlns:c="http://schemas.openxmlformats.org/drawingml/2006/chart" xmlns:r="http://schemas.openxmlformats.org/officeDocument/2006/relationships" r:id="rId3"/>
           </a:graphicData>
         </a:graphic>
       </p:graphicFrame>
@@ -4794,7 +4755,7 @@
           <a:bodyPr wrap="square" lIns="0" tIns="0" rIns="0" bIns="0" rtlCol="0" anchor="ctr"/>
           <a:lstStyle/>
           <a:p>
-            <a:pPr indent="0" marL="0">
+            <a:pPr marL="0" indent="0">
               <a:buNone/>
             </a:pPr>
             <a:r>
@@ -4814,7 +4775,7 @@
       </p:sp>
       <p:graphicFrame>
         <p:nvGraphicFramePr>
-          <p:cNvPr id="7" name="Chart 1" descr=""/>
+          <p:cNvPr id="7" name="Chart 1"/>
           <p:cNvGraphicFramePr/>
           <p:nvPr/>
         </p:nvGraphicFramePr>
@@ -4822,9 +4783,9 @@
           <a:off x="6263640" y="3429000"/>
           <a:ext cx="5394960" cy="2651760"/>
         </p:xfrm>
-        <a:graphic xmlns:a="http://schemas.openxmlformats.org/drawingml/2006/main">
+        <a:graphic>
           <a:graphicData uri="http://schemas.openxmlformats.org/drawingml/2006/chart">
-            <c:chart xmlns:c="http://schemas.openxmlformats.org/drawingml/2006/chart" r:id="rId2"/>
+            <c:chart xmlns:c="http://schemas.openxmlformats.org/drawingml/2006/chart" xmlns:r="http://schemas.openxmlformats.org/officeDocument/2006/relationships" r:id="rId4"/>
           </a:graphicData>
         </a:graphic>
       </p:graphicFrame>
@@ -4849,7 +4810,7 @@
           <a:bodyPr wrap="square" lIns="0" tIns="0" rIns="0" bIns="0" rtlCol="0" anchor="ctr"/>
           <a:lstStyle/>
           <a:p>
-            <a:pPr algn="l" indent="0" marL="0">
+            <a:pPr marL="0" indent="0" algn="l">
               <a:buNone/>
             </a:pPr>
             <a:r>
@@ -4888,7 +4849,7 @@
           <a:bodyPr wrap="square" lIns="0" tIns="0" rIns="0" bIns="0" rtlCol="0" anchor="ctr"/>
           <a:lstStyle/>
           <a:p>
-            <a:pPr algn="r" indent="0" marL="0">
+            <a:pPr marL="0" indent="0" algn="r">
               <a:buNone/>
             </a:pPr>
             <a:r>
@@ -4922,6 +4883,7 @@
         <a:solidFill>
           <a:srgbClr val="FFFFFF"/>
         </a:solidFill>
+        <a:effectLst/>
       </p:bgPr>
     </p:bg>
     <p:spTree>
@@ -4959,7 +4921,7 @@
           <a:bodyPr wrap="square" lIns="0" tIns="0" rIns="0" bIns="0" rtlCol="0" anchor="ctr"/>
           <a:lstStyle/>
           <a:p>
-            <a:pPr indent="0" marL="0">
+            <a:pPr marL="0" indent="0">
               <a:buNone/>
             </a:pPr>
             <a:r>
@@ -4998,17 +4960,13 @@
           </a:solidFill>
           <a:ln/>
           <a:effectLst>
-            <a:outerShdw sx="100000" sy="100000" kx="0" ky="0" algn="bl" rotWithShape="0" blurRad="76200" dist="25400" dir="5400000">
+            <a:outerShdw blurRad="76200" dist="25400" dir="5400000" algn="bl" rotWithShape="0">
               <a:srgbClr val="888888">
                 <a:alpha val="25000"/>
               </a:srgbClr>
             </a:outerShdw>
           </a:effectLst>
         </p:spPr>
-        <p:txBody>
-          <a:bodyPr/>
-          <a:p/>
-        </p:txBody>
       </p:sp>
       <p:sp>
         <p:nvSpPr>
@@ -5031,7 +4989,7 @@
           <a:bodyPr wrap="square" lIns="0" tIns="0" rIns="0" bIns="0" rtlCol="0" anchor="ctr"/>
           <a:lstStyle/>
           <a:p>
-            <a:pPr algn="ctr" indent="0" marL="0">
+            <a:pPr marL="0" indent="0" algn="ctr">
               <a:buNone/>
             </a:pPr>
             <a:r>
@@ -5070,7 +5028,7 @@
           <a:bodyPr wrap="square" lIns="0" tIns="0" rIns="0" bIns="0" rtlCol="0" anchor="t"/>
           <a:lstStyle/>
           <a:p>
-            <a:pPr algn="ctr" indent="0" marL="0">
+            <a:pPr marL="0" indent="0" algn="ctr">
               <a:buNone/>
             </a:pPr>
             <a:r>
@@ -5109,17 +5067,13 @@
           </a:solidFill>
           <a:ln/>
           <a:effectLst>
-            <a:outerShdw sx="100000" sy="100000" kx="0" ky="0" algn="bl" rotWithShape="0" blurRad="76200" dist="25400" dir="5400000">
+            <a:outerShdw blurRad="76200" dist="25400" dir="5400000" algn="bl" rotWithShape="0">
               <a:srgbClr val="888888">
                 <a:alpha val="25000"/>
               </a:srgbClr>
             </a:outerShdw>
           </a:effectLst>
         </p:spPr>
-        <p:txBody>
-          <a:bodyPr/>
-          <a:p/>
-        </p:txBody>
       </p:sp>
       <p:sp>
         <p:nvSpPr>
@@ -5142,10 +5096,18 @@
           <a:bodyPr wrap="square" lIns="0" tIns="0" rIns="0" bIns="0" rtlCol="0" anchor="ctr"/>
           <a:lstStyle/>
           <a:p>
-            <a:pPr algn="ctr" indent="0" marL="0">
+            <a:pPr marL="0" indent="0" algn="ctr">
               <a:buNone/>
             </a:pPr>
             <a:r>
+              <a:rPr lang="en-US" sz="2200" b="1">
+                <a:solidFill>
+                  <a:srgbClr val="028090"/>
+                </a:solidFill>
+                <a:latin typeface="Cambria" pitchFamily="34" charset="0"/>
+                <a:ea typeface="Cambria" pitchFamily="34" charset="-122"/>
+                <a:cs typeface="Cambria" pitchFamily="34" charset="-120"/>
+              </a:rPr>
               <a:t>16,5 meses</a:t>
             </a:r>
             <a:endParaRPr lang="en-US" sz="2200" dirty="0"/>
@@ -5173,7 +5135,7 @@
           <a:bodyPr wrap="square" lIns="0" tIns="0" rIns="0" bIns="0" rtlCol="0" anchor="t"/>
           <a:lstStyle/>
           <a:p>
-            <a:pPr algn="ctr" indent="0" marL="0">
+            <a:pPr marL="0" indent="0" algn="ctr">
               <a:buNone/>
             </a:pPr>
             <a:r>
@@ -5212,17 +5174,13 @@
           </a:solidFill>
           <a:ln/>
           <a:effectLst>
-            <a:outerShdw sx="100000" sy="100000" kx="0" ky="0" algn="bl" rotWithShape="0" blurRad="76200" dist="25400" dir="5400000">
+            <a:outerShdw blurRad="76200" dist="25400" dir="5400000" algn="bl" rotWithShape="0">
               <a:srgbClr val="888888">
                 <a:alpha val="25000"/>
               </a:srgbClr>
             </a:outerShdw>
           </a:effectLst>
         </p:spPr>
-        <p:txBody>
-          <a:bodyPr/>
-          <a:p/>
-        </p:txBody>
       </p:sp>
       <p:sp>
         <p:nvSpPr>
@@ -5245,10 +5203,18 @@
           <a:bodyPr wrap="square" lIns="0" tIns="0" rIns="0" bIns="0" rtlCol="0" anchor="ctr"/>
           <a:lstStyle/>
           <a:p>
-            <a:pPr algn="ctr" indent="0" marL="0">
+            <a:pPr marL="0" indent="0" algn="ctr">
               <a:buNone/>
             </a:pPr>
             <a:r>
+              <a:rPr lang="en-US" sz="2200" b="1">
+                <a:solidFill>
+                  <a:srgbClr val="1E2761"/>
+                </a:solidFill>
+                <a:latin typeface="Cambria" pitchFamily="34" charset="0"/>
+                <a:ea typeface="Cambria" pitchFamily="34" charset="-122"/>
+                <a:cs typeface="Cambria" pitchFamily="34" charset="-120"/>
+              </a:rPr>
               <a:t>+262,8%</a:t>
             </a:r>
             <a:endParaRPr lang="en-US" sz="2200" dirty="0"/>
@@ -5276,7 +5242,7 @@
           <a:bodyPr wrap="square" lIns="0" tIns="0" rIns="0" bIns="0" rtlCol="0" anchor="t"/>
           <a:lstStyle/>
           <a:p>
-            <a:pPr algn="ctr" indent="0" marL="0">
+            <a:pPr marL="0" indent="0" algn="ctr">
               <a:buNone/>
             </a:pPr>
             <a:r>
@@ -5315,17 +5281,13 @@
           </a:solidFill>
           <a:ln/>
           <a:effectLst>
-            <a:outerShdw sx="100000" sy="100000" kx="0" ky="0" algn="bl" rotWithShape="0" blurRad="76200" dist="25400" dir="5400000">
+            <a:outerShdw blurRad="76200" dist="25400" dir="5400000" algn="bl" rotWithShape="0">
               <a:srgbClr val="888888">
                 <a:alpha val="25000"/>
               </a:srgbClr>
             </a:outerShdw>
           </a:effectLst>
         </p:spPr>
-        <p:txBody>
-          <a:bodyPr/>
-          <a:p/>
-        </p:txBody>
       </p:sp>
       <p:sp>
         <p:nvSpPr>
@@ -5348,10 +5310,18 @@
           <a:bodyPr wrap="square" lIns="0" tIns="0" rIns="0" bIns="0" rtlCol="0" anchor="ctr"/>
           <a:lstStyle/>
           <a:p>
-            <a:pPr algn="ctr" indent="0" marL="0">
+            <a:pPr marL="0" indent="0" algn="ctr">
               <a:buNone/>
             </a:pPr>
             <a:r>
+              <a:rPr lang="en-US" sz="2200" b="1">
+                <a:solidFill>
+                  <a:srgbClr val="028090"/>
+                </a:solidFill>
+                <a:latin typeface="Cambria" pitchFamily="34" charset="0"/>
+                <a:ea typeface="Cambria" pitchFamily="34" charset="-122"/>
+                <a:cs typeface="Cambria" pitchFamily="34" charset="-120"/>
+              </a:rPr>
               <a:t>R$ 484.710</a:t>
             </a:r>
             <a:endParaRPr lang="en-US" sz="2200" dirty="0"/>
@@ -5379,7 +5349,7 @@
           <a:bodyPr wrap="square" lIns="0" tIns="0" rIns="0" bIns="0" rtlCol="0" anchor="t"/>
           <a:lstStyle/>
           <a:p>
-            <a:pPr algn="ctr" indent="0" marL="0">
+            <a:pPr marL="0" indent="0" algn="ctr">
               <a:buNone/>
             </a:pPr>
             <a:r>
@@ -5418,7 +5388,7 @@
           <a:bodyPr wrap="square" lIns="0" tIns="0" rIns="0" bIns="0" rtlCol="0" anchor="ctr"/>
           <a:lstStyle/>
           <a:p>
-            <a:pPr indent="0" marL="0">
+            <a:pPr marL="0" indent="0">
               <a:buNone/>
             </a:pPr>
             <a:r>
@@ -5438,7 +5408,7 @@
       </p:sp>
       <p:graphicFrame>
         <p:nvGraphicFramePr>
-          <p:cNvPr id="16" name="Chart 0" descr=""/>
+          <p:cNvPr id="16" name="Chart 0"/>
           <p:cNvGraphicFramePr/>
           <p:nvPr/>
         </p:nvGraphicFramePr>
@@ -5446,9 +5416,9 @@
           <a:off x="548640" y="2880360"/>
           <a:ext cx="7452360" cy="2880360"/>
         </p:xfrm>
-        <a:graphic xmlns:a="http://schemas.openxmlformats.org/drawingml/2006/main">
+        <a:graphic>
           <a:graphicData uri="http://schemas.openxmlformats.org/drawingml/2006/chart">
-            <c:chart xmlns:c="http://schemas.openxmlformats.org/drawingml/2006/chart" r:id="rId1"/>
+            <c:chart xmlns:c="http://schemas.openxmlformats.org/drawingml/2006/chart" xmlns:r="http://schemas.openxmlformats.org/officeDocument/2006/relationships" r:id="rId3"/>
           </a:graphicData>
         </a:graphic>
       </p:graphicFrame>
@@ -5473,10 +5443,6 @@
           </a:solidFill>
           <a:ln/>
         </p:spPr>
-        <p:txBody>
-          <a:bodyPr/>
-          <a:p/>
-        </p:txBody>
       </p:sp>
       <p:sp>
         <p:nvSpPr>
@@ -5499,7 +5465,7 @@
           <a:bodyPr wrap="square" lIns="0" tIns="0" rIns="0" bIns="0" rtlCol="0" anchor="ctr"/>
           <a:lstStyle/>
           <a:p>
-            <a:pPr indent="0" marL="0">
+            <a:pPr marL="0" indent="0">
               <a:buNone/>
             </a:pPr>
             <a:r>
@@ -5538,7 +5504,7 @@
           <a:bodyPr wrap="square" lIns="0" tIns="0" rIns="0" bIns="0" rtlCol="0" anchor="ctr"/>
           <a:lstStyle/>
           <a:p>
-            <a:pPr indent="0" marL="0">
+            <a:pPr marL="0" indent="0">
               <a:buNone/>
             </a:pPr>
             <a:r>
@@ -5578,10 +5544,6 @@
             <a:prstDash val="solid"/>
           </a:ln>
         </p:spPr>
-        <p:txBody>
-          <a:bodyPr/>
-          <a:p/>
-        </p:txBody>
       </p:sp>
       <p:sp>
         <p:nvSpPr>
@@ -5604,7 +5566,7 @@
           <a:bodyPr wrap="square" lIns="0" tIns="0" rIns="0" bIns="0" rtlCol="0" anchor="ctr"/>
           <a:lstStyle/>
           <a:p>
-            <a:pPr indent="0" marL="0">
+            <a:pPr marL="0" indent="0">
               <a:buNone/>
             </a:pPr>
             <a:r>
@@ -5643,7 +5605,7 @@
           <a:bodyPr wrap="square" lIns="0" tIns="0" rIns="0" bIns="0" rtlCol="0" anchor="ctr"/>
           <a:lstStyle/>
           <a:p>
-            <a:pPr indent="0" marL="0">
+            <a:pPr marL="0" indent="0">
               <a:buNone/>
             </a:pPr>
             <a:r>
@@ -5683,10 +5645,6 @@
             <a:prstDash val="solid"/>
           </a:ln>
         </p:spPr>
-        <p:txBody>
-          <a:bodyPr/>
-          <a:p/>
-        </p:txBody>
       </p:sp>
       <p:sp>
         <p:nvSpPr>
@@ -5709,7 +5667,7 @@
           <a:bodyPr wrap="square" lIns="0" tIns="0" rIns="0" bIns="0" rtlCol="0" anchor="ctr"/>
           <a:lstStyle/>
           <a:p>
-            <a:pPr indent="0" marL="0">
+            <a:pPr marL="0" indent="0">
               <a:buNone/>
             </a:pPr>
             <a:r>
@@ -5748,7 +5706,7 @@
           <a:bodyPr wrap="square" lIns="0" tIns="0" rIns="0" bIns="0" rtlCol="0" anchor="ctr"/>
           <a:lstStyle/>
           <a:p>
-            <a:pPr indent="0" marL="0">
+            <a:pPr marL="0" indent="0">
               <a:buNone/>
             </a:pPr>
             <a:r>
@@ -5787,7 +5745,7 @@
           <a:bodyPr wrap="square" lIns="0" tIns="0" rIns="0" bIns="0" rtlCol="0" anchor="ctr"/>
           <a:lstStyle/>
           <a:p>
-            <a:pPr algn="l" indent="0" marL="0">
+            <a:pPr marL="0" indent="0" algn="l">
               <a:buNone/>
             </a:pPr>
             <a:r>
@@ -5826,7 +5784,7 @@
           <a:bodyPr wrap="square" lIns="0" tIns="0" rIns="0" bIns="0" rtlCol="0" anchor="ctr"/>
           <a:lstStyle/>
           <a:p>
-            <a:pPr algn="r" indent="0" marL="0">
+            <a:pPr marL="0" indent="0" algn="r">
               <a:buNone/>
             </a:pPr>
             <a:r>
@@ -5860,6 +5818,7 @@
         <a:solidFill>
           <a:srgbClr val="F4F6FA"/>
         </a:solidFill>
+        <a:effectLst/>
       </p:bgPr>
     </p:bg>
     <p:spTree>
@@ -5897,7 +5856,7 @@
           <a:bodyPr wrap="square" lIns="0" tIns="0" rIns="0" bIns="0" rtlCol="0" anchor="ctr"/>
           <a:lstStyle/>
           <a:p>
-            <a:pPr indent="0" marL="0">
+            <a:pPr marL="0" indent="0">
               <a:buNone/>
             </a:pPr>
             <a:r>
@@ -5936,10 +5895,6 @@
           </a:solidFill>
           <a:ln/>
         </p:spPr>
-        <p:txBody>
-          <a:bodyPr/>
-          <a:p/>
-        </p:txBody>
       </p:sp>
       <p:sp>
         <p:nvSpPr>
@@ -5962,10 +5917,18 @@
           <a:bodyPr wrap="square" lIns="0" tIns="0" rIns="0" bIns="0" rtlCol="0" anchor="ctr"/>
           <a:lstStyle/>
           <a:p>
-            <a:pPr indent="0" marL="0">
+            <a:pPr marL="0" indent="0">
               <a:buNone/>
             </a:pPr>
             <a:r>
+              <a:rPr lang="en-US" sz="3400" b="1">
+                <a:solidFill>
+                  <a:srgbClr val="00A896"/>
+                </a:solidFill>
+                <a:latin typeface="Cambria" pitchFamily="34" charset="0"/>
+                <a:ea typeface="Cambria" pitchFamily="34" charset="-122"/>
+                <a:cs typeface="Cambria" pitchFamily="34" charset="-120"/>
+              </a:rPr>
               <a:t>25,0 tCO2/ano</a:t>
             </a:r>
             <a:endParaRPr lang="en-US" sz="3400" dirty="0"/>
@@ -5993,7 +5956,7 @@
           <a:bodyPr wrap="square" lIns="0" tIns="0" rIns="0" bIns="0" rtlCol="0" anchor="ctr"/>
           <a:lstStyle/>
           <a:p>
-            <a:pPr indent="0" marL="0">
+            <a:pPr marL="0" indent="0">
               <a:buNone/>
             </a:pPr>
             <a:r>
@@ -6033,10 +5996,6 @@
             <a:prstDash val="solid"/>
           </a:ln>
         </p:spPr>
-        <p:txBody>
-          <a:bodyPr/>
-          <a:p/>
-        </p:txBody>
       </p:sp>
       <p:sp>
         <p:nvSpPr>
@@ -6059,36 +6018,56 @@
           <a:bodyPr wrap="square" lIns="0" tIns="0" rIns="0" bIns="0" rtlCol="0" anchor="ctr"/>
           <a:lstStyle/>
           <a:p>
-            <a:pPr indent="0" marL="0">
+            <a:pPr marL="0" indent="0">
               <a:lnSpc>
                 <a:spcPct val="150000"/>
               </a:lnSpc>
               <a:buNone/>
             </a:pPr>
-            <a:pPr indent="0" marL="0">
-              <a:lnSpc>
-                <a:spcPct val="150000"/>
-              </a:lnSpc>
-              <a:buNone/>
-            </a:pPr>
-            <a:pPr indent="0" marL="0">
-              <a:lnSpc>
-                <a:spcPct val="150000"/>
-              </a:lnSpc>
-              <a:buNone/>
-            </a:pPr>
-            <a:pPr indent="0" marL="0">
-              <a:lnSpc>
-                <a:spcPct val="150000"/>
-              </a:lnSpc>
-              <a:buNone/>
-            </a:pPr>
-            <a:r>
-              <a:t>290.249 kWh/ano de energia economizada</a:t>
-            </a:r>
-            <a:br/>
-            <a:r>
-              <a:t>0,086 kg CO2/kWh fator de emissão (SIN / MCTI)</a:t>
+            <a:r>
+              <a:rPr lang="en-US" sz="1250" b="1">
+                <a:solidFill>
+                  <a:srgbClr val="FFFFFF"/>
+                </a:solidFill>
+                <a:latin typeface="Calibri" pitchFamily="34" charset="0"/>
+                <a:ea typeface="Calibri" pitchFamily="34" charset="-122"/>
+                <a:cs typeface="Calibri" pitchFamily="34" charset="-120"/>
+              </a:rPr>
+              <a:t>290.249 kWh/ano </a:t>
+            </a:r>
+            <a:r>
+              <a:rPr lang="en-US" sz="1250" dirty="0">
+                <a:solidFill>
+                  <a:srgbClr val="CADCFC"/>
+                </a:solidFill>
+                <a:latin typeface="Calibri" pitchFamily="34" charset="0"/>
+                <a:ea typeface="Calibri" pitchFamily="34" charset="-122"/>
+                <a:cs typeface="Calibri" pitchFamily="34" charset="-120"/>
+              </a:rPr>
+              <a:t>de energia economizada
+</a:t>
+            </a:r>
+            <a:r>
+              <a:rPr lang="en-US" sz="1250" b="1" dirty="0">
+                <a:solidFill>
+                  <a:srgbClr val="FFFFFF"/>
+                </a:solidFill>
+                <a:latin typeface="Calibri" pitchFamily="34" charset="0"/>
+                <a:ea typeface="Calibri" pitchFamily="34" charset="-122"/>
+                <a:cs typeface="Calibri" pitchFamily="34" charset="-120"/>
+              </a:rPr>
+              <a:t>0,086 kg CO2/kWh </a:t>
+            </a:r>
+            <a:r>
+              <a:rPr lang="en-US" sz="1250" dirty="0">
+                <a:solidFill>
+                  <a:srgbClr val="CADCFC"/>
+                </a:solidFill>
+                <a:latin typeface="Calibri" pitchFamily="34" charset="0"/>
+                <a:ea typeface="Calibri" pitchFamily="34" charset="-122"/>
+                <a:cs typeface="Calibri" pitchFamily="34" charset="-120"/>
+              </a:rPr>
+              <a:t>fator de emissão (SIN / MCTI)</a:t>
             </a:r>
             <a:endParaRPr lang="en-US" sz="1250" dirty="0"/>
           </a:p>
@@ -6113,10 +6092,6 @@
           </a:solidFill>
           <a:ln/>
         </p:spPr>
-        <p:txBody>
-          <a:bodyPr/>
-          <a:p/>
-        </p:txBody>
       </p:sp>
       <p:sp>
         <p:nvSpPr>
@@ -6139,7 +6114,7 @@
           <a:bodyPr wrap="square" lIns="0" tIns="0" rIns="0" bIns="0" rtlCol="0" anchor="ctr"/>
           <a:lstStyle/>
           <a:p>
-            <a:pPr algn="ctr" indent="0" marL="0">
+            <a:pPr marL="0" indent="0" algn="ctr">
               <a:buNone/>
             </a:pPr>
             <a:r>
@@ -6178,7 +6153,7 @@
           <a:bodyPr wrap="square" lIns="0" tIns="0" rIns="0" bIns="0" rtlCol="0" anchor="ctr"/>
           <a:lstStyle/>
           <a:p>
-            <a:pPr indent="0" marL="0">
+            <a:pPr marL="0" indent="0">
               <a:buNone/>
             </a:pPr>
             <a:r>
@@ -6217,7 +6192,7 @@
           <a:bodyPr wrap="square" lIns="0" tIns="0" rIns="0" bIns="0" rtlCol="0" anchor="ctr"/>
           <a:lstStyle/>
           <a:p>
-            <a:pPr indent="0" marL="0">
+            <a:pPr marL="0" indent="0">
               <a:buNone/>
             </a:pPr>
             <a:r>
@@ -6254,10 +6229,6 @@
           </a:solidFill>
           <a:ln/>
         </p:spPr>
-        <p:txBody>
-          <a:bodyPr/>
-          <a:p/>
-        </p:txBody>
       </p:sp>
       <p:sp>
         <p:nvSpPr>
@@ -6280,7 +6251,7 @@
           <a:bodyPr wrap="square" lIns="0" tIns="0" rIns="0" bIns="0" rtlCol="0" anchor="ctr"/>
           <a:lstStyle/>
           <a:p>
-            <a:pPr algn="ctr" indent="0" marL="0">
+            <a:pPr marL="0" indent="0" algn="ctr">
               <a:buNone/>
             </a:pPr>
             <a:r>
@@ -6319,7 +6290,7 @@
           <a:bodyPr wrap="square" lIns="0" tIns="0" rIns="0" bIns="0" rtlCol="0" anchor="ctr"/>
           <a:lstStyle/>
           <a:p>
-            <a:pPr indent="0" marL="0">
+            <a:pPr marL="0" indent="0">
               <a:buNone/>
             </a:pPr>
             <a:r>
@@ -6358,7 +6329,7 @@
           <a:bodyPr wrap="square" lIns="0" tIns="0" rIns="0" bIns="0" rtlCol="0" anchor="ctr"/>
           <a:lstStyle/>
           <a:p>
-            <a:pPr indent="0" marL="0">
+            <a:pPr marL="0" indent="0">
               <a:buNone/>
             </a:pPr>
             <a:r>
@@ -6395,10 +6366,6 @@
           </a:solidFill>
           <a:ln/>
         </p:spPr>
-        <p:txBody>
-          <a:bodyPr/>
-          <a:p/>
-        </p:txBody>
       </p:sp>
       <p:sp>
         <p:nvSpPr>
@@ -6421,7 +6388,7 @@
           <a:bodyPr wrap="square" lIns="0" tIns="0" rIns="0" bIns="0" rtlCol="0" anchor="ctr"/>
           <a:lstStyle/>
           <a:p>
-            <a:pPr algn="ctr" indent="0" marL="0">
+            <a:pPr marL="0" indent="0" algn="ctr">
               <a:buNone/>
             </a:pPr>
             <a:r>
@@ -6460,7 +6427,7 @@
           <a:bodyPr wrap="square" lIns="0" tIns="0" rIns="0" bIns="0" rtlCol="0" anchor="ctr"/>
           <a:lstStyle/>
           <a:p>
-            <a:pPr indent="0" marL="0">
+            <a:pPr marL="0" indent="0">
               <a:buNone/>
             </a:pPr>
             <a:r>
@@ -6499,7 +6466,7 @@
           <a:bodyPr wrap="square" lIns="0" tIns="0" rIns="0" bIns="0" rtlCol="0" anchor="ctr"/>
           <a:lstStyle/>
           <a:p>
-            <a:pPr indent="0" marL="0">
+            <a:pPr marL="0" indent="0">
               <a:buNone/>
             </a:pPr>
             <a:r>
@@ -6538,7 +6505,7 @@
           <a:bodyPr wrap="square" lIns="0" tIns="0" rIns="0" bIns="0" rtlCol="0" anchor="ctr"/>
           <a:lstStyle/>
           <a:p>
-            <a:pPr algn="l" indent="0" marL="0">
+            <a:pPr marL="0" indent="0" algn="l">
               <a:buNone/>
             </a:pPr>
             <a:r>
@@ -6577,7 +6544,7 @@
           <a:bodyPr wrap="square" lIns="0" tIns="0" rIns="0" bIns="0" rtlCol="0" anchor="ctr"/>
           <a:lstStyle/>
           <a:p>
-            <a:pPr algn="r" indent="0" marL="0">
+            <a:pPr marL="0" indent="0" algn="r">
               <a:buNone/>
             </a:pPr>
             <a:r>
@@ -6611,6 +6578,7 @@
         <a:solidFill>
           <a:srgbClr val="FFFFFF"/>
         </a:solidFill>
+        <a:effectLst/>
       </p:bgPr>
     </p:bg>
     <p:spTree>
@@ -6648,7 +6616,7 @@
           <a:bodyPr wrap="square" lIns="0" tIns="0" rIns="0" bIns="0" rtlCol="0" anchor="ctr"/>
           <a:lstStyle/>
           <a:p>
-            <a:pPr indent="0" marL="0">
+            <a:pPr marL="0" indent="0">
               <a:buNone/>
             </a:pPr>
             <a:r>
@@ -6687,7 +6655,7 @@
           <a:bodyPr wrap="square" lIns="0" tIns="0" rIns="0" bIns="0" rtlCol="0" anchor="ctr"/>
           <a:lstStyle/>
           <a:p>
-            <a:pPr indent="0" marL="0">
+            <a:pPr marL="0" indent="0">
               <a:buNone/>
             </a:pPr>
             <a:r>
@@ -6727,10 +6695,6 @@
             <a:prstDash val="solid"/>
           </a:ln>
         </p:spPr>
-        <p:txBody>
-          <a:bodyPr/>
-          <a:p/>
-        </p:txBody>
       </p:sp>
       <p:sp>
         <p:nvSpPr>
@@ -6751,10 +6715,6 @@
           </a:solidFill>
           <a:ln/>
         </p:spPr>
-        <p:txBody>
-          <a:bodyPr/>
-          <a:p/>
-        </p:txBody>
       </p:sp>
       <p:sp>
         <p:nvSpPr>
@@ -6777,7 +6737,7 @@
           <a:bodyPr wrap="square" lIns="0" tIns="0" rIns="0" bIns="0" rtlCol="0" anchor="ctr"/>
           <a:lstStyle/>
           <a:p>
-            <a:pPr algn="ctr" indent="0" marL="0">
+            <a:pPr marL="0" indent="0" algn="ctr">
               <a:buNone/>
             </a:pPr>
             <a:r>
@@ -6816,7 +6776,7 @@
           <a:bodyPr wrap="square" lIns="0" tIns="0" rIns="0" bIns="0" rtlCol="0" anchor="ctr"/>
           <a:lstStyle/>
           <a:p>
-            <a:pPr algn="ctr" indent="0" marL="0">
+            <a:pPr marL="0" indent="0" algn="ctr">
               <a:buNone/>
             </a:pPr>
             <a:r>
@@ -6855,10 +6815,6 @@
           </a:solidFill>
           <a:ln/>
         </p:spPr>
-        <p:txBody>
-          <a:bodyPr/>
-          <a:p/>
-        </p:txBody>
       </p:sp>
       <p:sp>
         <p:nvSpPr>
@@ -6881,7 +6837,7 @@
           <a:bodyPr wrap="square" lIns="0" tIns="0" rIns="0" bIns="0" rtlCol="0" anchor="ctr"/>
           <a:lstStyle/>
           <a:p>
-            <a:pPr algn="ctr" indent="0" marL="0">
+            <a:pPr marL="0" indent="0" algn="ctr">
               <a:buNone/>
             </a:pPr>
             <a:r>
@@ -6920,7 +6876,7 @@
           <a:bodyPr wrap="square" lIns="0" tIns="0" rIns="0" bIns="0" rtlCol="0" anchor="ctr"/>
           <a:lstStyle/>
           <a:p>
-            <a:pPr algn="ctr" indent="0" marL="0">
+            <a:pPr marL="0" indent="0" algn="ctr">
               <a:buNone/>
             </a:pPr>
             <a:r>
@@ -6957,10 +6913,6 @@
           </a:solidFill>
           <a:ln/>
         </p:spPr>
-        <p:txBody>
-          <a:bodyPr/>
-          <a:p/>
-        </p:txBody>
       </p:sp>
       <p:sp>
         <p:nvSpPr>
@@ -6983,7 +6935,7 @@
           <a:bodyPr wrap="square" lIns="0" tIns="0" rIns="0" bIns="0" rtlCol="0" anchor="ctr"/>
           <a:lstStyle/>
           <a:p>
-            <a:pPr algn="ctr" indent="0" marL="0">
+            <a:pPr marL="0" indent="0" algn="ctr">
               <a:buNone/>
             </a:pPr>
             <a:r>
@@ -7022,7 +6974,7 @@
           <a:bodyPr wrap="square" lIns="0" tIns="0" rIns="0" bIns="0" rtlCol="0" anchor="ctr"/>
           <a:lstStyle/>
           <a:p>
-            <a:pPr algn="ctr" indent="0" marL="0">
+            <a:pPr marL="0" indent="0" algn="ctr">
               <a:buNone/>
             </a:pPr>
             <a:r>
@@ -7061,10 +7013,6 @@
           </a:solidFill>
           <a:ln/>
         </p:spPr>
-        <p:txBody>
-          <a:bodyPr/>
-          <a:p/>
-        </p:txBody>
       </p:sp>
       <p:sp>
         <p:nvSpPr>
@@ -7087,7 +7035,7 @@
           <a:bodyPr wrap="square" lIns="0" tIns="0" rIns="0" bIns="0" rtlCol="0" anchor="ctr"/>
           <a:lstStyle/>
           <a:p>
-            <a:pPr algn="ctr" indent="0" marL="0">
+            <a:pPr marL="0" indent="0" algn="ctr">
               <a:buNone/>
             </a:pPr>
             <a:r>
@@ -7126,7 +7074,7 @@
           <a:bodyPr wrap="square" lIns="0" tIns="0" rIns="0" bIns="0" rtlCol="0" anchor="ctr"/>
           <a:lstStyle/>
           <a:p>
-            <a:pPr algn="ctr" indent="0" marL="0">
+            <a:pPr marL="0" indent="0" algn="ctr">
               <a:buNone/>
             </a:pPr>
             <a:r>
@@ -7163,10 +7111,6 @@
           </a:solidFill>
           <a:ln/>
         </p:spPr>
-        <p:txBody>
-          <a:bodyPr/>
-          <a:p/>
-        </p:txBody>
       </p:sp>
       <p:sp>
         <p:nvSpPr>
@@ -7189,7 +7133,7 @@
           <a:bodyPr wrap="square" lIns="0" tIns="0" rIns="0" bIns="0" rtlCol="0" anchor="ctr"/>
           <a:lstStyle/>
           <a:p>
-            <a:pPr algn="ctr" indent="0" marL="0">
+            <a:pPr marL="0" indent="0" algn="ctr">
               <a:buNone/>
             </a:pPr>
             <a:r>
@@ -7228,7 +7172,7 @@
           <a:bodyPr wrap="square" lIns="0" tIns="0" rIns="0" bIns="0" rtlCol="0" anchor="ctr"/>
           <a:lstStyle/>
           <a:p>
-            <a:pPr algn="ctr" indent="0" marL="0">
+            <a:pPr marL="0" indent="0" algn="ctr">
               <a:buNone/>
             </a:pPr>
             <a:r>
@@ -7267,10 +7211,6 @@
           </a:solidFill>
           <a:ln/>
         </p:spPr>
-        <p:txBody>
-          <a:bodyPr/>
-          <a:p/>
-        </p:txBody>
       </p:sp>
       <p:sp>
         <p:nvSpPr>
@@ -7293,7 +7233,7 @@
           <a:bodyPr wrap="square" lIns="0" tIns="0" rIns="0" bIns="0" rtlCol="0" anchor="ctr"/>
           <a:lstStyle/>
           <a:p>
-            <a:pPr algn="ctr" indent="0" marL="0">
+            <a:pPr marL="0" indent="0" algn="ctr">
               <a:buNone/>
             </a:pPr>
             <a:r>
@@ -7332,7 +7272,7 @@
           <a:bodyPr wrap="square" lIns="0" tIns="0" rIns="0" bIns="0" rtlCol="0" anchor="ctr"/>
           <a:lstStyle/>
           <a:p>
-            <a:pPr algn="ctr" indent="0" marL="0">
+            <a:pPr marL="0" indent="0" algn="ctr">
               <a:buNone/>
             </a:pPr>
             <a:r>
@@ -7369,10 +7309,6 @@
           </a:solidFill>
           <a:ln/>
         </p:spPr>
-        <p:txBody>
-          <a:bodyPr/>
-          <a:p/>
-        </p:txBody>
       </p:sp>
       <p:sp>
         <p:nvSpPr>
@@ -7395,7 +7331,7 @@
           <a:bodyPr wrap="square" lIns="0" tIns="0" rIns="0" bIns="0" rtlCol="0" anchor="ctr"/>
           <a:lstStyle/>
           <a:p>
-            <a:pPr algn="ctr" indent="0" marL="0">
+            <a:pPr marL="0" indent="0" algn="ctr">
               <a:buNone/>
             </a:pPr>
             <a:r>
@@ -7434,7 +7370,7 @@
           <a:bodyPr wrap="square" lIns="0" tIns="0" rIns="0" bIns="0" rtlCol="0" anchor="ctr"/>
           <a:lstStyle/>
           <a:p>
-            <a:pPr algn="ctr" indent="0" marL="0">
+            <a:pPr marL="0" indent="0" algn="ctr">
               <a:buNone/>
             </a:pPr>
             <a:r>
@@ -7473,10 +7409,6 @@
           </a:solidFill>
           <a:ln/>
         </p:spPr>
-        <p:txBody>
-          <a:bodyPr/>
-          <a:p/>
-        </p:txBody>
       </p:sp>
       <p:sp>
         <p:nvSpPr>
@@ -7499,7 +7431,7 @@
           <a:bodyPr wrap="square" lIns="0" tIns="0" rIns="0" bIns="0" rtlCol="0" anchor="ctr"/>
           <a:lstStyle/>
           <a:p>
-            <a:pPr algn="ctr" indent="0" marL="0">
+            <a:pPr marL="0" indent="0" algn="ctr">
               <a:buNone/>
             </a:pPr>
             <a:r>
@@ -7538,7 +7470,7 @@
           <a:bodyPr wrap="square" lIns="0" tIns="0" rIns="0" bIns="0" rtlCol="0" anchor="ctr"/>
           <a:lstStyle/>
           <a:p>
-            <a:pPr algn="ctr" indent="0" marL="0">
+            <a:pPr marL="0" indent="0" algn="ctr">
               <a:buNone/>
             </a:pPr>
             <a:r>
@@ -7575,10 +7507,6 @@
           </a:solidFill>
           <a:ln/>
         </p:spPr>
-        <p:txBody>
-          <a:bodyPr/>
-          <a:p/>
-        </p:txBody>
       </p:sp>
       <p:sp>
         <p:nvSpPr>
@@ -7601,7 +7529,7 @@
           <a:bodyPr wrap="square" lIns="0" tIns="0" rIns="0" bIns="0" rtlCol="0" anchor="ctr"/>
           <a:lstStyle/>
           <a:p>
-            <a:pPr algn="ctr" indent="0" marL="0">
+            <a:pPr marL="0" indent="0" algn="ctr">
               <a:buNone/>
             </a:pPr>
             <a:r>
@@ -7640,7 +7568,7 @@
           <a:bodyPr wrap="square" lIns="0" tIns="0" rIns="0" bIns="0" rtlCol="0" anchor="ctr"/>
           <a:lstStyle/>
           <a:p>
-            <a:pPr algn="ctr" indent="0" marL="0">
+            <a:pPr marL="0" indent="0" algn="ctr">
               <a:buNone/>
             </a:pPr>
             <a:r>
@@ -7679,10 +7607,6 @@
           </a:solidFill>
           <a:ln/>
         </p:spPr>
-        <p:txBody>
-          <a:bodyPr/>
-          <a:p/>
-        </p:txBody>
       </p:sp>
       <p:sp>
         <p:nvSpPr>
@@ -7705,7 +7629,7 @@
           <a:bodyPr wrap="square" lIns="0" tIns="0" rIns="0" bIns="0" rtlCol="0" anchor="ctr"/>
           <a:lstStyle/>
           <a:p>
-            <a:pPr algn="ctr" indent="0" marL="0">
+            <a:pPr marL="0" indent="0" algn="ctr">
               <a:buNone/>
             </a:pPr>
             <a:r>
@@ -7744,7 +7668,7 @@
           <a:bodyPr wrap="square" lIns="0" tIns="0" rIns="0" bIns="0" rtlCol="0" anchor="ctr"/>
           <a:lstStyle/>
           <a:p>
-            <a:pPr algn="ctr" indent="0" marL="0">
+            <a:pPr marL="0" indent="0" algn="ctr">
               <a:buNone/>
             </a:pPr>
             <a:r>
@@ -7783,7 +7707,7 @@
           <a:bodyPr wrap="square" lIns="0" tIns="0" rIns="0" bIns="0" rtlCol="0" anchor="ctr"/>
           <a:lstStyle/>
           <a:p>
-            <a:pPr algn="l" indent="0" marL="0">
+            <a:pPr marL="0" indent="0" algn="l">
               <a:buNone/>
             </a:pPr>
             <a:r>
@@ -7822,7 +7746,7 @@
           <a:bodyPr wrap="square" lIns="0" tIns="0" rIns="0" bIns="0" rtlCol="0" anchor="ctr"/>
           <a:lstStyle/>
           <a:p>
-            <a:pPr algn="r" indent="0" marL="0">
+            <a:pPr marL="0" indent="0" algn="r">
               <a:buNone/>
             </a:pPr>
             <a:r>
@@ -7856,6 +7780,7 @@
         <a:solidFill>
           <a:srgbClr val="F4F6FA"/>
         </a:solidFill>
+        <a:effectLst/>
       </p:bgPr>
     </p:bg>
     <p:spTree>
@@ -7893,7 +7818,7 @@
           <a:bodyPr wrap="square" lIns="0" tIns="0" rIns="0" bIns="0" rtlCol="0" anchor="ctr"/>
           <a:lstStyle/>
           <a:p>
-            <a:pPr indent="0" marL="0">
+            <a:pPr marL="0" indent="0">
               <a:buNone/>
             </a:pPr>
             <a:r>
@@ -7932,17 +7857,13 @@
           </a:solidFill>
           <a:ln/>
           <a:effectLst>
-            <a:outerShdw sx="100000" sy="100000" kx="0" ky="0" algn="bl" rotWithShape="0" blurRad="63500" dist="25400" dir="5400000">
+            <a:outerShdw blurRad="63500" dist="25400" dir="5400000" algn="bl" rotWithShape="0">
               <a:srgbClr val="888888">
                 <a:alpha val="20000"/>
               </a:srgbClr>
             </a:outerShdw>
           </a:effectLst>
         </p:spPr>
-        <p:txBody>
-          <a:bodyPr/>
-          <a:p/>
-        </p:txBody>
       </p:sp>
       <p:sp>
         <p:nvSpPr>
@@ -7963,10 +7884,6 @@
           </a:solidFill>
           <a:ln/>
         </p:spPr>
-        <p:txBody>
-          <a:bodyPr/>
-          <a:p/>
-        </p:txBody>
       </p:sp>
       <p:sp>
         <p:nvSpPr>
@@ -7989,7 +7906,7 @@
           <a:bodyPr wrap="square" lIns="0" tIns="0" rIns="0" bIns="0" rtlCol="0" anchor="ctr"/>
           <a:lstStyle/>
           <a:p>
-            <a:pPr algn="ctr" indent="0" marL="0">
+            <a:pPr marL="0" indent="0" algn="ctr">
               <a:buNone/>
             </a:pPr>
             <a:r>
@@ -8028,7 +7945,7 @@
           <a:bodyPr wrap="square" lIns="0" tIns="0" rIns="0" bIns="0" rtlCol="0" anchor="ctr"/>
           <a:lstStyle/>
           <a:p>
-            <a:pPr indent="0" marL="0">
+            <a:pPr marL="0" indent="0">
               <a:buNone/>
             </a:pPr>
             <a:r>
@@ -8067,7 +7984,7 @@
           <a:bodyPr wrap="square" lIns="0" tIns="0" rIns="0" bIns="0" rtlCol="0" anchor="ctr"/>
           <a:lstStyle/>
           <a:p>
-            <a:pPr indent="0" marL="0">
+            <a:pPr marL="0" indent="0">
               <a:buNone/>
             </a:pPr>
             <a:r>
@@ -8106,17 +8023,13 @@
           </a:solidFill>
           <a:ln/>
           <a:effectLst>
-            <a:outerShdw sx="100000" sy="100000" kx="0" ky="0" algn="bl" rotWithShape="0" blurRad="63500" dist="25400" dir="5400000">
+            <a:outerShdw blurRad="63500" dist="25400" dir="5400000" algn="bl" rotWithShape="0">
               <a:srgbClr val="888888">
                 <a:alpha val="20000"/>
               </a:srgbClr>
             </a:outerShdw>
           </a:effectLst>
         </p:spPr>
-        <p:txBody>
-          <a:bodyPr/>
-          <a:p/>
-        </p:txBody>
       </p:sp>
       <p:sp>
         <p:nvSpPr>
@@ -8137,10 +8050,6 @@
           </a:solidFill>
           <a:ln/>
         </p:spPr>
-        <p:txBody>
-          <a:bodyPr/>
-          <a:p/>
-        </p:txBody>
       </p:sp>
       <p:sp>
         <p:nvSpPr>
@@ -8163,7 +8072,7 @@
           <a:bodyPr wrap="square" lIns="0" tIns="0" rIns="0" bIns="0" rtlCol="0" anchor="ctr"/>
           <a:lstStyle/>
           <a:p>
-            <a:pPr algn="ctr" indent="0" marL="0">
+            <a:pPr marL="0" indent="0" algn="ctr">
               <a:buNone/>
             </a:pPr>
             <a:r>
@@ -8202,7 +8111,7 @@
           <a:bodyPr wrap="square" lIns="0" tIns="0" rIns="0" bIns="0" rtlCol="0" anchor="ctr"/>
           <a:lstStyle/>
           <a:p>
-            <a:pPr indent="0" marL="0">
+            <a:pPr marL="0" indent="0">
               <a:buNone/>
             </a:pPr>
             <a:r>
@@ -8241,7 +8150,7 @@
           <a:bodyPr wrap="square" lIns="0" tIns="0" rIns="0" bIns="0" rtlCol="0" anchor="ctr"/>
           <a:lstStyle/>
           <a:p>
-            <a:pPr indent="0" marL="0">
+            <a:pPr marL="0" indent="0">
               <a:buNone/>
             </a:pPr>
             <a:r>
@@ -8280,17 +8189,13 @@
           </a:solidFill>
           <a:ln/>
           <a:effectLst>
-            <a:outerShdw sx="100000" sy="100000" kx="0" ky="0" algn="bl" rotWithShape="0" blurRad="63500" dist="25400" dir="5400000">
+            <a:outerShdw blurRad="63500" dist="25400" dir="5400000" algn="bl" rotWithShape="0">
               <a:srgbClr val="888888">
                 <a:alpha val="20000"/>
               </a:srgbClr>
             </a:outerShdw>
           </a:effectLst>
         </p:spPr>
-        <p:txBody>
-          <a:bodyPr/>
-          <a:p/>
-        </p:txBody>
       </p:sp>
       <p:sp>
         <p:nvSpPr>
@@ -8311,10 +8216,6 @@
           </a:solidFill>
           <a:ln/>
         </p:spPr>
-        <p:txBody>
-          <a:bodyPr/>
-          <a:p/>
-        </p:txBody>
       </p:sp>
       <p:sp>
         <p:nvSpPr>
@@ -8337,7 +8238,7 @@
           <a:bodyPr wrap="square" lIns="0" tIns="0" rIns="0" bIns="0" rtlCol="0" anchor="ctr"/>
           <a:lstStyle/>
           <a:p>
-            <a:pPr algn="ctr" indent="0" marL="0">
+            <a:pPr marL="0" indent="0" algn="ctr">
               <a:buNone/>
             </a:pPr>
             <a:r>
@@ -8376,7 +8277,7 @@
           <a:bodyPr wrap="square" lIns="0" tIns="0" rIns="0" bIns="0" rtlCol="0" anchor="ctr"/>
           <a:lstStyle/>
           <a:p>
-            <a:pPr indent="0" marL="0">
+            <a:pPr marL="0" indent="0">
               <a:buNone/>
             </a:pPr>
             <a:r>
@@ -8415,7 +8316,7 @@
           <a:bodyPr wrap="square" lIns="0" tIns="0" rIns="0" bIns="0" rtlCol="0" anchor="ctr"/>
           <a:lstStyle/>
           <a:p>
-            <a:pPr indent="0" marL="0">
+            <a:pPr marL="0" indent="0">
               <a:buNone/>
             </a:pPr>
             <a:r>
@@ -8454,7 +8355,7 @@
           <a:bodyPr wrap="square" lIns="0" tIns="0" rIns="0" bIns="0" rtlCol="0" anchor="ctr"/>
           <a:lstStyle/>
           <a:p>
-            <a:pPr algn="l" indent="0" marL="0">
+            <a:pPr marL="0" indent="0" algn="l">
               <a:buNone/>
             </a:pPr>
             <a:r>
@@ -8493,7 +8394,7 @@
           <a:bodyPr wrap="square" lIns="0" tIns="0" rIns="0" bIns="0" rtlCol="0" anchor="ctr"/>
           <a:lstStyle/>
           <a:p>
-            <a:pPr algn="r" indent="0" marL="0">
+            <a:pPr marL="0" indent="0" algn="r">
               <a:buNone/>
             </a:pPr>
             <a:r>
@@ -8527,6 +8428,7 @@
         <a:solidFill>
           <a:srgbClr val="1E2761"/>
         </a:solidFill>
+        <a:effectLst/>
       </p:bgPr>
     </p:bg>
     <p:spTree>
@@ -8562,10 +8464,6 @@
           </a:solidFill>
           <a:ln/>
         </p:spPr>
-        <p:txBody>
-          <a:bodyPr/>
-          <a:p/>
-        </p:txBody>
       </p:sp>
       <p:sp>
         <p:nvSpPr>
@@ -8586,10 +8484,6 @@
           </a:solidFill>
           <a:ln/>
         </p:spPr>
-        <p:txBody>
-          <a:bodyPr/>
-          <a:p/>
-        </p:txBody>
       </p:sp>
       <p:sp>
         <p:nvSpPr>
@@ -8612,7 +8506,7 @@
           <a:bodyPr wrap="square" lIns="0" tIns="0" rIns="0" bIns="0" rtlCol="0" anchor="ctr"/>
           <a:lstStyle/>
           <a:p>
-            <a:pPr indent="0" marL="0">
+            <a:pPr marL="0" indent="0">
               <a:buNone/>
             </a:pPr>
             <a:r>
@@ -8651,53 +8545,112 @@
           <a:bodyPr wrap="square" lIns="0" tIns="0" rIns="0" bIns="0" rtlCol="0" anchor="ctr"/>
           <a:lstStyle/>
           <a:p>
-            <a:pPr indent="0" marL="0">
+            <a:pPr marL="0" indent="0">
               <a:lnSpc>
                 <a:spcPct val="140000"/>
               </a:lnSpc>
               <a:buNone/>
             </a:pPr>
-            <a:pPr indent="0" marL="0">
-              <a:lnSpc>
-                <a:spcPct val="140000"/>
-              </a:lnSpc>
-              <a:buNone/>
-            </a:pPr>
-            <a:pPr indent="0" marL="0">
-              <a:lnSpc>
-                <a:spcPct val="140000"/>
-              </a:lnSpc>
-              <a:buNone/>
-            </a:pPr>
-            <a:pPr indent="0" marL="0">
-              <a:lnSpc>
-                <a:spcPct val="140000"/>
-              </a:lnSpc>
-              <a:buNone/>
-            </a:pPr>
-            <a:pPr indent="0" marL="0">
-              <a:lnSpc>
-                <a:spcPct val="140000"/>
-              </a:lnSpc>
-              <a:buNone/>
-            </a:pPr>
-            <a:pPr indent="0" marL="0">
-              <a:lnSpc>
-                <a:spcPct val="140000"/>
-              </a:lnSpc>
-              <a:buNone/>
-            </a:pPr>
-            <a:r>
-              <a:t>Projeto tecnicamente maduro, financeiramente de altíssimo retorno e ambientalmente responsável.</a:t>
-            </a:r>
-            <a:br/>
-            <a:br/>
-            <a:r>
-              <a:t>Investimento de R$ 301.000,00 com retorno garantido em 16,5 meses.</a:t>
-            </a:r>
-            <a:br/>
-            <a:r>
-              <a:t>Redução permanente de R$ 217.686,42/ano no custo operacional de energia elétrica.</a:t>
+            <a:r>
+              <a:rPr lang="en-US" sz="1500" dirty="0">
+                <a:solidFill>
+                  <a:srgbClr val="CADCFC"/>
+                </a:solidFill>
+                <a:latin typeface="Calibri" pitchFamily="34" charset="0"/>
+                <a:ea typeface="Calibri" pitchFamily="34" charset="-122"/>
+                <a:cs typeface="Calibri" pitchFamily="34" charset="-120"/>
+              </a:rPr>
+              <a:t>Projeto tecnicamente maduro, financeiramente de altíssimo retorno e ambientalmente responsável.
+</a:t>
+            </a:r>
+            <a:r>
+              <a:rPr lang="en-US" sz="1500" b="1" dirty="0">
+                <a:solidFill>
+                  <a:srgbClr val="00A896"/>
+                </a:solidFill>
+                <a:latin typeface="Calibri" pitchFamily="34" charset="0"/>
+                <a:ea typeface="Calibri" pitchFamily="34" charset="-122"/>
+                <a:cs typeface="Calibri" pitchFamily="34" charset="-120"/>
+              </a:rPr>
+              <a:t>Investimento de R$ 301.000,00 </a:t>
+            </a:r>
+            <a:r>
+              <a:rPr lang="en-US" sz="1500" dirty="0">
+                <a:solidFill>
+                  <a:srgbClr val="CADCFC"/>
+                </a:solidFill>
+                <a:latin typeface="Calibri" pitchFamily="34" charset="0"/>
+                <a:ea typeface="Calibri" pitchFamily="34" charset="-122"/>
+                <a:cs typeface="Calibri" pitchFamily="34" charset="-120"/>
+              </a:rPr>
+              <a:t>com retorno garantido </a:t>
+            </a:r>
+            <a:r>
+              <a:rPr lang="en-US" sz="1500">
+                <a:solidFill>
+                  <a:srgbClr val="CADCFC"/>
+                </a:solidFill>
+                <a:latin typeface="Calibri" pitchFamily="34" charset="0"/>
+                <a:ea typeface="Calibri" pitchFamily="34" charset="-122"/>
+                <a:cs typeface="Calibri" pitchFamily="34" charset="-120"/>
+              </a:rPr>
+              <a:t>em </a:t>
+            </a:r>
+            <a:r>
+              <a:rPr lang="en-US" sz="1500" b="1">
+                <a:solidFill>
+                  <a:srgbClr val="00A896"/>
+                </a:solidFill>
+                <a:latin typeface="Calibri" pitchFamily="34" charset="0"/>
+                <a:ea typeface="Calibri" pitchFamily="34" charset="-122"/>
+                <a:cs typeface="Calibri" pitchFamily="34" charset="-120"/>
+              </a:rPr>
+              <a:t>16,5 meses.</a:t>
+            </a:r>
+            <a:r>
+              <a:rPr lang="en-US" sz="1500" b="1" dirty="0">
+                <a:solidFill>
+                  <a:srgbClr val="00A896"/>
+                </a:solidFill>
+                <a:latin typeface="Calibri" pitchFamily="34" charset="0"/>
+                <a:ea typeface="Calibri" pitchFamily="34" charset="-122"/>
+                <a:cs typeface="Calibri" pitchFamily="34" charset="-120"/>
+              </a:rPr>
+              <a:t>
+Redução permanente </a:t>
+            </a:r>
+            <a:r>
+              <a:rPr lang="en-US" sz="1500" b="1">
+                <a:solidFill>
+                  <a:srgbClr val="00A896"/>
+                </a:solidFill>
+                <a:latin typeface="Calibri" pitchFamily="34" charset="0"/>
+                <a:ea typeface="Calibri" pitchFamily="34" charset="-122"/>
+                <a:cs typeface="Calibri" pitchFamily="34" charset="-120"/>
+              </a:rPr>
+              <a:t>de R$ 217.686,42/</a:t>
+            </a:r>
+            <a:r>
+              <a:rPr lang="en-US" sz="1500" b="1" dirty="0">
+                <a:solidFill>
+                  <a:srgbClr val="00A896"/>
+                </a:solidFill>
+                <a:latin typeface="Calibri" pitchFamily="34" charset="0"/>
+                <a:ea typeface="Calibri" pitchFamily="34" charset="-122"/>
+                <a:cs typeface="Calibri" pitchFamily="34" charset="-120"/>
+              </a:rPr>
+              <a:t>ano </a:t>
+            </a:r>
+            <a:r>
+              <a:rPr lang="en-US" sz="1500" dirty="0">
+                <a:solidFill>
+                  <a:srgbClr val="CADCFC"/>
+                </a:solidFill>
+                <a:latin typeface="Calibri" pitchFamily="34" charset="0"/>
+                <a:ea typeface="Calibri" pitchFamily="34" charset="-122"/>
+                <a:cs typeface="Calibri" pitchFamily="34" charset="-120"/>
+              </a:rPr>
+              <a:t>no custo operacional de energia elétrica.</a:t>
             </a:r>
             <a:endParaRPr lang="en-US" sz="1500" dirty="0"/>
           </a:p>
@@ -8724,7 +8677,7 @@
           <a:bodyPr wrap="square" lIns="0" tIns="0" rIns="0" bIns="0" rtlCol="0" anchor="ctr"/>
           <a:lstStyle/>
           <a:p>
-            <a:pPr indent="0" marL="0">
+            <a:pPr marL="0" indent="0">
               <a:buNone/>
             </a:pPr>
             <a:r>
@@ -8761,10 +8714,6 @@
           </a:solidFill>
           <a:ln/>
         </p:spPr>
-        <p:txBody>
-          <a:bodyPr/>
-          <a:p/>
-        </p:txBody>
       </p:sp>
       <p:sp>
         <p:nvSpPr>
@@ -8787,7 +8736,7 @@
           <a:bodyPr wrap="square" lIns="0" tIns="0" rIns="0" bIns="0" rtlCol="0" anchor="ctr"/>
           <a:lstStyle/>
           <a:p>
-            <a:pPr algn="ctr" indent="0" marL="0">
+            <a:pPr marL="0" indent="0" algn="ctr">
               <a:buNone/>
             </a:pPr>
             <a:r>
@@ -8826,7 +8775,7 @@
           <a:bodyPr wrap="square" lIns="0" tIns="0" rIns="0" bIns="0" rtlCol="0" anchor="ctr"/>
           <a:lstStyle/>
           <a:p>
-            <a:pPr indent="0" marL="0">
+            <a:pPr marL="0" indent="0">
               <a:buNone/>
             </a:pPr>
             <a:r>
@@ -8863,10 +8812,6 @@
           </a:solidFill>
           <a:ln/>
         </p:spPr>
-        <p:txBody>
-          <a:bodyPr/>
-          <a:p/>
-        </p:txBody>
       </p:sp>
       <p:sp>
         <p:nvSpPr>
@@ -8889,7 +8834,7 @@
           <a:bodyPr wrap="square" lIns="0" tIns="0" rIns="0" bIns="0" rtlCol="0" anchor="ctr"/>
           <a:lstStyle/>
           <a:p>
-            <a:pPr algn="ctr" indent="0" marL="0">
+            <a:pPr marL="0" indent="0" algn="ctr">
               <a:buNone/>
             </a:pPr>
             <a:r>
@@ -8928,7 +8873,7 @@
           <a:bodyPr wrap="square" lIns="0" tIns="0" rIns="0" bIns="0" rtlCol="0" anchor="ctr"/>
           <a:lstStyle/>
           <a:p>
-            <a:pPr indent="0" marL="0">
+            <a:pPr marL="0" indent="0">
               <a:buNone/>
             </a:pPr>
             <a:r>
@@ -8965,10 +8910,6 @@
           </a:solidFill>
           <a:ln/>
         </p:spPr>
-        <p:txBody>
-          <a:bodyPr/>
-          <a:p/>
-        </p:txBody>
       </p:sp>
       <p:sp>
         <p:nvSpPr>
@@ -8991,7 +8932,7 @@
           <a:bodyPr wrap="square" lIns="0" tIns="0" rIns="0" bIns="0" rtlCol="0" anchor="ctr"/>
           <a:lstStyle/>
           <a:p>
-            <a:pPr algn="ctr" indent="0" marL="0">
+            <a:pPr marL="0" indent="0" algn="ctr">
               <a:buNone/>
             </a:pPr>
             <a:r>
@@ -9030,7 +8971,7 @@
           <a:bodyPr wrap="square" lIns="0" tIns="0" rIns="0" bIns="0" rtlCol="0" anchor="ctr"/>
           <a:lstStyle/>
           <a:p>
-            <a:pPr indent="0" marL="0">
+            <a:pPr marL="0" indent="0">
               <a:buNone/>
             </a:pPr>
             <a:r>
@@ -9070,10 +9011,6 @@
             <a:prstDash val="solid"/>
           </a:ln>
         </p:spPr>
-        <p:txBody>
-          <a:bodyPr/>
-          <a:p/>
-        </p:txBody>
       </p:sp>
       <p:sp>
         <p:nvSpPr>
@@ -9096,7 +9033,7 @@
           <a:bodyPr wrap="square" lIns="0" tIns="0" rIns="0" bIns="0" rtlCol="0" anchor="ctr"/>
           <a:lstStyle/>
           <a:p>
-            <a:pPr indent="0" marL="0">
+            <a:pPr marL="0" indent="0">
               <a:lnSpc>
                 <a:spcPct val="130000"/>
               </a:lnSpc>
@@ -9116,7 +9053,7 @@
             <a:endParaRPr lang="en-US" sz="1050" dirty="0"/>
           </a:p>
           <a:p>
-            <a:pPr indent="0" marL="0">
+            <a:pPr marL="0" indent="0">
               <a:lnSpc>
                 <a:spcPct val="130000"/>
               </a:lnSpc>
@@ -9153,6 +9090,7 @@
         <a:solidFill>
           <a:srgbClr val="F4F6FA"/>
         </a:solidFill>
+        <a:effectLst/>
       </p:bgPr>
     </p:bg>
     <p:spTree>
@@ -9190,7 +9128,7 @@
           <a:bodyPr wrap="square" lIns="0" tIns="0" rIns="0" bIns="0" rtlCol="0" anchor="ctr"/>
           <a:lstStyle/>
           <a:p>
-            <a:pPr indent="0" marL="0">
+            <a:pPr marL="0" indent="0">
               <a:buNone/>
             </a:pPr>
             <a:r>
@@ -9229,7 +9167,7 @@
           <a:bodyPr wrap="square" lIns="0" tIns="0" rIns="0" bIns="0" rtlCol="0" anchor="ctr"/>
           <a:lstStyle/>
           <a:p>
-            <a:pPr indent="0" marL="0">
+            <a:pPr marL="0" indent="0">
               <a:buNone/>
             </a:pPr>
             <a:r>
@@ -9268,17 +9206,13 @@
           </a:solidFill>
           <a:ln/>
           <a:effectLst>
-            <a:outerShdw sx="100000" sy="100000" kx="0" ky="0" algn="bl" rotWithShape="0" blurRad="76200" dist="25400" dir="5400000">
+            <a:outerShdw blurRad="76200" dist="25400" dir="5400000" algn="bl" rotWithShape="0">
               <a:srgbClr val="888888">
                 <a:alpha val="25000"/>
               </a:srgbClr>
             </a:outerShdw>
           </a:effectLst>
         </p:spPr>
-        <p:txBody>
-          <a:bodyPr/>
-          <a:p/>
-        </p:txBody>
       </p:sp>
       <p:sp>
         <p:nvSpPr>
@@ -9301,7 +9235,7 @@
           <a:bodyPr wrap="square" lIns="0" tIns="0" rIns="0" bIns="0" rtlCol="0" anchor="ctr"/>
           <a:lstStyle/>
           <a:p>
-            <a:pPr algn="ctr" indent="0" marL="0">
+            <a:pPr marL="0" indent="0" algn="ctr">
               <a:buNone/>
             </a:pPr>
             <a:r>
@@ -9340,7 +9274,7 @@
           <a:bodyPr wrap="square" lIns="0" tIns="0" rIns="0" bIns="0" rtlCol="0" anchor="t"/>
           <a:lstStyle/>
           <a:p>
-            <a:pPr algn="ctr" indent="0" marL="0">
+            <a:pPr marL="0" indent="0" algn="ctr">
               <a:buNone/>
             </a:pPr>
             <a:r>
@@ -9379,17 +9313,13 @@
           </a:solidFill>
           <a:ln/>
           <a:effectLst>
-            <a:outerShdw sx="100000" sy="100000" kx="0" ky="0" algn="bl" rotWithShape="0" blurRad="76200" dist="25400" dir="5400000">
+            <a:outerShdw blurRad="76200" dist="25400" dir="5400000" algn="bl" rotWithShape="0">
               <a:srgbClr val="888888">
                 <a:alpha val="25000"/>
               </a:srgbClr>
             </a:outerShdw>
           </a:effectLst>
         </p:spPr>
-        <p:txBody>
-          <a:bodyPr/>
-          <a:p/>
-        </p:txBody>
       </p:sp>
       <p:sp>
         <p:nvSpPr>
@@ -9412,11 +9342,30 @@
           <a:bodyPr wrap="square" lIns="0" tIns="0" rIns="0" bIns="0" rtlCol="0" anchor="ctr"/>
           <a:lstStyle/>
           <a:p>
-            <a:pPr algn="ctr" indent="0" marL="0">
+            <a:pPr marL="0" indent="0" algn="ctr">
               <a:buNone/>
             </a:pPr>
             <a:r>
-              <a:t>R$ 217.686 /ano</a:t>
+              <a:rPr lang="en-US" sz="2200" b="1">
+                <a:solidFill>
+                  <a:srgbClr val="028090"/>
+                </a:solidFill>
+                <a:latin typeface="Cambria" pitchFamily="34" charset="0"/>
+                <a:ea typeface="Cambria" pitchFamily="34" charset="-122"/>
+                <a:cs typeface="Cambria" pitchFamily="34" charset="-120"/>
+              </a:rPr>
+              <a:t>R$ 217.686 </a:t>
+            </a:r>
+            <a:r>
+              <a:rPr lang="en-US" sz="2200" b="1" dirty="0">
+                <a:solidFill>
+                  <a:srgbClr val="028090"/>
+                </a:solidFill>
+                <a:latin typeface="Cambria" pitchFamily="34" charset="0"/>
+                <a:ea typeface="Cambria" pitchFamily="34" charset="-122"/>
+                <a:cs typeface="Cambria" pitchFamily="34" charset="-120"/>
+              </a:rPr>
+              <a:t>/ano</a:t>
             </a:r>
             <a:endParaRPr lang="en-US" sz="2200" dirty="0"/>
           </a:p>
@@ -9443,7 +9392,7 @@
           <a:bodyPr wrap="square" lIns="0" tIns="0" rIns="0" bIns="0" rtlCol="0" anchor="t"/>
           <a:lstStyle/>
           <a:p>
-            <a:pPr algn="ctr" indent="0" marL="0">
+            <a:pPr marL="0" indent="0" algn="ctr">
               <a:buNone/>
             </a:pPr>
             <a:r>
@@ -9482,17 +9431,13 @@
           </a:solidFill>
           <a:ln/>
           <a:effectLst>
-            <a:outerShdw sx="100000" sy="100000" kx="0" ky="0" algn="bl" rotWithShape="0" blurRad="76200" dist="25400" dir="5400000">
+            <a:outerShdw blurRad="76200" dist="25400" dir="5400000" algn="bl" rotWithShape="0">
               <a:srgbClr val="888888">
                 <a:alpha val="25000"/>
               </a:srgbClr>
             </a:outerShdw>
           </a:effectLst>
         </p:spPr>
-        <p:txBody>
-          <a:bodyPr/>
-          <a:p/>
-        </p:txBody>
       </p:sp>
       <p:sp>
         <p:nvSpPr>
@@ -9515,7 +9460,7 @@
           <a:bodyPr wrap="square" lIns="0" tIns="0" rIns="0" bIns="0" rtlCol="0" anchor="ctr"/>
           <a:lstStyle/>
           <a:p>
-            <a:pPr algn="ctr" indent="0" marL="0">
+            <a:pPr marL="0" indent="0" algn="ctr">
               <a:buNone/>
             </a:pPr>
             <a:r>
@@ -9554,7 +9499,7 @@
           <a:bodyPr wrap="square" lIns="0" tIns="0" rIns="0" bIns="0" rtlCol="0" anchor="t"/>
           <a:lstStyle/>
           <a:p>
-            <a:pPr algn="ctr" indent="0" marL="0">
+            <a:pPr marL="0" indent="0" algn="ctr">
               <a:buNone/>
             </a:pPr>
             <a:r>
@@ -9593,17 +9538,13 @@
           </a:solidFill>
           <a:ln/>
           <a:effectLst>
-            <a:outerShdw sx="100000" sy="100000" kx="0" ky="0" algn="bl" rotWithShape="0" blurRad="76200" dist="25400" dir="5400000">
+            <a:outerShdw blurRad="76200" dist="25400" dir="5400000" algn="bl" rotWithShape="0">
               <a:srgbClr val="888888">
                 <a:alpha val="25000"/>
               </a:srgbClr>
             </a:outerShdw>
           </a:effectLst>
         </p:spPr>
-        <p:txBody>
-          <a:bodyPr/>
-          <a:p/>
-        </p:txBody>
       </p:sp>
       <p:sp>
         <p:nvSpPr>
@@ -9626,10 +9567,18 @@
           <a:bodyPr wrap="square" lIns="0" tIns="0" rIns="0" bIns="0" rtlCol="0" anchor="ctr"/>
           <a:lstStyle/>
           <a:p>
-            <a:pPr algn="ctr" indent="0" marL="0">
+            <a:pPr marL="0" indent="0" algn="ctr">
               <a:buNone/>
             </a:pPr>
             <a:r>
+              <a:rPr lang="en-US" sz="2200" b="1">
+                <a:solidFill>
+                  <a:srgbClr val="028090"/>
+                </a:solidFill>
+                <a:latin typeface="Cambria" pitchFamily="34" charset="0"/>
+                <a:ea typeface="Cambria" pitchFamily="34" charset="-122"/>
+                <a:cs typeface="Cambria" pitchFamily="34" charset="-120"/>
+              </a:rPr>
               <a:t>16,5 meses</a:t>
             </a:r>
             <a:endParaRPr lang="en-US" sz="2200" dirty="0"/>
@@ -9657,7 +9606,7 @@
           <a:bodyPr wrap="square" lIns="0" tIns="0" rIns="0" bIns="0" rtlCol="0" anchor="t"/>
           <a:lstStyle/>
           <a:p>
-            <a:pPr algn="ctr" indent="0" marL="0">
+            <a:pPr marL="0" indent="0" algn="ctr">
               <a:buNone/>
             </a:pPr>
             <a:r>
@@ -9696,17 +9645,13 @@
           </a:solidFill>
           <a:ln/>
           <a:effectLst>
-            <a:outerShdw sx="100000" sy="100000" kx="0" ky="0" algn="bl" rotWithShape="0" blurRad="76200" dist="25400" dir="5400000">
+            <a:outerShdw blurRad="76200" dist="25400" dir="5400000" algn="bl" rotWithShape="0">
               <a:srgbClr val="888888">
                 <a:alpha val="25000"/>
               </a:srgbClr>
             </a:outerShdw>
           </a:effectLst>
         </p:spPr>
-        <p:txBody>
-          <a:bodyPr/>
-          <a:p/>
-        </p:txBody>
       </p:sp>
       <p:sp>
         <p:nvSpPr>
@@ -9729,7 +9674,7 @@
           <a:bodyPr wrap="square" lIns="0" tIns="0" rIns="0" bIns="0" rtlCol="0" anchor="ctr"/>
           <a:lstStyle/>
           <a:p>
-            <a:pPr algn="ctr" indent="0" marL="0">
+            <a:pPr marL="0" indent="0" algn="ctr">
               <a:buNone/>
             </a:pPr>
             <a:r>
@@ -9768,7 +9713,7 @@
           <a:bodyPr wrap="square" lIns="0" tIns="0" rIns="0" bIns="0" rtlCol="0" anchor="t"/>
           <a:lstStyle/>
           <a:p>
-            <a:pPr algn="ctr" indent="0" marL="0">
+            <a:pPr marL="0" indent="0" algn="ctr">
               <a:buNone/>
             </a:pPr>
             <a:r>
@@ -9807,17 +9752,13 @@
           </a:solidFill>
           <a:ln/>
           <a:effectLst>
-            <a:outerShdw sx="100000" sy="100000" kx="0" ky="0" algn="bl" rotWithShape="0" blurRad="76200" dist="25400" dir="5400000">
+            <a:outerShdw blurRad="76200" dist="25400" dir="5400000" algn="bl" rotWithShape="0">
               <a:srgbClr val="888888">
                 <a:alpha val="25000"/>
               </a:srgbClr>
             </a:outerShdw>
           </a:effectLst>
         </p:spPr>
-        <p:txBody>
-          <a:bodyPr/>
-          <a:p/>
-        </p:txBody>
       </p:sp>
       <p:sp>
         <p:nvSpPr>
@@ -9840,10 +9781,18 @@
           <a:bodyPr wrap="square" lIns="0" tIns="0" rIns="0" bIns="0" rtlCol="0" anchor="ctr"/>
           <a:lstStyle/>
           <a:p>
-            <a:pPr algn="ctr" indent="0" marL="0">
+            <a:pPr marL="0" indent="0" algn="ctr">
               <a:buNone/>
             </a:pPr>
             <a:r>
+              <a:rPr lang="en-US" sz="2200" b="1">
+                <a:solidFill>
+                  <a:srgbClr val="1E2761"/>
+                </a:solidFill>
+                <a:latin typeface="Cambria" pitchFamily="34" charset="0"/>
+                <a:ea typeface="Cambria" pitchFamily="34" charset="-122"/>
+                <a:cs typeface="Cambria" pitchFamily="34" charset="-120"/>
+              </a:rPr>
               <a:t>R$ 484.710</a:t>
             </a:r>
             <a:endParaRPr lang="en-US" sz="2200" dirty="0"/>
@@ -9871,7 +9820,7 @@
           <a:bodyPr wrap="square" lIns="0" tIns="0" rIns="0" bIns="0" rtlCol="0" anchor="t"/>
           <a:lstStyle/>
           <a:p>
-            <a:pPr algn="ctr" indent="0" marL="0">
+            <a:pPr marL="0" indent="0" algn="ctr">
               <a:buNone/>
             </a:pPr>
             <a:r>
@@ -9910,17 +9859,13 @@
           </a:solidFill>
           <a:ln/>
           <a:effectLst>
-            <a:outerShdw sx="100000" sy="100000" kx="0" ky="0" algn="bl" rotWithShape="0" blurRad="76200" dist="25400" dir="5400000">
+            <a:outerShdw blurRad="76200" dist="25400" dir="5400000" algn="bl" rotWithShape="0">
               <a:srgbClr val="888888">
                 <a:alpha val="25000"/>
               </a:srgbClr>
             </a:outerShdw>
           </a:effectLst>
         </p:spPr>
-        <p:txBody>
-          <a:bodyPr/>
-          <a:p/>
-        </p:txBody>
       </p:sp>
       <p:sp>
         <p:nvSpPr>
@@ -9943,10 +9888,18 @@
           <a:bodyPr wrap="square" lIns="0" tIns="0" rIns="0" bIns="0" rtlCol="0" anchor="ctr"/>
           <a:lstStyle/>
           <a:p>
-            <a:pPr algn="ctr" indent="0" marL="0">
+            <a:pPr marL="0" indent="0" algn="ctr">
               <a:buNone/>
             </a:pPr>
             <a:r>
+              <a:rPr lang="en-US" sz="2200" b="1">
+                <a:solidFill>
+                  <a:srgbClr val="1E2761"/>
+                </a:solidFill>
+                <a:latin typeface="Cambria" pitchFamily="34" charset="0"/>
+                <a:ea typeface="Cambria" pitchFamily="34" charset="-122"/>
+                <a:cs typeface="Cambria" pitchFamily="34" charset="-120"/>
+              </a:rPr>
               <a:t>290.249 kWh/ano</a:t>
             </a:r>
             <a:endParaRPr lang="en-US" sz="2200" dirty="0"/>
@@ -9974,7 +9927,7 @@
           <a:bodyPr wrap="square" lIns="0" tIns="0" rIns="0" bIns="0" rtlCol="0" anchor="t"/>
           <a:lstStyle/>
           <a:p>
-            <a:pPr algn="ctr" indent="0" marL="0">
+            <a:pPr marL="0" indent="0" algn="ctr">
               <a:buNone/>
             </a:pPr>
             <a:r>
@@ -10013,17 +9966,13 @@
           </a:solidFill>
           <a:ln/>
           <a:effectLst>
-            <a:outerShdw sx="100000" sy="100000" kx="0" ky="0" algn="bl" rotWithShape="0" blurRad="76200" dist="25400" dir="5400000">
+            <a:outerShdw blurRad="76200" dist="25400" dir="5400000" algn="bl" rotWithShape="0">
               <a:srgbClr val="888888">
                 <a:alpha val="25000"/>
               </a:srgbClr>
             </a:outerShdw>
           </a:effectLst>
         </p:spPr>
-        <p:txBody>
-          <a:bodyPr/>
-          <a:p/>
-        </p:txBody>
       </p:sp>
       <p:sp>
         <p:nvSpPr>
@@ -10046,10 +9995,18 @@
           <a:bodyPr wrap="square" lIns="0" tIns="0" rIns="0" bIns="0" rtlCol="0" anchor="ctr"/>
           <a:lstStyle/>
           <a:p>
-            <a:pPr algn="ctr" indent="0" marL="0">
+            <a:pPr marL="0" indent="0" algn="ctr">
               <a:buNone/>
             </a:pPr>
             <a:r>
+              <a:rPr lang="en-US" sz="2200" b="1">
+                <a:solidFill>
+                  <a:srgbClr val="028090"/>
+                </a:solidFill>
+                <a:latin typeface="Cambria" pitchFamily="34" charset="0"/>
+                <a:ea typeface="Cambria" pitchFamily="34" charset="-122"/>
+                <a:cs typeface="Cambria" pitchFamily="34" charset="-120"/>
+              </a:rPr>
               <a:t>25,0 tCO2/ano</a:t>
             </a:r>
             <a:endParaRPr lang="en-US" sz="2200" dirty="0"/>
@@ -10077,7 +10034,7 @@
           <a:bodyPr wrap="square" lIns="0" tIns="0" rIns="0" bIns="0" rtlCol="0" anchor="t"/>
           <a:lstStyle/>
           <a:p>
-            <a:pPr algn="ctr" indent="0" marL="0">
+            <a:pPr marL="0" indent="0" algn="ctr">
               <a:buNone/>
             </a:pPr>
             <a:r>
@@ -10116,7 +10073,7 @@
           <a:bodyPr wrap="square" lIns="0" tIns="0" rIns="0" bIns="0" rtlCol="0" anchor="ctr"/>
           <a:lstStyle/>
           <a:p>
-            <a:pPr algn="l" indent="0" marL="0">
+            <a:pPr marL="0" indent="0" algn="l">
               <a:buNone/>
             </a:pPr>
             <a:r>
@@ -10155,7 +10112,7 @@
           <a:bodyPr wrap="square" lIns="0" tIns="0" rIns="0" bIns="0" rtlCol="0" anchor="ctr"/>
           <a:lstStyle/>
           <a:p>
-            <a:pPr algn="r" indent="0" marL="0">
+            <a:pPr marL="0" indent="0" algn="r">
               <a:buNone/>
             </a:pPr>
             <a:r>
@@ -10189,6 +10146,7 @@
         <a:solidFill>
           <a:srgbClr val="FFFFFF"/>
         </a:solidFill>
+        <a:effectLst/>
       </p:bgPr>
     </p:bg>
     <p:spTree>
@@ -10226,7 +10184,7 @@
           <a:bodyPr wrap="square" lIns="0" tIns="0" rIns="0" bIns="0" rtlCol="0" anchor="ctr"/>
           <a:lstStyle/>
           <a:p>
-            <a:pPr indent="0" marL="0">
+            <a:pPr marL="0" indent="0">
               <a:buNone/>
             </a:pPr>
             <a:r>
@@ -10265,7 +10223,7 @@
           <a:bodyPr wrap="square" lIns="0" tIns="0" rIns="0" bIns="0" rtlCol="0" anchor="ctr"/>
           <a:lstStyle/>
           <a:p>
-            <a:pPr indent="0" marL="0">
+            <a:pPr marL="0" indent="0">
               <a:buNone/>
             </a:pPr>
             <a:r>
@@ -10302,10 +10260,6 @@
           </a:solidFill>
           <a:ln/>
         </p:spPr>
-        <p:txBody>
-          <a:bodyPr/>
-          <a:p/>
-        </p:txBody>
       </p:sp>
       <p:sp>
         <p:nvSpPr>
@@ -10328,7 +10282,7 @@
           <a:bodyPr wrap="square" lIns="0" tIns="0" rIns="0" bIns="0" rtlCol="0" anchor="ctr"/>
           <a:lstStyle/>
           <a:p>
-            <a:pPr algn="ctr" indent="0" marL="0">
+            <a:pPr marL="0" indent="0" algn="ctr">
               <a:buNone/>
             </a:pPr>
             <a:r>
@@ -10367,7 +10321,7 @@
           <a:bodyPr wrap="square" lIns="0" tIns="0" rIns="0" bIns="0" rtlCol="0" anchor="ctr"/>
           <a:lstStyle/>
           <a:p>
-            <a:pPr indent="0" marL="0">
+            <a:pPr marL="0" indent="0">
               <a:buNone/>
             </a:pPr>
             <a:r>
@@ -10406,7 +10360,7 @@
           <a:bodyPr wrap="square" lIns="0" tIns="0" rIns="0" bIns="0" rtlCol="0" anchor="ctr"/>
           <a:lstStyle/>
           <a:p>
-            <a:pPr indent="0" marL="0">
+            <a:pPr marL="0" indent="0">
               <a:buNone/>
             </a:pPr>
             <a:r>
@@ -10443,10 +10397,6 @@
           </a:solidFill>
           <a:ln/>
         </p:spPr>
-        <p:txBody>
-          <a:bodyPr/>
-          <a:p/>
-        </p:txBody>
       </p:sp>
       <p:sp>
         <p:nvSpPr>
@@ -10469,7 +10419,7 @@
           <a:bodyPr wrap="square" lIns="0" tIns="0" rIns="0" bIns="0" rtlCol="0" anchor="ctr"/>
           <a:lstStyle/>
           <a:p>
-            <a:pPr algn="ctr" indent="0" marL="0">
+            <a:pPr marL="0" indent="0" algn="ctr">
               <a:buNone/>
             </a:pPr>
             <a:r>
@@ -10508,7 +10458,7 @@
           <a:bodyPr wrap="square" lIns="0" tIns="0" rIns="0" bIns="0" rtlCol="0" anchor="ctr"/>
           <a:lstStyle/>
           <a:p>
-            <a:pPr indent="0" marL="0">
+            <a:pPr marL="0" indent="0">
               <a:buNone/>
             </a:pPr>
             <a:r>
@@ -10547,7 +10497,7 @@
           <a:bodyPr wrap="square" lIns="0" tIns="0" rIns="0" bIns="0" rtlCol="0" anchor="ctr"/>
           <a:lstStyle/>
           <a:p>
-            <a:pPr indent="0" marL="0">
+            <a:pPr marL="0" indent="0">
               <a:buNone/>
             </a:pPr>
             <a:r>
@@ -10584,10 +10534,6 @@
           </a:solidFill>
           <a:ln/>
         </p:spPr>
-        <p:txBody>
-          <a:bodyPr/>
-          <a:p/>
-        </p:txBody>
       </p:sp>
       <p:sp>
         <p:nvSpPr>
@@ -10610,7 +10556,7 @@
           <a:bodyPr wrap="square" lIns="0" tIns="0" rIns="0" bIns="0" rtlCol="0" anchor="ctr"/>
           <a:lstStyle/>
           <a:p>
-            <a:pPr algn="ctr" indent="0" marL="0">
+            <a:pPr marL="0" indent="0" algn="ctr">
               <a:buNone/>
             </a:pPr>
             <a:r>
@@ -10649,7 +10595,7 @@
           <a:bodyPr wrap="square" lIns="0" tIns="0" rIns="0" bIns="0" rtlCol="0" anchor="ctr"/>
           <a:lstStyle/>
           <a:p>
-            <a:pPr indent="0" marL="0">
+            <a:pPr marL="0" indent="0">
               <a:buNone/>
             </a:pPr>
             <a:r>
@@ -10688,7 +10634,7 @@
           <a:bodyPr wrap="square" lIns="0" tIns="0" rIns="0" bIns="0" rtlCol="0" anchor="ctr"/>
           <a:lstStyle/>
           <a:p>
-            <a:pPr indent="0" marL="0">
+            <a:pPr marL="0" indent="0">
               <a:buNone/>
             </a:pPr>
             <a:r>
@@ -10725,10 +10671,6 @@
           </a:solidFill>
           <a:ln/>
         </p:spPr>
-        <p:txBody>
-          <a:bodyPr/>
-          <a:p/>
-        </p:txBody>
       </p:sp>
       <p:sp>
         <p:nvSpPr>
@@ -10751,7 +10693,7 @@
           <a:bodyPr wrap="square" lIns="0" tIns="0" rIns="0" bIns="0" rtlCol="0" anchor="ctr"/>
           <a:lstStyle/>
           <a:p>
-            <a:pPr algn="ctr" indent="0" marL="0">
+            <a:pPr marL="0" indent="0" algn="ctr">
               <a:buNone/>
             </a:pPr>
             <a:r>
@@ -10790,7 +10732,7 @@
           <a:bodyPr wrap="square" lIns="0" tIns="0" rIns="0" bIns="0" rtlCol="0" anchor="ctr"/>
           <a:lstStyle/>
           <a:p>
-            <a:pPr indent="0" marL="0">
+            <a:pPr marL="0" indent="0">
               <a:buNone/>
             </a:pPr>
             <a:r>
@@ -10829,7 +10771,7 @@
           <a:bodyPr wrap="square" lIns="0" tIns="0" rIns="0" bIns="0" rtlCol="0" anchor="ctr"/>
           <a:lstStyle/>
           <a:p>
-            <a:pPr indent="0" marL="0">
+            <a:pPr marL="0" indent="0">
               <a:buNone/>
             </a:pPr>
             <a:r>
@@ -10868,10 +10810,6 @@
           </a:solidFill>
           <a:ln/>
         </p:spPr>
-        <p:txBody>
-          <a:bodyPr/>
-          <a:p/>
-        </p:txBody>
       </p:sp>
       <p:sp>
         <p:nvSpPr>
@@ -10894,7 +10832,7 @@
           <a:bodyPr wrap="square" lIns="0" tIns="0" rIns="0" bIns="0" rtlCol="0" anchor="ctr"/>
           <a:lstStyle/>
           <a:p>
-            <a:pPr indent="0" marL="0">
+            <a:pPr marL="0" indent="0">
               <a:buNone/>
             </a:pPr>
             <a:r>
@@ -10933,7 +10871,7 @@
           <a:bodyPr wrap="square" lIns="0" tIns="0" rIns="0" bIns="0" rtlCol="0" anchor="ctr"/>
           <a:lstStyle/>
           <a:p>
-            <a:pPr indent="0" marL="0">
+            <a:pPr marL="0" indent="0">
               <a:buNone/>
             </a:pPr>
             <a:r>
@@ -10972,7 +10910,7 @@
           <a:bodyPr wrap="square" lIns="0" tIns="0" rIns="0" bIns="0" rtlCol="0" anchor="ctr"/>
           <a:lstStyle/>
           <a:p>
-            <a:pPr algn="r" indent="0" marL="0">
+            <a:pPr marL="0" indent="0" algn="r">
               <a:buNone/>
             </a:pPr>
             <a:r>
@@ -11012,10 +10950,6 @@
             <a:prstDash val="solid"/>
           </a:ln>
         </p:spPr>
-        <p:txBody>
-          <a:bodyPr/>
-          <a:p/>
-        </p:txBody>
       </p:sp>
       <p:sp>
         <p:nvSpPr>
@@ -11038,7 +10972,7 @@
           <a:bodyPr wrap="square" lIns="0" tIns="0" rIns="0" bIns="0" rtlCol="0" anchor="ctr"/>
           <a:lstStyle/>
           <a:p>
-            <a:pPr indent="0" marL="0">
+            <a:pPr marL="0" indent="0">
               <a:buNone/>
             </a:pPr>
             <a:r>
@@ -11077,7 +11011,7 @@
           <a:bodyPr wrap="square" lIns="0" tIns="0" rIns="0" bIns="0" rtlCol="0" anchor="ctr"/>
           <a:lstStyle/>
           <a:p>
-            <a:pPr algn="r" indent="0" marL="0">
+            <a:pPr marL="0" indent="0" algn="r">
               <a:buNone/>
             </a:pPr>
             <a:r>
@@ -11117,10 +11051,6 @@
             <a:prstDash val="solid"/>
           </a:ln>
         </p:spPr>
-        <p:txBody>
-          <a:bodyPr/>
-          <a:p/>
-        </p:txBody>
       </p:sp>
       <p:sp>
         <p:nvSpPr>
@@ -11143,7 +11073,7 @@
           <a:bodyPr wrap="square" lIns="0" tIns="0" rIns="0" bIns="0" rtlCol="0" anchor="ctr"/>
           <a:lstStyle/>
           <a:p>
-            <a:pPr indent="0" marL="0">
+            <a:pPr marL="0" indent="0">
               <a:buNone/>
             </a:pPr>
             <a:r>
@@ -11182,7 +11112,7 @@
           <a:bodyPr wrap="square" lIns="0" tIns="0" rIns="0" bIns="0" rtlCol="0" anchor="ctr"/>
           <a:lstStyle/>
           <a:p>
-            <a:pPr algn="r" indent="0" marL="0">
+            <a:pPr marL="0" indent="0" algn="r">
               <a:buNone/>
             </a:pPr>
             <a:r>
@@ -11222,10 +11152,6 @@
             <a:prstDash val="solid"/>
           </a:ln>
         </p:spPr>
-        <p:txBody>
-          <a:bodyPr/>
-          <a:p/>
-        </p:txBody>
       </p:sp>
       <p:sp>
         <p:nvSpPr>
@@ -11248,7 +11174,7 @@
           <a:bodyPr wrap="square" lIns="0" tIns="0" rIns="0" bIns="0" rtlCol="0" anchor="ctr"/>
           <a:lstStyle/>
           <a:p>
-            <a:pPr indent="0" marL="0">
+            <a:pPr marL="0" indent="0">
               <a:buNone/>
             </a:pPr>
             <a:r>
@@ -11287,7 +11213,7 @@
           <a:bodyPr wrap="square" lIns="0" tIns="0" rIns="0" bIns="0" rtlCol="0" anchor="ctr"/>
           <a:lstStyle/>
           <a:p>
-            <a:pPr algn="l" indent="0" marL="0">
+            <a:pPr marL="0" indent="0" algn="l">
               <a:buNone/>
             </a:pPr>
             <a:r>
@@ -11326,7 +11252,7 @@
           <a:bodyPr wrap="square" lIns="0" tIns="0" rIns="0" bIns="0" rtlCol="0" anchor="ctr"/>
           <a:lstStyle/>
           <a:p>
-            <a:pPr algn="r" indent="0" marL="0">
+            <a:pPr marL="0" indent="0" algn="r">
               <a:buNone/>
             </a:pPr>
             <a:r>
@@ -11360,6 +11286,7 @@
         <a:solidFill>
           <a:srgbClr val="F4F6FA"/>
         </a:solidFill>
+        <a:effectLst/>
       </p:bgPr>
     </p:bg>
     <p:spTree>
@@ -11397,7 +11324,7 @@
           <a:bodyPr wrap="square" lIns="0" tIns="0" rIns="0" bIns="0" rtlCol="0" anchor="ctr"/>
           <a:lstStyle/>
           <a:p>
-            <a:pPr indent="0" marL="0">
+            <a:pPr marL="0" indent="0">
               <a:buNone/>
             </a:pPr>
             <a:r>
@@ -11436,7 +11363,7 @@
           <a:bodyPr wrap="square" lIns="0" tIns="0" rIns="0" bIns="0" rtlCol="0" anchor="ctr"/>
           <a:lstStyle/>
           <a:p>
-            <a:pPr indent="0" marL="0">
+            <a:pPr marL="0" indent="0">
               <a:buNone/>
             </a:pPr>
             <a:r>
@@ -11475,17 +11402,13 @@
           </a:solidFill>
           <a:ln/>
           <a:effectLst>
-            <a:outerShdw sx="100000" sy="100000" kx="0" ky="0" algn="bl" rotWithShape="0" blurRad="63500" dist="25400" dir="5400000">
+            <a:outerShdw blurRad="63500" dist="25400" dir="5400000" algn="bl" rotWithShape="0">
               <a:srgbClr val="888888">
                 <a:alpha val="20000"/>
               </a:srgbClr>
             </a:outerShdw>
           </a:effectLst>
         </p:spPr>
-        <p:txBody>
-          <a:bodyPr/>
-          <a:p/>
-        </p:txBody>
       </p:sp>
       <p:sp>
         <p:nvSpPr>
@@ -11508,7 +11431,7 @@
           <a:bodyPr wrap="square" lIns="0" tIns="0" rIns="0" bIns="0" rtlCol="0" anchor="ctr"/>
           <a:lstStyle/>
           <a:p>
-            <a:pPr indent="0" marL="0">
+            <a:pPr marL="0" indent="0">
               <a:buNone/>
             </a:pPr>
             <a:r>
@@ -11547,7 +11470,7 @@
           <a:bodyPr wrap="square" lIns="0" tIns="0" rIns="0" bIns="0" rtlCol="0" anchor="ctr"/>
           <a:lstStyle/>
           <a:p>
-            <a:pPr indent="0" marL="0">
+            <a:pPr marL="0" indent="0">
               <a:buNone/>
             </a:pPr>
             <a:r>
@@ -11586,7 +11509,7 @@
           <a:bodyPr wrap="square" lIns="0" tIns="0" rIns="0" bIns="0" rtlCol="0" anchor="ctr"/>
           <a:lstStyle/>
           <a:p>
-            <a:pPr indent="0" marL="0">
+            <a:pPr marL="0" indent="0">
               <a:buNone/>
             </a:pPr>
             <a:r>
@@ -11625,17 +11548,13 @@
           </a:solidFill>
           <a:ln/>
           <a:effectLst>
-            <a:outerShdw sx="100000" sy="100000" kx="0" ky="0" algn="bl" rotWithShape="0" blurRad="63500" dist="25400" dir="5400000">
+            <a:outerShdw blurRad="63500" dist="25400" dir="5400000" algn="bl" rotWithShape="0">
               <a:srgbClr val="888888">
                 <a:alpha val="20000"/>
               </a:srgbClr>
             </a:outerShdw>
           </a:effectLst>
         </p:spPr>
-        <p:txBody>
-          <a:bodyPr/>
-          <a:p/>
-        </p:txBody>
       </p:sp>
       <p:sp>
         <p:nvSpPr>
@@ -11658,7 +11577,7 @@
           <a:bodyPr wrap="square" lIns="0" tIns="0" rIns="0" bIns="0" rtlCol="0" anchor="ctr"/>
           <a:lstStyle/>
           <a:p>
-            <a:pPr indent="0" marL="0">
+            <a:pPr marL="0" indent="0">
               <a:buNone/>
             </a:pPr>
             <a:r>
@@ -11697,7 +11616,7 @@
           <a:bodyPr wrap="square" lIns="0" tIns="0" rIns="0" bIns="0" rtlCol="0" anchor="ctr"/>
           <a:lstStyle/>
           <a:p>
-            <a:pPr indent="0" marL="0">
+            <a:pPr marL="0" indent="0">
               <a:buNone/>
             </a:pPr>
             <a:r>
@@ -11736,7 +11655,7 @@
           <a:bodyPr wrap="square" lIns="0" tIns="0" rIns="0" bIns="0" rtlCol="0" anchor="ctr"/>
           <a:lstStyle/>
           <a:p>
-            <a:pPr indent="0" marL="0">
+            <a:pPr marL="0" indent="0">
               <a:buNone/>
             </a:pPr>
             <a:r>
@@ -11775,17 +11694,13 @@
           </a:solidFill>
           <a:ln/>
           <a:effectLst>
-            <a:outerShdw sx="100000" sy="100000" kx="0" ky="0" algn="bl" rotWithShape="0" blurRad="63500" dist="25400" dir="5400000">
+            <a:outerShdw blurRad="63500" dist="25400" dir="5400000" algn="bl" rotWithShape="0">
               <a:srgbClr val="888888">
                 <a:alpha val="20000"/>
               </a:srgbClr>
             </a:outerShdw>
           </a:effectLst>
         </p:spPr>
-        <p:txBody>
-          <a:bodyPr/>
-          <a:p/>
-        </p:txBody>
       </p:sp>
       <p:sp>
         <p:nvSpPr>
@@ -11808,7 +11723,7 @@
           <a:bodyPr wrap="square" lIns="0" tIns="0" rIns="0" bIns="0" rtlCol="0" anchor="ctr"/>
           <a:lstStyle/>
           <a:p>
-            <a:pPr indent="0" marL="0">
+            <a:pPr marL="0" indent="0">
               <a:buNone/>
             </a:pPr>
             <a:r>
@@ -11847,7 +11762,7 @@
           <a:bodyPr wrap="square" lIns="0" tIns="0" rIns="0" bIns="0" rtlCol="0" anchor="ctr"/>
           <a:lstStyle/>
           <a:p>
-            <a:pPr indent="0" marL="0">
+            <a:pPr marL="0" indent="0">
               <a:buNone/>
             </a:pPr>
             <a:r>
@@ -11886,7 +11801,7 @@
           <a:bodyPr wrap="square" lIns="0" tIns="0" rIns="0" bIns="0" rtlCol="0" anchor="ctr"/>
           <a:lstStyle/>
           <a:p>
-            <a:pPr indent="0" marL="0">
+            <a:pPr marL="0" indent="0">
               <a:buNone/>
             </a:pPr>
             <a:r>
@@ -11925,17 +11840,13 @@
           </a:solidFill>
           <a:ln/>
           <a:effectLst>
-            <a:outerShdw sx="100000" sy="100000" kx="0" ky="0" algn="bl" rotWithShape="0" blurRad="63500" dist="25400" dir="5400000">
+            <a:outerShdw blurRad="63500" dist="25400" dir="5400000" algn="bl" rotWithShape="0">
               <a:srgbClr val="888888">
                 <a:alpha val="20000"/>
               </a:srgbClr>
             </a:outerShdw>
           </a:effectLst>
         </p:spPr>
-        <p:txBody>
-          <a:bodyPr/>
-          <a:p/>
-        </p:txBody>
       </p:sp>
       <p:sp>
         <p:nvSpPr>
@@ -11958,7 +11869,7 @@
           <a:bodyPr wrap="square" lIns="0" tIns="0" rIns="0" bIns="0" rtlCol="0" anchor="ctr"/>
           <a:lstStyle/>
           <a:p>
-            <a:pPr indent="0" marL="0">
+            <a:pPr marL="0" indent="0">
               <a:buNone/>
             </a:pPr>
             <a:r>
@@ -11997,7 +11908,7 @@
           <a:bodyPr wrap="square" lIns="0" tIns="0" rIns="0" bIns="0" rtlCol="0" anchor="ctr"/>
           <a:lstStyle/>
           <a:p>
-            <a:pPr indent="0" marL="0">
+            <a:pPr marL="0" indent="0">
               <a:buNone/>
             </a:pPr>
             <a:r>
@@ -12036,7 +11947,7 @@
           <a:bodyPr wrap="square" lIns="0" tIns="0" rIns="0" bIns="0" rtlCol="0" anchor="ctr"/>
           <a:lstStyle/>
           <a:p>
-            <a:pPr indent="0" marL="0">
+            <a:pPr marL="0" indent="0">
               <a:buNone/>
             </a:pPr>
             <a:r>
@@ -12075,7 +11986,7 @@
           <a:bodyPr wrap="square" lIns="0" tIns="0" rIns="0" bIns="0" rtlCol="0" anchor="ctr"/>
           <a:lstStyle/>
           <a:p>
-            <a:pPr algn="l" indent="0" marL="0">
+            <a:pPr marL="0" indent="0" algn="l">
               <a:buNone/>
             </a:pPr>
             <a:r>
@@ -12114,7 +12025,7 @@
           <a:bodyPr wrap="square" lIns="0" tIns="0" rIns="0" bIns="0" rtlCol="0" anchor="ctr"/>
           <a:lstStyle/>
           <a:p>
-            <a:pPr algn="r" indent="0" marL="0">
+            <a:pPr marL="0" indent="0" algn="r">
               <a:buNone/>
             </a:pPr>
             <a:r>
@@ -12148,6 +12059,7 @@
         <a:solidFill>
           <a:srgbClr val="FFFFFF"/>
         </a:solidFill>
+        <a:effectLst/>
       </p:bgPr>
     </p:bg>
     <p:spTree>
@@ -12185,7 +12097,7 @@
           <a:bodyPr wrap="square" lIns="0" tIns="0" rIns="0" bIns="0" rtlCol="0" anchor="ctr"/>
           <a:lstStyle/>
           <a:p>
-            <a:pPr indent="0" marL="0">
+            <a:pPr marL="0" indent="0">
               <a:buNone/>
             </a:pPr>
             <a:r>
@@ -12224,7 +12136,7 @@
           <a:bodyPr wrap="square" lIns="0" tIns="0" rIns="0" bIns="0" rtlCol="0" anchor="ctr"/>
           <a:lstStyle/>
           <a:p>
-            <a:pPr indent="0" marL="0">
+            <a:pPr marL="0" indent="0">
               <a:buNone/>
             </a:pPr>
             <a:r>
@@ -12263,7 +12175,7 @@
           <a:bodyPr wrap="square" lIns="0" tIns="0" rIns="0" bIns="0" rtlCol="0" anchor="ctr"/>
           <a:lstStyle/>
           <a:p>
-            <a:pPr indent="0" marL="0">
+            <a:pPr marL="0" indent="0">
               <a:lnSpc>
                 <a:spcPct val="140000"/>
               </a:lnSpc>
@@ -12280,12 +12192,6 @@
               </a:rPr>
               <a:t>Tensão de alimentação: </a:t>
             </a:r>
-            <a:pPr indent="0" marL="0">
-              <a:lnSpc>
-                <a:spcPct val="140000"/>
-              </a:lnSpc>
-              <a:buNone/>
-            </a:pPr>
             <a:r>
               <a:rPr lang="en-US" sz="1250" dirty="0">
                 <a:solidFill>
@@ -12298,12 +12204,6 @@
               <a:t>380V trifásico
 </a:t>
             </a:r>
-            <a:pPr indent="0" marL="0">
-              <a:lnSpc>
-                <a:spcPct val="140000"/>
-              </a:lnSpc>
-              <a:buNone/>
-            </a:pPr>
             <a:r>
               <a:rPr lang="en-US" sz="1250" b="1" dirty="0">
                 <a:solidFill>
@@ -12315,12 +12215,6 @@
               </a:rPr>
               <a:t>Fator de potência (cos phi): </a:t>
             </a:r>
-            <a:pPr indent="0" marL="0">
-              <a:lnSpc>
-                <a:spcPct val="140000"/>
-              </a:lnSpc>
-              <a:buNone/>
-            </a:pPr>
             <a:r>
               <a:rPr lang="en-US" sz="1250" dirty="0">
                 <a:solidFill>
@@ -12333,12 +12227,6 @@
               <a:t>0,95
 </a:t>
             </a:r>
-            <a:pPr indent="0" marL="0">
-              <a:lnSpc>
-                <a:spcPct val="140000"/>
-              </a:lnSpc>
-              <a:buNone/>
-            </a:pPr>
             <a:r>
               <a:rPr lang="en-US" sz="1250" b="1" dirty="0">
                 <a:solidFill>
@@ -12350,12 +12238,6 @@
               </a:rPr>
               <a:t>Corrente nominal: </a:t>
             </a:r>
-            <a:pPr indent="0" marL="0">
-              <a:lnSpc>
-                <a:spcPct val="140000"/>
-              </a:lnSpc>
-              <a:buNone/>
-            </a:pPr>
             <a:r>
               <a:rPr lang="en-US" sz="1250" dirty="0">
                 <a:solidFill>
@@ -12368,12 +12250,6 @@
               <a:t>I = (P_total x 1000) / (raiz(3) x 380 x 0,95)
 </a:t>
             </a:r>
-            <a:pPr indent="0" marL="0">
-              <a:lnSpc>
-                <a:spcPct val="140000"/>
-              </a:lnSpc>
-              <a:buNone/>
-            </a:pPr>
             <a:r>
               <a:rPr lang="en-US" sz="1250" b="1" dirty="0">
                 <a:solidFill>
@@ -12385,12 +12261,6 @@
               </a:rPr>
               <a:t>Constante mensal: </a:t>
             </a:r>
-            <a:pPr indent="0" marL="0">
-              <a:lnSpc>
-                <a:spcPct val="140000"/>
-              </a:lnSpc>
-              <a:buNone/>
-            </a:pPr>
             <a:r>
               <a:rPr lang="en-US" sz="1250" dirty="0">
                 <a:solidFill>
@@ -12427,7 +12297,7 @@
           <a:bodyPr wrap="square" lIns="0" tIns="0" rIns="0" bIns="0" rtlCol="0" anchor="ctr"/>
           <a:lstStyle/>
           <a:p>
-            <a:pPr indent="0" marL="0">
+            <a:pPr marL="0" indent="0">
               <a:buNone/>
             </a:pPr>
             <a:r>
@@ -12466,10 +12336,6 @@
           </a:solidFill>
           <a:ln/>
         </p:spPr>
-        <p:txBody>
-          <a:bodyPr/>
-          <a:p/>
-        </p:txBody>
       </p:sp>
       <p:sp>
         <p:nvSpPr>
@@ -12492,7 +12358,7 @@
           <a:bodyPr wrap="square" lIns="0" tIns="0" rIns="0" bIns="0" rtlCol="0" anchor="ctr"/>
           <a:lstStyle/>
           <a:p>
-            <a:pPr indent="0" marL="0">
+            <a:pPr marL="0" indent="0">
               <a:buNone/>
             </a:pPr>
             <a:r>
@@ -12507,9 +12373,6 @@
               <a:t>Pull-Down — 1,5h
 </a:t>
             </a:r>
-            <a:pPr indent="0" marL="0">
-              <a:buNone/>
-            </a:pPr>
             <a:r>
               <a:rPr lang="en-US" sz="1050" dirty="0">
                 <a:solidFill>
@@ -12546,10 +12409,6 @@
           </a:solidFill>
           <a:ln/>
         </p:spPr>
-        <p:txBody>
-          <a:bodyPr/>
-          <a:p/>
-        </p:txBody>
       </p:sp>
       <p:sp>
         <p:nvSpPr>
@@ -12572,7 +12431,7 @@
           <a:bodyPr wrap="square" lIns="0" tIns="0" rIns="0" bIns="0" rtlCol="0" anchor="ctr"/>
           <a:lstStyle/>
           <a:p>
-            <a:pPr indent="0" marL="0">
+            <a:pPr marL="0" indent="0">
               <a:buNone/>
             </a:pPr>
             <a:r>
@@ -12587,9 +12446,6 @@
               <a:t>Manutenção — 10,5h
 </a:t>
             </a:r>
-            <a:pPr indent="0" marL="0">
-              <a:buNone/>
-            </a:pPr>
             <a:r>
               <a:rPr lang="en-US" sz="1050" dirty="0">
                 <a:solidFill>
@@ -12626,10 +12482,6 @@
           </a:solidFill>
           <a:ln/>
         </p:spPr>
-        <p:txBody>
-          <a:bodyPr/>
-          <a:p/>
-        </p:txBody>
       </p:sp>
       <p:sp>
         <p:nvSpPr>
@@ -12652,7 +12504,7 @@
           <a:bodyPr wrap="square" lIns="0" tIns="0" rIns="0" bIns="0" rtlCol="0" anchor="ctr"/>
           <a:lstStyle/>
           <a:p>
-            <a:pPr indent="0" marL="0">
+            <a:pPr marL="0" indent="0">
               <a:buNone/>
             </a:pPr>
             <a:r>
@@ -12691,7 +12543,7 @@
           <a:bodyPr wrap="square" lIns="0" tIns="0" rIns="0" bIns="0" rtlCol="0" anchor="ctr"/>
           <a:lstStyle/>
           <a:p>
-            <a:pPr indent="0" marL="0">
+            <a:pPr marL="0" indent="0">
               <a:buNone/>
             </a:pPr>
             <a:r>
@@ -12730,7 +12582,7 @@
           <a:bodyPr wrap="square" lIns="0" tIns="0" rIns="0" bIns="0" rtlCol="0" anchor="ctr"/>
           <a:lstStyle/>
           <a:p>
-            <a:pPr indent="0" marL="0">
+            <a:pPr marL="0" indent="0">
               <a:lnSpc>
                 <a:spcPct val="130000"/>
               </a:lnSpc>
@@ -12750,7 +12602,7 @@
             <a:endParaRPr lang="en-US" sz="1050" dirty="0"/>
           </a:p>
           <a:p>
-            <a:pPr indent="0" marL="0">
+            <a:pPr marL="0" indent="0">
               <a:lnSpc>
                 <a:spcPct val="130000"/>
               </a:lnSpc>
@@ -12793,10 +12645,6 @@
             <a:prstDash val="solid"/>
           </a:ln>
         </p:spPr>
-        <p:txBody>
-          <a:bodyPr/>
-          <a:p/>
-        </p:txBody>
       </p:sp>
       <p:sp>
         <p:nvSpPr>
@@ -12819,7 +12667,7 @@
           <a:bodyPr wrap="square" lIns="0" tIns="0" rIns="0" bIns="0" rtlCol="0" anchor="ctr"/>
           <a:lstStyle/>
           <a:p>
-            <a:pPr indent="0" marL="0">
+            <a:pPr marL="0" indent="0">
               <a:buNone/>
             </a:pPr>
             <a:r>
@@ -12858,7 +12706,7 @@
           <a:bodyPr wrap="square" lIns="0" tIns="0" rIns="0" bIns="0" rtlCol="0" anchor="ctr"/>
           <a:lstStyle/>
           <a:p>
-            <a:pPr indent="0" marL="0">
+            <a:pPr marL="0" indent="0">
               <a:lnSpc>
                 <a:spcPct val="130000"/>
               </a:lnSpc>
@@ -12878,7 +12726,7 @@
             <a:endParaRPr lang="en-US" sz="1000" dirty="0"/>
           </a:p>
           <a:p>
-            <a:pPr indent="0" marL="0">
+            <a:pPr marL="0" indent="0">
               <a:lnSpc>
                 <a:spcPct val="130000"/>
               </a:lnSpc>
@@ -12920,7 +12768,7 @@
           <a:bodyPr wrap="square" lIns="0" tIns="0" rIns="0" bIns="0" rtlCol="0" anchor="ctr"/>
           <a:lstStyle/>
           <a:p>
-            <a:pPr algn="l" indent="0" marL="0">
+            <a:pPr marL="0" indent="0" algn="l">
               <a:buNone/>
             </a:pPr>
             <a:r>
@@ -12959,7 +12807,7 @@
           <a:bodyPr wrap="square" lIns="0" tIns="0" rIns="0" bIns="0" rtlCol="0" anchor="ctr"/>
           <a:lstStyle/>
           <a:p>
-            <a:pPr algn="r" indent="0" marL="0">
+            <a:pPr marL="0" indent="0" algn="r">
               <a:buNone/>
             </a:pPr>
             <a:r>
@@ -12993,6 +12841,7 @@
         <a:solidFill>
           <a:srgbClr val="F4F6FA"/>
         </a:solidFill>
+        <a:effectLst/>
       </p:bgPr>
     </p:bg>
     <p:spTree>
@@ -13030,7 +12879,7 @@
           <a:bodyPr wrap="square" lIns="0" tIns="0" rIns="0" bIns="0" rtlCol="0" anchor="ctr"/>
           <a:lstStyle/>
           <a:p>
-            <a:pPr indent="0" marL="0">
+            <a:pPr marL="0" indent="0">
               <a:buNone/>
             </a:pPr>
             <a:r>
@@ -13057,7 +12906,7 @@
           <p:nvPr>
             <p:extLst>
               <p:ext uri="{D42A27DB-BD31-4B8C-83A1-F6EECF244321}">
-                <p14:modId xmlns:p14="http://schemas.microsoft.com/office/powerpoint/2010/main" val="1579011935"/>
+                <p14:modId xmlns:p14="http://schemas.microsoft.com/office/powerpoint/2010/main" val="4216483421"/>
               </p:ext>
             </p:extLst>
           </p:nvPr>
@@ -13071,9 +12920,27 @@
             <a:tbl>
               <a:tblPr/>
               <a:tblGrid>
-                <a:gridCol w="6126480"/>
-                <a:gridCol w="2377440"/>
-                <a:gridCol w="2011680"/>
+                <a:gridCol w="6126480">
+                  <a:extLst>
+                    <a:ext uri="{9D8B030D-6E8A-4147-A177-3AD203B41FA5}">
+                      <a16:colId xmlns:a16="http://schemas.microsoft.com/office/drawing/2014/main" val="20000"/>
+                    </a:ext>
+                  </a:extLst>
+                </a:gridCol>
+                <a:gridCol w="2377440">
+                  <a:extLst>
+                    <a:ext uri="{9D8B030D-6E8A-4147-A177-3AD203B41FA5}">
+                      <a16:colId xmlns:a16="http://schemas.microsoft.com/office/drawing/2014/main" val="20001"/>
+                    </a:ext>
+                  </a:extLst>
+                </a:gridCol>
+                <a:gridCol w="2011680">
+                  <a:extLst>
+                    <a:ext uri="{9D8B030D-6E8A-4147-A177-3AD203B41FA5}">
+                      <a16:colId xmlns:a16="http://schemas.microsoft.com/office/drawing/2014/main" val="20002"/>
+                    </a:ext>
+                  </a:extLst>
+                </a:gridCol>
               </a:tblGrid>
               <a:tr h="365760">
                 <a:tc>
@@ -13081,7 +12948,7 @@
                     <a:bodyPr/>
                     <a:lstStyle/>
                     <a:p>
-                      <a:pPr algn="l" indent="0" marL="0">
+                      <a:pPr marL="0" indent="0" algn="l">
                         <a:buNone/>
                       </a:pPr>
                       <a:r>
@@ -13102,7 +12969,7 @@
                       </a:endParaRPr>
                     </a:p>
                   </a:txBody>
-                  <a:tcPr marL="91440" marR="91440" marT="45720" marB="45720" anchor="ctr">
+                  <a:tcPr anchor="ctr">
                     <a:lnL w="0" cap="flat" cmpd="sng" algn="ctr">
                       <a:noFill/>
                     </a:lnL>
@@ -13125,7 +12992,7 @@
                     <a:bodyPr/>
                     <a:lstStyle/>
                     <a:p>
-                      <a:pPr algn="l" indent="0" marL="0">
+                      <a:pPr marL="0" indent="0" algn="l">
                         <a:buNone/>
                       </a:pPr>
                       <a:r>
@@ -13146,7 +13013,7 @@
                       </a:endParaRPr>
                     </a:p>
                   </a:txBody>
-                  <a:tcPr marL="91440" marR="91440" marT="45720" marB="45720" anchor="ctr">
+                  <a:tcPr anchor="ctr">
                     <a:lnL w="0" cap="flat" cmpd="sng" algn="ctr">
                       <a:noFill/>
                     </a:lnL>
@@ -13169,7 +13036,7 @@
                     <a:bodyPr/>
                     <a:lstStyle/>
                     <a:p>
-                      <a:pPr algn="l" indent="0" marL="0">
+                      <a:pPr marL="0" indent="0" algn="l">
                         <a:buNone/>
                       </a:pPr>
                       <a:r>
@@ -13190,7 +13057,7 @@
                       </a:endParaRPr>
                     </a:p>
                   </a:txBody>
-                  <a:tcPr marL="91440" marR="91440" marT="45720" marB="45720" anchor="ctr">
+                  <a:tcPr anchor="ctr">
                     <a:lnL w="0" cap="flat" cmpd="sng" algn="ctr">
                       <a:noFill/>
                     </a:lnL>
@@ -13208,6 +13075,11 @@
                     </a:solidFill>
                   </a:tcPr>
                 </a:tc>
+                <a:extLst>
+                  <a:ext uri="{0D108BD9-81ED-4DB2-BD59-A6C34878D82A}">
+                    <a16:rowId xmlns:a16="http://schemas.microsoft.com/office/drawing/2014/main" val="10000"/>
+                  </a:ext>
+                </a:extLst>
               </a:tr>
               <a:tr h="365760">
                 <a:tc>
@@ -13215,7 +13087,7 @@
                     <a:bodyPr/>
                     <a:lstStyle/>
                     <a:p>
-                      <a:pPr algn="l" indent="0" marL="0">
+                      <a:pPr marL="0" indent="0" algn="l">
                         <a:buNone/>
                       </a:pPr>
                       <a:r>
@@ -13236,7 +13108,7 @@
                       </a:endParaRPr>
                     </a:p>
                   </a:txBody>
-                  <a:tcPr marL="91440" marR="91440" marT="45720" marB="45720" anchor="ctr">
+                  <a:tcPr anchor="ctr">
                     <a:lnL w="0" cap="flat" cmpd="sng" algn="ctr">
                       <a:noFill/>
                     </a:lnL>
@@ -13259,7 +13131,7 @@
                     <a:bodyPr/>
                     <a:lstStyle/>
                     <a:p>
-                      <a:pPr algn="ctr" indent="0" marL="0">
+                      <a:pPr marL="0" indent="0" algn="ctr">
                         <a:buNone/>
                       </a:pPr>
                       <a:r>
@@ -13280,7 +13152,7 @@
                       </a:endParaRPr>
                     </a:p>
                   </a:txBody>
-                  <a:tcPr marL="91440" marR="91440" marT="45720" marB="45720" anchor="ctr">
+                  <a:tcPr anchor="ctr">
                     <a:lnL w="0" cap="flat" cmpd="sng" algn="ctr">
                       <a:noFill/>
                     </a:lnL>
@@ -13303,7 +13175,7 @@
                     <a:bodyPr/>
                     <a:lstStyle/>
                     <a:p>
-                      <a:pPr algn="ctr" indent="0" marL="0">
+                      <a:pPr marL="0" indent="0" algn="ctr">
                         <a:buNone/>
                       </a:pPr>
                       <a:r>
@@ -13324,7 +13196,7 @@
                       </a:endParaRPr>
                     </a:p>
                   </a:txBody>
-                  <a:tcPr marL="91440" marR="91440" marT="45720" marB="45720" anchor="ctr">
+                  <a:tcPr anchor="ctr">
                     <a:lnL w="0" cap="flat" cmpd="sng" algn="ctr">
                       <a:noFill/>
                     </a:lnL>
@@ -13342,6 +13214,11 @@
                     </a:solidFill>
                   </a:tcPr>
                 </a:tc>
+                <a:extLst>
+                  <a:ext uri="{0D108BD9-81ED-4DB2-BD59-A6C34878D82A}">
+                    <a16:rowId xmlns:a16="http://schemas.microsoft.com/office/drawing/2014/main" val="10001"/>
+                  </a:ext>
+                </a:extLst>
               </a:tr>
               <a:tr h="365760">
                 <a:tc>
@@ -13349,7 +13226,7 @@
                     <a:bodyPr/>
                     <a:lstStyle/>
                     <a:p>
-                      <a:pPr algn="l" indent="0" marL="0">
+                      <a:pPr marL="0" indent="0" algn="l">
                         <a:buNone/>
                       </a:pPr>
                       <a:r>
@@ -13370,7 +13247,7 @@
                       </a:endParaRPr>
                     </a:p>
                   </a:txBody>
-                  <a:tcPr marL="91440" marR="91440" marT="45720" marB="45720" anchor="ctr">
+                  <a:tcPr anchor="ctr">
                     <a:lnL w="0" cap="flat" cmpd="sng" algn="ctr">
                       <a:noFill/>
                     </a:lnL>
@@ -13393,7 +13270,7 @@
                     <a:bodyPr/>
                     <a:lstStyle/>
                     <a:p>
-                      <a:pPr algn="ctr" indent="0" marL="0">
+                      <a:pPr marL="0" indent="0" algn="ctr">
                         <a:buNone/>
                       </a:pPr>
                       <a:r>
@@ -13414,7 +13291,7 @@
                       </a:endParaRPr>
                     </a:p>
                   </a:txBody>
-                  <a:tcPr marL="91440" marR="91440" marT="45720" marB="45720" anchor="ctr">
+                  <a:tcPr anchor="ctr">
                     <a:lnL w="0" cap="flat" cmpd="sng" algn="ctr">
                       <a:noFill/>
                     </a:lnL>
@@ -13437,7 +13314,7 @@
                     <a:bodyPr/>
                     <a:lstStyle/>
                     <a:p>
-                      <a:pPr algn="ctr" indent="0" marL="0">
+                      <a:pPr marL="0" indent="0" algn="ctr">
                         <a:buNone/>
                       </a:pPr>
                       <a:r>
@@ -13458,7 +13335,7 @@
                       </a:endParaRPr>
                     </a:p>
                   </a:txBody>
-                  <a:tcPr marL="91440" marR="91440" marT="45720" marB="45720" anchor="ctr">
+                  <a:tcPr anchor="ctr">
                     <a:lnL w="0" cap="flat" cmpd="sng" algn="ctr">
                       <a:noFill/>
                     </a:lnL>
@@ -13476,6 +13353,11 @@
                     </a:solidFill>
                   </a:tcPr>
                 </a:tc>
+                <a:extLst>
+                  <a:ext uri="{0D108BD9-81ED-4DB2-BD59-A6C34878D82A}">
+                    <a16:rowId xmlns:a16="http://schemas.microsoft.com/office/drawing/2014/main" val="10002"/>
+                  </a:ext>
+                </a:extLst>
               </a:tr>
               <a:tr h="365760">
                 <a:tc>
@@ -13483,7 +13365,7 @@
                     <a:bodyPr/>
                     <a:lstStyle/>
                     <a:p>
-                      <a:pPr algn="l" indent="0" marL="0">
+                      <a:pPr marL="0" indent="0" algn="l">
                         <a:buNone/>
                       </a:pPr>
                       <a:r>
@@ -13504,7 +13386,7 @@
                       </a:endParaRPr>
                     </a:p>
                   </a:txBody>
-                  <a:tcPr marL="91440" marR="91440" marT="45720" marB="45720" anchor="ctr">
+                  <a:tcPr anchor="ctr">
                     <a:lnL w="0" cap="flat" cmpd="sng" algn="ctr">
                       <a:noFill/>
                     </a:lnL>
@@ -13527,7 +13409,7 @@
                     <a:bodyPr/>
                     <a:lstStyle/>
                     <a:p>
-                      <a:pPr algn="ctr" indent="0" marL="0">
+                      <a:pPr marL="0" indent="0" algn="ctr">
                         <a:buNone/>
                       </a:pPr>
                       <a:r>
@@ -13548,7 +13430,7 @@
                       </a:endParaRPr>
                     </a:p>
                   </a:txBody>
-                  <a:tcPr marL="91440" marR="91440" marT="45720" marB="45720" anchor="ctr">
+                  <a:tcPr anchor="ctr">
                     <a:lnL w="0" cap="flat" cmpd="sng" algn="ctr">
                       <a:noFill/>
                     </a:lnL>
@@ -13571,7 +13453,7 @@
                     <a:bodyPr/>
                     <a:lstStyle/>
                     <a:p>
-                      <a:pPr algn="ctr" indent="0" marL="0">
+                      <a:pPr marL="0" indent="0" algn="ctr">
                         <a:buNone/>
                       </a:pPr>
                       <a:r>
@@ -13592,7 +13474,7 @@
                       </a:endParaRPr>
                     </a:p>
                   </a:txBody>
-                  <a:tcPr marL="91440" marR="91440" marT="45720" marB="45720" anchor="ctr">
+                  <a:tcPr anchor="ctr">
                     <a:lnL w="0" cap="flat" cmpd="sng" algn="ctr">
                       <a:noFill/>
                     </a:lnL>
@@ -13610,6 +13492,11 @@
                     </a:solidFill>
                   </a:tcPr>
                 </a:tc>
+                <a:extLst>
+                  <a:ext uri="{0D108BD9-81ED-4DB2-BD59-A6C34878D82A}">
+                    <a16:rowId xmlns:a16="http://schemas.microsoft.com/office/drawing/2014/main" val="10003"/>
+                  </a:ext>
+                </a:extLst>
               </a:tr>
               <a:tr h="365760">
                 <a:tc>
@@ -13617,7 +13504,7 @@
                     <a:bodyPr/>
                     <a:lstStyle/>
                     <a:p>
-                      <a:pPr algn="l" indent="0" marL="0">
+                      <a:pPr marL="0" indent="0" algn="l">
                         <a:buNone/>
                       </a:pPr>
                       <a:r>
@@ -13638,7 +13525,7 @@
                       </a:endParaRPr>
                     </a:p>
                   </a:txBody>
-                  <a:tcPr marL="91440" marR="91440" marT="45720" marB="45720" anchor="ctr">
+                  <a:tcPr anchor="ctr">
                     <a:lnL w="0" cap="flat" cmpd="sng" algn="ctr">
                       <a:noFill/>
                     </a:lnL>
@@ -13661,11 +13548,11 @@
                     <a:bodyPr/>
                     <a:lstStyle/>
                     <a:p>
-                      <a:pPr algn="ctr" indent="0" marL="0">
+                      <a:pPr marL="0" indent="0" algn="ctr">
                         <a:buNone/>
                       </a:pPr>
                       <a:r>
-                        <a:rPr lang="en-US" sz="1050" dirty="0">
+                        <a:rPr lang="en-US" sz="1050">
                           <a:solidFill>
                             <a:srgbClr val="1E2761"/>
                           </a:solidFill>
@@ -13682,7 +13569,7 @@
                       </a:endParaRPr>
                     </a:p>
                   </a:txBody>
-                  <a:tcPr marL="91440" marR="91440" marT="45720" marB="45720" anchor="ctr">
+                  <a:tcPr anchor="ctr">
                     <a:lnL w="0" cap="flat" cmpd="sng" algn="ctr">
                       <a:noFill/>
                     </a:lnL>
@@ -13705,7 +13592,7 @@
                     <a:bodyPr/>
                     <a:lstStyle/>
                     <a:p>
-                      <a:pPr algn="ctr" indent="0" marL="0">
+                      <a:pPr marL="0" indent="0" algn="ctr">
                         <a:buNone/>
                       </a:pPr>
                       <a:r>
@@ -13726,7 +13613,7 @@
                       </a:endParaRPr>
                     </a:p>
                   </a:txBody>
-                  <a:tcPr marL="91440" marR="91440" marT="45720" marB="45720" anchor="ctr">
+                  <a:tcPr anchor="ctr">
                     <a:lnL w="0" cap="flat" cmpd="sng" algn="ctr">
                       <a:noFill/>
                     </a:lnL>
@@ -13744,6 +13631,11 @@
                     </a:solidFill>
                   </a:tcPr>
                 </a:tc>
+                <a:extLst>
+                  <a:ext uri="{0D108BD9-81ED-4DB2-BD59-A6C34878D82A}">
+                    <a16:rowId xmlns:a16="http://schemas.microsoft.com/office/drawing/2014/main" val="10004"/>
+                  </a:ext>
+                </a:extLst>
               </a:tr>
               <a:tr h="365760">
                 <a:tc>
@@ -13751,7 +13643,7 @@
                     <a:bodyPr/>
                     <a:lstStyle/>
                     <a:p>
-                      <a:pPr algn="l" indent="0" marL="0">
+                      <a:pPr marL="0" indent="0" algn="l">
                         <a:buNone/>
                       </a:pPr>
                       <a:r>
@@ -13772,7 +13664,7 @@
                       </a:endParaRPr>
                     </a:p>
                   </a:txBody>
-                  <a:tcPr marL="91440" marR="91440" marT="45720" marB="45720" anchor="ctr">
+                  <a:tcPr anchor="ctr">
                     <a:lnL w="0" cap="flat" cmpd="sng" algn="ctr">
                       <a:noFill/>
                     </a:lnL>
@@ -13795,7 +13687,7 @@
                     <a:bodyPr/>
                     <a:lstStyle/>
                     <a:p>
-                      <a:pPr algn="ctr" indent="0" marL="0">
+                      <a:pPr marL="0" indent="0" algn="ctr">
                         <a:buNone/>
                       </a:pPr>
                       <a:r>
@@ -13816,7 +13708,7 @@
                       </a:endParaRPr>
                     </a:p>
                   </a:txBody>
-                  <a:tcPr marL="91440" marR="91440" marT="45720" marB="45720" anchor="ctr">
+                  <a:tcPr anchor="ctr">
                     <a:lnL w="0" cap="flat" cmpd="sng" algn="ctr">
                       <a:noFill/>
                     </a:lnL>
@@ -13839,7 +13731,7 @@
                     <a:bodyPr/>
                     <a:lstStyle/>
                     <a:p>
-                      <a:pPr algn="ctr" indent="0" marL="0">
+                      <a:pPr marL="0" indent="0" algn="ctr">
                         <a:buNone/>
                       </a:pPr>
                       <a:r>
@@ -13860,7 +13752,7 @@
                       </a:endParaRPr>
                     </a:p>
                   </a:txBody>
-                  <a:tcPr marL="91440" marR="91440" marT="45720" marB="45720" anchor="ctr">
+                  <a:tcPr anchor="ctr">
                     <a:lnL w="0" cap="flat" cmpd="sng" algn="ctr">
                       <a:noFill/>
                     </a:lnL>
@@ -13878,6 +13770,11 @@
                     </a:solidFill>
                   </a:tcPr>
                 </a:tc>
+                <a:extLst>
+                  <a:ext uri="{0D108BD9-81ED-4DB2-BD59-A6C34878D82A}">
+                    <a16:rowId xmlns:a16="http://schemas.microsoft.com/office/drawing/2014/main" val="10005"/>
+                  </a:ext>
+                </a:extLst>
               </a:tr>
               <a:tr h="365760">
                 <a:tc>
@@ -13885,7 +13782,7 @@
                     <a:bodyPr/>
                     <a:lstStyle/>
                     <a:p>
-                      <a:pPr algn="l" indent="0" marL="0">
+                      <a:pPr marL="0" indent="0" algn="l">
                         <a:buNone/>
                       </a:pPr>
                       <a:r>
@@ -13906,7 +13803,7 @@
                       </a:endParaRPr>
                     </a:p>
                   </a:txBody>
-                  <a:tcPr marL="91440" marR="91440" marT="45720" marB="45720" anchor="ctr">
+                  <a:tcPr anchor="ctr">
                     <a:lnL w="0" cap="flat" cmpd="sng" algn="ctr">
                       <a:noFill/>
                     </a:lnL>
@@ -13929,11 +13826,11 @@
                     <a:bodyPr/>
                     <a:lstStyle/>
                     <a:p>
-                      <a:pPr algn="ctr" indent="0" marL="0">
+                      <a:pPr marL="0" indent="0" algn="ctr">
                         <a:buNone/>
                       </a:pPr>
                       <a:r>
-                        <a:rPr lang="en-US" sz="1050" dirty="0">
+                        <a:rPr lang="en-US" sz="1050">
                           <a:solidFill>
                             <a:srgbClr val="1E2761"/>
                           </a:solidFill>
@@ -13941,7 +13838,7 @@
                           <a:ea typeface="Calibri" pitchFamily="34" charset="-122"/>
                           <a:cs typeface="Calibri" pitchFamily="34" charset="-120"/>
                         </a:rPr>
-                        <a:t>0,70 (70%)</a:t>
+                        <a:t>0.70 (70%)</a:t>
                       </a:r>
                       <a:endParaRPr lang="en-US" sz="1050" dirty="0">
                         <a:latin typeface="Calibri" charset="0"/>
@@ -13950,7 +13847,7 @@
                       </a:endParaRPr>
                     </a:p>
                   </a:txBody>
-                  <a:tcPr marL="91440" marR="91440" marT="45720" marB="45720" anchor="ctr">
+                  <a:tcPr anchor="ctr">
                     <a:lnL w="0" cap="flat" cmpd="sng" algn="ctr">
                       <a:noFill/>
                     </a:lnL>
@@ -13973,7 +13870,7 @@
                     <a:bodyPr/>
                     <a:lstStyle/>
                     <a:p>
-                      <a:pPr algn="ctr" indent="0" marL="0">
+                      <a:pPr marL="0" indent="0" algn="ctr">
                         <a:buNone/>
                       </a:pPr>
                       <a:r>
@@ -13994,7 +13891,7 @@
                       </a:endParaRPr>
                     </a:p>
                   </a:txBody>
-                  <a:tcPr marL="91440" marR="91440" marT="45720" marB="45720" anchor="ctr">
+                  <a:tcPr anchor="ctr">
                     <a:lnL w="0" cap="flat" cmpd="sng" algn="ctr">
                       <a:noFill/>
                     </a:lnL>
@@ -14012,6 +13909,11 @@
                     </a:solidFill>
                   </a:tcPr>
                 </a:tc>
+                <a:extLst>
+                  <a:ext uri="{0D108BD9-81ED-4DB2-BD59-A6C34878D82A}">
+                    <a16:rowId xmlns:a16="http://schemas.microsoft.com/office/drawing/2014/main" val="10006"/>
+                  </a:ext>
+                </a:extLst>
               </a:tr>
               <a:tr h="365760">
                 <a:tc>
@@ -14019,7 +13921,7 @@
                     <a:bodyPr/>
                     <a:lstStyle/>
                     <a:p>
-                      <a:pPr algn="l" indent="0" marL="0">
+                      <a:pPr marL="0" indent="0" algn="l">
                         <a:buNone/>
                       </a:pPr>
                       <a:r>
@@ -14040,7 +13942,7 @@
                       </a:endParaRPr>
                     </a:p>
                   </a:txBody>
-                  <a:tcPr marL="91440" marR="91440" marT="45720" marB="45720" anchor="ctr">
+                  <a:tcPr anchor="ctr">
                     <a:lnL w="0" cap="flat" cmpd="sng" algn="ctr">
                       <a:noFill/>
                     </a:lnL>
@@ -14063,11 +13965,11 @@
                     <a:bodyPr/>
                     <a:lstStyle/>
                     <a:p>
-                      <a:pPr algn="ctr" indent="0" marL="0">
+                      <a:pPr marL="0" indent="0" algn="ctr">
                         <a:buNone/>
                       </a:pPr>
                       <a:r>
-                        <a:rPr lang="en-US" sz="1050" dirty="0">
+                        <a:rPr lang="en-US" sz="1050">
                           <a:solidFill>
                             <a:srgbClr val="1E2761"/>
                           </a:solidFill>
@@ -14075,7 +13977,7 @@
                           <a:ea typeface="Calibri" pitchFamily="34" charset="-122"/>
                           <a:cs typeface="Calibri" pitchFamily="34" charset="-120"/>
                         </a:rPr>
-                        <a:t>0,70 (70%)</a:t>
+                        <a:t>0.70 (70%)</a:t>
                       </a:r>
                       <a:endParaRPr lang="en-US" sz="1050" dirty="0">
                         <a:latin typeface="Calibri" charset="0"/>
@@ -14084,7 +13986,7 @@
                       </a:endParaRPr>
                     </a:p>
                   </a:txBody>
-                  <a:tcPr marL="91440" marR="91440" marT="45720" marB="45720" anchor="ctr">
+                  <a:tcPr anchor="ctr">
                     <a:lnL w="0" cap="flat" cmpd="sng" algn="ctr">
                       <a:noFill/>
                     </a:lnL>
@@ -14107,7 +14009,7 @@
                     <a:bodyPr/>
                     <a:lstStyle/>
                     <a:p>
-                      <a:pPr algn="ctr" indent="0" marL="0">
+                      <a:pPr marL="0" indent="0" algn="ctr">
                         <a:buNone/>
                       </a:pPr>
                       <a:r>
@@ -14128,7 +14030,7 @@
                       </a:endParaRPr>
                     </a:p>
                   </a:txBody>
-                  <a:tcPr marL="91440" marR="91440" marT="45720" marB="45720" anchor="ctr">
+                  <a:tcPr anchor="ctr">
                     <a:lnL w="0" cap="flat" cmpd="sng" algn="ctr">
                       <a:noFill/>
                     </a:lnL>
@@ -14146,6 +14048,11 @@
                     </a:solidFill>
                   </a:tcPr>
                 </a:tc>
+                <a:extLst>
+                  <a:ext uri="{0D108BD9-81ED-4DB2-BD59-A6C34878D82A}">
+                    <a16:rowId xmlns:a16="http://schemas.microsoft.com/office/drawing/2014/main" val="10007"/>
+                  </a:ext>
+                </a:extLst>
               </a:tr>
               <a:tr h="365760">
                 <a:tc>
@@ -14153,7 +14060,7 @@
                     <a:bodyPr/>
                     <a:lstStyle/>
                     <a:p>
-                      <a:pPr algn="l" indent="0" marL="0">
+                      <a:pPr marL="0" indent="0" algn="l">
                         <a:buNone/>
                       </a:pPr>
                       <a:r>
@@ -14174,7 +14081,7 @@
                       </a:endParaRPr>
                     </a:p>
                   </a:txBody>
-                  <a:tcPr marL="91440" marR="91440" marT="45720" marB="45720" anchor="ctr">
+                  <a:tcPr anchor="ctr">
                     <a:lnL w="0" cap="flat" cmpd="sng" algn="ctr">
                       <a:noFill/>
                     </a:lnL>
@@ -14197,11 +14104,11 @@
                     <a:bodyPr/>
                     <a:lstStyle/>
                     <a:p>
-                      <a:pPr algn="ctr" indent="0" marL="0">
+                      <a:pPr marL="0" indent="0" algn="ctr">
                         <a:buNone/>
                       </a:pPr>
                       <a:r>
-                        <a:rPr lang="en-US" sz="1050" dirty="0">
+                        <a:rPr lang="en-US" sz="1050">
                           <a:solidFill>
                             <a:srgbClr val="1E2761"/>
                           </a:solidFill>
@@ -14209,7 +14116,7 @@
                           <a:ea typeface="Calibri" pitchFamily="34" charset="-122"/>
                           <a:cs typeface="Calibri" pitchFamily="34" charset="-120"/>
                         </a:rPr>
-                        <a:t>0,50 (50%)</a:t>
+                        <a:t>0.50 (50%)</a:t>
                       </a:r>
                       <a:endParaRPr lang="en-US" sz="1050" dirty="0">
                         <a:latin typeface="Calibri" charset="0"/>
@@ -14218,7 +14125,7 @@
                       </a:endParaRPr>
                     </a:p>
                   </a:txBody>
-                  <a:tcPr marL="91440" marR="91440" marT="45720" marB="45720" anchor="ctr">
+                  <a:tcPr anchor="ctr">
                     <a:lnL w="0" cap="flat" cmpd="sng" algn="ctr">
                       <a:noFill/>
                     </a:lnL>
@@ -14241,7 +14148,7 @@
                     <a:bodyPr/>
                     <a:lstStyle/>
                     <a:p>
-                      <a:pPr algn="ctr" indent="0" marL="0">
+                      <a:pPr marL="0" indent="0" algn="ctr">
                         <a:buNone/>
                       </a:pPr>
                       <a:r>
@@ -14262,7 +14169,7 @@
                       </a:endParaRPr>
                     </a:p>
                   </a:txBody>
-                  <a:tcPr marL="91440" marR="91440" marT="45720" marB="45720" anchor="ctr">
+                  <a:tcPr anchor="ctr">
                     <a:lnL w="0" cap="flat" cmpd="sng" algn="ctr">
                       <a:noFill/>
                     </a:lnL>
@@ -14280,6 +14187,11 @@
                     </a:solidFill>
                   </a:tcPr>
                 </a:tc>
+                <a:extLst>
+                  <a:ext uri="{0D108BD9-81ED-4DB2-BD59-A6C34878D82A}">
+                    <a16:rowId xmlns:a16="http://schemas.microsoft.com/office/drawing/2014/main" val="10008"/>
+                  </a:ext>
+                </a:extLst>
               </a:tr>
               <a:tr h="365760">
                 <a:tc>
@@ -14287,7 +14199,7 @@
                     <a:bodyPr/>
                     <a:lstStyle/>
                     <a:p>
-                      <a:pPr algn="l" indent="0" marL="0">
+                      <a:pPr marL="0" indent="0" algn="l">
                         <a:buNone/>
                       </a:pPr>
                       <a:r>
@@ -14308,7 +14220,7 @@
                       </a:endParaRPr>
                     </a:p>
                   </a:txBody>
-                  <a:tcPr marL="91440" marR="91440" marT="45720" marB="45720" anchor="ctr">
+                  <a:tcPr anchor="ctr">
                     <a:lnL w="0" cap="flat" cmpd="sng" algn="ctr">
                       <a:noFill/>
                     </a:lnL>
@@ -14331,7 +14243,7 @@
                     <a:bodyPr/>
                     <a:lstStyle/>
                     <a:p>
-                      <a:pPr algn="ctr" indent="0" marL="0">
+                      <a:pPr marL="0" indent="0" algn="ctr">
                         <a:buNone/>
                       </a:pPr>
                       <a:r>
@@ -14352,7 +14264,7 @@
                       </a:endParaRPr>
                     </a:p>
                   </a:txBody>
-                  <a:tcPr marL="91440" marR="91440" marT="45720" marB="45720" anchor="ctr">
+                  <a:tcPr anchor="ctr">
                     <a:lnL w="0" cap="flat" cmpd="sng" algn="ctr">
                       <a:noFill/>
                     </a:lnL>
@@ -14375,7 +14287,7 @@
                     <a:bodyPr/>
                     <a:lstStyle/>
                     <a:p>
-                      <a:pPr algn="ctr" indent="0" marL="0">
+                      <a:pPr marL="0" indent="0" algn="ctr">
                         <a:buNone/>
                       </a:pPr>
                       <a:r>
@@ -14396,7 +14308,7 @@
                       </a:endParaRPr>
                     </a:p>
                   </a:txBody>
-                  <a:tcPr marL="91440" marR="91440" marT="45720" marB="45720" anchor="ctr">
+                  <a:tcPr anchor="ctr">
                     <a:lnL w="0" cap="flat" cmpd="sng" algn="ctr">
                       <a:noFill/>
                     </a:lnL>
@@ -14414,6 +14326,11 @@
                     </a:solidFill>
                   </a:tcPr>
                 </a:tc>
+                <a:extLst>
+                  <a:ext uri="{0D108BD9-81ED-4DB2-BD59-A6C34878D82A}">
+                    <a16:rowId xmlns:a16="http://schemas.microsoft.com/office/drawing/2014/main" val="10009"/>
+                  </a:ext>
+                </a:extLst>
               </a:tr>
               <a:tr h="365760">
                 <a:tc>
@@ -14421,7 +14338,7 @@
                     <a:bodyPr/>
                     <a:lstStyle/>
                     <a:p>
-                      <a:pPr algn="l" indent="0" marL="0">
+                      <a:pPr marL="0" indent="0" algn="l">
                         <a:buNone/>
                       </a:pPr>
                       <a:r>
@@ -14442,7 +14359,7 @@
                       </a:endParaRPr>
                     </a:p>
                   </a:txBody>
-                  <a:tcPr marL="91440" marR="91440" marT="45720" marB="45720" anchor="ctr">
+                  <a:tcPr anchor="ctr">
                     <a:lnL w="0" cap="flat" cmpd="sng" algn="ctr">
                       <a:noFill/>
                     </a:lnL>
@@ -14465,7 +14382,7 @@
                     <a:bodyPr/>
                     <a:lstStyle/>
                     <a:p>
-                      <a:pPr algn="ctr" indent="0" marL="0">
+                      <a:pPr marL="0" indent="0" algn="ctr">
                         <a:buNone/>
                       </a:pPr>
                       <a:r>
@@ -14486,7 +14403,7 @@
                       </a:endParaRPr>
                     </a:p>
                   </a:txBody>
-                  <a:tcPr marL="91440" marR="91440" marT="45720" marB="45720" anchor="ctr">
+                  <a:tcPr anchor="ctr">
                     <a:lnL w="0" cap="flat" cmpd="sng" algn="ctr">
                       <a:noFill/>
                     </a:lnL>
@@ -14509,7 +14426,7 @@
                     <a:bodyPr/>
                     <a:lstStyle/>
                     <a:p>
-                      <a:pPr algn="ctr" indent="0" marL="0">
+                      <a:pPr marL="0" indent="0" algn="ctr">
                         <a:buNone/>
                       </a:pPr>
                       <a:r>
@@ -14530,7 +14447,7 @@
                       </a:endParaRPr>
                     </a:p>
                   </a:txBody>
-                  <a:tcPr marL="91440" marR="91440" marT="45720" marB="45720" anchor="ctr">
+                  <a:tcPr anchor="ctr">
                     <a:lnL w="0" cap="flat" cmpd="sng" algn="ctr">
                       <a:noFill/>
                     </a:lnL>
@@ -14548,6 +14465,11 @@
                     </a:solidFill>
                   </a:tcPr>
                 </a:tc>
+                <a:extLst>
+                  <a:ext uri="{0D108BD9-81ED-4DB2-BD59-A6C34878D82A}">
+                    <a16:rowId xmlns:a16="http://schemas.microsoft.com/office/drawing/2014/main" val="10010"/>
+                  </a:ext>
+                </a:extLst>
               </a:tr>
               <a:tr h="365760">
                 <a:tc>
@@ -14555,7 +14477,7 @@
                     <a:bodyPr/>
                     <a:lstStyle/>
                     <a:p>
-                      <a:pPr algn="l" indent="0" marL="0">
+                      <a:pPr marL="0" indent="0" algn="l">
                         <a:buNone/>
                       </a:pPr>
                       <a:r>
@@ -14576,7 +14498,7 @@
                       </a:endParaRPr>
                     </a:p>
                   </a:txBody>
-                  <a:tcPr marL="91440" marR="91440" marT="45720" marB="45720" anchor="ctr">
+                  <a:tcPr anchor="ctr">
                     <a:lnL w="0" cap="flat" cmpd="sng" algn="ctr">
                       <a:noFill/>
                     </a:lnL>
@@ -14599,7 +14521,7 @@
                     <a:bodyPr/>
                     <a:lstStyle/>
                     <a:p>
-                      <a:pPr algn="ctr" indent="0" marL="0">
+                      <a:pPr marL="0" indent="0" algn="ctr">
                         <a:buNone/>
                       </a:pPr>
                       <a:r>
@@ -14620,7 +14542,7 @@
                       </a:endParaRPr>
                     </a:p>
                   </a:txBody>
-                  <a:tcPr marL="91440" marR="91440" marT="45720" marB="45720" anchor="ctr">
+                  <a:tcPr anchor="ctr">
                     <a:lnL w="0" cap="flat" cmpd="sng" algn="ctr">
                       <a:noFill/>
                     </a:lnL>
@@ -14643,7 +14565,7 @@
                     <a:bodyPr/>
                     <a:lstStyle/>
                     <a:p>
-                      <a:pPr algn="ctr" indent="0" marL="0">
+                      <a:pPr marL="0" indent="0" algn="ctr">
                         <a:buNone/>
                       </a:pPr>
                       <a:r>
@@ -14664,7 +14586,7 @@
                       </a:endParaRPr>
                     </a:p>
                   </a:txBody>
-                  <a:tcPr marL="91440" marR="91440" marT="45720" marB="45720" anchor="ctr">
+                  <a:tcPr anchor="ctr">
                     <a:lnL w="0" cap="flat" cmpd="sng" algn="ctr">
                       <a:noFill/>
                     </a:lnL>
@@ -14682,6 +14604,11 @@
                     </a:solidFill>
                   </a:tcPr>
                 </a:tc>
+                <a:extLst>
+                  <a:ext uri="{0D108BD9-81ED-4DB2-BD59-A6C34878D82A}">
+                    <a16:rowId xmlns:a16="http://schemas.microsoft.com/office/drawing/2014/main" val="10011"/>
+                  </a:ext>
+                </a:extLst>
               </a:tr>
               <a:tr h="365760">
                 <a:tc>
@@ -14689,7 +14616,7 @@
                     <a:bodyPr/>
                     <a:lstStyle/>
                     <a:p>
-                      <a:pPr algn="l" indent="0" marL="0">
+                      <a:pPr marL="0" indent="0" algn="l">
                         <a:buNone/>
                       </a:pPr>
                       <a:r>
@@ -14710,7 +14637,7 @@
                       </a:endParaRPr>
                     </a:p>
                   </a:txBody>
-                  <a:tcPr marL="91440" marR="91440" marT="45720" marB="45720" anchor="ctr">
+                  <a:tcPr anchor="ctr">
                     <a:lnL w="0" cap="flat" cmpd="sng" algn="ctr">
                       <a:noFill/>
                     </a:lnL>
@@ -14733,7 +14660,7 @@
                     <a:bodyPr/>
                     <a:lstStyle/>
                     <a:p>
-                      <a:pPr algn="ctr" indent="0" marL="0">
+                      <a:pPr marL="0" indent="0" algn="ctr">
                         <a:buNone/>
                       </a:pPr>
                       <a:r>
@@ -14754,7 +14681,7 @@
                       </a:endParaRPr>
                     </a:p>
                   </a:txBody>
-                  <a:tcPr marL="91440" marR="91440" marT="45720" marB="45720" anchor="ctr">
+                  <a:tcPr anchor="ctr">
                     <a:lnL w="0" cap="flat" cmpd="sng" algn="ctr">
                       <a:noFill/>
                     </a:lnL>
@@ -14777,7 +14704,7 @@
                     <a:bodyPr/>
                     <a:lstStyle/>
                     <a:p>
-                      <a:pPr algn="ctr" indent="0" marL="0">
+                      <a:pPr marL="0" indent="0" algn="ctr">
                         <a:buNone/>
                       </a:pPr>
                       <a:r>
@@ -14798,7 +14725,7 @@
                       </a:endParaRPr>
                     </a:p>
                   </a:txBody>
-                  <a:tcPr marL="91440" marR="91440" marT="45720" marB="45720" anchor="ctr">
+                  <a:tcPr anchor="ctr">
                     <a:lnL w="0" cap="flat" cmpd="sng" algn="ctr">
                       <a:noFill/>
                     </a:lnL>
@@ -14816,6 +14743,11 @@
                     </a:solidFill>
                   </a:tcPr>
                 </a:tc>
+                <a:extLst>
+                  <a:ext uri="{0D108BD9-81ED-4DB2-BD59-A6C34878D82A}">
+                    <a16:rowId xmlns:a16="http://schemas.microsoft.com/office/drawing/2014/main" val="10012"/>
+                  </a:ext>
+                </a:extLst>
               </a:tr>
               <a:tr h="365760">
                 <a:tc>
@@ -14823,7 +14755,7 @@
                     <a:bodyPr/>
                     <a:lstStyle/>
                     <a:p>
-                      <a:pPr algn="l" indent="0" marL="0">
+                      <a:pPr marL="0" indent="0" algn="l">
                         <a:buNone/>
                       </a:pPr>
                       <a:r>
@@ -14844,7 +14776,7 @@
                       </a:endParaRPr>
                     </a:p>
                   </a:txBody>
-                  <a:tcPr marL="91440" marR="91440" marT="45720" marB="45720" anchor="ctr">
+                  <a:tcPr anchor="ctr">
                     <a:lnL w="0" cap="flat" cmpd="sng" algn="ctr">
                       <a:noFill/>
                     </a:lnL>
@@ -14867,7 +14799,7 @@
                     <a:bodyPr/>
                     <a:lstStyle/>
                     <a:p>
-                      <a:pPr algn="ctr" indent="0" marL="0">
+                      <a:pPr marL="0" indent="0" algn="ctr">
                         <a:buNone/>
                       </a:pPr>
                       <a:r>
@@ -14888,7 +14820,7 @@
                       </a:endParaRPr>
                     </a:p>
                   </a:txBody>
-                  <a:tcPr marL="91440" marR="91440" marT="45720" marB="45720" anchor="ctr">
+                  <a:tcPr anchor="ctr">
                     <a:lnL w="0" cap="flat" cmpd="sng" algn="ctr">
                       <a:noFill/>
                     </a:lnL>
@@ -14911,7 +14843,7 @@
                     <a:bodyPr/>
                     <a:lstStyle/>
                     <a:p>
-                      <a:pPr algn="ctr" indent="0" marL="0">
+                      <a:pPr marL="0" indent="0" algn="ctr">
                         <a:buNone/>
                       </a:pPr>
                       <a:r>
@@ -14932,7 +14864,7 @@
                       </a:endParaRPr>
                     </a:p>
                   </a:txBody>
-                  <a:tcPr marL="91440" marR="91440" marT="45720" marB="45720" anchor="ctr">
+                  <a:tcPr anchor="ctr">
                     <a:lnL w="0" cap="flat" cmpd="sng" algn="ctr">
                       <a:noFill/>
                     </a:lnL>
@@ -14950,6 +14882,11 @@
                     </a:solidFill>
                   </a:tcPr>
                 </a:tc>
+                <a:extLst>
+                  <a:ext uri="{0D108BD9-81ED-4DB2-BD59-A6C34878D82A}">
+                    <a16:rowId xmlns:a16="http://schemas.microsoft.com/office/drawing/2014/main" val="10013"/>
+                  </a:ext>
+                </a:extLst>
               </a:tr>
             </a:tbl>
           </a:graphicData>
@@ -14976,7 +14913,7 @@
           <a:bodyPr wrap="square" lIns="0" tIns="0" rIns="0" bIns="0" rtlCol="0" anchor="ctr"/>
           <a:lstStyle/>
           <a:p>
-            <a:pPr algn="l" indent="0" marL="0">
+            <a:pPr marL="0" indent="0" algn="l">
               <a:buNone/>
             </a:pPr>
             <a:r>
@@ -15015,7 +14952,7 @@
           <a:bodyPr wrap="square" lIns="0" tIns="0" rIns="0" bIns="0" rtlCol="0" anchor="ctr"/>
           <a:lstStyle/>
           <a:p>
-            <a:pPr algn="r" indent="0" marL="0">
+            <a:pPr marL="0" indent="0" algn="r">
               <a:buNone/>
             </a:pPr>
             <a:r>
@@ -15049,6 +14986,7 @@
         <a:solidFill>
           <a:srgbClr val="FFFFFF"/>
         </a:solidFill>
+        <a:effectLst/>
       </p:bgPr>
     </p:bg>
     <p:spTree>
@@ -15086,7 +15024,7 @@
           <a:bodyPr wrap="square" lIns="0" tIns="0" rIns="0" bIns="0" rtlCol="0" anchor="ctr"/>
           <a:lstStyle/>
           <a:p>
-            <a:pPr indent="0" marL="0">
+            <a:pPr marL="0" indent="0">
               <a:buNone/>
             </a:pPr>
             <a:r>
@@ -15125,7 +15063,7 @@
           <a:bodyPr wrap="square" lIns="0" tIns="0" rIns="0" bIns="0" rtlCol="0" anchor="ctr"/>
           <a:lstStyle/>
           <a:p>
-            <a:pPr indent="0" marL="0">
+            <a:pPr marL="0" indent="0">
               <a:buNone/>
             </a:pPr>
             <a:r>
@@ -15164,7 +15102,7 @@
           <a:bodyPr wrap="square" lIns="0" tIns="0" rIns="0" bIns="0" rtlCol="0" anchor="ctr"/>
           <a:lstStyle/>
           <a:p>
-            <a:pPr indent="0" marL="0">
+            <a:pPr marL="0" indent="0">
               <a:buNone/>
             </a:pPr>
             <a:r>
@@ -15184,7 +15122,7 @@
       </p:sp>
       <p:graphicFrame>
         <p:nvGraphicFramePr>
-          <p:cNvPr id="5" name="Chart 0" descr=""/>
+          <p:cNvPr id="5" name="Chart 0"/>
           <p:cNvGraphicFramePr/>
           <p:nvPr/>
         </p:nvGraphicFramePr>
@@ -15192,9 +15130,9 @@
           <a:off x="548640" y="1783080"/>
           <a:ext cx="5394960" cy="1965960"/>
         </p:xfrm>
-        <a:graphic xmlns:a="http://schemas.openxmlformats.org/drawingml/2006/main">
+        <a:graphic>
           <a:graphicData uri="http://schemas.openxmlformats.org/drawingml/2006/chart">
-            <c:chart xmlns:c="http://schemas.openxmlformats.org/drawingml/2006/chart" r:id="rId1"/>
+            <c:chart xmlns:c="http://schemas.openxmlformats.org/drawingml/2006/chart" xmlns:r="http://schemas.openxmlformats.org/officeDocument/2006/relationships" r:id="rId3"/>
           </a:graphicData>
         </a:graphic>
       </p:graphicFrame>
@@ -15219,7 +15157,7 @@
           <a:bodyPr wrap="square" lIns="0" tIns="0" rIns="0" bIns="0" rtlCol="0" anchor="ctr"/>
           <a:lstStyle/>
           <a:p>
-            <a:pPr indent="0" marL="0">
+            <a:pPr marL="0" indent="0">
               <a:buNone/>
             </a:pPr>
             <a:r>
@@ -15239,7 +15177,7 @@
       </p:sp>
       <p:graphicFrame>
         <p:nvGraphicFramePr>
-          <p:cNvPr id="7" name="Chart 1" descr=""/>
+          <p:cNvPr id="7" name="Chart 1"/>
           <p:cNvGraphicFramePr/>
           <p:nvPr/>
         </p:nvGraphicFramePr>
@@ -15247,9 +15185,9 @@
           <a:off x="6263640" y="1783080"/>
           <a:ext cx="5394960" cy="1965960"/>
         </p:xfrm>
-        <a:graphic xmlns:a="http://schemas.openxmlformats.org/drawingml/2006/main">
+        <a:graphic>
           <a:graphicData uri="http://schemas.openxmlformats.org/drawingml/2006/chart">
-            <c:chart xmlns:c="http://schemas.openxmlformats.org/drawingml/2006/chart" r:id="rId2"/>
+            <c:chart xmlns:c="http://schemas.openxmlformats.org/drawingml/2006/chart" xmlns:r="http://schemas.openxmlformats.org/officeDocument/2006/relationships" r:id="rId4"/>
           </a:graphicData>
         </a:graphic>
       </p:graphicFrame>
@@ -15274,10 +15212,6 @@
           </a:solidFill>
           <a:ln/>
         </p:spPr>
-        <p:txBody>
-          <a:bodyPr/>
-          <a:p/>
-        </p:txBody>
       </p:sp>
       <p:sp>
         <p:nvSpPr>
@@ -15300,7 +15234,7 @@
           <a:bodyPr wrap="square" lIns="0" tIns="0" rIns="0" bIns="0" rtlCol="0" anchor="ctr"/>
           <a:lstStyle/>
           <a:p>
-            <a:pPr indent="0" marL="0">
+            <a:pPr marL="0" indent="0">
               <a:lnSpc>
                 <a:spcPct val="130000"/>
               </a:lnSpc>
@@ -15317,12 +15251,6 @@
               </a:rPr>
               <a:t>Horas de operação: </a:t>
             </a:r>
-            <a:pPr indent="0" marL="0">
-              <a:lnSpc>
-                <a:spcPct val="130000"/>
-              </a:lnSpc>
-              <a:buNone/>
-            </a:pPr>
             <a:r>
               <a:rPr lang="en-US" sz="1050" dirty="0">
                 <a:solidFill>
@@ -15334,12 +15262,6 @@
               </a:rPr>
               <a:t>+2h/dia (Black Friday/Natal) eleva a economia para R$ 259.294,79/ano (payback 13,9 meses).   </a:t>
             </a:r>
-            <a:pPr indent="0" marL="0">
-              <a:lnSpc>
-                <a:spcPct val="130000"/>
-              </a:lnSpc>
-              <a:buNone/>
-            </a:pPr>
             <a:r>
               <a:rPr lang="en-US" sz="1050" b="1" dirty="0">
                 <a:solidFill>
@@ -15351,12 +15273,6 @@
               </a:rPr>
               <a:t>CAPEX: </a:t>
             </a:r>
-            <a:pPr indent="0" marL="0">
-              <a:lnSpc>
-                <a:spcPct val="130000"/>
-              </a:lnSpc>
-              <a:buNone/>
-            </a:pPr>
             <a:r>
               <a:rPr lang="en-US" sz="1050" dirty="0">
                 <a:solidFill>
@@ -15393,10 +15309,6 @@
           </a:solidFill>
           <a:ln/>
         </p:spPr>
-        <p:txBody>
-          <a:bodyPr/>
-          <a:p/>
-        </p:txBody>
       </p:sp>
       <p:sp>
         <p:nvSpPr>
@@ -15419,58 +15331,93 @@
           <a:bodyPr wrap="square" lIns="0" tIns="0" rIns="0" bIns="0" rtlCol="0" anchor="ctr"/>
           <a:lstStyle/>
           <a:p>
-            <a:pPr indent="0" marL="0">
+            <a:pPr marL="0" indent="0">
               <a:lnSpc>
                 <a:spcPct val="135000"/>
               </a:lnSpc>
               <a:buNone/>
             </a:pPr>
-            <a:pPr indent="0" marL="0">
-              <a:lnSpc>
-                <a:spcPct val="135000"/>
-              </a:lnSpc>
-              <a:buNone/>
-            </a:pPr>
-            <a:r>
-              <a:t>Escala linear por máquina retrofitada: cada climatizador gera R$ 477,38/mês (R$ 5.728,59/ano) de economia líquida individual — 10 máquinas = R$ 57.285,90/ano; 38 máquinas (parque total) = R$ 217.686,42/ano.</a:t>
-            </a:r>
-            <a:endParaRPr lang="en-US" sz="1150" dirty="0"/>
-          </a:p>
-        </p:txBody>
-      </p:sp>
-      <p:sp>
-        <p:nvSpPr>
-          <p:cNvPr id="12" name="Text 8"/>
-          <p:cNvSpPr txBox="1"/>
-          <p:nvPr/>
-        </p:nvSpPr>
-        <p:spPr>
-          <a:xfrm>
-            <a:off x="457200" y="6473952"/>
-            <a:ext cx="6400800" cy="274320"/>
-          </a:xfrm>
-          <a:prstGeom prst="rect">
-            <a:avLst/>
-          </a:prstGeom>
-          <a:noFill/>
-          <a:ln/>
-        </p:spPr>
-        <p:txBody>
-          <a:bodyPr wrap="square" lIns="0" tIns="0" rIns="0" bIns="0" rtlCol="0" anchor="ctr"/>
-          <a:lstStyle/>
-          <a:p>
-            <a:pPr algn="l" indent="0" marL="0">
-              <a:buNone/>
-            </a:pPr>
-            <a:r>
-              <a:rPr lang="en-US" sz="900" dirty="0">
-                <a:solidFill>
-                  <a:srgbClr val="5A6472"/>
+            <a:r>
+              <a:rPr lang="en-US" sz="1150" b="1" dirty="0">
+                <a:solidFill>
+                  <a:srgbClr val="FFFFFF"/>
                 </a:solidFill>
                 <a:latin typeface="Calibri" pitchFamily="34" charset="0"/>
                 <a:ea typeface="Calibri" pitchFamily="34" charset="-122"/>
                 <a:cs typeface="Calibri" pitchFamily="34" charset="-120"/>
               </a:rPr>
+              <a:t>Escala linear por máquina retrofitada: </a:t>
+            </a:r>
+            <a:r>
+              <a:rPr lang="en-US" sz="1150" dirty="0">
+                <a:solidFill>
+                  <a:srgbClr val="CADCFC"/>
+                </a:solidFill>
+                <a:latin typeface="Calibri" pitchFamily="34" charset="0"/>
+                <a:ea typeface="Calibri" pitchFamily="34" charset="-122"/>
+                <a:cs typeface="Calibri" pitchFamily="34" charset="-120"/>
+              </a:rPr>
+              <a:t>cada climatizador gera R$ 477,38/mês (R$ 5.728,59/ano) de economia líquida individual — 10 máquinas = R$ 57.285,90/ano; 38 máquinas (parque total) </a:t>
+            </a:r>
+            <a:r>
+              <a:rPr lang="en-US" sz="1150">
+                <a:solidFill>
+                  <a:srgbClr val="CADCFC"/>
+                </a:solidFill>
+                <a:latin typeface="Calibri" pitchFamily="34" charset="0"/>
+                <a:ea typeface="Calibri" pitchFamily="34" charset="-122"/>
+                <a:cs typeface="Calibri" pitchFamily="34" charset="-120"/>
+              </a:rPr>
+              <a:t>= R$ 217.686,42/</a:t>
+            </a:r>
+            <a:r>
+              <a:rPr lang="en-US" sz="1150" dirty="0">
+                <a:solidFill>
+                  <a:srgbClr val="CADCFC"/>
+                </a:solidFill>
+                <a:latin typeface="Calibri" pitchFamily="34" charset="0"/>
+                <a:ea typeface="Calibri" pitchFamily="34" charset="-122"/>
+                <a:cs typeface="Calibri" pitchFamily="34" charset="-120"/>
+              </a:rPr>
+              <a:t>ano.</a:t>
+            </a:r>
+            <a:endParaRPr lang="en-US" sz="1150" dirty="0"/>
+          </a:p>
+        </p:txBody>
+      </p:sp>
+      <p:sp>
+        <p:nvSpPr>
+          <p:cNvPr id="12" name="Text 8"/>
+          <p:cNvSpPr txBox="1"/>
+          <p:nvPr/>
+        </p:nvSpPr>
+        <p:spPr>
+          <a:xfrm>
+            <a:off x="457200" y="6473952"/>
+            <a:ext cx="6400800" cy="274320"/>
+          </a:xfrm>
+          <a:prstGeom prst="rect">
+            <a:avLst/>
+          </a:prstGeom>
+          <a:noFill/>
+          <a:ln/>
+        </p:spPr>
+        <p:txBody>
+          <a:bodyPr wrap="square" lIns="0" tIns="0" rIns="0" bIns="0" rtlCol="0" anchor="ctr"/>
+          <a:lstStyle/>
+          <a:p>
+            <a:pPr marL="0" indent="0" algn="l">
+              <a:buNone/>
+            </a:pPr>
+            <a:r>
+              <a:rPr lang="en-US" sz="900" dirty="0">
+                <a:solidFill>
+                  <a:srgbClr val="5A6472"/>
+                </a:solidFill>
+                <a:latin typeface="Calibri" pitchFamily="34" charset="0"/>
+                <a:ea typeface="Calibri" pitchFamily="34" charset="-122"/>
+                <a:cs typeface="Calibri" pitchFamily="34" charset="-120"/>
+              </a:rPr>
               <a:t>Novo Shopping — Retrofit HVAC Inteligente</a:t>
             </a:r>
             <a:endParaRPr lang="en-US" sz="900" dirty="0"/>
@@ -15498,7 +15445,7 @@
           <a:bodyPr wrap="square" lIns="0" tIns="0" rIns="0" bIns="0" rtlCol="0" anchor="ctr"/>
           <a:lstStyle/>
           <a:p>
-            <a:pPr algn="r" indent="0" marL="0">
+            <a:pPr marL="0" indent="0" algn="r">
               <a:buNone/>
             </a:pPr>
             <a:r>
@@ -15532,6 +15479,7 @@
         <a:solidFill>
           <a:srgbClr val="F4F6FA"/>
         </a:solidFill>
+        <a:effectLst/>
       </p:bgPr>
     </p:bg>
     <p:spTree>
@@ -15569,7 +15517,7 @@
           <a:bodyPr wrap="square" lIns="0" tIns="0" rIns="0" bIns="0" rtlCol="0" anchor="ctr"/>
           <a:lstStyle/>
           <a:p>
-            <a:pPr indent="0" marL="0">
+            <a:pPr marL="0" indent="0">
               <a:buNone/>
             </a:pPr>
             <a:r>
@@ -15608,17 +15556,13 @@
           </a:solidFill>
           <a:ln/>
           <a:effectLst>
-            <a:outerShdw sx="100000" sy="100000" kx="0" ky="0" algn="bl" rotWithShape="0" blurRad="76200" dist="25400" dir="5400000">
+            <a:outerShdw blurRad="76200" dist="25400" dir="5400000" algn="bl" rotWithShape="0">
               <a:srgbClr val="888888">
                 <a:alpha val="25000"/>
               </a:srgbClr>
             </a:outerShdw>
           </a:effectLst>
         </p:spPr>
-        <p:txBody>
-          <a:bodyPr/>
-          <a:p/>
-        </p:txBody>
       </p:sp>
       <p:sp>
         <p:nvSpPr>
@@ -15641,7 +15585,7 @@
           <a:bodyPr wrap="square" lIns="0" tIns="0" rIns="0" bIns="0" rtlCol="0" anchor="ctr"/>
           <a:lstStyle/>
           <a:p>
-            <a:pPr algn="ctr" indent="0" marL="0">
+            <a:pPr marL="0" indent="0" algn="ctr">
               <a:buNone/>
             </a:pPr>
             <a:r>
@@ -15680,7 +15624,7 @@
           <a:bodyPr wrap="square" lIns="0" tIns="0" rIns="0" bIns="0" rtlCol="0" anchor="t"/>
           <a:lstStyle/>
           <a:p>
-            <a:pPr algn="ctr" indent="0" marL="0">
+            <a:pPr marL="0" indent="0" algn="ctr">
               <a:buNone/>
             </a:pPr>
             <a:r>
@@ -15719,17 +15663,13 @@
           </a:solidFill>
           <a:ln/>
           <a:effectLst>
-            <a:outerShdw sx="100000" sy="100000" kx="0" ky="0" algn="bl" rotWithShape="0" blurRad="76200" dist="25400" dir="5400000">
+            <a:outerShdw blurRad="76200" dist="25400" dir="5400000" algn="bl" rotWithShape="0">
               <a:srgbClr val="888888">
                 <a:alpha val="25000"/>
               </a:srgbClr>
             </a:outerShdw>
           </a:effectLst>
         </p:spPr>
-        <p:txBody>
-          <a:bodyPr/>
-          <a:p/>
-        </p:txBody>
       </p:sp>
       <p:sp>
         <p:nvSpPr>
@@ -15752,7 +15692,7 @@
           <a:bodyPr wrap="square" lIns="0" tIns="0" rIns="0" bIns="0" rtlCol="0" anchor="ctr"/>
           <a:lstStyle/>
           <a:p>
-            <a:pPr algn="ctr" indent="0" marL="0">
+            <a:pPr marL="0" indent="0" algn="ctr">
               <a:buNone/>
             </a:pPr>
             <a:r>
@@ -15791,7 +15731,7 @@
           <a:bodyPr wrap="square" lIns="0" tIns="0" rIns="0" bIns="0" rtlCol="0" anchor="t"/>
           <a:lstStyle/>
           <a:p>
-            <a:pPr algn="ctr" indent="0" marL="0">
+            <a:pPr marL="0" indent="0" algn="ctr">
               <a:buNone/>
             </a:pPr>
             <a:r>
@@ -15830,17 +15770,13 @@
           </a:solidFill>
           <a:ln/>
           <a:effectLst>
-            <a:outerShdw sx="100000" sy="100000" kx="0" ky="0" algn="bl" rotWithShape="0" blurRad="76200" dist="25400" dir="5400000">
+            <a:outerShdw blurRad="76200" dist="25400" dir="5400000" algn="bl" rotWithShape="0">
               <a:srgbClr val="888888">
                 <a:alpha val="25000"/>
               </a:srgbClr>
             </a:outerShdw>
           </a:effectLst>
         </p:spPr>
-        <p:txBody>
-          <a:bodyPr/>
-          <a:p/>
-        </p:txBody>
       </p:sp>
       <p:sp>
         <p:nvSpPr>
@@ -15863,7 +15799,7 @@
           <a:bodyPr wrap="square" lIns="0" tIns="0" rIns="0" bIns="0" rtlCol="0" anchor="ctr"/>
           <a:lstStyle/>
           <a:p>
-            <a:pPr algn="ctr" indent="0" marL="0">
+            <a:pPr marL="0" indent="0" algn="ctr">
               <a:buNone/>
             </a:pPr>
             <a:r>
@@ -15902,7 +15838,7 @@
           <a:bodyPr wrap="square" lIns="0" tIns="0" rIns="0" bIns="0" rtlCol="0" anchor="t"/>
           <a:lstStyle/>
           <a:p>
-            <a:pPr algn="ctr" indent="0" marL="0">
+            <a:pPr marL="0" indent="0" algn="ctr">
               <a:buNone/>
             </a:pPr>
             <a:r>
@@ -15941,17 +15877,13 @@
           </a:solidFill>
           <a:ln/>
           <a:effectLst>
-            <a:outerShdw sx="100000" sy="100000" kx="0" ky="0" algn="bl" rotWithShape="0" blurRad="76200" dist="25400" dir="5400000">
+            <a:outerShdw blurRad="76200" dist="25400" dir="5400000" algn="bl" rotWithShape="0">
               <a:srgbClr val="888888">
                 <a:alpha val="25000"/>
               </a:srgbClr>
             </a:outerShdw>
           </a:effectLst>
         </p:spPr>
-        <p:txBody>
-          <a:bodyPr/>
-          <a:p/>
-        </p:txBody>
       </p:sp>
       <p:sp>
         <p:nvSpPr>
@@ -15974,7 +15906,7 @@
           <a:bodyPr wrap="square" lIns="0" tIns="0" rIns="0" bIns="0" rtlCol="0" anchor="ctr"/>
           <a:lstStyle/>
           <a:p>
-            <a:pPr algn="ctr" indent="0" marL="0">
+            <a:pPr marL="0" indent="0" algn="ctr">
               <a:buNone/>
             </a:pPr>
             <a:r>
@@ -16013,7 +15945,7 @@
           <a:bodyPr wrap="square" lIns="0" tIns="0" rIns="0" bIns="0" rtlCol="0" anchor="t"/>
           <a:lstStyle/>
           <a:p>
-            <a:pPr algn="ctr" indent="0" marL="0">
+            <a:pPr marL="0" indent="0" algn="ctr">
               <a:buNone/>
             </a:pPr>
             <a:r>
@@ -16052,17 +15984,13 @@
           </a:solidFill>
           <a:ln/>
           <a:effectLst>
-            <a:outerShdw sx="100000" sy="100000" kx="0" ky="0" algn="bl" rotWithShape="0" blurRad="76200" dist="25400" dir="5400000">
+            <a:outerShdw blurRad="76200" dist="25400" dir="5400000" algn="bl" rotWithShape="0">
               <a:srgbClr val="888888">
                 <a:alpha val="25000"/>
               </a:srgbClr>
             </a:outerShdw>
           </a:effectLst>
         </p:spPr>
-        <p:txBody>
-          <a:bodyPr/>
-          <a:p/>
-        </p:txBody>
       </p:sp>
       <p:sp>
         <p:nvSpPr>
@@ -16085,7 +16013,7 @@
           <a:bodyPr wrap="square" lIns="0" tIns="0" rIns="0" bIns="0" rtlCol="0" anchor="ctr"/>
           <a:lstStyle/>
           <a:p>
-            <a:pPr algn="ctr" indent="0" marL="0">
+            <a:pPr marL="0" indent="0" algn="ctr">
               <a:buNone/>
             </a:pPr>
             <a:r>
@@ -16124,7 +16052,7 @@
           <a:bodyPr wrap="square" lIns="0" tIns="0" rIns="0" bIns="0" rtlCol="0" anchor="t"/>
           <a:lstStyle/>
           <a:p>
-            <a:pPr algn="ctr" indent="0" marL="0">
+            <a:pPr marL="0" indent="0" algn="ctr">
               <a:buNone/>
             </a:pPr>
             <a:r>
@@ -16163,7 +16091,7 @@
           <a:bodyPr wrap="square" lIns="0" tIns="0" rIns="0" bIns="0" rtlCol="0" anchor="ctr"/>
           <a:lstStyle/>
           <a:p>
-            <a:pPr indent="0" marL="0">
+            <a:pPr marL="0" indent="0">
               <a:buNone/>
             </a:pPr>
             <a:r>
@@ -16183,7 +16111,7 @@
       </p:sp>
       <p:graphicFrame>
         <p:nvGraphicFramePr>
-          <p:cNvPr id="9" name="Table 0"/>
+          <p:cNvPr id="19" name="Table 0"/>
           <p:cNvGraphicFramePr>
             <a:graphicFrameLocks noGrp="1"/>
           </p:cNvGraphicFramePr>
@@ -16204,10 +16132,34 @@
             <a:tbl>
               <a:tblPr/>
               <a:tblGrid>
-                <a:gridCol w="3474720"/>
-                <a:gridCol w="1097280"/>
-                <a:gridCol w="1371600"/>
-                <a:gridCol w="1371600"/>
+                <a:gridCol w="3474720">
+                  <a:extLst>
+                    <a:ext uri="{9D8B030D-6E8A-4147-A177-3AD203B41FA5}">
+                      <a16:colId xmlns:a16="http://schemas.microsoft.com/office/drawing/2014/main" val="20000"/>
+                    </a:ext>
+                  </a:extLst>
+                </a:gridCol>
+                <a:gridCol w="1097280">
+                  <a:extLst>
+                    <a:ext uri="{9D8B030D-6E8A-4147-A177-3AD203B41FA5}">
+                      <a16:colId xmlns:a16="http://schemas.microsoft.com/office/drawing/2014/main" val="20001"/>
+                    </a:ext>
+                  </a:extLst>
+                </a:gridCol>
+                <a:gridCol w="1371600">
+                  <a:extLst>
+                    <a:ext uri="{9D8B030D-6E8A-4147-A177-3AD203B41FA5}">
+                      <a16:colId xmlns:a16="http://schemas.microsoft.com/office/drawing/2014/main" val="20002"/>
+                    </a:ext>
+                  </a:extLst>
+                </a:gridCol>
+                <a:gridCol w="1371600">
+                  <a:extLst>
+                    <a:ext uri="{9D8B030D-6E8A-4147-A177-3AD203B41FA5}">
+                      <a16:colId xmlns:a16="http://schemas.microsoft.com/office/drawing/2014/main" val="20003"/>
+                    </a:ext>
+                  </a:extLst>
+                </a:gridCol>
               </a:tblGrid>
               <a:tr h="372291">
                 <a:tc>
@@ -16215,7 +16167,7 @@
                     <a:bodyPr/>
                     <a:lstStyle/>
                     <a:p>
-                      <a:pPr indent="0" marL="0">
+                      <a:pPr marL="0" indent="0">
                         <a:buNone/>
                       </a:pPr>
                       <a:r>
@@ -16236,7 +16188,7 @@
                       </a:endParaRPr>
                     </a:p>
                   </a:txBody>
-                  <a:tcPr marL="91440" marR="91440" marT="45720" marB="45720" anchor="ctr">
+                  <a:tcPr anchor="ctr">
                     <a:lnL w="0" cap="flat" cmpd="sng" algn="ctr">
                       <a:noFill/>
                     </a:lnL>
@@ -16259,7 +16211,7 @@
                     <a:bodyPr/>
                     <a:lstStyle/>
                     <a:p>
-                      <a:pPr indent="0" marL="0">
+                      <a:pPr marL="0" indent="0">
                         <a:buNone/>
                       </a:pPr>
                       <a:r>
@@ -16280,7 +16232,7 @@
                       </a:endParaRPr>
                     </a:p>
                   </a:txBody>
-                  <a:tcPr marL="91440" marR="91440" marT="45720" marB="45720" anchor="ctr">
+                  <a:tcPr anchor="ctr">
                     <a:lnL w="0" cap="flat" cmpd="sng" algn="ctr">
                       <a:noFill/>
                     </a:lnL>
@@ -16303,7 +16255,7 @@
                     <a:bodyPr/>
                     <a:lstStyle/>
                     <a:p>
-                      <a:pPr indent="0" marL="0">
+                      <a:pPr marL="0" indent="0">
                         <a:buNone/>
                       </a:pPr>
                       <a:r>
@@ -16324,7 +16276,7 @@
                       </a:endParaRPr>
                     </a:p>
                   </a:txBody>
-                  <a:tcPr marL="91440" marR="91440" marT="45720" marB="45720" anchor="ctr">
+                  <a:tcPr anchor="ctr">
                     <a:lnL w="0" cap="flat" cmpd="sng" algn="ctr">
                       <a:noFill/>
                     </a:lnL>
@@ -16347,7 +16299,7 @@
                     <a:bodyPr/>
                     <a:lstStyle/>
                     <a:p>
-                      <a:pPr indent="0" marL="0">
+                      <a:pPr marL="0" indent="0">
                         <a:buNone/>
                       </a:pPr>
                       <a:r>
@@ -16368,7 +16320,7 @@
                       </a:endParaRPr>
                     </a:p>
                   </a:txBody>
-                  <a:tcPr marL="91440" marR="91440" marT="45720" marB="45720" anchor="ctr">
+                  <a:tcPr anchor="ctr">
                     <a:lnL w="0" cap="flat" cmpd="sng" algn="ctr">
                       <a:noFill/>
                     </a:lnL>
@@ -16386,6 +16338,11 @@
                     </a:solidFill>
                   </a:tcPr>
                 </a:tc>
+                <a:extLst>
+                  <a:ext uri="{0D108BD9-81ED-4DB2-BD59-A6C34878D82A}">
+                    <a16:rowId xmlns:a16="http://schemas.microsoft.com/office/drawing/2014/main" val="10000"/>
+                  </a:ext>
+                </a:extLst>
               </a:tr>
               <a:tr h="372291">
                 <a:tc>
@@ -16393,7 +16350,7 @@
                     <a:bodyPr/>
                     <a:lstStyle/>
                     <a:p>
-                      <a:pPr algn="l" indent="0" marL="0">
+                      <a:pPr marL="0" indent="0" algn="l">
                         <a:buNone/>
                       </a:pPr>
                       <a:r>
@@ -16414,7 +16371,7 @@
                       </a:endParaRPr>
                     </a:p>
                   </a:txBody>
-                  <a:tcPr marL="91440" marR="91440" marT="45720" marB="45720" anchor="ctr">
+                  <a:tcPr anchor="ctr">
                     <a:lnL w="0" cap="flat" cmpd="sng" algn="ctr">
                       <a:noFill/>
                     </a:lnL>
@@ -16437,7 +16394,7 @@
                     <a:bodyPr/>
                     <a:lstStyle/>
                     <a:p>
-                      <a:pPr algn="ctr" indent="0" marL="0">
+                      <a:pPr marL="0" indent="0" algn="ctr">
                         <a:buNone/>
                       </a:pPr>
                       <a:r>
@@ -16458,7 +16415,7 @@
                       </a:endParaRPr>
                     </a:p>
                   </a:txBody>
-                  <a:tcPr marL="91440" marR="91440" marT="45720" marB="45720" anchor="ctr">
+                  <a:tcPr anchor="ctr">
                     <a:lnL w="0" cap="flat" cmpd="sng" algn="ctr">
                       <a:noFill/>
                     </a:lnL>
@@ -16481,7 +16438,7 @@
                     <a:bodyPr/>
                     <a:lstStyle/>
                     <a:p>
-                      <a:pPr algn="ctr" indent="0" marL="0">
+                      <a:pPr marL="0" indent="0" algn="ctr">
                         <a:buNone/>
                       </a:pPr>
                       <a:r>
@@ -16502,7 +16459,7 @@
                       </a:endParaRPr>
                     </a:p>
                   </a:txBody>
-                  <a:tcPr marL="91440" marR="91440" marT="45720" marB="45720" anchor="ctr">
+                  <a:tcPr anchor="ctr">
                     <a:lnL w="0" cap="flat" cmpd="sng" algn="ctr">
                       <a:noFill/>
                     </a:lnL>
@@ -16525,7 +16482,7 @@
                     <a:bodyPr/>
                     <a:lstStyle/>
                     <a:p>
-                      <a:pPr algn="ctr" indent="0" marL="0">
+                      <a:pPr marL="0" indent="0" algn="ctr">
                         <a:buNone/>
                       </a:pPr>
                       <a:r>
@@ -16546,7 +16503,7 @@
                       </a:endParaRPr>
                     </a:p>
                   </a:txBody>
-                  <a:tcPr marL="91440" marR="91440" marT="45720" marB="45720" anchor="ctr">
+                  <a:tcPr anchor="ctr">
                     <a:lnL w="0" cap="flat" cmpd="sng" algn="ctr">
                       <a:noFill/>
                     </a:lnL>
@@ -16564,6 +16521,11 @@
                     </a:solidFill>
                   </a:tcPr>
                 </a:tc>
+                <a:extLst>
+                  <a:ext uri="{0D108BD9-81ED-4DB2-BD59-A6C34878D82A}">
+                    <a16:rowId xmlns:a16="http://schemas.microsoft.com/office/drawing/2014/main" val="10001"/>
+                  </a:ext>
+                </a:extLst>
               </a:tr>
               <a:tr h="372291">
                 <a:tc>
@@ -16571,7 +16533,7 @@
                     <a:bodyPr/>
                     <a:lstStyle/>
                     <a:p>
-                      <a:pPr algn="l" indent="0" marL="0">
+                      <a:pPr marL="0" indent="0" algn="l">
                         <a:buNone/>
                       </a:pPr>
                       <a:r>
@@ -16592,7 +16554,7 @@
                       </a:endParaRPr>
                     </a:p>
                   </a:txBody>
-                  <a:tcPr marL="91440" marR="91440" marT="45720" marB="45720" anchor="ctr">
+                  <a:tcPr anchor="ctr">
                     <a:lnL w="0" cap="flat" cmpd="sng" algn="ctr">
                       <a:noFill/>
                     </a:lnL>
@@ -16615,7 +16577,7 @@
                     <a:bodyPr/>
                     <a:lstStyle/>
                     <a:p>
-                      <a:pPr algn="ctr" indent="0" marL="0">
+                      <a:pPr marL="0" indent="0" algn="ctr">
                         <a:buNone/>
                       </a:pPr>
                       <a:r>
@@ -16636,7 +16598,7 @@
                       </a:endParaRPr>
                     </a:p>
                   </a:txBody>
-                  <a:tcPr marL="91440" marR="91440" marT="45720" marB="45720" anchor="ctr">
+                  <a:tcPr anchor="ctr">
                     <a:lnL w="0" cap="flat" cmpd="sng" algn="ctr">
                       <a:noFill/>
                     </a:lnL>
@@ -16659,7 +16621,7 @@
                     <a:bodyPr/>
                     <a:lstStyle/>
                     <a:p>
-                      <a:pPr algn="ctr" indent="0" marL="0">
+                      <a:pPr marL="0" indent="0" algn="ctr">
                         <a:buNone/>
                       </a:pPr>
                       <a:r>
@@ -16680,7 +16642,7 @@
                       </a:endParaRPr>
                     </a:p>
                   </a:txBody>
-                  <a:tcPr marL="91440" marR="91440" marT="45720" marB="45720" anchor="ctr">
+                  <a:tcPr anchor="ctr">
                     <a:lnL w="0" cap="flat" cmpd="sng" algn="ctr">
                       <a:noFill/>
                     </a:lnL>
@@ -16703,7 +16665,7 @@
                     <a:bodyPr/>
                     <a:lstStyle/>
                     <a:p>
-                      <a:pPr algn="ctr" indent="0" marL="0">
+                      <a:pPr marL="0" indent="0" algn="ctr">
                         <a:buNone/>
                       </a:pPr>
                       <a:r>
@@ -16724,7 +16686,7 @@
                       </a:endParaRPr>
                     </a:p>
                   </a:txBody>
-                  <a:tcPr marL="91440" marR="91440" marT="45720" marB="45720" anchor="ctr">
+                  <a:tcPr anchor="ctr">
                     <a:lnL w="0" cap="flat" cmpd="sng" algn="ctr">
                       <a:noFill/>
                     </a:lnL>
@@ -16742,6 +16704,11 @@
                     </a:solidFill>
                   </a:tcPr>
                 </a:tc>
+                <a:extLst>
+                  <a:ext uri="{0D108BD9-81ED-4DB2-BD59-A6C34878D82A}">
+                    <a16:rowId xmlns:a16="http://schemas.microsoft.com/office/drawing/2014/main" val="10002"/>
+                  </a:ext>
+                </a:extLst>
               </a:tr>
               <a:tr h="372291">
                 <a:tc>
@@ -16749,7 +16716,7 @@
                     <a:bodyPr/>
                     <a:lstStyle/>
                     <a:p>
-                      <a:pPr algn="l" indent="0" marL="0">
+                      <a:pPr marL="0" indent="0" algn="l">
                         <a:buNone/>
                       </a:pPr>
                       <a:r>
@@ -16770,7 +16737,7 @@
                       </a:endParaRPr>
                     </a:p>
                   </a:txBody>
-                  <a:tcPr marL="91440" marR="91440" marT="45720" marB="45720" anchor="ctr">
+                  <a:tcPr anchor="ctr">
                     <a:lnL w="0" cap="flat" cmpd="sng" algn="ctr">
                       <a:noFill/>
                     </a:lnL>
@@ -16793,7 +16760,7 @@
                     <a:bodyPr/>
                     <a:lstStyle/>
                     <a:p>
-                      <a:pPr algn="ctr" indent="0" marL="0">
+                      <a:pPr marL="0" indent="0" algn="ctr">
                         <a:buNone/>
                       </a:pPr>
                       <a:r>
@@ -16814,7 +16781,7 @@
                       </a:endParaRPr>
                     </a:p>
                   </a:txBody>
-                  <a:tcPr marL="91440" marR="91440" marT="45720" marB="45720" anchor="ctr">
+                  <a:tcPr anchor="ctr">
                     <a:lnL w="0" cap="flat" cmpd="sng" algn="ctr">
                       <a:noFill/>
                     </a:lnL>
@@ -16837,7 +16804,7 @@
                     <a:bodyPr/>
                     <a:lstStyle/>
                     <a:p>
-                      <a:pPr algn="ctr" indent="0" marL="0">
+                      <a:pPr marL="0" indent="0" algn="ctr">
                         <a:buNone/>
                       </a:pPr>
                       <a:r>
@@ -16858,7 +16825,7 @@
                       </a:endParaRPr>
                     </a:p>
                   </a:txBody>
-                  <a:tcPr marL="91440" marR="91440" marT="45720" marB="45720" anchor="ctr">
+                  <a:tcPr anchor="ctr">
                     <a:lnL w="0" cap="flat" cmpd="sng" algn="ctr">
                       <a:noFill/>
                     </a:lnL>
@@ -16881,7 +16848,7 @@
                     <a:bodyPr/>
                     <a:lstStyle/>
                     <a:p>
-                      <a:pPr algn="ctr" indent="0" marL="0">
+                      <a:pPr marL="0" indent="0" algn="ctr">
                         <a:buNone/>
                       </a:pPr>
                       <a:r>
@@ -16902,7 +16869,7 @@
                       </a:endParaRPr>
                     </a:p>
                   </a:txBody>
-                  <a:tcPr marL="91440" marR="91440" marT="45720" marB="45720" anchor="ctr">
+                  <a:tcPr anchor="ctr">
                     <a:lnL w="0" cap="flat" cmpd="sng" algn="ctr">
                       <a:noFill/>
                     </a:lnL>
@@ -16920,6 +16887,11 @@
                     </a:solidFill>
                   </a:tcPr>
                 </a:tc>
+                <a:extLst>
+                  <a:ext uri="{0D108BD9-81ED-4DB2-BD59-A6C34878D82A}">
+                    <a16:rowId xmlns:a16="http://schemas.microsoft.com/office/drawing/2014/main" val="10003"/>
+                  </a:ext>
+                </a:extLst>
               </a:tr>
               <a:tr h="372291">
                 <a:tc>
@@ -16927,7 +16899,7 @@
                     <a:bodyPr/>
                     <a:lstStyle/>
                     <a:p>
-                      <a:pPr algn="l" indent="0" marL="0">
+                      <a:pPr marL="0" indent="0" algn="l">
                         <a:buNone/>
                       </a:pPr>
                       <a:r>
@@ -16948,7 +16920,7 @@
                       </a:endParaRPr>
                     </a:p>
                   </a:txBody>
-                  <a:tcPr marL="91440" marR="91440" marT="45720" marB="45720" anchor="ctr">
+                  <a:tcPr anchor="ctr">
                     <a:lnL w="0" cap="flat" cmpd="sng" algn="ctr">
                       <a:noFill/>
                     </a:lnL>
@@ -16971,7 +16943,7 @@
                     <a:bodyPr/>
                     <a:lstStyle/>
                     <a:p>
-                      <a:pPr algn="ctr" indent="0" marL="0">
+                      <a:pPr marL="0" indent="0" algn="ctr">
                         <a:buNone/>
                       </a:pPr>
                       <a:r>
@@ -16992,7 +16964,7 @@
                       </a:endParaRPr>
                     </a:p>
                   </a:txBody>
-                  <a:tcPr marL="91440" marR="91440" marT="45720" marB="45720" anchor="ctr">
+                  <a:tcPr anchor="ctr">
                     <a:lnL w="0" cap="flat" cmpd="sng" algn="ctr">
                       <a:noFill/>
                     </a:lnL>
@@ -17015,7 +16987,7 @@
                     <a:bodyPr/>
                     <a:lstStyle/>
                     <a:p>
-                      <a:pPr algn="ctr" indent="0" marL="0">
+                      <a:pPr marL="0" indent="0" algn="ctr">
                         <a:buNone/>
                       </a:pPr>
                       <a:r>
@@ -17036,7 +17008,7 @@
                       </a:endParaRPr>
                     </a:p>
                   </a:txBody>
-                  <a:tcPr marL="91440" marR="91440" marT="45720" marB="45720" anchor="ctr">
+                  <a:tcPr anchor="ctr">
                     <a:lnL w="0" cap="flat" cmpd="sng" algn="ctr">
                       <a:noFill/>
                     </a:lnL>
@@ -17059,7 +17031,7 @@
                     <a:bodyPr/>
                     <a:lstStyle/>
                     <a:p>
-                      <a:pPr algn="ctr" indent="0" marL="0">
+                      <a:pPr marL="0" indent="0" algn="ctr">
                         <a:buNone/>
                       </a:pPr>
                       <a:r>
@@ -17080,7 +17052,7 @@
                       </a:endParaRPr>
                     </a:p>
                   </a:txBody>
-                  <a:tcPr marL="91440" marR="91440" marT="45720" marB="45720" anchor="ctr">
+                  <a:tcPr anchor="ctr">
                     <a:lnL w="0" cap="flat" cmpd="sng" algn="ctr">
                       <a:noFill/>
                     </a:lnL>
@@ -17098,6 +17070,11 @@
                     </a:solidFill>
                   </a:tcPr>
                 </a:tc>
+                <a:extLst>
+                  <a:ext uri="{0D108BD9-81ED-4DB2-BD59-A6C34878D82A}">
+                    <a16:rowId xmlns:a16="http://schemas.microsoft.com/office/drawing/2014/main" val="10004"/>
+                  </a:ext>
+                </a:extLst>
               </a:tr>
               <a:tr h="372291">
                 <a:tc>
@@ -17105,7 +17082,7 @@
                     <a:bodyPr/>
                     <a:lstStyle/>
                     <a:p>
-                      <a:pPr algn="l" indent="0" marL="0">
+                      <a:pPr marL="0" indent="0" algn="l">
                         <a:buNone/>
                       </a:pPr>
                       <a:r>
@@ -17126,7 +17103,7 @@
                       </a:endParaRPr>
                     </a:p>
                   </a:txBody>
-                  <a:tcPr marL="91440" marR="91440" marT="45720" marB="45720" anchor="ctr">
+                  <a:tcPr anchor="ctr">
                     <a:lnL w="0" cap="flat" cmpd="sng" algn="ctr">
                       <a:noFill/>
                     </a:lnL>
@@ -17149,7 +17126,7 @@
                     <a:bodyPr/>
                     <a:lstStyle/>
                     <a:p>
-                      <a:pPr algn="ctr" indent="0" marL="0">
+                      <a:pPr marL="0" indent="0" algn="ctr">
                         <a:buNone/>
                       </a:pPr>
                       <a:r>
@@ -17170,7 +17147,7 @@
                       </a:endParaRPr>
                     </a:p>
                   </a:txBody>
-                  <a:tcPr marL="91440" marR="91440" marT="45720" marB="45720" anchor="ctr">
+                  <a:tcPr anchor="ctr">
                     <a:lnL w="0" cap="flat" cmpd="sng" algn="ctr">
                       <a:noFill/>
                     </a:lnL>
@@ -17193,7 +17170,7 @@
                     <a:bodyPr/>
                     <a:lstStyle/>
                     <a:p>
-                      <a:pPr algn="ctr" indent="0" marL="0">
+                      <a:pPr marL="0" indent="0" algn="ctr">
                         <a:buNone/>
                       </a:pPr>
                       <a:r>
@@ -17214,7 +17191,7 @@
                       </a:endParaRPr>
                     </a:p>
                   </a:txBody>
-                  <a:tcPr marL="91440" marR="91440" marT="45720" marB="45720" anchor="ctr">
+                  <a:tcPr anchor="ctr">
                     <a:lnL w="0" cap="flat" cmpd="sng" algn="ctr">
                       <a:noFill/>
                     </a:lnL>
@@ -17237,7 +17214,7 @@
                     <a:bodyPr/>
                     <a:lstStyle/>
                     <a:p>
-                      <a:pPr algn="ctr" indent="0" marL="0">
+                      <a:pPr marL="0" indent="0" algn="ctr">
                         <a:buNone/>
                       </a:pPr>
                       <a:r>
@@ -17258,7 +17235,7 @@
                       </a:endParaRPr>
                     </a:p>
                   </a:txBody>
-                  <a:tcPr marL="91440" marR="91440" marT="45720" marB="45720" anchor="ctr">
+                  <a:tcPr anchor="ctr">
                     <a:lnL w="0" cap="flat" cmpd="sng" algn="ctr">
                       <a:noFill/>
                     </a:lnL>
@@ -17276,6 +17253,11 @@
                     </a:solidFill>
                   </a:tcPr>
                 </a:tc>
+                <a:extLst>
+                  <a:ext uri="{0D108BD9-81ED-4DB2-BD59-A6C34878D82A}">
+                    <a16:rowId xmlns:a16="http://schemas.microsoft.com/office/drawing/2014/main" val="10005"/>
+                  </a:ext>
+                </a:extLst>
               </a:tr>
               <a:tr h="372291">
                 <a:tc>
@@ -17283,7 +17265,7 @@
                     <a:bodyPr/>
                     <a:lstStyle/>
                     <a:p>
-                      <a:pPr algn="l" indent="0" marL="0">
+                      <a:pPr marL="0" indent="0" algn="l">
                         <a:buNone/>
                       </a:pPr>
                       <a:r>
@@ -17304,7 +17286,7 @@
                       </a:endParaRPr>
                     </a:p>
                   </a:txBody>
-                  <a:tcPr marL="91440" marR="91440" marT="45720" marB="45720" anchor="ctr">
+                  <a:tcPr anchor="ctr">
                     <a:lnL w="0" cap="flat" cmpd="sng" algn="ctr">
                       <a:noFill/>
                     </a:lnL>
@@ -17327,7 +17309,7 @@
                     <a:bodyPr/>
                     <a:lstStyle/>
                     <a:p>
-                      <a:pPr algn="ctr" indent="0" marL="0">
+                      <a:pPr marL="0" indent="0" algn="ctr">
                         <a:buNone/>
                       </a:pPr>
                       <a:r>
@@ -17348,7 +17330,7 @@
                       </a:endParaRPr>
                     </a:p>
                   </a:txBody>
-                  <a:tcPr marL="91440" marR="91440" marT="45720" marB="45720" anchor="ctr">
+                  <a:tcPr anchor="ctr">
                     <a:lnL w="0" cap="flat" cmpd="sng" algn="ctr">
                       <a:noFill/>
                     </a:lnL>
@@ -17371,7 +17353,7 @@
                     <a:bodyPr/>
                     <a:lstStyle/>
                     <a:p>
-                      <a:pPr algn="ctr" indent="0" marL="0">
+                      <a:pPr marL="0" indent="0" algn="ctr">
                         <a:buNone/>
                       </a:pPr>
                       <a:r>
@@ -17392,7 +17374,7 @@
                       </a:endParaRPr>
                     </a:p>
                   </a:txBody>
-                  <a:tcPr marL="91440" marR="91440" marT="45720" marB="45720" anchor="ctr">
+                  <a:tcPr anchor="ctr">
                     <a:lnL w="0" cap="flat" cmpd="sng" algn="ctr">
                       <a:noFill/>
                     </a:lnL>
@@ -17415,7 +17397,7 @@
                     <a:bodyPr/>
                     <a:lstStyle/>
                     <a:p>
-                      <a:pPr algn="ctr" indent="0" marL="0">
+                      <a:pPr marL="0" indent="0" algn="ctr">
                         <a:buNone/>
                       </a:pPr>
                       <a:r>
@@ -17436,7 +17418,7 @@
                       </a:endParaRPr>
                     </a:p>
                   </a:txBody>
-                  <a:tcPr marL="91440" marR="91440" marT="45720" marB="45720" anchor="ctr">
+                  <a:tcPr anchor="ctr">
                     <a:lnL w="0" cap="flat" cmpd="sng" algn="ctr">
                       <a:noFill/>
                     </a:lnL>
@@ -17454,6 +17436,11 @@
                     </a:solidFill>
                   </a:tcPr>
                 </a:tc>
+                <a:extLst>
+                  <a:ext uri="{0D108BD9-81ED-4DB2-BD59-A6C34878D82A}">
+                    <a16:rowId xmlns:a16="http://schemas.microsoft.com/office/drawing/2014/main" val="10006"/>
+                  </a:ext>
+                </a:extLst>
               </a:tr>
             </a:tbl>
           </a:graphicData>
@@ -17480,10 +17467,6 @@
           </a:solidFill>
           <a:ln/>
         </p:spPr>
-        <p:txBody>
-          <a:bodyPr/>
-          <a:p/>
-        </p:txBody>
       </p:sp>
       <p:sp>
         <p:nvSpPr>
@@ -17506,7 +17489,7 @@
           <a:bodyPr wrap="square" lIns="0" tIns="0" rIns="0" bIns="0" rtlCol="0" anchor="ctr"/>
           <a:lstStyle/>
           <a:p>
-            <a:pPr indent="0" marL="0">
+            <a:pPr marL="0" indent="0">
               <a:buNone/>
             </a:pPr>
             <a:r>
@@ -17545,7 +17528,7 @@
           <a:bodyPr wrap="square" lIns="0" tIns="0" rIns="0" bIns="0" rtlCol="0" anchor="ctr"/>
           <a:lstStyle/>
           <a:p>
-            <a:pPr indent="0" marL="0">
+            <a:pPr marL="0" indent="0">
               <a:buNone/>
             </a:pPr>
             <a:r>
@@ -17584,7 +17567,7 @@
           <a:bodyPr wrap="square" lIns="0" tIns="0" rIns="0" bIns="0" rtlCol="0" anchor="ctr"/>
           <a:lstStyle/>
           <a:p>
-            <a:pPr indent="0" marL="0">
+            <a:pPr marL="0" indent="0">
               <a:buNone/>
             </a:pPr>
             <a:r>
@@ -17623,7 +17606,7 @@
           <a:bodyPr wrap="square" lIns="0" tIns="0" rIns="0" bIns="0" rtlCol="0" anchor="ctr"/>
           <a:lstStyle/>
           <a:p>
-            <a:pPr indent="0" marL="0">
+            <a:pPr marL="0" indent="0">
               <a:buNone/>
             </a:pPr>
             <a:r>
@@ -17662,7 +17645,7 @@
           <a:bodyPr wrap="square" lIns="0" tIns="0" rIns="0" bIns="0" rtlCol="0" anchor="ctr"/>
           <a:lstStyle/>
           <a:p>
-            <a:pPr algn="l" indent="0" marL="0">
+            <a:pPr marL="0" indent="0" algn="l">
               <a:buNone/>
             </a:pPr>
             <a:r>
@@ -17701,7 +17684,7 @@
           <a:bodyPr wrap="square" lIns="0" tIns="0" rIns="0" bIns="0" rtlCol="0" anchor="ctr"/>
           <a:lstStyle/>
           <a:p>
-            <a:pPr algn="r" indent="0" marL="0">
+            <a:pPr marL="0" indent="0" algn="r">
               <a:buNone/>
             </a:pPr>
             <a:r>
@@ -17735,6 +17718,7 @@
         <a:solidFill>
           <a:srgbClr val="FFFFFF"/>
         </a:solidFill>
+        <a:effectLst/>
       </p:bgPr>
     </p:bg>
     <p:spTree>
@@ -17772,7 +17756,7 @@
           <a:bodyPr wrap="square" lIns="0" tIns="0" rIns="0" bIns="0" rtlCol="0" anchor="ctr"/>
           <a:lstStyle/>
           <a:p>
-            <a:pPr indent="0" marL="0">
+            <a:pPr marL="0" indent="0">
               <a:buNone/>
             </a:pPr>
             <a:r>
@@ -17811,7 +17795,7 @@
           <a:bodyPr wrap="square" lIns="0" tIns="0" rIns="0" bIns="0" rtlCol="0" anchor="ctr"/>
           <a:lstStyle/>
           <a:p>
-            <a:pPr indent="0" marL="0">
+            <a:pPr marL="0" indent="0">
               <a:buNone/>
             </a:pPr>
             <a:r>
@@ -17852,14 +17836,62 @@
             <a:tbl>
               <a:tblPr/>
               <a:tblGrid>
-                <a:gridCol w="1051560"/>
-                <a:gridCol w="731520"/>
-                <a:gridCol w="1737360"/>
-                <a:gridCol w="1234440"/>
-                <a:gridCol w="1280160"/>
-                <a:gridCol w="1508760"/>
-                <a:gridCol w="1234440"/>
-                <a:gridCol w="1399032"/>
+                <a:gridCol w="1051560">
+                  <a:extLst>
+                    <a:ext uri="{9D8B030D-6E8A-4147-A177-3AD203B41FA5}">
+                      <a16:colId xmlns:a16="http://schemas.microsoft.com/office/drawing/2014/main" val="20000"/>
+                    </a:ext>
+                  </a:extLst>
+                </a:gridCol>
+                <a:gridCol w="731520">
+                  <a:extLst>
+                    <a:ext uri="{9D8B030D-6E8A-4147-A177-3AD203B41FA5}">
+                      <a16:colId xmlns:a16="http://schemas.microsoft.com/office/drawing/2014/main" val="20001"/>
+                    </a:ext>
+                  </a:extLst>
+                </a:gridCol>
+                <a:gridCol w="1737360">
+                  <a:extLst>
+                    <a:ext uri="{9D8B030D-6E8A-4147-A177-3AD203B41FA5}">
+                      <a16:colId xmlns:a16="http://schemas.microsoft.com/office/drawing/2014/main" val="20002"/>
+                    </a:ext>
+                  </a:extLst>
+                </a:gridCol>
+                <a:gridCol w="1234440">
+                  <a:extLst>
+                    <a:ext uri="{9D8B030D-6E8A-4147-A177-3AD203B41FA5}">
+                      <a16:colId xmlns:a16="http://schemas.microsoft.com/office/drawing/2014/main" val="20003"/>
+                    </a:ext>
+                  </a:extLst>
+                </a:gridCol>
+                <a:gridCol w="1280160">
+                  <a:extLst>
+                    <a:ext uri="{9D8B030D-6E8A-4147-A177-3AD203B41FA5}">
+                      <a16:colId xmlns:a16="http://schemas.microsoft.com/office/drawing/2014/main" val="20004"/>
+                    </a:ext>
+                  </a:extLst>
+                </a:gridCol>
+                <a:gridCol w="1508760">
+                  <a:extLst>
+                    <a:ext uri="{9D8B030D-6E8A-4147-A177-3AD203B41FA5}">
+                      <a16:colId xmlns:a16="http://schemas.microsoft.com/office/drawing/2014/main" val="20005"/>
+                    </a:ext>
+                  </a:extLst>
+                </a:gridCol>
+                <a:gridCol w="1234440">
+                  <a:extLst>
+                    <a:ext uri="{9D8B030D-6E8A-4147-A177-3AD203B41FA5}">
+                      <a16:colId xmlns:a16="http://schemas.microsoft.com/office/drawing/2014/main" val="20006"/>
+                    </a:ext>
+                  </a:extLst>
+                </a:gridCol>
+                <a:gridCol w="1399032">
+                  <a:extLst>
+                    <a:ext uri="{9D8B030D-6E8A-4147-A177-3AD203B41FA5}">
+                      <a16:colId xmlns:a16="http://schemas.microsoft.com/office/drawing/2014/main" val="20007"/>
+                    </a:ext>
+                  </a:extLst>
+                </a:gridCol>
               </a:tblGrid>
               <a:tr h="388620">
                 <a:tc>
@@ -17867,7 +17899,7 @@
                     <a:bodyPr/>
                     <a:lstStyle/>
                     <a:p>
-                      <a:pPr indent="0" marL="0">
+                      <a:pPr marL="0" indent="0">
                         <a:buNone/>
                       </a:pPr>
                       <a:r>
@@ -17888,7 +17920,7 @@
                       </a:endParaRPr>
                     </a:p>
                   </a:txBody>
-                  <a:tcPr marL="91440" marR="91440" marT="45720" marB="45720" anchor="ctr">
+                  <a:tcPr anchor="ctr">
                     <a:lnL w="0" cap="flat" cmpd="sng" algn="ctr">
                       <a:noFill/>
                     </a:lnL>
@@ -17911,7 +17943,7 @@
                     <a:bodyPr/>
                     <a:lstStyle/>
                     <a:p>
-                      <a:pPr indent="0" marL="0">
+                      <a:pPr marL="0" indent="0">
                         <a:buNone/>
                       </a:pPr>
                       <a:r>
@@ -17932,7 +17964,7 @@
                       </a:endParaRPr>
                     </a:p>
                   </a:txBody>
-                  <a:tcPr marL="91440" marR="91440" marT="45720" marB="45720" anchor="ctr">
+                  <a:tcPr anchor="ctr">
                     <a:lnL w="0" cap="flat" cmpd="sng" algn="ctr">
                       <a:noFill/>
                     </a:lnL>
@@ -17955,7 +17987,7 @@
                     <a:bodyPr/>
                     <a:lstStyle/>
                     <a:p>
-                      <a:pPr indent="0" marL="0">
+                      <a:pPr marL="0" indent="0">
                         <a:buNone/>
                       </a:pPr>
                       <a:r>
@@ -17976,7 +18008,7 @@
                       </a:endParaRPr>
                     </a:p>
                   </a:txBody>
-                  <a:tcPr marL="91440" marR="91440" marT="45720" marB="45720" anchor="ctr">
+                  <a:tcPr anchor="ctr">
                     <a:lnL w="0" cap="flat" cmpd="sng" algn="ctr">
                       <a:noFill/>
                     </a:lnL>
@@ -17999,7 +18031,7 @@
                     <a:bodyPr/>
                     <a:lstStyle/>
                     <a:p>
-                      <a:pPr indent="0" marL="0">
+                      <a:pPr marL="0" indent="0">
                         <a:buNone/>
                       </a:pPr>
                       <a:r>
@@ -18020,7 +18052,7 @@
                       </a:endParaRPr>
                     </a:p>
                   </a:txBody>
-                  <a:tcPr marL="91440" marR="91440" marT="45720" marB="45720" anchor="ctr">
+                  <a:tcPr anchor="ctr">
                     <a:lnL w="0" cap="flat" cmpd="sng" algn="ctr">
                       <a:noFill/>
                     </a:lnL>
@@ -18043,7 +18075,7 @@
                     <a:bodyPr/>
                     <a:lstStyle/>
                     <a:p>
-                      <a:pPr indent="0" marL="0">
+                      <a:pPr marL="0" indent="0">
                         <a:buNone/>
                       </a:pPr>
                       <a:r>
@@ -18064,7 +18096,7 @@
                       </a:endParaRPr>
                     </a:p>
                   </a:txBody>
-                  <a:tcPr marL="91440" marR="91440" marT="45720" marB="45720" anchor="ctr">
+                  <a:tcPr anchor="ctr">
                     <a:lnL w="0" cap="flat" cmpd="sng" algn="ctr">
                       <a:noFill/>
                     </a:lnL>
@@ -18087,7 +18119,7 @@
                     <a:bodyPr/>
                     <a:lstStyle/>
                     <a:p>
-                      <a:pPr indent="0" marL="0">
+                      <a:pPr marL="0" indent="0">
                         <a:buNone/>
                       </a:pPr>
                       <a:r>
@@ -18108,7 +18140,7 @@
                       </a:endParaRPr>
                     </a:p>
                   </a:txBody>
-                  <a:tcPr marL="91440" marR="91440" marT="45720" marB="45720" anchor="ctr">
+                  <a:tcPr anchor="ctr">
                     <a:lnL w="0" cap="flat" cmpd="sng" algn="ctr">
                       <a:noFill/>
                     </a:lnL>
@@ -18131,7 +18163,7 @@
                     <a:bodyPr/>
                     <a:lstStyle/>
                     <a:p>
-                      <a:pPr indent="0" marL="0">
+                      <a:pPr marL="0" indent="0">
                         <a:buNone/>
                       </a:pPr>
                       <a:r>
@@ -18152,7 +18184,7 @@
                       </a:endParaRPr>
                     </a:p>
                   </a:txBody>
-                  <a:tcPr marL="91440" marR="91440" marT="45720" marB="45720" anchor="ctr">
+                  <a:tcPr anchor="ctr">
                     <a:lnL w="0" cap="flat" cmpd="sng" algn="ctr">
                       <a:noFill/>
                     </a:lnL>
@@ -18175,7 +18207,7 @@
                     <a:bodyPr/>
                     <a:lstStyle/>
                     <a:p>
-                      <a:pPr indent="0" marL="0">
+                      <a:pPr marL="0" indent="0">
                         <a:buNone/>
                       </a:pPr>
                       <a:r>
@@ -18196,7 +18228,7 @@
                       </a:endParaRPr>
                     </a:p>
                   </a:txBody>
-                  <a:tcPr marL="91440" marR="91440" marT="45720" marB="45720" anchor="ctr">
+                  <a:tcPr anchor="ctr">
                     <a:lnL w="0" cap="flat" cmpd="sng" algn="ctr">
                       <a:noFill/>
                     </a:lnL>
@@ -18214,6 +18246,11 @@
                     </a:solidFill>
                   </a:tcPr>
                 </a:tc>
+                <a:extLst>
+                  <a:ext uri="{0D108BD9-81ED-4DB2-BD59-A6C34878D82A}">
+                    <a16:rowId xmlns:a16="http://schemas.microsoft.com/office/drawing/2014/main" val="10000"/>
+                  </a:ext>
+                </a:extLst>
               </a:tr>
               <a:tr h="388620">
                 <a:tc>
@@ -18221,7 +18258,7 @@
                     <a:bodyPr/>
                     <a:lstStyle/>
                     <a:p>
-                      <a:pPr algn="l" indent="0" marL="0">
+                      <a:pPr marL="0" indent="0" algn="l">
                         <a:buNone/>
                       </a:pPr>
                       <a:r>
@@ -18242,7 +18279,7 @@
                       </a:endParaRPr>
                     </a:p>
                   </a:txBody>
-                  <a:tcPr marL="91440" marR="91440" marT="45720" marB="45720" anchor="ctr">
+                  <a:tcPr anchor="ctr">
                     <a:lnL w="0" cap="flat" cmpd="sng" algn="ctr">
                       <a:noFill/>
                     </a:lnL>
@@ -18265,7 +18302,7 @@
                     <a:bodyPr/>
                     <a:lstStyle/>
                     <a:p>
-                      <a:pPr algn="ctr" indent="0" marL="0">
+                      <a:pPr marL="0" indent="0" algn="ctr">
                         <a:buNone/>
                       </a:pPr>
                       <a:r>
@@ -18286,7 +18323,7 @@
                       </a:endParaRPr>
                     </a:p>
                   </a:txBody>
-                  <a:tcPr marL="91440" marR="91440" marT="45720" marB="45720" anchor="ctr">
+                  <a:tcPr anchor="ctr">
                     <a:lnL w="0" cap="flat" cmpd="sng" algn="ctr">
                       <a:noFill/>
                     </a:lnL>
@@ -18309,7 +18346,7 @@
                     <a:bodyPr/>
                     <a:lstStyle/>
                     <a:p>
-                      <a:pPr algn="ctr" indent="0" marL="0">
+                      <a:pPr marL="0" indent="0" algn="ctr">
                         <a:buNone/>
                       </a:pPr>
                       <a:r>
@@ -18330,7 +18367,7 @@
                       </a:endParaRPr>
                     </a:p>
                   </a:txBody>
-                  <a:tcPr marL="91440" marR="91440" marT="45720" marB="45720" anchor="ctr">
+                  <a:tcPr anchor="ctr">
                     <a:lnL w="0" cap="flat" cmpd="sng" algn="ctr">
                       <a:noFill/>
                     </a:lnL>
@@ -18353,7 +18390,7 @@
                     <a:bodyPr/>
                     <a:lstStyle/>
                     <a:p>
-                      <a:pPr algn="ctr" indent="0" marL="0">
+                      <a:pPr marL="0" indent="0" algn="ctr">
                         <a:buNone/>
                       </a:pPr>
                       <a:r>
@@ -18374,7 +18411,7 @@
                       </a:endParaRPr>
                     </a:p>
                   </a:txBody>
-                  <a:tcPr marL="91440" marR="91440" marT="45720" marB="45720" anchor="ctr">
+                  <a:tcPr anchor="ctr">
                     <a:lnL w="0" cap="flat" cmpd="sng" algn="ctr">
                       <a:noFill/>
                     </a:lnL>
@@ -18397,7 +18434,7 @@
                     <a:bodyPr/>
                     <a:lstStyle/>
                     <a:p>
-                      <a:pPr algn="ctr" indent="0" marL="0">
+                      <a:pPr marL="0" indent="0" algn="ctr">
                         <a:buNone/>
                       </a:pPr>
                       <a:r>
@@ -18418,7 +18455,7 @@
                       </a:endParaRPr>
                     </a:p>
                   </a:txBody>
-                  <a:tcPr marL="91440" marR="91440" marT="45720" marB="45720" anchor="ctr">
+                  <a:tcPr anchor="ctr">
                     <a:lnL w="0" cap="flat" cmpd="sng" algn="ctr">
                       <a:noFill/>
                     </a:lnL>
@@ -18441,7 +18478,7 @@
                     <a:bodyPr/>
                     <a:lstStyle/>
                     <a:p>
-                      <a:pPr algn="ctr" indent="0" marL="0">
+                      <a:pPr marL="0" indent="0" algn="ctr">
                         <a:buNone/>
                       </a:pPr>
                       <a:r>
@@ -18462,7 +18499,7 @@
                       </a:endParaRPr>
                     </a:p>
                   </a:txBody>
-                  <a:tcPr marL="91440" marR="91440" marT="45720" marB="45720" anchor="ctr">
+                  <a:tcPr anchor="ctr">
                     <a:lnL w="0" cap="flat" cmpd="sng" algn="ctr">
                       <a:noFill/>
                     </a:lnL>
@@ -18485,7 +18522,7 @@
                     <a:bodyPr/>
                     <a:lstStyle/>
                     <a:p>
-                      <a:pPr algn="ctr" indent="0" marL="0">
+                      <a:pPr marL="0" indent="0" algn="ctr">
                         <a:buNone/>
                       </a:pPr>
                       <a:r>
@@ -18506,7 +18543,7 @@
                       </a:endParaRPr>
                     </a:p>
                   </a:txBody>
-                  <a:tcPr marL="91440" marR="91440" marT="45720" marB="45720" anchor="ctr">
+                  <a:tcPr anchor="ctr">
                     <a:lnL w="0" cap="flat" cmpd="sng" algn="ctr">
                       <a:noFill/>
                     </a:lnL>
@@ -18529,7 +18566,7 @@
                     <a:bodyPr/>
                     <a:lstStyle/>
                     <a:p>
-                      <a:pPr algn="ctr" indent="0" marL="0">
+                      <a:pPr marL="0" indent="0" algn="ctr">
                         <a:buNone/>
                       </a:pPr>
                       <a:r>
@@ -18550,7 +18587,7 @@
                       </a:endParaRPr>
                     </a:p>
                   </a:txBody>
-                  <a:tcPr marL="91440" marR="91440" marT="45720" marB="45720" anchor="ctr">
+                  <a:tcPr anchor="ctr">
                     <a:lnL w="0" cap="flat" cmpd="sng" algn="ctr">
                       <a:noFill/>
                     </a:lnL>
@@ -18568,6 +18605,11 @@
                     </a:solidFill>
                   </a:tcPr>
                 </a:tc>
+                <a:extLst>
+                  <a:ext uri="{0D108BD9-81ED-4DB2-BD59-A6C34878D82A}">
+                    <a16:rowId xmlns:a16="http://schemas.microsoft.com/office/drawing/2014/main" val="10001"/>
+                  </a:ext>
+                </a:extLst>
               </a:tr>
               <a:tr h="388620">
                 <a:tc>
@@ -18575,7 +18617,7 @@
                     <a:bodyPr/>
                     <a:lstStyle/>
                     <a:p>
-                      <a:pPr algn="l" indent="0" marL="0">
+                      <a:pPr marL="0" indent="0" algn="l">
                         <a:buNone/>
                       </a:pPr>
                       <a:r>
@@ -18596,7 +18638,7 @@
                       </a:endParaRPr>
                     </a:p>
                   </a:txBody>
-                  <a:tcPr marL="91440" marR="91440" marT="45720" marB="45720" anchor="ctr">
+                  <a:tcPr anchor="ctr">
                     <a:lnL w="0" cap="flat" cmpd="sng" algn="ctr">
                       <a:noFill/>
                     </a:lnL>
@@ -18619,7 +18661,7 @@
                     <a:bodyPr/>
                     <a:lstStyle/>
                     <a:p>
-                      <a:pPr algn="ctr" indent="0" marL="0">
+                      <a:pPr marL="0" indent="0" algn="ctr">
                         <a:buNone/>
                       </a:pPr>
                       <a:r>
@@ -18640,7 +18682,7 @@
                       </a:endParaRPr>
                     </a:p>
                   </a:txBody>
-                  <a:tcPr marL="91440" marR="91440" marT="45720" marB="45720" anchor="ctr">
+                  <a:tcPr anchor="ctr">
                     <a:lnL w="0" cap="flat" cmpd="sng" algn="ctr">
                       <a:noFill/>
                     </a:lnL>
@@ -18663,7 +18705,7 @@
                     <a:bodyPr/>
                     <a:lstStyle/>
                     <a:p>
-                      <a:pPr algn="ctr" indent="0" marL="0">
+                      <a:pPr marL="0" indent="0" algn="ctr">
                         <a:buNone/>
                       </a:pPr>
                       <a:r>
@@ -18684,7 +18726,7 @@
                       </a:endParaRPr>
                     </a:p>
                   </a:txBody>
-                  <a:tcPr marL="91440" marR="91440" marT="45720" marB="45720" anchor="ctr">
+                  <a:tcPr anchor="ctr">
                     <a:lnL w="0" cap="flat" cmpd="sng" algn="ctr">
                       <a:noFill/>
                     </a:lnL>
@@ -18707,7 +18749,7 @@
                     <a:bodyPr/>
                     <a:lstStyle/>
                     <a:p>
-                      <a:pPr algn="ctr" indent="0" marL="0">
+                      <a:pPr marL="0" indent="0" algn="ctr">
                         <a:buNone/>
                       </a:pPr>
                       <a:r>
@@ -18728,7 +18770,7 @@
                       </a:endParaRPr>
                     </a:p>
                   </a:txBody>
-                  <a:tcPr marL="91440" marR="91440" marT="45720" marB="45720" anchor="ctr">
+                  <a:tcPr anchor="ctr">
                     <a:lnL w="0" cap="flat" cmpd="sng" algn="ctr">
                       <a:noFill/>
                     </a:lnL>
@@ -18751,7 +18793,7 @@
                     <a:bodyPr/>
                     <a:lstStyle/>
                     <a:p>
-                      <a:pPr algn="ctr" indent="0" marL="0">
+                      <a:pPr marL="0" indent="0" algn="ctr">
                         <a:buNone/>
                       </a:pPr>
                       <a:r>
@@ -18772,7 +18814,7 @@
                       </a:endParaRPr>
                     </a:p>
                   </a:txBody>
-                  <a:tcPr marL="91440" marR="91440" marT="45720" marB="45720" anchor="ctr">
+                  <a:tcPr anchor="ctr">
                     <a:lnL w="0" cap="flat" cmpd="sng" algn="ctr">
                       <a:noFill/>
                     </a:lnL>
@@ -18795,7 +18837,7 @@
                     <a:bodyPr/>
                     <a:lstStyle/>
                     <a:p>
-                      <a:pPr algn="ctr" indent="0" marL="0">
+                      <a:pPr marL="0" indent="0" algn="ctr">
                         <a:buNone/>
                       </a:pPr>
                       <a:r>
@@ -18816,7 +18858,7 @@
                       </a:endParaRPr>
                     </a:p>
                   </a:txBody>
-                  <a:tcPr marL="91440" marR="91440" marT="45720" marB="45720" anchor="ctr">
+                  <a:tcPr anchor="ctr">
                     <a:lnL w="0" cap="flat" cmpd="sng" algn="ctr">
                       <a:noFill/>
                     </a:lnL>
@@ -18839,7 +18881,7 @@
                     <a:bodyPr/>
                     <a:lstStyle/>
                     <a:p>
-                      <a:pPr algn="ctr" indent="0" marL="0">
+                      <a:pPr marL="0" indent="0" algn="ctr">
                         <a:buNone/>
                       </a:pPr>
                       <a:r>
@@ -18860,7 +18902,7 @@
                       </a:endParaRPr>
                     </a:p>
                   </a:txBody>
-                  <a:tcPr marL="91440" marR="91440" marT="45720" marB="45720" anchor="ctr">
+                  <a:tcPr anchor="ctr">
                     <a:lnL w="0" cap="flat" cmpd="sng" algn="ctr">
                       <a:noFill/>
                     </a:lnL>
@@ -18883,7 +18925,7 @@
                     <a:bodyPr/>
                     <a:lstStyle/>
                     <a:p>
-                      <a:pPr algn="ctr" indent="0" marL="0">
+                      <a:pPr marL="0" indent="0" algn="ctr">
                         <a:buNone/>
                       </a:pPr>
                       <a:r>
@@ -18904,7 +18946,7 @@
                       </a:endParaRPr>
                     </a:p>
                   </a:txBody>
-                  <a:tcPr marL="91440" marR="91440" marT="45720" marB="45720" anchor="ctr">
+                  <a:tcPr anchor="ctr">
                     <a:lnL w="0" cap="flat" cmpd="sng" algn="ctr">
                       <a:noFill/>
                     </a:lnL>
@@ -18922,6 +18964,11 @@
                     </a:solidFill>
                   </a:tcPr>
                 </a:tc>
+                <a:extLst>
+                  <a:ext uri="{0D108BD9-81ED-4DB2-BD59-A6C34878D82A}">
+                    <a16:rowId xmlns:a16="http://schemas.microsoft.com/office/drawing/2014/main" val="10002"/>
+                  </a:ext>
+                </a:extLst>
               </a:tr>
               <a:tr h="388620">
                 <a:tc>
@@ -18929,7 +18976,7 @@
                     <a:bodyPr/>
                     <a:lstStyle/>
                     <a:p>
-                      <a:pPr algn="l" indent="0" marL="0">
+                      <a:pPr marL="0" indent="0" algn="l">
                         <a:buNone/>
                       </a:pPr>
                       <a:r>
@@ -18950,7 +18997,7 @@
                       </a:endParaRPr>
                     </a:p>
                   </a:txBody>
-                  <a:tcPr marL="91440" marR="91440" marT="45720" marB="45720" anchor="ctr">
+                  <a:tcPr anchor="ctr">
                     <a:lnL w="0" cap="flat" cmpd="sng" algn="ctr">
                       <a:noFill/>
                     </a:lnL>
@@ -18973,7 +19020,7 @@
                     <a:bodyPr/>
                     <a:lstStyle/>
                     <a:p>
-                      <a:pPr algn="ctr" indent="0" marL="0">
+                      <a:pPr marL="0" indent="0" algn="ctr">
                         <a:buNone/>
                       </a:pPr>
                       <a:r>
@@ -18994,7 +19041,7 @@
                       </a:endParaRPr>
                     </a:p>
                   </a:txBody>
-                  <a:tcPr marL="91440" marR="91440" marT="45720" marB="45720" anchor="ctr">
+                  <a:tcPr anchor="ctr">
                     <a:lnL w="0" cap="flat" cmpd="sng" algn="ctr">
                       <a:noFill/>
                     </a:lnL>
@@ -19017,7 +19064,7 @@
                     <a:bodyPr/>
                     <a:lstStyle/>
                     <a:p>
-                      <a:pPr algn="ctr" indent="0" marL="0">
+                      <a:pPr marL="0" indent="0" algn="ctr">
                         <a:buNone/>
                       </a:pPr>
                       <a:r>
@@ -19038,7 +19085,7 @@
                       </a:endParaRPr>
                     </a:p>
                   </a:txBody>
-                  <a:tcPr marL="91440" marR="91440" marT="45720" marB="45720" anchor="ctr">
+                  <a:tcPr anchor="ctr">
                     <a:lnL w="0" cap="flat" cmpd="sng" algn="ctr">
                       <a:noFill/>
                     </a:lnL>
@@ -19061,7 +19108,7 @@
                     <a:bodyPr/>
                     <a:lstStyle/>
                     <a:p>
-                      <a:pPr algn="ctr" indent="0" marL="0">
+                      <a:pPr marL="0" indent="0" algn="ctr">
                         <a:buNone/>
                       </a:pPr>
                       <a:r>
@@ -19082,7 +19129,7 @@
                       </a:endParaRPr>
                     </a:p>
                   </a:txBody>
-                  <a:tcPr marL="91440" marR="91440" marT="45720" marB="45720" anchor="ctr">
+                  <a:tcPr anchor="ctr">
                     <a:lnL w="0" cap="flat" cmpd="sng" algn="ctr">
                       <a:noFill/>
                     </a:lnL>
@@ -19105,7 +19152,7 @@
                     <a:bodyPr/>
                     <a:lstStyle/>
                     <a:p>
-                      <a:pPr algn="ctr" indent="0" marL="0">
+                      <a:pPr marL="0" indent="0" algn="ctr">
                         <a:buNone/>
                       </a:pPr>
                       <a:r>
@@ -19126,7 +19173,7 @@
                       </a:endParaRPr>
                     </a:p>
                   </a:txBody>
-                  <a:tcPr marL="91440" marR="91440" marT="45720" marB="45720" anchor="ctr">
+                  <a:tcPr anchor="ctr">
                     <a:lnL w="0" cap="flat" cmpd="sng" algn="ctr">
                       <a:noFill/>
                     </a:lnL>
@@ -19149,7 +19196,7 @@
                     <a:bodyPr/>
                     <a:lstStyle/>
                     <a:p>
-                      <a:pPr algn="ctr" indent="0" marL="0">
+                      <a:pPr marL="0" indent="0" algn="ctr">
                         <a:buNone/>
                       </a:pPr>
                       <a:r>
@@ -19170,7 +19217,7 @@
                       </a:endParaRPr>
                     </a:p>
                   </a:txBody>
-                  <a:tcPr marL="91440" marR="91440" marT="45720" marB="45720" anchor="ctr">
+                  <a:tcPr anchor="ctr">
                     <a:lnL w="0" cap="flat" cmpd="sng" algn="ctr">
                       <a:noFill/>
                     </a:lnL>
@@ -19193,7 +19240,7 @@
                     <a:bodyPr/>
                     <a:lstStyle/>
                     <a:p>
-                      <a:pPr algn="ctr" indent="0" marL="0">
+                      <a:pPr marL="0" indent="0" algn="ctr">
                         <a:buNone/>
                       </a:pPr>
                       <a:r>
@@ -19214,7 +19261,7 @@
                       </a:endParaRPr>
                     </a:p>
                   </a:txBody>
-                  <a:tcPr marL="91440" marR="91440" marT="45720" marB="45720" anchor="ctr">
+                  <a:tcPr anchor="ctr">
                     <a:lnL w="0" cap="flat" cmpd="sng" algn="ctr">
                       <a:noFill/>
                     </a:lnL>
@@ -19237,7 +19284,7 @@
                     <a:bodyPr/>
                     <a:lstStyle/>
                     <a:p>
-                      <a:pPr algn="ctr" indent="0" marL="0">
+                      <a:pPr marL="0" indent="0" algn="ctr">
                         <a:buNone/>
                       </a:pPr>
                       <a:r>
@@ -19258,7 +19305,7 @@
                       </a:endParaRPr>
                     </a:p>
                   </a:txBody>
-                  <a:tcPr marL="91440" marR="91440" marT="45720" marB="45720" anchor="ctr">
+                  <a:tcPr anchor="ctr">
                     <a:lnL w="0" cap="flat" cmpd="sng" algn="ctr">
                       <a:noFill/>
                     </a:lnL>
@@ -19276,6 +19323,11 @@
                     </a:solidFill>
                   </a:tcPr>
                 </a:tc>
+                <a:extLst>
+                  <a:ext uri="{0D108BD9-81ED-4DB2-BD59-A6C34878D82A}">
+                    <a16:rowId xmlns:a16="http://schemas.microsoft.com/office/drawing/2014/main" val="10003"/>
+                  </a:ext>
+                </a:extLst>
               </a:tr>
             </a:tbl>
           </a:graphicData>
@@ -19302,7 +19354,7 @@
           <a:bodyPr wrap="square" lIns="0" tIns="0" rIns="0" bIns="0" rtlCol="0" anchor="ctr"/>
           <a:lstStyle/>
           <a:p>
-            <a:pPr indent="0" marL="0">
+            <a:pPr marL="0" indent="0">
               <a:buNone/>
             </a:pPr>
             <a:r>
@@ -19339,10 +19391,6 @@
           </a:solidFill>
           <a:ln/>
         </p:spPr>
-        <p:txBody>
-          <a:bodyPr/>
-          <a:p/>
-        </p:txBody>
       </p:sp>
       <p:sp>
         <p:nvSpPr>
@@ -19365,7 +19413,7 @@
           <a:bodyPr wrap="square" lIns="0" tIns="0" rIns="0" bIns="0" rtlCol="0" anchor="ctr"/>
           <a:lstStyle/>
           <a:p>
-            <a:pPr algn="ctr" indent="0" marL="0">
+            <a:pPr marL="0" indent="0" algn="ctr">
               <a:buNone/>
             </a:pPr>
             <a:r>
@@ -19404,7 +19452,7 @@
           <a:bodyPr wrap="square" lIns="0" tIns="0" rIns="0" bIns="0" rtlCol="0" anchor="ctr"/>
           <a:lstStyle/>
           <a:p>
-            <a:pPr indent="0" marL="0">
+            <a:pPr marL="0" indent="0">
               <a:buNone/>
             </a:pPr>
             <a:r>
@@ -19441,14 +19489,10 @@
           </a:solidFill>
           <a:ln/>
         </p:spPr>
-        <p:txBody>
-          <a:bodyPr/>
-          <a:p/>
-        </p:txBody>
-      </p:sp>
-      <p:sp>
-        <p:nvSpPr>
-          <p:cNvPr id="10" name="Text 7"/>
+      </p:sp>
+      <p:sp>
+        <p:nvSpPr>
+          <p:cNvPr id="4" name="Text 7"/>
           <p:cNvSpPr txBox="1"/>
           <p:nvPr/>
         </p:nvSpPr>
@@ -19467,7 +19511,7 @@
           <a:bodyPr wrap="square" lIns="0" tIns="0" rIns="0" bIns="0" rtlCol="0" anchor="ctr"/>
           <a:lstStyle/>
           <a:p>
-            <a:pPr algn="ctr" indent="0" marL="0">
+            <a:pPr marL="0" indent="0" algn="ctr">
               <a:buNone/>
             </a:pPr>
             <a:r>
@@ -19506,7 +19550,7 @@
           <a:bodyPr wrap="square" lIns="0" tIns="0" rIns="0" bIns="0" rtlCol="0" anchor="ctr"/>
           <a:lstStyle/>
           <a:p>
-            <a:pPr indent="0" marL="0">
+            <a:pPr marL="0" indent="0">
               <a:buNone/>
             </a:pPr>
             <a:r>
@@ -19543,10 +19587,6 @@
           </a:solidFill>
           <a:ln/>
         </p:spPr>
-        <p:txBody>
-          <a:bodyPr/>
-          <a:p/>
-        </p:txBody>
       </p:sp>
       <p:sp>
         <p:nvSpPr>
@@ -19569,7 +19609,7 @@
           <a:bodyPr wrap="square" lIns="0" tIns="0" rIns="0" bIns="0" rtlCol="0" anchor="ctr"/>
           <a:lstStyle/>
           <a:p>
-            <a:pPr algn="ctr" indent="0" marL="0">
+            <a:pPr marL="0" indent="0" algn="ctr">
               <a:buNone/>
             </a:pPr>
             <a:r>
@@ -19608,7 +19648,7 @@
           <a:bodyPr wrap="square" lIns="0" tIns="0" rIns="0" bIns="0" rtlCol="0" anchor="ctr"/>
           <a:lstStyle/>
           <a:p>
-            <a:pPr indent="0" marL="0">
+            <a:pPr marL="0" indent="0">
               <a:buNone/>
             </a:pPr>
             <a:r>
@@ -19647,7 +19687,7 @@
           <a:bodyPr wrap="square" lIns="0" tIns="0" rIns="0" bIns="0" rtlCol="0" anchor="ctr"/>
           <a:lstStyle/>
           <a:p>
-            <a:pPr algn="l" indent="0" marL="0">
+            <a:pPr marL="0" indent="0" algn="l">
               <a:buNone/>
             </a:pPr>
             <a:r>
@@ -19686,7 +19726,7 @@
           <a:bodyPr wrap="square" lIns="0" tIns="0" rIns="0" bIns="0" rtlCol="0" anchor="ctr"/>
           <a:lstStyle/>
           <a:p>
-            <a:pPr algn="r" indent="0" marL="0">
+            <a:pPr marL="0" indent="0" algn="r">
               <a:buNone/>
             </a:pPr>
             <a:r>
@@ -20005,4 +20045,299 @@
     </a:ext>
   </a:extLst>
 </a:theme>
+</file>
+
+<file path=ppt/theme/theme2.xml><?xml version="1.0" encoding="utf-8"?>
+<a:theme xmlns:a="http://schemas.openxmlformats.org/drawingml/2006/main" name="Tema do Office">
+  <a:themeElements>
+    <a:clrScheme name="Office">
+      <a:dk1>
+        <a:sysClr val="windowText" lastClr="000000"/>
+      </a:dk1>
+      <a:lt1>
+        <a:sysClr val="window" lastClr="FFFFFF"/>
+      </a:lt1>
+      <a:dk2>
+        <a:srgbClr val="44546A"/>
+      </a:dk2>
+      <a:lt2>
+        <a:srgbClr val="E7E6E6"/>
+      </a:lt2>
+      <a:accent1>
+        <a:srgbClr val="4472C4"/>
+      </a:accent1>
+      <a:accent2>
+        <a:srgbClr val="ED7D31"/>
+      </a:accent2>
+      <a:accent3>
+        <a:srgbClr val="A5A5A5"/>
+      </a:accent3>
+      <a:accent4>
+        <a:srgbClr val="FFC000"/>
+      </a:accent4>
+      <a:accent5>
+        <a:srgbClr val="5B9BD5"/>
+      </a:accent5>
+      <a:accent6>
+        <a:srgbClr val="70AD47"/>
+      </a:accent6>
+      <a:hlink>
+        <a:srgbClr val="0563C1"/>
+      </a:hlink>
+      <a:folHlink>
+        <a:srgbClr val="954F72"/>
+      </a:folHlink>
+    </a:clrScheme>
+    <a:fontScheme name="Office">
+      <a:majorFont>
+        <a:latin typeface="Calibri Light" panose="020F0302020204030204"/>
+        <a:ea typeface=""/>
+        <a:cs typeface=""/>
+        <a:font script="Jpan" typeface="游ゴシック Light"/>
+        <a:font script="Hang" typeface="맑은 고딕"/>
+        <a:font script="Hans" typeface="等线 Light"/>
+        <a:font script="Hant" typeface="新細明體"/>
+        <a:font script="Arab" typeface="Times New Roman"/>
+        <a:font script="Hebr" typeface="Times New Roman"/>
+        <a:font script="Thai" typeface="Angsana New"/>
+        <a:font script="Ethi" typeface="Nyala"/>
+        <a:font script="Beng" typeface="Vrinda"/>
+        <a:font script="Gujr" typeface="Shruti"/>
+        <a:font script="Khmr" typeface="MoolBoran"/>
+        <a:font script="Knda" typeface="Tunga"/>
+        <a:font script="Guru" typeface="Raavi"/>
+        <a:font script="Cans" typeface="Euphemia"/>
+        <a:font script="Cher" typeface="Plantagenet Cherokee"/>
+        <a:font script="Yiii" typeface="Microsoft Yi Baiti"/>
+        <a:font script="Tibt" typeface="Microsoft Himalaya"/>
+        <a:font script="Thaa" typeface="MV Boli"/>
+        <a:font script="Deva" typeface="Mangal"/>
+        <a:font script="Telu" typeface="Gautami"/>
+        <a:font script="Taml" typeface="Latha"/>
+        <a:font script="Syrc" typeface="Estrangelo Edessa"/>
+        <a:font script="Orya" typeface="Kalinga"/>
+        <a:font script="Mlym" typeface="Kartika"/>
+        <a:font script="Laoo" typeface="DokChampa"/>
+        <a:font script="Sinh" typeface="Iskoola Pota"/>
+        <a:font script="Mong" typeface="Mongolian Baiti"/>
+        <a:font script="Viet" typeface="Times New Roman"/>
+        <a:font script="Uigh" typeface="Microsoft Uighur"/>
+        <a:font script="Geor" typeface="Sylfaen"/>
+        <a:font script="Armn" typeface="Arial"/>
+        <a:font script="Bugi" typeface="Leelawadee UI"/>
+        <a:font script="Bopo" typeface="Microsoft JhengHei"/>
+        <a:font script="Java" typeface="Javanese Text"/>
+        <a:font script="Lisu" typeface="Segoe UI"/>
+        <a:font script="Mymr" typeface="Myanmar Text"/>
+        <a:font script="Nkoo" typeface="Ebrima"/>
+        <a:font script="Olck" typeface="Nirmala UI"/>
+        <a:font script="Osma" typeface="Ebrima"/>
+        <a:font script="Phag" typeface="Phagspa"/>
+        <a:font script="Syrn" typeface="Estrangelo Edessa"/>
+        <a:font script="Syrj" typeface="Estrangelo Edessa"/>
+        <a:font script="Syre" typeface="Estrangelo Edessa"/>
+        <a:font script="Sora" typeface="Nirmala UI"/>
+        <a:font script="Tale" typeface="Microsoft Tai Le"/>
+        <a:font script="Talu" typeface="Microsoft New Tai Lue"/>
+        <a:font script="Tfng" typeface="Ebrima"/>
+      </a:majorFont>
+      <a:minorFont>
+        <a:latin typeface="Calibri" panose="020F0502020204030204"/>
+        <a:ea typeface=""/>
+        <a:cs typeface=""/>
+        <a:font script="Jpan" typeface="游ゴシック"/>
+        <a:font script="Hang" typeface="맑은 고딕"/>
+        <a:font script="Hans" typeface="等线"/>
+        <a:font script="Hant" typeface="新細明體"/>
+        <a:font script="Arab" typeface="Arial"/>
+        <a:font script="Hebr" typeface="Arial"/>
+        <a:font script="Thai" typeface="Cordia New"/>
+        <a:font script="Ethi" typeface="Nyala"/>
+        <a:font script="Beng" typeface="Vrinda"/>
+        <a:font script="Gujr" typeface="Shruti"/>
+        <a:font script="Khmr" typeface="DaunPenh"/>
+        <a:font script="Knda" typeface="Tunga"/>
+        <a:font script="Guru" typeface="Raavi"/>
+        <a:font script="Cans" typeface="Euphemia"/>
+        <a:font script="Cher" typeface="Plantagenet Cherokee"/>
+        <a:font script="Yiii" typeface="Microsoft Yi Baiti"/>
+        <a:font script="Tibt" typeface="Microsoft Himalaya"/>
+        <a:font script="Thaa" typeface="MV Boli"/>
+        <a:font script="Deva" typeface="Mangal"/>
+        <a:font script="Telu" typeface="Gautami"/>
+        <a:font script="Taml" typeface="Latha"/>
+        <a:font script="Syrc" typeface="Estrangelo Edessa"/>
+        <a:font script="Orya" typeface="Kalinga"/>
+        <a:font script="Mlym" typeface="Kartika"/>
+        <a:font script="Laoo" typeface="DokChampa"/>
+        <a:font script="Sinh" typeface="Iskoola Pota"/>
+        <a:font script="Mong" typeface="Mongolian Baiti"/>
+        <a:font script="Viet" typeface="Arial"/>
+        <a:font script="Uigh" typeface="Microsoft Uighur"/>
+        <a:font script="Geor" typeface="Sylfaen"/>
+        <a:font script="Armn" typeface="Arial"/>
+        <a:font script="Bugi" typeface="Leelawadee UI"/>
+        <a:font script="Bopo" typeface="Microsoft JhengHei"/>
+        <a:font script="Java" typeface="Javanese Text"/>
+        <a:font script="Lisu" typeface="Segoe UI"/>
+        <a:font script="Mymr" typeface="Myanmar Text"/>
+        <a:font script="Nkoo" typeface="Ebrima"/>
+        <a:font script="Olck" typeface="Nirmala UI"/>
+        <a:font script="Osma" typeface="Ebrima"/>
+        <a:font script="Phag" typeface="Phagspa"/>
+        <a:font script="Syrn" typeface="Estrangelo Edessa"/>
+        <a:font script="Syrj" typeface="Estrangelo Edessa"/>
+        <a:font script="Syre" typeface="Estrangelo Edessa"/>
+        <a:font script="Sora" typeface="Nirmala UI"/>
+        <a:font script="Tale" typeface="Microsoft Tai Le"/>
+        <a:font script="Talu" typeface="Microsoft New Tai Lue"/>
+        <a:font script="Tfng" typeface="Ebrima"/>
+      </a:minorFont>
+    </a:fontScheme>
+    <a:fmtScheme name="Office">
+      <a:fillStyleLst>
+        <a:solidFill>
+          <a:schemeClr val="phClr"/>
+        </a:solidFill>
+        <a:gradFill rotWithShape="1">
+          <a:gsLst>
+            <a:gs pos="0">
+              <a:schemeClr val="phClr">
+                <a:lumMod val="110000"/>
+                <a:satMod val="105000"/>
+                <a:tint val="67000"/>
+              </a:schemeClr>
+            </a:gs>
+            <a:gs pos="50000">
+              <a:schemeClr val="phClr">
+                <a:lumMod val="105000"/>
+                <a:satMod val="103000"/>
+                <a:tint val="73000"/>
+              </a:schemeClr>
+            </a:gs>
+            <a:gs pos="100000">
+              <a:schemeClr val="phClr">
+                <a:lumMod val="105000"/>
+                <a:satMod val="109000"/>
+                <a:tint val="81000"/>
+              </a:schemeClr>
+            </a:gs>
+          </a:gsLst>
+          <a:lin ang="5400000" scaled="0"/>
+        </a:gradFill>
+        <a:gradFill rotWithShape="1">
+          <a:gsLst>
+            <a:gs pos="0">
+              <a:schemeClr val="phClr">
+                <a:satMod val="103000"/>
+                <a:lumMod val="102000"/>
+                <a:tint val="94000"/>
+              </a:schemeClr>
+            </a:gs>
+            <a:gs pos="50000">
+              <a:schemeClr val="phClr">
+                <a:satMod val="110000"/>
+                <a:lumMod val="100000"/>
+                <a:shade val="100000"/>
+              </a:schemeClr>
+            </a:gs>
+            <a:gs pos="100000">
+              <a:schemeClr val="phClr">
+                <a:lumMod val="99000"/>
+                <a:satMod val="120000"/>
+                <a:shade val="78000"/>
+              </a:schemeClr>
+            </a:gs>
+          </a:gsLst>
+          <a:lin ang="5400000" scaled="0"/>
+        </a:gradFill>
+      </a:fillStyleLst>
+      <a:lnStyleLst>
+        <a:ln w="6350" cap="flat" cmpd="sng" algn="ctr">
+          <a:solidFill>
+            <a:schemeClr val="phClr"/>
+          </a:solidFill>
+          <a:prstDash val="solid"/>
+          <a:miter lim="800000"/>
+        </a:ln>
+        <a:ln w="12700" cap="flat" cmpd="sng" algn="ctr">
+          <a:solidFill>
+            <a:schemeClr val="phClr"/>
+          </a:solidFill>
+          <a:prstDash val="solid"/>
+          <a:miter lim="800000"/>
+        </a:ln>
+        <a:ln w="19050" cap="flat" cmpd="sng" algn="ctr">
+          <a:solidFill>
+            <a:schemeClr val="phClr"/>
+          </a:solidFill>
+          <a:prstDash val="solid"/>
+          <a:miter lim="800000"/>
+        </a:ln>
+      </a:lnStyleLst>
+      <a:effectStyleLst>
+        <a:effectStyle>
+          <a:effectLst/>
+        </a:effectStyle>
+        <a:effectStyle>
+          <a:effectLst/>
+        </a:effectStyle>
+        <a:effectStyle>
+          <a:effectLst>
+            <a:outerShdw blurRad="57150" dist="19050" dir="5400000" algn="ctr" rotWithShape="0">
+              <a:srgbClr val="000000">
+                <a:alpha val="63000"/>
+              </a:srgbClr>
+            </a:outerShdw>
+          </a:effectLst>
+        </a:effectStyle>
+      </a:effectStyleLst>
+      <a:bgFillStyleLst>
+        <a:solidFill>
+          <a:schemeClr val="phClr"/>
+        </a:solidFill>
+        <a:solidFill>
+          <a:schemeClr val="phClr">
+            <a:tint val="95000"/>
+            <a:satMod val="170000"/>
+          </a:schemeClr>
+        </a:solidFill>
+        <a:gradFill rotWithShape="1">
+          <a:gsLst>
+            <a:gs pos="0">
+              <a:schemeClr val="phClr">
+                <a:tint val="93000"/>
+                <a:satMod val="150000"/>
+                <a:shade val="98000"/>
+                <a:lumMod val="102000"/>
+              </a:schemeClr>
+            </a:gs>
+            <a:gs pos="50000">
+              <a:schemeClr val="phClr">
+                <a:tint val="98000"/>
+                <a:satMod val="130000"/>
+                <a:shade val="90000"/>
+                <a:lumMod val="103000"/>
+              </a:schemeClr>
+            </a:gs>
+            <a:gs pos="100000">
+              <a:schemeClr val="phClr">
+                <a:shade val="63000"/>
+                <a:satMod val="120000"/>
+              </a:schemeClr>
+            </a:gs>
+          </a:gsLst>
+          <a:lin ang="5400000" scaled="0"/>
+        </a:gradFill>
+      </a:bgFillStyleLst>
+    </a:fmtScheme>
+  </a:themeElements>
+  <a:objectDefaults/>
+  <a:extraClrSchemeLst/>
+  <a:extLst>
+    <a:ext uri="{05A4C25C-085E-4340-85A3-A5531E510DB2}">
+      <thm15:themeFamily xmlns:thm15="http://schemas.microsoft.com/office/thememl/2012/main" name="Office Theme" id="{62F939B6-93AF-4DB8-9C6B-D6C7DFDC589F}" vid="{4A3C46E8-61CC-4603-A589-7422A47A8E4A}"/>
+    </a:ext>
+  </a:extLst>
+</a:theme>
 </file>
--- a/Estudo_Viabilidade_Retrofit_HVAC_Novo_Shopping.pptx
+++ b/Estudo_Viabilidade_Retrofit_HVAC_Novo_Shopping.pptx
@@ -225,16 +225,16 @@
                 <c:formatCode>General</c:formatCode>
                 <c:ptCount val="4"/>
                 <c:pt idx="0">
-                  <c:v>188.7</c:v>
+                  <c:v>141.5</c:v>
                 </c:pt>
                 <c:pt idx="1">
-                  <c:v>217.7</c:v>
+                  <c:v>163.30000000000001</c:v>
                 </c:pt>
                 <c:pt idx="2">
-                  <c:v>246.7</c:v>
+                  <c:v>185</c:v>
                 </c:pt>
                 <c:pt idx="3">
-                  <c:v>290.2</c:v>
+                  <c:v>217.7</c:v>
                 </c:pt>
               </c:numCache>
             </c:numRef>
@@ -744,7 +744,7 @@
                   <c:v>237000</c:v>
                 </c:pt>
                 <c:pt idx="1">
-                  <c:v>212813</c:v>
+                  <c:v>218859</c:v>
                 </c:pt>
               </c:numCache>
             </c:numRef>
@@ -1007,7 +1007,7 @@
                   <c:v>2132999.5699999998</c:v>
                 </c:pt>
                 <c:pt idx="1">
-                  <c:v>1915313.15</c:v>
+                  <c:v>1969734.75</c:v>
                 </c:pt>
               </c:numCache>
             </c:numRef>
@@ -3145,6 +3145,13 @@
           </a:solidFill>
           <a:ln/>
         </p:spPr>
+        <p:txBody>
+          <a:bodyPr/>
+          <a:lstStyle/>
+          <a:p>
+            <a:endParaRPr/>
+          </a:p>
+        </p:txBody>
       </p:sp>
       <p:sp>
         <p:nvSpPr>
@@ -3165,6 +3172,13 @@
           </a:solidFill>
           <a:ln/>
         </p:spPr>
+        <p:txBody>
+          <a:bodyPr/>
+          <a:lstStyle/>
+          <a:p>
+            <a:endParaRPr/>
+          </a:p>
+        </p:txBody>
       </p:sp>
       <p:sp>
         <p:nvSpPr>
@@ -3185,6 +3199,13 @@
           </a:solidFill>
           <a:ln/>
         </p:spPr>
+        <p:txBody>
+          <a:bodyPr/>
+          <a:lstStyle/>
+          <a:p>
+            <a:endParaRPr/>
+          </a:p>
+        </p:txBody>
       </p:sp>
       <p:sp>
         <p:nvSpPr>
@@ -3286,6 +3307,13 @@
             <a:prstDash val="solid"/>
           </a:ln>
         </p:spPr>
+        <p:txBody>
+          <a:bodyPr/>
+          <a:lstStyle/>
+          <a:p>
+            <a:endParaRPr/>
+          </a:p>
+        </p:txBody>
       </p:sp>
       <p:sp>
         <p:nvSpPr>
@@ -3490,7 +3518,7 @@
           <p:nvPr>
             <p:extLst>
               <p:ext uri="{D42A27DB-BD31-4B8C-83A1-F6EECF244321}">
-                <p14:modId xmlns:p14="http://schemas.microsoft.com/office/powerpoint/2010/main" val="1557127870"/>
+                <p14:modId xmlns:p14="http://schemas.microsoft.com/office/powerpoint/2010/main" val="1487318999"/>
               </p:ext>
             </p:extLst>
           </p:nvPr>
@@ -3817,25 +3845,9 @@
                     <a:bodyPr/>
                     <a:lstStyle/>
                     <a:p>
-                      <a:pPr marL="0" indent="0" algn="ctr">
-                        <a:buNone/>
-                      </a:pPr>
                       <a:r>
-                        <a:rPr lang="en-US" sz="1150">
-                          <a:solidFill>
-                            <a:srgbClr val="1E2761"/>
-                          </a:solidFill>
-                          <a:latin typeface="Calibri" pitchFamily="34" charset="0"/>
-                          <a:ea typeface="Calibri" pitchFamily="34" charset="-122"/>
-                          <a:cs typeface="Calibri" pitchFamily="34" charset="-120"/>
-                        </a:rPr>
                         <a:t>237.000 kWh</a:t>
                       </a:r>
-                      <a:endParaRPr lang="en-US" sz="1150" dirty="0">
-                        <a:latin typeface="Calibri" charset="0"/>
-                        <a:ea typeface="Calibri" charset="0"/>
-                        <a:cs typeface="Calibri" charset="0"/>
-                      </a:endParaRPr>
                     </a:p>
                   </a:txBody>
                   <a:tcPr anchor="ctr">
@@ -3861,25 +3873,9 @@
                     <a:bodyPr/>
                     <a:lstStyle/>
                     <a:p>
-                      <a:pPr marL="0" indent="0" algn="ctr">
-                        <a:buNone/>
-                      </a:pPr>
                       <a:r>
-                        <a:rPr lang="en-US" sz="1150">
-                          <a:solidFill>
-                            <a:srgbClr val="1E2761"/>
-                          </a:solidFill>
-                          <a:latin typeface="Calibri" pitchFamily="34" charset="0"/>
-                          <a:ea typeface="Calibri" pitchFamily="34" charset="-122"/>
-                          <a:cs typeface="Calibri" pitchFamily="34" charset="-120"/>
-                        </a:rPr>
-                        <a:t>212.813 kWh</a:t>
+                        <a:t>218.859 kWh</a:t>
                       </a:r>
-                      <a:endParaRPr lang="en-US" sz="1150" dirty="0">
-                        <a:latin typeface="Calibri" charset="0"/>
-                        <a:ea typeface="Calibri" charset="0"/>
-                        <a:cs typeface="Calibri" charset="0"/>
-                      </a:endParaRPr>
                     </a:p>
                   </a:txBody>
                   <a:tcPr anchor="ctr">
@@ -3905,25 +3901,9 @@
                     <a:bodyPr/>
                     <a:lstStyle/>
                     <a:p>
-                      <a:pPr marL="0" indent="0" algn="ctr">
-                        <a:buNone/>
-                      </a:pPr>
                       <a:r>
-                        <a:rPr lang="en-US" sz="1150">
-                          <a:solidFill>
-                            <a:srgbClr val="1E2761"/>
-                          </a:solidFill>
-                          <a:latin typeface="Calibri" pitchFamily="34" charset="0"/>
-                          <a:ea typeface="Calibri" pitchFamily="34" charset="-122"/>
-                          <a:cs typeface="Calibri" pitchFamily="34" charset="-120"/>
-                        </a:rPr>
-                        <a:t>24.187 kWh</a:t>
+                        <a:t>18.141 kWh</a:t>
                       </a:r>
-                      <a:endParaRPr lang="en-US" sz="1150" dirty="0">
-                        <a:latin typeface="Calibri" charset="0"/>
-                        <a:ea typeface="Calibri" charset="0"/>
-                        <a:cs typeface="Calibri" charset="0"/>
-                      </a:endParaRPr>
                     </a:p>
                   </a:txBody>
                   <a:tcPr anchor="ctr">
@@ -3949,25 +3929,9 @@
                     <a:bodyPr/>
                     <a:lstStyle/>
                     <a:p>
-                      <a:pPr marL="0" indent="0" algn="ctr">
-                        <a:buNone/>
-                      </a:pPr>
                       <a:r>
-                        <a:rPr lang="en-US" sz="1150" b="1">
-                          <a:solidFill>
-                            <a:srgbClr val="028090"/>
-                          </a:solidFill>
-                          <a:latin typeface="Calibri" pitchFamily="34" charset="0"/>
-                          <a:ea typeface="Calibri" pitchFamily="34" charset="-122"/>
-                          <a:cs typeface="Calibri" pitchFamily="34" charset="-120"/>
-                        </a:rPr>
-                        <a:t>-10,2%</a:t>
+                        <a:t>-7,7%</a:t>
                       </a:r>
-                      <a:endParaRPr lang="en-US" sz="1150" dirty="0">
-                        <a:latin typeface="Calibri" charset="0"/>
-                        <a:ea typeface="Calibri" charset="0"/>
-                        <a:cs typeface="Calibri" charset="0"/>
-                      </a:endParaRPr>
                     </a:p>
                   </a:txBody>
                   <a:tcPr anchor="ctr">
@@ -4044,25 +4008,9 @@
                     <a:bodyPr/>
                     <a:lstStyle/>
                     <a:p>
-                      <a:pPr marL="0" indent="0" algn="ctr">
-                        <a:buNone/>
-                      </a:pPr>
                       <a:r>
-                        <a:rPr lang="en-US" sz="1150">
-                          <a:solidFill>
-                            <a:srgbClr val="1E2761"/>
-                          </a:solidFill>
-                          <a:latin typeface="Calibri" pitchFamily="34" charset="0"/>
-                          <a:ea typeface="Calibri" pitchFamily="34" charset="-122"/>
-                          <a:cs typeface="Calibri" pitchFamily="34" charset="-120"/>
-                        </a:rPr>
                         <a:t>2.843.999 kWh</a:t>
                       </a:r>
-                      <a:endParaRPr lang="en-US" sz="1150" dirty="0">
-                        <a:latin typeface="Calibri" charset="0"/>
-                        <a:ea typeface="Calibri" charset="0"/>
-                        <a:cs typeface="Calibri" charset="0"/>
-                      </a:endParaRPr>
                     </a:p>
                   </a:txBody>
                   <a:tcPr anchor="ctr">
@@ -4088,25 +4036,9 @@
                     <a:bodyPr/>
                     <a:lstStyle/>
                     <a:p>
-                      <a:pPr marL="0" indent="0" algn="ctr">
-                        <a:buNone/>
-                      </a:pPr>
                       <a:r>
-                        <a:rPr lang="en-US" sz="1150">
-                          <a:solidFill>
-                            <a:srgbClr val="1E2761"/>
-                          </a:solidFill>
-                          <a:latin typeface="Calibri" pitchFamily="34" charset="0"/>
-                          <a:ea typeface="Calibri" pitchFamily="34" charset="-122"/>
-                          <a:cs typeface="Calibri" pitchFamily="34" charset="-120"/>
-                        </a:rPr>
-                        <a:t>2.553.751 kWh</a:t>
+                        <a:t>2.626.313 kWh</a:t>
                       </a:r>
-                      <a:endParaRPr lang="en-US" sz="1150" dirty="0">
-                        <a:latin typeface="Calibri" charset="0"/>
-                        <a:ea typeface="Calibri" charset="0"/>
-                        <a:cs typeface="Calibri" charset="0"/>
-                      </a:endParaRPr>
                     </a:p>
                   </a:txBody>
                   <a:tcPr anchor="ctr">
@@ -4132,25 +4064,9 @@
                     <a:bodyPr/>
                     <a:lstStyle/>
                     <a:p>
-                      <a:pPr marL="0" indent="0" algn="ctr">
-                        <a:buNone/>
-                      </a:pPr>
                       <a:r>
-                        <a:rPr lang="en-US" sz="1150">
-                          <a:solidFill>
-                            <a:srgbClr val="1E2761"/>
-                          </a:solidFill>
-                          <a:latin typeface="Calibri" pitchFamily="34" charset="0"/>
-                          <a:ea typeface="Calibri" pitchFamily="34" charset="-122"/>
-                          <a:cs typeface="Calibri" pitchFamily="34" charset="-120"/>
-                        </a:rPr>
-                        <a:t>290.249 kWh</a:t>
+                        <a:t>217.686 kWh</a:t>
                       </a:r>
-                      <a:endParaRPr lang="en-US" sz="1150" dirty="0">
-                        <a:latin typeface="Calibri" charset="0"/>
-                        <a:ea typeface="Calibri" charset="0"/>
-                        <a:cs typeface="Calibri" charset="0"/>
-                      </a:endParaRPr>
                     </a:p>
                   </a:txBody>
                   <a:tcPr anchor="ctr">
@@ -4176,25 +4092,9 @@
                     <a:bodyPr/>
                     <a:lstStyle/>
                     <a:p>
-                      <a:pPr marL="0" indent="0" algn="ctr">
-                        <a:buNone/>
-                      </a:pPr>
                       <a:r>
-                        <a:rPr lang="en-US" sz="1150" b="1">
-                          <a:solidFill>
-                            <a:srgbClr val="028090"/>
-                          </a:solidFill>
-                          <a:latin typeface="Calibri" pitchFamily="34" charset="0"/>
-                          <a:ea typeface="Calibri" pitchFamily="34" charset="-122"/>
-                          <a:cs typeface="Calibri" pitchFamily="34" charset="-120"/>
-                        </a:rPr>
-                        <a:t>-10,2%</a:t>
+                        <a:t>-7,7%</a:t>
                       </a:r>
-                      <a:endParaRPr lang="en-US" sz="1150" dirty="0">
-                        <a:latin typeface="Calibri" charset="0"/>
-                        <a:ea typeface="Calibri" charset="0"/>
-                        <a:cs typeface="Calibri" charset="0"/>
-                      </a:endParaRPr>
                     </a:p>
                   </a:txBody>
                   <a:tcPr anchor="ctr">
@@ -4271,25 +4171,9 @@
                     <a:bodyPr/>
                     <a:lstStyle/>
                     <a:p>
-                      <a:pPr marL="0" indent="0" algn="ctr">
-                        <a:buNone/>
-                      </a:pPr>
                       <a:r>
-                        <a:rPr lang="en-US" sz="1150">
-                          <a:solidFill>
-                            <a:srgbClr val="1E2761"/>
-                          </a:solidFill>
-                          <a:latin typeface="Calibri" pitchFamily="34" charset="0"/>
-                          <a:ea typeface="Calibri" pitchFamily="34" charset="-122"/>
-                          <a:cs typeface="Calibri" pitchFamily="34" charset="-120"/>
-                        </a:rPr>
                         <a:t>R$ 177.749,96</a:t>
                       </a:r>
-                      <a:endParaRPr lang="en-US" sz="1150" dirty="0">
-                        <a:latin typeface="Calibri" charset="0"/>
-                        <a:ea typeface="Calibri" charset="0"/>
-                        <a:cs typeface="Calibri" charset="0"/>
-                      </a:endParaRPr>
                     </a:p>
                   </a:txBody>
                   <a:tcPr anchor="ctr">
@@ -4315,25 +4199,9 @@
                     <a:bodyPr/>
                     <a:lstStyle/>
                     <a:p>
-                      <a:pPr marL="0" indent="0" algn="ctr">
-                        <a:buNone/>
-                      </a:pPr>
                       <a:r>
-                        <a:rPr lang="en-US" sz="1150">
-                          <a:solidFill>
-                            <a:srgbClr val="1E2761"/>
-                          </a:solidFill>
-                          <a:latin typeface="Calibri" pitchFamily="34" charset="0"/>
-                          <a:ea typeface="Calibri" pitchFamily="34" charset="-122"/>
-                          <a:cs typeface="Calibri" pitchFamily="34" charset="-120"/>
-                        </a:rPr>
-                        <a:t>R$ 159.609,43</a:t>
+                        <a:t>R$ 164.144,56</a:t>
                       </a:r>
-                      <a:endParaRPr lang="en-US" sz="1150" dirty="0">
-                        <a:latin typeface="Calibri" charset="0"/>
-                        <a:ea typeface="Calibri" charset="0"/>
-                        <a:cs typeface="Calibri" charset="0"/>
-                      </a:endParaRPr>
                     </a:p>
                   </a:txBody>
                   <a:tcPr anchor="ctr">
@@ -4359,25 +4227,9 @@
                     <a:bodyPr/>
                     <a:lstStyle/>
                     <a:p>
-                      <a:pPr marL="0" indent="0" algn="ctr">
-                        <a:buNone/>
-                      </a:pPr>
                       <a:r>
-                        <a:rPr lang="en-US" sz="1150">
-                          <a:solidFill>
-                            <a:srgbClr val="1E2761"/>
-                          </a:solidFill>
-                          <a:latin typeface="Calibri" pitchFamily="34" charset="0"/>
-                          <a:ea typeface="Calibri" pitchFamily="34" charset="-122"/>
-                          <a:cs typeface="Calibri" pitchFamily="34" charset="-120"/>
-                        </a:rPr>
-                        <a:t>R$ 18.140,54</a:t>
+                        <a:t>R$ 13.605,40</a:t>
                       </a:r>
-                      <a:endParaRPr lang="en-US" sz="1150" dirty="0">
-                        <a:latin typeface="Calibri" charset="0"/>
-                        <a:ea typeface="Calibri" charset="0"/>
-                        <a:cs typeface="Calibri" charset="0"/>
-                      </a:endParaRPr>
                     </a:p>
                   </a:txBody>
                   <a:tcPr anchor="ctr">
@@ -4403,25 +4255,9 @@
                     <a:bodyPr/>
                     <a:lstStyle/>
                     <a:p>
-                      <a:pPr marL="0" indent="0" algn="ctr">
-                        <a:buNone/>
-                      </a:pPr>
                       <a:r>
-                        <a:rPr lang="en-US" sz="1150" b="1">
-                          <a:solidFill>
-                            <a:srgbClr val="028090"/>
-                          </a:solidFill>
-                          <a:latin typeface="Calibri" pitchFamily="34" charset="0"/>
-                          <a:ea typeface="Calibri" pitchFamily="34" charset="-122"/>
-                          <a:cs typeface="Calibri" pitchFamily="34" charset="-120"/>
-                        </a:rPr>
-                        <a:t>-10,2%</a:t>
+                        <a:t>-7,7%</a:t>
                       </a:r>
-                      <a:endParaRPr lang="en-US" sz="1150" dirty="0">
-                        <a:latin typeface="Calibri" charset="0"/>
-                        <a:ea typeface="Calibri" charset="0"/>
-                        <a:cs typeface="Calibri" charset="0"/>
-                      </a:endParaRPr>
                     </a:p>
                   </a:txBody>
                   <a:tcPr anchor="ctr">
@@ -4498,25 +4334,9 @@
                     <a:bodyPr/>
                     <a:lstStyle/>
                     <a:p>
-                      <a:pPr marL="0" indent="0" algn="ctr">
-                        <a:buNone/>
-                      </a:pPr>
                       <a:r>
-                        <a:rPr lang="en-US" sz="1150">
-                          <a:solidFill>
-                            <a:srgbClr val="1E2761"/>
-                          </a:solidFill>
-                          <a:latin typeface="Calibri" pitchFamily="34" charset="0"/>
-                          <a:ea typeface="Calibri" pitchFamily="34" charset="-122"/>
-                          <a:cs typeface="Calibri" pitchFamily="34" charset="-120"/>
-                        </a:rPr>
                         <a:t>R$ 2.132.999,57</a:t>
                       </a:r>
-                      <a:endParaRPr lang="en-US" sz="1150" dirty="0">
-                        <a:latin typeface="Calibri" charset="0"/>
-                        <a:ea typeface="Calibri" charset="0"/>
-                        <a:cs typeface="Calibri" charset="0"/>
-                      </a:endParaRPr>
                     </a:p>
                   </a:txBody>
                   <a:tcPr anchor="ctr">
@@ -4542,25 +4362,9 @@
                     <a:bodyPr/>
                     <a:lstStyle/>
                     <a:p>
-                      <a:pPr marL="0" indent="0" algn="ctr">
-                        <a:buNone/>
-                      </a:pPr>
                       <a:r>
-                        <a:rPr lang="en-US" sz="1150">
-                          <a:solidFill>
-                            <a:srgbClr val="1E2761"/>
-                          </a:solidFill>
-                          <a:latin typeface="Calibri" pitchFamily="34" charset="0"/>
-                          <a:ea typeface="Calibri" pitchFamily="34" charset="-122"/>
-                          <a:cs typeface="Calibri" pitchFamily="34" charset="-120"/>
-                        </a:rPr>
-                        <a:t>R$ 1.915.313,15</a:t>
+                        <a:t>R$ 1.969.734,75</a:t>
                       </a:r>
-                      <a:endParaRPr lang="en-US" sz="1150" dirty="0">
-                        <a:latin typeface="Calibri" charset="0"/>
-                        <a:ea typeface="Calibri" charset="0"/>
-                        <a:cs typeface="Calibri" charset="0"/>
-                      </a:endParaRPr>
                     </a:p>
                   </a:txBody>
                   <a:tcPr anchor="ctr">
@@ -4586,25 +4390,9 @@
                     <a:bodyPr/>
                     <a:lstStyle/>
                     <a:p>
-                      <a:pPr marL="0" indent="0" algn="ctr">
-                        <a:buNone/>
-                      </a:pPr>
                       <a:r>
-                        <a:rPr lang="en-US" sz="1150">
-                          <a:solidFill>
-                            <a:srgbClr val="1E2761"/>
-                          </a:solidFill>
-                          <a:latin typeface="Calibri" pitchFamily="34" charset="0"/>
-                          <a:ea typeface="Calibri" pitchFamily="34" charset="-122"/>
-                          <a:cs typeface="Calibri" pitchFamily="34" charset="-120"/>
-                        </a:rPr>
-                        <a:t>R$ 217.686,42</a:t>
+                        <a:t>R$ 163.264,82</a:t>
                       </a:r>
-                      <a:endParaRPr lang="en-US" sz="1150" dirty="0">
-                        <a:latin typeface="Calibri" charset="0"/>
-                        <a:ea typeface="Calibri" charset="0"/>
-                        <a:cs typeface="Calibri" charset="0"/>
-                      </a:endParaRPr>
                     </a:p>
                   </a:txBody>
                   <a:tcPr anchor="ctr">
@@ -4630,25 +4418,9 @@
                     <a:bodyPr/>
                     <a:lstStyle/>
                     <a:p>
-                      <a:pPr marL="0" indent="0" algn="ctr">
-                        <a:buNone/>
-                      </a:pPr>
                       <a:r>
-                        <a:rPr lang="en-US" sz="1150" b="1">
-                          <a:solidFill>
-                            <a:srgbClr val="028090"/>
-                          </a:solidFill>
-                          <a:latin typeface="Calibri" pitchFamily="34" charset="0"/>
-                          <a:ea typeface="Calibri" pitchFamily="34" charset="-122"/>
-                          <a:cs typeface="Calibri" pitchFamily="34" charset="-120"/>
-                        </a:rPr>
-                        <a:t>-10,2%</a:t>
+                        <a:t>-7,7%</a:t>
                       </a:r>
-                      <a:endParaRPr lang="en-US" sz="1150" dirty="0">
-                        <a:latin typeface="Calibri" charset="0"/>
-                        <a:ea typeface="Calibri" charset="0"/>
-                        <a:cs typeface="Calibri" charset="0"/>
-                      </a:endParaRPr>
                     </a:p>
                   </a:txBody>
                   <a:tcPr anchor="ctr">
@@ -4967,6 +4739,13 @@
             </a:outerShdw>
           </a:effectLst>
         </p:spPr>
+        <p:txBody>
+          <a:bodyPr/>
+          <a:lstStyle/>
+          <a:p>
+            <a:endParaRPr/>
+          </a:p>
+        </p:txBody>
       </p:sp>
       <p:sp>
         <p:nvSpPr>
@@ -5074,6 +4853,13 @@
             </a:outerShdw>
           </a:effectLst>
         </p:spPr>
+        <p:txBody>
+          <a:bodyPr/>
+          <a:lstStyle/>
+          <a:p>
+            <a:endParaRPr/>
+          </a:p>
+        </p:txBody>
       </p:sp>
       <p:sp>
         <p:nvSpPr>
@@ -5100,15 +4886,7 @@
               <a:buNone/>
             </a:pPr>
             <a:r>
-              <a:rPr lang="en-US" sz="2200" b="1">
-                <a:solidFill>
-                  <a:srgbClr val="028090"/>
-                </a:solidFill>
-                <a:latin typeface="Cambria" pitchFamily="34" charset="0"/>
-                <a:ea typeface="Cambria" pitchFamily="34" charset="-122"/>
-                <a:cs typeface="Cambria" pitchFamily="34" charset="-120"/>
-              </a:rPr>
-              <a:t>16,5 meses</a:t>
+              <a:t>22,1 meses</a:t>
             </a:r>
             <a:endParaRPr lang="en-US" sz="2200" dirty="0"/>
           </a:p>
@@ -5181,6 +4959,13 @@
             </a:outerShdw>
           </a:effectLst>
         </p:spPr>
+        <p:txBody>
+          <a:bodyPr/>
+          <a:lstStyle/>
+          <a:p>
+            <a:endParaRPr/>
+          </a:p>
+        </p:txBody>
       </p:sp>
       <p:sp>
         <p:nvSpPr>
@@ -5207,15 +4992,7 @@
               <a:buNone/>
             </a:pPr>
             <a:r>
-              <a:rPr lang="en-US" sz="2200" b="1">
-                <a:solidFill>
-                  <a:srgbClr val="1E2761"/>
-                </a:solidFill>
-                <a:latin typeface="Cambria" pitchFamily="34" charset="0"/>
-                <a:ea typeface="Cambria" pitchFamily="34" charset="-122"/>
-                <a:cs typeface="Cambria" pitchFamily="34" charset="-120"/>
-              </a:rPr>
-              <a:t>+262,8%</a:t>
+              <a:t>+172,1%</a:t>
             </a:r>
             <a:endParaRPr lang="en-US" sz="2200" dirty="0"/>
           </a:p>
@@ -5288,6 +5065,13 @@
             </a:outerShdw>
           </a:effectLst>
         </p:spPr>
+        <p:txBody>
+          <a:bodyPr/>
+          <a:lstStyle/>
+          <a:p>
+            <a:endParaRPr/>
+          </a:p>
+        </p:txBody>
       </p:sp>
       <p:sp>
         <p:nvSpPr>
@@ -5314,15 +5098,7 @@
               <a:buNone/>
             </a:pPr>
             <a:r>
-              <a:rPr lang="en-US" sz="2200" b="1">
-                <a:solidFill>
-                  <a:srgbClr val="028090"/>
-                </a:solidFill>
-                <a:latin typeface="Cambria" pitchFamily="34" charset="0"/>
-                <a:ea typeface="Cambria" pitchFamily="34" charset="-122"/>
-                <a:cs typeface="Cambria" pitchFamily="34" charset="-120"/>
-              </a:rPr>
-              <a:t>R$ 484.710</a:t>
+              <a:t>R$ 288.533</a:t>
             </a:r>
             <a:endParaRPr lang="en-US" sz="2200" dirty="0"/>
           </a:p>
@@ -5443,6 +5219,13 @@
           </a:solidFill>
           <a:ln/>
         </p:spPr>
+        <p:txBody>
+          <a:bodyPr/>
+          <a:lstStyle/>
+          <a:p>
+            <a:endParaRPr/>
+          </a:p>
+        </p:txBody>
       </p:sp>
       <p:sp>
         <p:nvSpPr>
@@ -5544,6 +5327,13 @@
             <a:prstDash val="solid"/>
           </a:ln>
         </p:spPr>
+        <p:txBody>
+          <a:bodyPr/>
+          <a:lstStyle/>
+          <a:p>
+            <a:endParaRPr/>
+          </a:p>
+        </p:txBody>
       </p:sp>
       <p:sp>
         <p:nvSpPr>
@@ -5645,6 +5435,13 @@
             <a:prstDash val="solid"/>
           </a:ln>
         </p:spPr>
+        <p:txBody>
+          <a:bodyPr/>
+          <a:lstStyle/>
+          <a:p>
+            <a:endParaRPr/>
+          </a:p>
+        </p:txBody>
       </p:sp>
       <p:sp>
         <p:nvSpPr>
@@ -5895,6 +5692,13 @@
           </a:solidFill>
           <a:ln/>
         </p:spPr>
+        <p:txBody>
+          <a:bodyPr/>
+          <a:lstStyle/>
+          <a:p>
+            <a:endParaRPr/>
+          </a:p>
+        </p:txBody>
       </p:sp>
       <p:sp>
         <p:nvSpPr>
@@ -5921,15 +5725,7 @@
               <a:buNone/>
             </a:pPr>
             <a:r>
-              <a:rPr lang="en-US" sz="3400" b="1">
-                <a:solidFill>
-                  <a:srgbClr val="00A896"/>
-                </a:solidFill>
-                <a:latin typeface="Cambria" pitchFamily="34" charset="0"/>
-                <a:ea typeface="Cambria" pitchFamily="34" charset="-122"/>
-                <a:cs typeface="Cambria" pitchFamily="34" charset="-120"/>
-              </a:rPr>
-              <a:t>25,0 tCO2/ano</a:t>
+              <a:t>18,7 tCO2/ano</a:t>
             </a:r>
             <a:endParaRPr lang="en-US" sz="3400" dirty="0"/>
           </a:p>
@@ -5996,6 +5792,13 @@
             <a:prstDash val="solid"/>
           </a:ln>
         </p:spPr>
+        <p:txBody>
+          <a:bodyPr/>
+          <a:lstStyle/>
+          <a:p>
+            <a:endParaRPr/>
+          </a:p>
+        </p:txBody>
       </p:sp>
       <p:sp>
         <p:nvSpPr>
@@ -6025,7 +5828,69 @@
               <a:buNone/>
             </a:pPr>
             <a:r>
-              <a:rPr lang="en-US" sz="1250" b="1">
+              <a:t>217.686 kWh/ano de energia economizada</a:t>
+            </a:r>
+            <a:br/>
+            <a:r>
+              <a:t>0,086 kg CO2/kWh fator de emissão (SIN / MCTI)</a:t>
+            </a:r>
+            <a:endParaRPr lang="en-US" sz="1250" dirty="0"/>
+          </a:p>
+        </p:txBody>
+      </p:sp>
+      <p:sp>
+        <p:nvSpPr>
+          <p:cNvPr id="8" name="Shape 6"/>
+          <p:cNvSpPr/>
+          <p:nvPr/>
+        </p:nvSpPr>
+        <p:spPr>
+          <a:xfrm>
+            <a:off x="6126480" y="1371600"/>
+            <a:ext cx="640080" cy="640080"/>
+          </a:xfrm>
+          <a:prstGeom prst="ellipse">
+            <a:avLst/>
+          </a:prstGeom>
+          <a:solidFill>
+            <a:srgbClr val="00A896"/>
+          </a:solidFill>
+          <a:ln/>
+        </p:spPr>
+        <p:txBody>
+          <a:bodyPr/>
+          <a:lstStyle/>
+          <a:p>
+            <a:endParaRPr/>
+          </a:p>
+        </p:txBody>
+      </p:sp>
+      <p:sp>
+        <p:nvSpPr>
+          <p:cNvPr id="9" name="Text 7"/>
+          <p:cNvSpPr txBox="1"/>
+          <p:nvPr/>
+        </p:nvSpPr>
+        <p:spPr>
+          <a:xfrm>
+            <a:off x="6126480" y="1371600"/>
+            <a:ext cx="640080" cy="640080"/>
+          </a:xfrm>
+          <a:prstGeom prst="rect">
+            <a:avLst/>
+          </a:prstGeom>
+          <a:noFill/>
+          <a:ln/>
+        </p:spPr>
+        <p:txBody>
+          <a:bodyPr wrap="square" lIns="0" tIns="0" rIns="0" bIns="0" rtlCol="0" anchor="ctr"/>
+          <a:lstStyle/>
+          <a:p>
+            <a:pPr marL="0" indent="0" algn="ctr">
+              <a:buNone/>
+            </a:pPr>
+            <a:r>
+              <a:rPr lang="en-US" sz="1800" b="1" dirty="0">
                 <a:solidFill>
                   <a:srgbClr val="FFFFFF"/>
                 </a:solidFill>
@@ -6033,22 +5898,143 @@
                 <a:ea typeface="Calibri" pitchFamily="34" charset="-122"/>
                 <a:cs typeface="Calibri" pitchFamily="34" charset="-120"/>
               </a:rPr>
-              <a:t>290.249 kWh/ano </a:t>
-            </a:r>
-            <a:r>
-              <a:rPr lang="en-US" sz="1250" dirty="0">
-                <a:solidFill>
-                  <a:srgbClr val="CADCFC"/>
+              <a:t>1.560</a:t>
+            </a:r>
+            <a:endParaRPr lang="en-US" sz="1800" dirty="0"/>
+          </a:p>
+        </p:txBody>
+      </p:sp>
+      <p:sp>
+        <p:nvSpPr>
+          <p:cNvPr id="10" name="Text 8"/>
+          <p:cNvSpPr txBox="1"/>
+          <p:nvPr/>
+        </p:nvSpPr>
+        <p:spPr>
+          <a:xfrm>
+            <a:off x="6949440" y="1353312"/>
+            <a:ext cx="4572000" cy="365760"/>
+          </a:xfrm>
+          <a:prstGeom prst="rect">
+            <a:avLst/>
+          </a:prstGeom>
+          <a:noFill/>
+          <a:ln/>
+        </p:spPr>
+        <p:txBody>
+          <a:bodyPr wrap="square" lIns="0" tIns="0" rIns="0" bIns="0" rtlCol="0" anchor="ctr"/>
+          <a:lstStyle/>
+          <a:p>
+            <a:pPr marL="0" indent="0">
+              <a:buNone/>
+            </a:pPr>
+            <a:r>
+              <a:rPr lang="en-US" sz="1600" b="1" dirty="0">
+                <a:solidFill>
+                  <a:srgbClr val="1E2761"/>
+                </a:solidFill>
+                <a:latin typeface="Cambria" pitchFamily="34" charset="0"/>
+                <a:ea typeface="Cambria" pitchFamily="34" charset="-122"/>
+                <a:cs typeface="Cambria" pitchFamily="34" charset="-120"/>
+              </a:rPr>
+              <a:t>~1.560 árvores</a:t>
+            </a:r>
+            <a:endParaRPr lang="en-US" sz="1600" dirty="0"/>
+          </a:p>
+        </p:txBody>
+      </p:sp>
+      <p:sp>
+        <p:nvSpPr>
+          <p:cNvPr id="11" name="Text 9"/>
+          <p:cNvSpPr txBox="1"/>
+          <p:nvPr/>
+        </p:nvSpPr>
+        <p:spPr>
+          <a:xfrm>
+            <a:off x="6949440" y="1691640"/>
+            <a:ext cx="4572000" cy="594360"/>
+          </a:xfrm>
+          <a:prstGeom prst="rect">
+            <a:avLst/>
+          </a:prstGeom>
+          <a:noFill/>
+          <a:ln/>
+        </p:spPr>
+        <p:txBody>
+          <a:bodyPr wrap="square" lIns="0" tIns="0" rIns="0" bIns="0" rtlCol="0" anchor="ctr"/>
+          <a:lstStyle/>
+          <a:p>
+            <a:pPr marL="0" indent="0">
+              <a:buNone/>
+            </a:pPr>
+            <a:r>
+              <a:rPr lang="en-US" sz="1150" dirty="0">
+                <a:solidFill>
+                  <a:srgbClr val="5A6472"/>
                 </a:solidFill>
                 <a:latin typeface="Calibri" pitchFamily="34" charset="0"/>
                 <a:ea typeface="Calibri" pitchFamily="34" charset="-122"/>
                 <a:cs typeface="Calibri" pitchFamily="34" charset="-120"/>
               </a:rPr>
-              <a:t>de energia economizada
-</a:t>
-            </a:r>
-            <a:r>
-              <a:rPr lang="en-US" sz="1250" b="1" dirty="0">
+              <a:t>plantadas e preservadas por ano para absorver o mesmo volume de carbono</a:t>
+            </a:r>
+            <a:endParaRPr lang="en-US" sz="1150" dirty="0"/>
+          </a:p>
+        </p:txBody>
+      </p:sp>
+      <p:sp>
+        <p:nvSpPr>
+          <p:cNvPr id="12" name="Shape 10"/>
+          <p:cNvSpPr/>
+          <p:nvPr/>
+        </p:nvSpPr>
+        <p:spPr>
+          <a:xfrm>
+            <a:off x="6126480" y="2788920"/>
+            <a:ext cx="640080" cy="640080"/>
+          </a:xfrm>
+          <a:prstGeom prst="ellipse">
+            <a:avLst/>
+          </a:prstGeom>
+          <a:solidFill>
+            <a:srgbClr val="00A896"/>
+          </a:solidFill>
+          <a:ln/>
+        </p:spPr>
+        <p:txBody>
+          <a:bodyPr/>
+          <a:lstStyle/>
+          <a:p>
+            <a:endParaRPr/>
+          </a:p>
+        </p:txBody>
+      </p:sp>
+      <p:sp>
+        <p:nvSpPr>
+          <p:cNvPr id="13" name="Text 11"/>
+          <p:cNvSpPr txBox="1"/>
+          <p:nvPr/>
+        </p:nvSpPr>
+        <p:spPr>
+          <a:xfrm>
+            <a:off x="6126480" y="2788920"/>
+            <a:ext cx="640080" cy="640080"/>
+          </a:xfrm>
+          <a:prstGeom prst="rect">
+            <a:avLst/>
+          </a:prstGeom>
+          <a:noFill/>
+          <a:ln/>
+        </p:spPr>
+        <p:txBody>
+          <a:bodyPr wrap="square" lIns="0" tIns="0" rIns="0" bIns="0" rtlCol="0" anchor="ctr"/>
+          <a:lstStyle/>
+          <a:p>
+            <a:pPr marL="0" indent="0" algn="ctr">
+              <a:buNone/>
+            </a:pPr>
+            <a:r>
+              <a:rPr lang="en-US" sz="1800" b="1" dirty="0">
                 <a:solidFill>
                   <a:srgbClr val="FFFFFF"/>
                 </a:solidFill>
@@ -6056,32 +6042,99 @@
                 <a:ea typeface="Calibri" pitchFamily="34" charset="-122"/>
                 <a:cs typeface="Calibri" pitchFamily="34" charset="-120"/>
               </a:rPr>
-              <a:t>0,086 kg CO2/kWh </a:t>
-            </a:r>
-            <a:r>
-              <a:rPr lang="en-US" sz="1250" dirty="0">
-                <a:solidFill>
-                  <a:srgbClr val="CADCFC"/>
+              <a:t>54</a:t>
+            </a:r>
+            <a:endParaRPr lang="en-US" sz="1800" dirty="0"/>
+          </a:p>
+        </p:txBody>
+      </p:sp>
+      <p:sp>
+        <p:nvSpPr>
+          <p:cNvPr id="14" name="Text 12"/>
+          <p:cNvSpPr txBox="1"/>
+          <p:nvPr/>
+        </p:nvSpPr>
+        <p:spPr>
+          <a:xfrm>
+            <a:off x="6949440" y="2770632"/>
+            <a:ext cx="4572000" cy="365760"/>
+          </a:xfrm>
+          <a:prstGeom prst="rect">
+            <a:avLst/>
+          </a:prstGeom>
+          <a:noFill/>
+          <a:ln/>
+        </p:spPr>
+        <p:txBody>
+          <a:bodyPr wrap="square" lIns="0" tIns="0" rIns="0" bIns="0" rtlCol="0" anchor="ctr"/>
+          <a:lstStyle/>
+          <a:p>
+            <a:pPr marL="0" indent="0">
+              <a:buNone/>
+            </a:pPr>
+            <a:r>
+              <a:rPr lang="en-US" sz="1600" b="1" dirty="0">
+                <a:solidFill>
+                  <a:srgbClr val="1E2761"/>
+                </a:solidFill>
+                <a:latin typeface="Cambria" pitchFamily="34" charset="0"/>
+                <a:ea typeface="Cambria" pitchFamily="34" charset="-122"/>
+                <a:cs typeface="Cambria" pitchFamily="34" charset="-120"/>
+              </a:rPr>
+              <a:t>~54 veículos</a:t>
+            </a:r>
+            <a:endParaRPr lang="en-US" sz="1600" dirty="0"/>
+          </a:p>
+        </p:txBody>
+      </p:sp>
+      <p:sp>
+        <p:nvSpPr>
+          <p:cNvPr id="15" name="Text 13"/>
+          <p:cNvSpPr txBox="1"/>
+          <p:nvPr/>
+        </p:nvSpPr>
+        <p:spPr>
+          <a:xfrm>
+            <a:off x="6949440" y="3108960"/>
+            <a:ext cx="4572000" cy="594360"/>
+          </a:xfrm>
+          <a:prstGeom prst="rect">
+            <a:avLst/>
+          </a:prstGeom>
+          <a:noFill/>
+          <a:ln/>
+        </p:spPr>
+        <p:txBody>
+          <a:bodyPr wrap="square" lIns="0" tIns="0" rIns="0" bIns="0" rtlCol="0" anchor="ctr"/>
+          <a:lstStyle/>
+          <a:p>
+            <a:pPr marL="0" indent="0">
+              <a:buNone/>
+            </a:pPr>
+            <a:r>
+              <a:rPr lang="en-US" sz="1150" dirty="0">
+                <a:solidFill>
+                  <a:srgbClr val="5A6472"/>
                 </a:solidFill>
                 <a:latin typeface="Calibri" pitchFamily="34" charset="0"/>
                 <a:ea typeface="Calibri" pitchFamily="34" charset="-122"/>
                 <a:cs typeface="Calibri" pitchFamily="34" charset="-120"/>
               </a:rPr>
-              <a:t>fator de emissão (SIN / MCTI)</a:t>
-            </a:r>
-            <a:endParaRPr lang="en-US" sz="1250" dirty="0"/>
-          </a:p>
-        </p:txBody>
-      </p:sp>
-      <p:sp>
-        <p:nvSpPr>
-          <p:cNvPr id="8" name="Shape 6"/>
+              <a:t>de passeio a combustão retirados de circulação nas avenidas de Ribeirão Preto</a:t>
+            </a:r>
+            <a:endParaRPr lang="en-US" sz="1150" dirty="0"/>
+          </a:p>
+        </p:txBody>
+      </p:sp>
+      <p:sp>
+        <p:nvSpPr>
+          <p:cNvPr id="16" name="Shape 14"/>
           <p:cNvSpPr/>
           <p:nvPr/>
         </p:nvSpPr>
         <p:spPr>
           <a:xfrm>
-            <a:off x="6126480" y="1371600"/>
+            <a:off x="6126480" y="4206240"/>
             <a:ext cx="640080" cy="640080"/>
           </a:xfrm>
           <a:prstGeom prst="ellipse">
@@ -6092,280 +6145,13 @@
           </a:solidFill>
           <a:ln/>
         </p:spPr>
-      </p:sp>
-      <p:sp>
-        <p:nvSpPr>
-          <p:cNvPr id="9" name="Text 7"/>
-          <p:cNvSpPr txBox="1"/>
-          <p:nvPr/>
-        </p:nvSpPr>
-        <p:spPr>
-          <a:xfrm>
-            <a:off x="6126480" y="1371600"/>
-            <a:ext cx="640080" cy="640080"/>
-          </a:xfrm>
-          <a:prstGeom prst="rect">
-            <a:avLst/>
-          </a:prstGeom>
-          <a:noFill/>
-          <a:ln/>
-        </p:spPr>
-        <p:txBody>
-          <a:bodyPr wrap="square" lIns="0" tIns="0" rIns="0" bIns="0" rtlCol="0" anchor="ctr"/>
-          <a:lstStyle/>
-          <a:p>
-            <a:pPr marL="0" indent="0" algn="ctr">
-              <a:buNone/>
-            </a:pPr>
-            <a:r>
-              <a:rPr lang="en-US" sz="1800" b="1" dirty="0">
-                <a:solidFill>
-                  <a:srgbClr val="FFFFFF"/>
-                </a:solidFill>
-                <a:latin typeface="Calibri" pitchFamily="34" charset="0"/>
-                <a:ea typeface="Calibri" pitchFamily="34" charset="-122"/>
-                <a:cs typeface="Calibri" pitchFamily="34" charset="-120"/>
-              </a:rPr>
-              <a:t>1.560</a:t>
-            </a:r>
-            <a:endParaRPr lang="en-US" sz="1800" dirty="0"/>
-          </a:p>
-        </p:txBody>
-      </p:sp>
-      <p:sp>
-        <p:nvSpPr>
-          <p:cNvPr id="10" name="Text 8"/>
-          <p:cNvSpPr txBox="1"/>
-          <p:nvPr/>
-        </p:nvSpPr>
-        <p:spPr>
-          <a:xfrm>
-            <a:off x="6949440" y="1353312"/>
-            <a:ext cx="4572000" cy="365760"/>
-          </a:xfrm>
-          <a:prstGeom prst="rect">
-            <a:avLst/>
-          </a:prstGeom>
-          <a:noFill/>
-          <a:ln/>
-        </p:spPr>
-        <p:txBody>
-          <a:bodyPr wrap="square" lIns="0" tIns="0" rIns="0" bIns="0" rtlCol="0" anchor="ctr"/>
-          <a:lstStyle/>
-          <a:p>
-            <a:pPr marL="0" indent="0">
-              <a:buNone/>
-            </a:pPr>
-            <a:r>
-              <a:rPr lang="en-US" sz="1600" b="1" dirty="0">
-                <a:solidFill>
-                  <a:srgbClr val="1E2761"/>
-                </a:solidFill>
-                <a:latin typeface="Cambria" pitchFamily="34" charset="0"/>
-                <a:ea typeface="Cambria" pitchFamily="34" charset="-122"/>
-                <a:cs typeface="Cambria" pitchFamily="34" charset="-120"/>
-              </a:rPr>
-              <a:t>~1.560 árvores</a:t>
-            </a:r>
-            <a:endParaRPr lang="en-US" sz="1600" dirty="0"/>
-          </a:p>
-        </p:txBody>
-      </p:sp>
-      <p:sp>
-        <p:nvSpPr>
-          <p:cNvPr id="11" name="Text 9"/>
-          <p:cNvSpPr txBox="1"/>
-          <p:nvPr/>
-        </p:nvSpPr>
-        <p:spPr>
-          <a:xfrm>
-            <a:off x="6949440" y="1691640"/>
-            <a:ext cx="4572000" cy="594360"/>
-          </a:xfrm>
-          <a:prstGeom prst="rect">
-            <a:avLst/>
-          </a:prstGeom>
-          <a:noFill/>
-          <a:ln/>
-        </p:spPr>
-        <p:txBody>
-          <a:bodyPr wrap="square" lIns="0" tIns="0" rIns="0" bIns="0" rtlCol="0" anchor="ctr"/>
-          <a:lstStyle/>
-          <a:p>
-            <a:pPr marL="0" indent="0">
-              <a:buNone/>
-            </a:pPr>
-            <a:r>
-              <a:rPr lang="en-US" sz="1150" dirty="0">
-                <a:solidFill>
-                  <a:srgbClr val="5A6472"/>
-                </a:solidFill>
-                <a:latin typeface="Calibri" pitchFamily="34" charset="0"/>
-                <a:ea typeface="Calibri" pitchFamily="34" charset="-122"/>
-                <a:cs typeface="Calibri" pitchFamily="34" charset="-120"/>
-              </a:rPr>
-              <a:t>plantadas e preservadas por ano para absorver o mesmo volume de carbono</a:t>
-            </a:r>
-            <a:endParaRPr lang="en-US" sz="1150" dirty="0"/>
-          </a:p>
-        </p:txBody>
-      </p:sp>
-      <p:sp>
-        <p:nvSpPr>
-          <p:cNvPr id="12" name="Shape 10"/>
-          <p:cNvSpPr/>
-          <p:nvPr/>
-        </p:nvSpPr>
-        <p:spPr>
-          <a:xfrm>
-            <a:off x="6126480" y="2788920"/>
-            <a:ext cx="640080" cy="640080"/>
-          </a:xfrm>
-          <a:prstGeom prst="ellipse">
-            <a:avLst/>
-          </a:prstGeom>
-          <a:solidFill>
-            <a:srgbClr val="00A896"/>
-          </a:solidFill>
-          <a:ln/>
-        </p:spPr>
-      </p:sp>
-      <p:sp>
-        <p:nvSpPr>
-          <p:cNvPr id="13" name="Text 11"/>
-          <p:cNvSpPr txBox="1"/>
-          <p:nvPr/>
-        </p:nvSpPr>
-        <p:spPr>
-          <a:xfrm>
-            <a:off x="6126480" y="2788920"/>
-            <a:ext cx="640080" cy="640080"/>
-          </a:xfrm>
-          <a:prstGeom prst="rect">
-            <a:avLst/>
-          </a:prstGeom>
-          <a:noFill/>
-          <a:ln/>
-        </p:spPr>
-        <p:txBody>
-          <a:bodyPr wrap="square" lIns="0" tIns="0" rIns="0" bIns="0" rtlCol="0" anchor="ctr"/>
-          <a:lstStyle/>
-          <a:p>
-            <a:pPr marL="0" indent="0" algn="ctr">
-              <a:buNone/>
-            </a:pPr>
-            <a:r>
-              <a:rPr lang="en-US" sz="1800" b="1" dirty="0">
-                <a:solidFill>
-                  <a:srgbClr val="FFFFFF"/>
-                </a:solidFill>
-                <a:latin typeface="Calibri" pitchFamily="34" charset="0"/>
-                <a:ea typeface="Calibri" pitchFamily="34" charset="-122"/>
-                <a:cs typeface="Calibri" pitchFamily="34" charset="-120"/>
-              </a:rPr>
-              <a:t>54</a:t>
-            </a:r>
-            <a:endParaRPr lang="en-US" sz="1800" dirty="0"/>
-          </a:p>
-        </p:txBody>
-      </p:sp>
-      <p:sp>
-        <p:nvSpPr>
-          <p:cNvPr id="14" name="Text 12"/>
-          <p:cNvSpPr txBox="1"/>
-          <p:nvPr/>
-        </p:nvSpPr>
-        <p:spPr>
-          <a:xfrm>
-            <a:off x="6949440" y="2770632"/>
-            <a:ext cx="4572000" cy="365760"/>
-          </a:xfrm>
-          <a:prstGeom prst="rect">
-            <a:avLst/>
-          </a:prstGeom>
-          <a:noFill/>
-          <a:ln/>
-        </p:spPr>
-        <p:txBody>
-          <a:bodyPr wrap="square" lIns="0" tIns="0" rIns="0" bIns="0" rtlCol="0" anchor="ctr"/>
-          <a:lstStyle/>
-          <a:p>
-            <a:pPr marL="0" indent="0">
-              <a:buNone/>
-            </a:pPr>
-            <a:r>
-              <a:rPr lang="en-US" sz="1600" b="1" dirty="0">
-                <a:solidFill>
-                  <a:srgbClr val="1E2761"/>
-                </a:solidFill>
-                <a:latin typeface="Cambria" pitchFamily="34" charset="0"/>
-                <a:ea typeface="Cambria" pitchFamily="34" charset="-122"/>
-                <a:cs typeface="Cambria" pitchFamily="34" charset="-120"/>
-              </a:rPr>
-              <a:t>~54 veículos</a:t>
-            </a:r>
-            <a:endParaRPr lang="en-US" sz="1600" dirty="0"/>
-          </a:p>
-        </p:txBody>
-      </p:sp>
-      <p:sp>
-        <p:nvSpPr>
-          <p:cNvPr id="15" name="Text 13"/>
-          <p:cNvSpPr txBox="1"/>
-          <p:nvPr/>
-        </p:nvSpPr>
-        <p:spPr>
-          <a:xfrm>
-            <a:off x="6949440" y="3108960"/>
-            <a:ext cx="4572000" cy="594360"/>
-          </a:xfrm>
-          <a:prstGeom prst="rect">
-            <a:avLst/>
-          </a:prstGeom>
-          <a:noFill/>
-          <a:ln/>
-        </p:spPr>
-        <p:txBody>
-          <a:bodyPr wrap="square" lIns="0" tIns="0" rIns="0" bIns="0" rtlCol="0" anchor="ctr"/>
-          <a:lstStyle/>
-          <a:p>
-            <a:pPr marL="0" indent="0">
-              <a:buNone/>
-            </a:pPr>
-            <a:r>
-              <a:rPr lang="en-US" sz="1150" dirty="0">
-                <a:solidFill>
-                  <a:srgbClr val="5A6472"/>
-                </a:solidFill>
-                <a:latin typeface="Calibri" pitchFamily="34" charset="0"/>
-                <a:ea typeface="Calibri" pitchFamily="34" charset="-122"/>
-                <a:cs typeface="Calibri" pitchFamily="34" charset="-120"/>
-              </a:rPr>
-              <a:t>de passeio a combustão retirados de circulação nas avenidas de Ribeirão Preto</a:t>
-            </a:r>
-            <a:endParaRPr lang="en-US" sz="1150" dirty="0"/>
-          </a:p>
-        </p:txBody>
-      </p:sp>
-      <p:sp>
-        <p:nvSpPr>
-          <p:cNvPr id="16" name="Shape 14"/>
-          <p:cNvSpPr/>
-          <p:nvPr/>
-        </p:nvSpPr>
-        <p:spPr>
-          <a:xfrm>
-            <a:off x="6126480" y="4206240"/>
-            <a:ext cx="640080" cy="640080"/>
-          </a:xfrm>
-          <a:prstGeom prst="ellipse">
-            <a:avLst/>
-          </a:prstGeom>
-          <a:solidFill>
-            <a:srgbClr val="00A896"/>
-          </a:solidFill>
-          <a:ln/>
-        </p:spPr>
+        <p:txBody>
+          <a:bodyPr/>
+          <a:lstStyle/>
+          <a:p>
+            <a:endParaRPr/>
+          </a:p>
+        </p:txBody>
       </p:sp>
       <p:sp>
         <p:nvSpPr>
@@ -6695,6 +6481,13 @@
             <a:prstDash val="solid"/>
           </a:ln>
         </p:spPr>
+        <p:txBody>
+          <a:bodyPr/>
+          <a:lstStyle/>
+          <a:p>
+            <a:endParaRPr/>
+          </a:p>
+        </p:txBody>
       </p:sp>
       <p:sp>
         <p:nvSpPr>
@@ -6715,6 +6508,13 @@
           </a:solidFill>
           <a:ln/>
         </p:spPr>
+        <p:txBody>
+          <a:bodyPr/>
+          <a:lstStyle/>
+          <a:p>
+            <a:endParaRPr/>
+          </a:p>
+        </p:txBody>
       </p:sp>
       <p:sp>
         <p:nvSpPr>
@@ -6815,6 +6615,13 @@
           </a:solidFill>
           <a:ln/>
         </p:spPr>
+        <p:txBody>
+          <a:bodyPr/>
+          <a:lstStyle/>
+          <a:p>
+            <a:endParaRPr/>
+          </a:p>
+        </p:txBody>
       </p:sp>
       <p:sp>
         <p:nvSpPr>
@@ -6913,6 +6720,13 @@
           </a:solidFill>
           <a:ln/>
         </p:spPr>
+        <p:txBody>
+          <a:bodyPr/>
+          <a:lstStyle/>
+          <a:p>
+            <a:endParaRPr/>
+          </a:p>
+        </p:txBody>
       </p:sp>
       <p:sp>
         <p:nvSpPr>
@@ -7013,6 +6827,13 @@
           </a:solidFill>
           <a:ln/>
         </p:spPr>
+        <p:txBody>
+          <a:bodyPr/>
+          <a:lstStyle/>
+          <a:p>
+            <a:endParaRPr/>
+          </a:p>
+        </p:txBody>
       </p:sp>
       <p:sp>
         <p:nvSpPr>
@@ -7111,6 +6932,13 @@
           </a:solidFill>
           <a:ln/>
         </p:spPr>
+        <p:txBody>
+          <a:bodyPr/>
+          <a:lstStyle/>
+          <a:p>
+            <a:endParaRPr/>
+          </a:p>
+        </p:txBody>
       </p:sp>
       <p:sp>
         <p:nvSpPr>
@@ -7211,6 +7039,13 @@
           </a:solidFill>
           <a:ln/>
         </p:spPr>
+        <p:txBody>
+          <a:bodyPr/>
+          <a:lstStyle/>
+          <a:p>
+            <a:endParaRPr/>
+          </a:p>
+        </p:txBody>
       </p:sp>
       <p:sp>
         <p:nvSpPr>
@@ -7309,6 +7144,13 @@
           </a:solidFill>
           <a:ln/>
         </p:spPr>
+        <p:txBody>
+          <a:bodyPr/>
+          <a:lstStyle/>
+          <a:p>
+            <a:endParaRPr/>
+          </a:p>
+        </p:txBody>
       </p:sp>
       <p:sp>
         <p:nvSpPr>
@@ -7409,6 +7251,13 @@
           </a:solidFill>
           <a:ln/>
         </p:spPr>
+        <p:txBody>
+          <a:bodyPr/>
+          <a:lstStyle/>
+          <a:p>
+            <a:endParaRPr/>
+          </a:p>
+        </p:txBody>
       </p:sp>
       <p:sp>
         <p:nvSpPr>
@@ -7507,6 +7356,13 @@
           </a:solidFill>
           <a:ln/>
         </p:spPr>
+        <p:txBody>
+          <a:bodyPr/>
+          <a:lstStyle/>
+          <a:p>
+            <a:endParaRPr/>
+          </a:p>
+        </p:txBody>
       </p:sp>
       <p:sp>
         <p:nvSpPr>
@@ -7607,6 +7463,13 @@
           </a:solidFill>
           <a:ln/>
         </p:spPr>
+        <p:txBody>
+          <a:bodyPr/>
+          <a:lstStyle/>
+          <a:p>
+            <a:endParaRPr/>
+          </a:p>
+        </p:txBody>
       </p:sp>
       <p:sp>
         <p:nvSpPr>
@@ -7864,6 +7727,13 @@
             </a:outerShdw>
           </a:effectLst>
         </p:spPr>
+        <p:txBody>
+          <a:bodyPr/>
+          <a:lstStyle/>
+          <a:p>
+            <a:endParaRPr/>
+          </a:p>
+        </p:txBody>
       </p:sp>
       <p:sp>
         <p:nvSpPr>
@@ -7884,6 +7754,13 @@
           </a:solidFill>
           <a:ln/>
         </p:spPr>
+        <p:txBody>
+          <a:bodyPr/>
+          <a:lstStyle/>
+          <a:p>
+            <a:endParaRPr/>
+          </a:p>
+        </p:txBody>
       </p:sp>
       <p:sp>
         <p:nvSpPr>
@@ -8030,6 +7907,13 @@
             </a:outerShdw>
           </a:effectLst>
         </p:spPr>
+        <p:txBody>
+          <a:bodyPr/>
+          <a:lstStyle/>
+          <a:p>
+            <a:endParaRPr/>
+          </a:p>
+        </p:txBody>
       </p:sp>
       <p:sp>
         <p:nvSpPr>
@@ -8050,6 +7934,13 @@
           </a:solidFill>
           <a:ln/>
         </p:spPr>
+        <p:txBody>
+          <a:bodyPr/>
+          <a:lstStyle/>
+          <a:p>
+            <a:endParaRPr/>
+          </a:p>
+        </p:txBody>
       </p:sp>
       <p:sp>
         <p:nvSpPr>
@@ -8196,6 +8087,13 @@
             </a:outerShdw>
           </a:effectLst>
         </p:spPr>
+        <p:txBody>
+          <a:bodyPr/>
+          <a:lstStyle/>
+          <a:p>
+            <a:endParaRPr/>
+          </a:p>
+        </p:txBody>
       </p:sp>
       <p:sp>
         <p:nvSpPr>
@@ -8216,6 +8114,13 @@
           </a:solidFill>
           <a:ln/>
         </p:spPr>
+        <p:txBody>
+          <a:bodyPr/>
+          <a:lstStyle/>
+          <a:p>
+            <a:endParaRPr/>
+          </a:p>
+        </p:txBody>
       </p:sp>
       <p:sp>
         <p:nvSpPr>
@@ -8464,6 +8369,13 @@
           </a:solidFill>
           <a:ln/>
         </p:spPr>
+        <p:txBody>
+          <a:bodyPr/>
+          <a:lstStyle/>
+          <a:p>
+            <a:endParaRPr/>
+          </a:p>
+        </p:txBody>
       </p:sp>
       <p:sp>
         <p:nvSpPr>
@@ -8484,6 +8396,13 @@
           </a:solidFill>
           <a:ln/>
         </p:spPr>
+        <p:txBody>
+          <a:bodyPr/>
+          <a:lstStyle/>
+          <a:p>
+            <a:endParaRPr/>
+          </a:p>
+        </p:txBody>
       </p:sp>
       <p:sp>
         <p:nvSpPr>
@@ -8552,158 +8471,279 @@
               <a:buNone/>
             </a:pPr>
             <a:r>
-              <a:rPr lang="en-US" sz="1500" dirty="0">
-                <a:solidFill>
-                  <a:srgbClr val="CADCFC"/>
+              <a:t>Projeto tecnicamente maduro, financeiramente de altíssimo retorno e ambientalmente responsável.</a:t>
+            </a:r>
+            <a:br/>
+            <a:br/>
+            <a:r>
+              <a:t>Investimento de R$ 301.000,00 com retorno garantido em 22,1 meses.</a:t>
+            </a:r>
+            <a:br/>
+            <a:r>
+              <a:t>Redução permanente de R$ 163.264,82/ano no custo operacional de energia elétrica.</a:t>
+            </a:r>
+            <a:endParaRPr lang="en-US" sz="1500" dirty="0"/>
+          </a:p>
+        </p:txBody>
+      </p:sp>
+      <p:sp>
+        <p:nvSpPr>
+          <p:cNvPr id="6" name="Text 4"/>
+          <p:cNvSpPr txBox="1"/>
+          <p:nvPr/>
+        </p:nvSpPr>
+        <p:spPr>
+          <a:xfrm>
+            <a:off x="640080" y="3337560"/>
+            <a:ext cx="7315200" cy="365760"/>
+          </a:xfrm>
+          <a:prstGeom prst="rect">
+            <a:avLst/>
+          </a:prstGeom>
+          <a:noFill/>
+          <a:ln/>
+        </p:spPr>
+        <p:txBody>
+          <a:bodyPr wrap="square" lIns="0" tIns="0" rIns="0" bIns="0" rtlCol="0" anchor="ctr"/>
+          <a:lstStyle/>
+          <a:p>
+            <a:pPr marL="0" indent="0">
+              <a:buNone/>
+            </a:pPr>
+            <a:r>
+              <a:rPr lang="en-US" sz="1600" b="1" dirty="0">
+                <a:solidFill>
+                  <a:srgbClr val="00A896"/>
+                </a:solidFill>
+                <a:latin typeface="Cambria" pitchFamily="34" charset="0"/>
+                <a:ea typeface="Cambria" pitchFamily="34" charset="-122"/>
+                <a:cs typeface="Cambria" pitchFamily="34" charset="-120"/>
+              </a:rPr>
+              <a:t>Próximos Passos Recomendados</a:t>
+            </a:r>
+            <a:endParaRPr lang="en-US" sz="1600" dirty="0"/>
+          </a:p>
+        </p:txBody>
+      </p:sp>
+      <p:sp>
+        <p:nvSpPr>
+          <p:cNvPr id="7" name="Shape 5"/>
+          <p:cNvSpPr/>
+          <p:nvPr/>
+        </p:nvSpPr>
+        <p:spPr>
+          <a:xfrm>
+            <a:off x="640080" y="3840480"/>
+            <a:ext cx="411480" cy="411480"/>
+          </a:xfrm>
+          <a:prstGeom prst="ellipse">
+            <a:avLst/>
+          </a:prstGeom>
+          <a:solidFill>
+            <a:srgbClr val="00A896"/>
+          </a:solidFill>
+          <a:ln/>
+        </p:spPr>
+        <p:txBody>
+          <a:bodyPr/>
+          <a:lstStyle/>
+          <a:p>
+            <a:endParaRPr/>
+          </a:p>
+        </p:txBody>
+      </p:sp>
+      <p:sp>
+        <p:nvSpPr>
+          <p:cNvPr id="8" name="Text 6"/>
+          <p:cNvSpPr txBox="1"/>
+          <p:nvPr/>
+        </p:nvSpPr>
+        <p:spPr>
+          <a:xfrm>
+            <a:off x="640080" y="3840480"/>
+            <a:ext cx="411480" cy="411480"/>
+          </a:xfrm>
+          <a:prstGeom prst="rect">
+            <a:avLst/>
+          </a:prstGeom>
+          <a:noFill/>
+          <a:ln/>
+        </p:spPr>
+        <p:txBody>
+          <a:bodyPr wrap="square" lIns="0" tIns="0" rIns="0" bIns="0" rtlCol="0" anchor="ctr"/>
+          <a:lstStyle/>
+          <a:p>
+            <a:pPr marL="0" indent="0" algn="ctr">
+              <a:buNone/>
+            </a:pPr>
+            <a:r>
+              <a:rPr lang="en-US" sz="1200" b="1" dirty="0">
+                <a:solidFill>
+                  <a:srgbClr val="FFFFFF"/>
                 </a:solidFill>
                 <a:latin typeface="Calibri" pitchFamily="34" charset="0"/>
                 <a:ea typeface="Calibri" pitchFamily="34" charset="-122"/>
                 <a:cs typeface="Calibri" pitchFamily="34" charset="-120"/>
               </a:rPr>
-              <a:t>Projeto tecnicamente maduro, financeiramente de altíssimo retorno e ambientalmente responsável.
-</a:t>
-            </a:r>
-            <a:r>
-              <a:rPr lang="en-US" sz="1500" b="1" dirty="0">
-                <a:solidFill>
-                  <a:srgbClr val="00A896"/>
+              <a:t>1</a:t>
+            </a:r>
+            <a:endParaRPr lang="en-US" sz="1200" dirty="0"/>
+          </a:p>
+        </p:txBody>
+      </p:sp>
+      <p:sp>
+        <p:nvSpPr>
+          <p:cNvPr id="9" name="Text 7"/>
+          <p:cNvSpPr txBox="1"/>
+          <p:nvPr/>
+        </p:nvSpPr>
+        <p:spPr>
+          <a:xfrm>
+            <a:off x="1234440" y="3858768"/>
+            <a:ext cx="9875520" cy="384048"/>
+          </a:xfrm>
+          <a:prstGeom prst="rect">
+            <a:avLst/>
+          </a:prstGeom>
+          <a:noFill/>
+          <a:ln/>
+        </p:spPr>
+        <p:txBody>
+          <a:bodyPr wrap="square" lIns="0" tIns="0" rIns="0" bIns="0" rtlCol="0" anchor="ctr"/>
+          <a:lstStyle/>
+          <a:p>
+            <a:pPr marL="0" indent="0">
+              <a:buNone/>
+            </a:pPr>
+            <a:r>
+              <a:rPr lang="en-US" sz="1350" dirty="0">
+                <a:solidFill>
+                  <a:srgbClr val="FFFFFF"/>
                 </a:solidFill>
                 <a:latin typeface="Calibri" pitchFamily="34" charset="0"/>
                 <a:ea typeface="Calibri" pitchFamily="34" charset="-122"/>
                 <a:cs typeface="Calibri" pitchFamily="34" charset="-120"/>
               </a:rPr>
-              <a:t>Investimento de R$ 301.000,00 </a:t>
-            </a:r>
-            <a:r>
-              <a:rPr lang="en-US" sz="1500" dirty="0">
-                <a:solidFill>
-                  <a:srgbClr val="CADCFC"/>
+              <a:t>Aprovação da proposta executiva pela Diretoria e Conselho Gestor.</a:t>
+            </a:r>
+            <a:endParaRPr lang="en-US" sz="1350" dirty="0"/>
+          </a:p>
+        </p:txBody>
+      </p:sp>
+      <p:sp>
+        <p:nvSpPr>
+          <p:cNvPr id="10" name="Shape 8"/>
+          <p:cNvSpPr/>
+          <p:nvPr/>
+        </p:nvSpPr>
+        <p:spPr>
+          <a:xfrm>
+            <a:off x="640080" y="4434840"/>
+            <a:ext cx="411480" cy="411480"/>
+          </a:xfrm>
+          <a:prstGeom prst="ellipse">
+            <a:avLst/>
+          </a:prstGeom>
+          <a:solidFill>
+            <a:srgbClr val="00A896"/>
+          </a:solidFill>
+          <a:ln/>
+        </p:spPr>
+        <p:txBody>
+          <a:bodyPr/>
+          <a:lstStyle/>
+          <a:p>
+            <a:endParaRPr/>
+          </a:p>
+        </p:txBody>
+      </p:sp>
+      <p:sp>
+        <p:nvSpPr>
+          <p:cNvPr id="11" name="Text 9"/>
+          <p:cNvSpPr txBox="1"/>
+          <p:nvPr/>
+        </p:nvSpPr>
+        <p:spPr>
+          <a:xfrm>
+            <a:off x="640080" y="4434840"/>
+            <a:ext cx="411480" cy="411480"/>
+          </a:xfrm>
+          <a:prstGeom prst="rect">
+            <a:avLst/>
+          </a:prstGeom>
+          <a:noFill/>
+          <a:ln/>
+        </p:spPr>
+        <p:txBody>
+          <a:bodyPr wrap="square" lIns="0" tIns="0" rIns="0" bIns="0" rtlCol="0" anchor="ctr"/>
+          <a:lstStyle/>
+          <a:p>
+            <a:pPr marL="0" indent="0" algn="ctr">
+              <a:buNone/>
+            </a:pPr>
+            <a:r>
+              <a:rPr lang="en-US" sz="1200" b="1" dirty="0">
+                <a:solidFill>
+                  <a:srgbClr val="FFFFFF"/>
                 </a:solidFill>
                 <a:latin typeface="Calibri" pitchFamily="34" charset="0"/>
                 <a:ea typeface="Calibri" pitchFamily="34" charset="-122"/>
                 <a:cs typeface="Calibri" pitchFamily="34" charset="-120"/>
               </a:rPr>
-              <a:t>com retorno garantido </a:t>
-            </a:r>
-            <a:r>
-              <a:rPr lang="en-US" sz="1500">
-                <a:solidFill>
-                  <a:srgbClr val="CADCFC"/>
+              <a:t>2</a:t>
+            </a:r>
+            <a:endParaRPr lang="en-US" sz="1200" dirty="0"/>
+          </a:p>
+        </p:txBody>
+      </p:sp>
+      <p:sp>
+        <p:nvSpPr>
+          <p:cNvPr id="12" name="Text 10"/>
+          <p:cNvSpPr txBox="1"/>
+          <p:nvPr/>
+        </p:nvSpPr>
+        <p:spPr>
+          <a:xfrm>
+            <a:off x="1234440" y="4453128"/>
+            <a:ext cx="9875520" cy="384048"/>
+          </a:xfrm>
+          <a:prstGeom prst="rect">
+            <a:avLst/>
+          </a:prstGeom>
+          <a:noFill/>
+          <a:ln/>
+        </p:spPr>
+        <p:txBody>
+          <a:bodyPr wrap="square" lIns="0" tIns="0" rIns="0" bIns="0" rtlCol="0" anchor="ctr"/>
+          <a:lstStyle/>
+          <a:p>
+            <a:pPr marL="0" indent="0">
+              <a:buNone/>
+            </a:pPr>
+            <a:r>
+              <a:rPr lang="en-US" sz="1350" dirty="0">
+                <a:solidFill>
+                  <a:srgbClr val="FFFFFF"/>
                 </a:solidFill>
                 <a:latin typeface="Calibri" pitchFamily="34" charset="0"/>
                 <a:ea typeface="Calibri" pitchFamily="34" charset="-122"/>
                 <a:cs typeface="Calibri" pitchFamily="34" charset="-120"/>
               </a:rPr>
-              <a:t>em </a:t>
-            </a:r>
-            <a:r>
-              <a:rPr lang="en-US" sz="1500" b="1">
-                <a:solidFill>
-                  <a:srgbClr val="00A896"/>
-                </a:solidFill>
-                <a:latin typeface="Calibri" pitchFamily="34" charset="0"/>
-                <a:ea typeface="Calibri" pitchFamily="34" charset="-122"/>
-                <a:cs typeface="Calibri" pitchFamily="34" charset="-120"/>
-              </a:rPr>
-              <a:t>16,5 meses.</a:t>
-            </a:r>
-            <a:r>
-              <a:rPr lang="en-US" sz="1500" b="1" dirty="0">
-                <a:solidFill>
-                  <a:srgbClr val="00A896"/>
-                </a:solidFill>
-                <a:latin typeface="Calibri" pitchFamily="34" charset="0"/>
-                <a:ea typeface="Calibri" pitchFamily="34" charset="-122"/>
-                <a:cs typeface="Calibri" pitchFamily="34" charset="-120"/>
-              </a:rPr>
-              <a:t>
-Redução permanente </a:t>
-            </a:r>
-            <a:r>
-              <a:rPr lang="en-US" sz="1500" b="1">
-                <a:solidFill>
-                  <a:srgbClr val="00A896"/>
-                </a:solidFill>
-                <a:latin typeface="Calibri" pitchFamily="34" charset="0"/>
-                <a:ea typeface="Calibri" pitchFamily="34" charset="-122"/>
-                <a:cs typeface="Calibri" pitchFamily="34" charset="-120"/>
-              </a:rPr>
-              <a:t>de R$ 217.686,42/</a:t>
-            </a:r>
-            <a:r>
-              <a:rPr lang="en-US" sz="1500" b="1" dirty="0">
-                <a:solidFill>
-                  <a:srgbClr val="00A896"/>
-                </a:solidFill>
-                <a:latin typeface="Calibri" pitchFamily="34" charset="0"/>
-                <a:ea typeface="Calibri" pitchFamily="34" charset="-122"/>
-                <a:cs typeface="Calibri" pitchFamily="34" charset="-120"/>
-              </a:rPr>
-              <a:t>ano </a:t>
-            </a:r>
-            <a:r>
-              <a:rPr lang="en-US" sz="1500" dirty="0">
-                <a:solidFill>
-                  <a:srgbClr val="CADCFC"/>
-                </a:solidFill>
-                <a:latin typeface="Calibri" pitchFamily="34" charset="0"/>
-                <a:ea typeface="Calibri" pitchFamily="34" charset="-122"/>
-                <a:cs typeface="Calibri" pitchFamily="34" charset="-120"/>
-              </a:rPr>
-              <a:t>no custo operacional de energia elétrica.</a:t>
-            </a:r>
-            <a:endParaRPr lang="en-US" sz="1500" dirty="0"/>
-          </a:p>
-        </p:txBody>
-      </p:sp>
-      <p:sp>
-        <p:nvSpPr>
-          <p:cNvPr id="6" name="Text 4"/>
-          <p:cNvSpPr txBox="1"/>
-          <p:nvPr/>
-        </p:nvSpPr>
-        <p:spPr>
-          <a:xfrm>
-            <a:off x="640080" y="3337560"/>
-            <a:ext cx="7315200" cy="365760"/>
-          </a:xfrm>
-          <a:prstGeom prst="rect">
-            <a:avLst/>
-          </a:prstGeom>
-          <a:noFill/>
-          <a:ln/>
-        </p:spPr>
-        <p:txBody>
-          <a:bodyPr wrap="square" lIns="0" tIns="0" rIns="0" bIns="0" rtlCol="0" anchor="ctr"/>
-          <a:lstStyle/>
-          <a:p>
-            <a:pPr marL="0" indent="0">
-              <a:buNone/>
-            </a:pPr>
-            <a:r>
-              <a:rPr lang="en-US" sz="1600" b="1" dirty="0">
-                <a:solidFill>
-                  <a:srgbClr val="00A896"/>
-                </a:solidFill>
-                <a:latin typeface="Cambria" pitchFamily="34" charset="0"/>
-                <a:ea typeface="Cambria" pitchFamily="34" charset="-122"/>
-                <a:cs typeface="Cambria" pitchFamily="34" charset="-120"/>
-              </a:rPr>
-              <a:t>Próximos Passos Recomendados</a:t>
-            </a:r>
-            <a:endParaRPr lang="en-US" sz="1600" dirty="0"/>
-          </a:p>
-        </p:txBody>
-      </p:sp>
-      <p:sp>
-        <p:nvSpPr>
-          <p:cNvPr id="7" name="Shape 5"/>
+              <a:t>Assinatura do contrato de fornecimento e serviços.</a:t>
+            </a:r>
+            <a:endParaRPr lang="en-US" sz="1350" dirty="0"/>
+          </a:p>
+        </p:txBody>
+      </p:sp>
+      <p:sp>
+        <p:nvSpPr>
+          <p:cNvPr id="13" name="Shape 11"/>
           <p:cNvSpPr/>
           <p:nvPr/>
         </p:nvSpPr>
         <p:spPr>
           <a:xfrm>
-            <a:off x="640080" y="3840480"/>
+            <a:off x="640080" y="5029200"/>
             <a:ext cx="411480" cy="411480"/>
           </a:xfrm>
           <a:prstGeom prst="ellipse">
@@ -8714,202 +8754,13 @@
           </a:solidFill>
           <a:ln/>
         </p:spPr>
-      </p:sp>
-      <p:sp>
-        <p:nvSpPr>
-          <p:cNvPr id="8" name="Text 6"/>
-          <p:cNvSpPr txBox="1"/>
-          <p:nvPr/>
-        </p:nvSpPr>
-        <p:spPr>
-          <a:xfrm>
-            <a:off x="640080" y="3840480"/>
-            <a:ext cx="411480" cy="411480"/>
-          </a:xfrm>
-          <a:prstGeom prst="rect">
-            <a:avLst/>
-          </a:prstGeom>
-          <a:noFill/>
-          <a:ln/>
-        </p:spPr>
-        <p:txBody>
-          <a:bodyPr wrap="square" lIns="0" tIns="0" rIns="0" bIns="0" rtlCol="0" anchor="ctr"/>
-          <a:lstStyle/>
-          <a:p>
-            <a:pPr marL="0" indent="0" algn="ctr">
-              <a:buNone/>
-            </a:pPr>
-            <a:r>
-              <a:rPr lang="en-US" sz="1200" b="1" dirty="0">
-                <a:solidFill>
-                  <a:srgbClr val="FFFFFF"/>
-                </a:solidFill>
-                <a:latin typeface="Calibri" pitchFamily="34" charset="0"/>
-                <a:ea typeface="Calibri" pitchFamily="34" charset="-122"/>
-                <a:cs typeface="Calibri" pitchFamily="34" charset="-120"/>
-              </a:rPr>
-              <a:t>1</a:t>
-            </a:r>
-            <a:endParaRPr lang="en-US" sz="1200" dirty="0"/>
-          </a:p>
-        </p:txBody>
-      </p:sp>
-      <p:sp>
-        <p:nvSpPr>
-          <p:cNvPr id="9" name="Text 7"/>
-          <p:cNvSpPr txBox="1"/>
-          <p:nvPr/>
-        </p:nvSpPr>
-        <p:spPr>
-          <a:xfrm>
-            <a:off x="1234440" y="3858768"/>
-            <a:ext cx="9875520" cy="384048"/>
-          </a:xfrm>
-          <a:prstGeom prst="rect">
-            <a:avLst/>
-          </a:prstGeom>
-          <a:noFill/>
-          <a:ln/>
-        </p:spPr>
-        <p:txBody>
-          <a:bodyPr wrap="square" lIns="0" tIns="0" rIns="0" bIns="0" rtlCol="0" anchor="ctr"/>
-          <a:lstStyle/>
-          <a:p>
-            <a:pPr marL="0" indent="0">
-              <a:buNone/>
-            </a:pPr>
-            <a:r>
-              <a:rPr lang="en-US" sz="1350" dirty="0">
-                <a:solidFill>
-                  <a:srgbClr val="FFFFFF"/>
-                </a:solidFill>
-                <a:latin typeface="Calibri" pitchFamily="34" charset="0"/>
-                <a:ea typeface="Calibri" pitchFamily="34" charset="-122"/>
-                <a:cs typeface="Calibri" pitchFamily="34" charset="-120"/>
-              </a:rPr>
-              <a:t>Aprovação da proposta executiva pela Diretoria e Conselho Gestor.</a:t>
-            </a:r>
-            <a:endParaRPr lang="en-US" sz="1350" dirty="0"/>
-          </a:p>
-        </p:txBody>
-      </p:sp>
-      <p:sp>
-        <p:nvSpPr>
-          <p:cNvPr id="10" name="Shape 8"/>
-          <p:cNvSpPr/>
-          <p:nvPr/>
-        </p:nvSpPr>
-        <p:spPr>
-          <a:xfrm>
-            <a:off x="640080" y="4434840"/>
-            <a:ext cx="411480" cy="411480"/>
-          </a:xfrm>
-          <a:prstGeom prst="ellipse">
-            <a:avLst/>
-          </a:prstGeom>
-          <a:solidFill>
-            <a:srgbClr val="00A896"/>
-          </a:solidFill>
-          <a:ln/>
-        </p:spPr>
-      </p:sp>
-      <p:sp>
-        <p:nvSpPr>
-          <p:cNvPr id="11" name="Text 9"/>
-          <p:cNvSpPr txBox="1"/>
-          <p:nvPr/>
-        </p:nvSpPr>
-        <p:spPr>
-          <a:xfrm>
-            <a:off x="640080" y="4434840"/>
-            <a:ext cx="411480" cy="411480"/>
-          </a:xfrm>
-          <a:prstGeom prst="rect">
-            <a:avLst/>
-          </a:prstGeom>
-          <a:noFill/>
-          <a:ln/>
-        </p:spPr>
-        <p:txBody>
-          <a:bodyPr wrap="square" lIns="0" tIns="0" rIns="0" bIns="0" rtlCol="0" anchor="ctr"/>
-          <a:lstStyle/>
-          <a:p>
-            <a:pPr marL="0" indent="0" algn="ctr">
-              <a:buNone/>
-            </a:pPr>
-            <a:r>
-              <a:rPr lang="en-US" sz="1200" b="1" dirty="0">
-                <a:solidFill>
-                  <a:srgbClr val="FFFFFF"/>
-                </a:solidFill>
-                <a:latin typeface="Calibri" pitchFamily="34" charset="0"/>
-                <a:ea typeface="Calibri" pitchFamily="34" charset="-122"/>
-                <a:cs typeface="Calibri" pitchFamily="34" charset="-120"/>
-              </a:rPr>
-              <a:t>2</a:t>
-            </a:r>
-            <a:endParaRPr lang="en-US" sz="1200" dirty="0"/>
-          </a:p>
-        </p:txBody>
-      </p:sp>
-      <p:sp>
-        <p:nvSpPr>
-          <p:cNvPr id="12" name="Text 10"/>
-          <p:cNvSpPr txBox="1"/>
-          <p:nvPr/>
-        </p:nvSpPr>
-        <p:spPr>
-          <a:xfrm>
-            <a:off x="1234440" y="4453128"/>
-            <a:ext cx="9875520" cy="384048"/>
-          </a:xfrm>
-          <a:prstGeom prst="rect">
-            <a:avLst/>
-          </a:prstGeom>
-          <a:noFill/>
-          <a:ln/>
-        </p:spPr>
-        <p:txBody>
-          <a:bodyPr wrap="square" lIns="0" tIns="0" rIns="0" bIns="0" rtlCol="0" anchor="ctr"/>
-          <a:lstStyle/>
-          <a:p>
-            <a:pPr marL="0" indent="0">
-              <a:buNone/>
-            </a:pPr>
-            <a:r>
-              <a:rPr lang="en-US" sz="1350" dirty="0">
-                <a:solidFill>
-                  <a:srgbClr val="FFFFFF"/>
-                </a:solidFill>
-                <a:latin typeface="Calibri" pitchFamily="34" charset="0"/>
-                <a:ea typeface="Calibri" pitchFamily="34" charset="-122"/>
-                <a:cs typeface="Calibri" pitchFamily="34" charset="-120"/>
-              </a:rPr>
-              <a:t>Assinatura do contrato de fornecimento e serviços.</a:t>
-            </a:r>
-            <a:endParaRPr lang="en-US" sz="1350" dirty="0"/>
-          </a:p>
-        </p:txBody>
-      </p:sp>
-      <p:sp>
-        <p:nvSpPr>
-          <p:cNvPr id="13" name="Shape 11"/>
-          <p:cNvSpPr/>
-          <p:nvPr/>
-        </p:nvSpPr>
-        <p:spPr>
-          <a:xfrm>
-            <a:off x="640080" y="5029200"/>
-            <a:ext cx="411480" cy="411480"/>
-          </a:xfrm>
-          <a:prstGeom prst="ellipse">
-            <a:avLst/>
-          </a:prstGeom>
-          <a:solidFill>
-            <a:srgbClr val="00A896"/>
-          </a:solidFill>
-          <a:ln/>
-        </p:spPr>
+        <p:txBody>
+          <a:bodyPr/>
+          <a:lstStyle/>
+          <a:p>
+            <a:endParaRPr/>
+          </a:p>
+        </p:txBody>
       </p:sp>
       <p:sp>
         <p:nvSpPr>
@@ -9011,6 +8862,13 @@
             <a:prstDash val="solid"/>
           </a:ln>
         </p:spPr>
+        <p:txBody>
+          <a:bodyPr/>
+          <a:lstStyle/>
+          <a:p>
+            <a:endParaRPr/>
+          </a:p>
+        </p:txBody>
       </p:sp>
       <p:sp>
         <p:nvSpPr>
@@ -9213,6 +9071,13 @@
             </a:outerShdw>
           </a:effectLst>
         </p:spPr>
+        <p:txBody>
+          <a:bodyPr/>
+          <a:lstStyle/>
+          <a:p>
+            <a:endParaRPr/>
+          </a:p>
+        </p:txBody>
       </p:sp>
       <p:sp>
         <p:nvSpPr>
@@ -9320,6 +9185,13 @@
             </a:outerShdw>
           </a:effectLst>
         </p:spPr>
+        <p:txBody>
+          <a:bodyPr/>
+          <a:lstStyle/>
+          <a:p>
+            <a:endParaRPr/>
+          </a:p>
+        </p:txBody>
       </p:sp>
       <p:sp>
         <p:nvSpPr>
@@ -9346,26 +9218,7 @@
               <a:buNone/>
             </a:pPr>
             <a:r>
-              <a:rPr lang="en-US" sz="2200" b="1">
-                <a:solidFill>
-                  <a:srgbClr val="028090"/>
-                </a:solidFill>
-                <a:latin typeface="Cambria" pitchFamily="34" charset="0"/>
-                <a:ea typeface="Cambria" pitchFamily="34" charset="-122"/>
-                <a:cs typeface="Cambria" pitchFamily="34" charset="-120"/>
-              </a:rPr>
-              <a:t>R$ 217.686 </a:t>
-            </a:r>
-            <a:r>
-              <a:rPr lang="en-US" sz="2200" b="1" dirty="0">
-                <a:solidFill>
-                  <a:srgbClr val="028090"/>
-                </a:solidFill>
-                <a:latin typeface="Cambria" pitchFamily="34" charset="0"/>
-                <a:ea typeface="Cambria" pitchFamily="34" charset="-122"/>
-                <a:cs typeface="Cambria" pitchFamily="34" charset="-120"/>
-              </a:rPr>
-              <a:t>/ano</a:t>
+              <a:t>R$ 163.264 /ano</a:t>
             </a:r>
             <a:endParaRPr lang="en-US" sz="2200" dirty="0"/>
           </a:p>
@@ -9438,6 +9291,13 @@
             </a:outerShdw>
           </a:effectLst>
         </p:spPr>
+        <p:txBody>
+          <a:bodyPr/>
+          <a:lstStyle/>
+          <a:p>
+            <a:endParaRPr/>
+          </a:p>
+        </p:txBody>
       </p:sp>
       <p:sp>
         <p:nvSpPr>
@@ -9545,6 +9405,13 @@
             </a:outerShdw>
           </a:effectLst>
         </p:spPr>
+        <p:txBody>
+          <a:bodyPr/>
+          <a:lstStyle/>
+          <a:p>
+            <a:endParaRPr/>
+          </a:p>
+        </p:txBody>
       </p:sp>
       <p:sp>
         <p:nvSpPr>
@@ -9571,15 +9438,7 @@
               <a:buNone/>
             </a:pPr>
             <a:r>
-              <a:rPr lang="en-US" sz="2200" b="1">
-                <a:solidFill>
-                  <a:srgbClr val="028090"/>
-                </a:solidFill>
-                <a:latin typeface="Cambria" pitchFamily="34" charset="0"/>
-                <a:ea typeface="Cambria" pitchFamily="34" charset="-122"/>
-                <a:cs typeface="Cambria" pitchFamily="34" charset="-120"/>
-              </a:rPr>
-              <a:t>16,5 meses</a:t>
+              <a:t>22,1 meses</a:t>
             </a:r>
             <a:endParaRPr lang="en-US" sz="2200" dirty="0"/>
           </a:p>
@@ -9652,6 +9511,13 @@
             </a:outerShdw>
           </a:effectLst>
         </p:spPr>
+        <p:txBody>
+          <a:bodyPr/>
+          <a:lstStyle/>
+          <a:p>
+            <a:endParaRPr/>
+          </a:p>
+        </p:txBody>
       </p:sp>
       <p:sp>
         <p:nvSpPr>
@@ -9759,6 +9625,13 @@
             </a:outerShdw>
           </a:effectLst>
         </p:spPr>
+        <p:txBody>
+          <a:bodyPr/>
+          <a:lstStyle/>
+          <a:p>
+            <a:endParaRPr/>
+          </a:p>
+        </p:txBody>
       </p:sp>
       <p:sp>
         <p:nvSpPr>
@@ -9785,15 +9658,7 @@
               <a:buNone/>
             </a:pPr>
             <a:r>
-              <a:rPr lang="en-US" sz="2200" b="1">
-                <a:solidFill>
-                  <a:srgbClr val="1E2761"/>
-                </a:solidFill>
-                <a:latin typeface="Cambria" pitchFamily="34" charset="0"/>
-                <a:ea typeface="Cambria" pitchFamily="34" charset="-122"/>
-                <a:cs typeface="Cambria" pitchFamily="34" charset="-120"/>
-              </a:rPr>
-              <a:t>R$ 484.710</a:t>
+              <a:t>R$ 288.533</a:t>
             </a:r>
             <a:endParaRPr lang="en-US" sz="2200" dirty="0"/>
           </a:p>
@@ -9866,6 +9731,13 @@
             </a:outerShdw>
           </a:effectLst>
         </p:spPr>
+        <p:txBody>
+          <a:bodyPr/>
+          <a:lstStyle/>
+          <a:p>
+            <a:endParaRPr/>
+          </a:p>
+        </p:txBody>
       </p:sp>
       <p:sp>
         <p:nvSpPr>
@@ -9892,15 +9764,7 @@
               <a:buNone/>
             </a:pPr>
             <a:r>
-              <a:rPr lang="en-US" sz="2200" b="1">
-                <a:solidFill>
-                  <a:srgbClr val="1E2761"/>
-                </a:solidFill>
-                <a:latin typeface="Cambria" pitchFamily="34" charset="0"/>
-                <a:ea typeface="Cambria" pitchFamily="34" charset="-122"/>
-                <a:cs typeface="Cambria" pitchFamily="34" charset="-120"/>
-              </a:rPr>
-              <a:t>290.249 kWh/ano</a:t>
+              <a:t>217.686 kWh/ano</a:t>
             </a:r>
             <a:endParaRPr lang="en-US" sz="2200" dirty="0"/>
           </a:p>
@@ -9973,6 +9837,13 @@
             </a:outerShdw>
           </a:effectLst>
         </p:spPr>
+        <p:txBody>
+          <a:bodyPr/>
+          <a:lstStyle/>
+          <a:p>
+            <a:endParaRPr/>
+          </a:p>
+        </p:txBody>
       </p:sp>
       <p:sp>
         <p:nvSpPr>
@@ -9999,15 +9870,7 @@
               <a:buNone/>
             </a:pPr>
             <a:r>
-              <a:rPr lang="en-US" sz="2200" b="1">
-                <a:solidFill>
-                  <a:srgbClr val="028090"/>
-                </a:solidFill>
-                <a:latin typeface="Cambria" pitchFamily="34" charset="0"/>
-                <a:ea typeface="Cambria" pitchFamily="34" charset="-122"/>
-                <a:cs typeface="Cambria" pitchFamily="34" charset="-120"/>
-              </a:rPr>
-              <a:t>25,0 tCO2/ano</a:t>
+              <a:t>18,7 tCO2/ano</a:t>
             </a:r>
             <a:endParaRPr lang="en-US" sz="2200" dirty="0"/>
           </a:p>
@@ -10260,6 +10123,13 @@
           </a:solidFill>
           <a:ln/>
         </p:spPr>
+        <p:txBody>
+          <a:bodyPr/>
+          <a:lstStyle/>
+          <a:p>
+            <a:endParaRPr/>
+          </a:p>
+        </p:txBody>
       </p:sp>
       <p:sp>
         <p:nvSpPr>
@@ -10397,6 +10267,13 @@
           </a:solidFill>
           <a:ln/>
         </p:spPr>
+        <p:txBody>
+          <a:bodyPr/>
+          <a:lstStyle/>
+          <a:p>
+            <a:endParaRPr/>
+          </a:p>
+        </p:txBody>
       </p:sp>
       <p:sp>
         <p:nvSpPr>
@@ -10534,6 +10411,13 @@
           </a:solidFill>
           <a:ln/>
         </p:spPr>
+        <p:txBody>
+          <a:bodyPr/>
+          <a:lstStyle/>
+          <a:p>
+            <a:endParaRPr/>
+          </a:p>
+        </p:txBody>
       </p:sp>
       <p:sp>
         <p:nvSpPr>
@@ -10671,6 +10555,13 @@
           </a:solidFill>
           <a:ln/>
         </p:spPr>
+        <p:txBody>
+          <a:bodyPr/>
+          <a:lstStyle/>
+          <a:p>
+            <a:endParaRPr/>
+          </a:p>
+        </p:txBody>
       </p:sp>
       <p:sp>
         <p:nvSpPr>
@@ -10810,6 +10701,13 @@
           </a:solidFill>
           <a:ln/>
         </p:spPr>
+        <p:txBody>
+          <a:bodyPr/>
+          <a:lstStyle/>
+          <a:p>
+            <a:endParaRPr/>
+          </a:p>
+        </p:txBody>
       </p:sp>
       <p:sp>
         <p:nvSpPr>
@@ -10950,6 +10848,13 @@
             <a:prstDash val="solid"/>
           </a:ln>
         </p:spPr>
+        <p:txBody>
+          <a:bodyPr/>
+          <a:lstStyle/>
+          <a:p>
+            <a:endParaRPr/>
+          </a:p>
+        </p:txBody>
       </p:sp>
       <p:sp>
         <p:nvSpPr>
@@ -11051,6 +10956,13 @@
             <a:prstDash val="solid"/>
           </a:ln>
         </p:spPr>
+        <p:txBody>
+          <a:bodyPr/>
+          <a:lstStyle/>
+          <a:p>
+            <a:endParaRPr/>
+          </a:p>
+        </p:txBody>
       </p:sp>
       <p:sp>
         <p:nvSpPr>
@@ -11152,6 +11064,13 @@
             <a:prstDash val="solid"/>
           </a:ln>
         </p:spPr>
+        <p:txBody>
+          <a:bodyPr/>
+          <a:lstStyle/>
+          <a:p>
+            <a:endParaRPr/>
+          </a:p>
+        </p:txBody>
       </p:sp>
       <p:sp>
         <p:nvSpPr>
@@ -11409,6 +11328,13 @@
             </a:outerShdw>
           </a:effectLst>
         </p:spPr>
+        <p:txBody>
+          <a:bodyPr/>
+          <a:lstStyle/>
+          <a:p>
+            <a:endParaRPr/>
+          </a:p>
+        </p:txBody>
       </p:sp>
       <p:sp>
         <p:nvSpPr>
@@ -11555,6 +11481,13 @@
             </a:outerShdw>
           </a:effectLst>
         </p:spPr>
+        <p:txBody>
+          <a:bodyPr/>
+          <a:lstStyle/>
+          <a:p>
+            <a:endParaRPr/>
+          </a:p>
+        </p:txBody>
       </p:sp>
       <p:sp>
         <p:nvSpPr>
@@ -11701,6 +11634,13 @@
             </a:outerShdw>
           </a:effectLst>
         </p:spPr>
+        <p:txBody>
+          <a:bodyPr/>
+          <a:lstStyle/>
+          <a:p>
+            <a:endParaRPr/>
+          </a:p>
+        </p:txBody>
       </p:sp>
       <p:sp>
         <p:nvSpPr>
@@ -11847,6 +11787,13 @@
             </a:outerShdw>
           </a:effectLst>
         </p:spPr>
+        <p:txBody>
+          <a:bodyPr/>
+          <a:lstStyle/>
+          <a:p>
+            <a:endParaRPr/>
+          </a:p>
+        </p:txBody>
       </p:sp>
       <p:sp>
         <p:nvSpPr>
@@ -12336,6 +12283,13 @@
           </a:solidFill>
           <a:ln/>
         </p:spPr>
+        <p:txBody>
+          <a:bodyPr/>
+          <a:lstStyle/>
+          <a:p>
+            <a:endParaRPr/>
+          </a:p>
+        </p:txBody>
       </p:sp>
       <p:sp>
         <p:nvSpPr>
@@ -12409,6 +12363,13 @@
           </a:solidFill>
           <a:ln/>
         </p:spPr>
+        <p:txBody>
+          <a:bodyPr/>
+          <a:lstStyle/>
+          <a:p>
+            <a:endParaRPr/>
+          </a:p>
+        </p:txBody>
       </p:sp>
       <p:sp>
         <p:nvSpPr>
@@ -12482,6 +12443,13 @@
           </a:solidFill>
           <a:ln/>
         </p:spPr>
+        <p:txBody>
+          <a:bodyPr/>
+          <a:lstStyle/>
+          <a:p>
+            <a:endParaRPr/>
+          </a:p>
+        </p:txBody>
       </p:sp>
       <p:sp>
         <p:nvSpPr>
@@ -12645,6 +12613,13 @@
             <a:prstDash val="solid"/>
           </a:ln>
         </p:spPr>
+        <p:txBody>
+          <a:bodyPr/>
+          <a:lstStyle/>
+          <a:p>
+            <a:endParaRPr/>
+          </a:p>
+        </p:txBody>
       </p:sp>
       <p:sp>
         <p:nvSpPr>
@@ -12906,7 +12881,7 @@
           <p:nvPr>
             <p:extLst>
               <p:ext uri="{D42A27DB-BD31-4B8C-83A1-F6EECF244321}">
-                <p14:modId xmlns:p14="http://schemas.microsoft.com/office/powerpoint/2010/main" val="4216483421"/>
+                <p14:modId xmlns:p14="http://schemas.microsoft.com/office/powerpoint/2010/main" val="754644817"/>
               </p:ext>
             </p:extLst>
           </p:nvPr>
@@ -13131,25 +13106,9 @@
                     <a:bodyPr/>
                     <a:lstStyle/>
                     <a:p>
-                      <a:pPr marL="0" indent="0" algn="ctr">
-                        <a:buNone/>
-                      </a:pPr>
                       <a:r>
-                        <a:rPr lang="en-US" sz="1050" dirty="0">
-                          <a:solidFill>
-                            <a:srgbClr val="1E2761"/>
-                          </a:solidFill>
-                          <a:latin typeface="Calibri" pitchFamily="34" charset="0"/>
-                          <a:ea typeface="Calibri" pitchFamily="34" charset="-122"/>
-                          <a:cs typeface="Calibri" pitchFamily="34" charset="-120"/>
-                        </a:rPr>
-                        <a:t>22,0</a:t>
+                        <a:t>23,0</a:t>
                       </a:r>
-                      <a:endParaRPr lang="en-US" sz="1050" dirty="0">
-                        <a:latin typeface="Calibri" charset="0"/>
-                        <a:ea typeface="Calibri" charset="0"/>
-                        <a:cs typeface="Calibri" charset="0"/>
-                      </a:endParaRPr>
                     </a:p>
                   </a:txBody>
                   <a:tcPr anchor="ctr">
@@ -13270,25 +13229,9 @@
                     <a:bodyPr/>
                     <a:lstStyle/>
                     <a:p>
-                      <a:pPr marL="0" indent="0" algn="ctr">
-                        <a:buNone/>
-                      </a:pPr>
                       <a:r>
-                        <a:rPr lang="en-US" sz="1050" dirty="0">
-                          <a:solidFill>
-                            <a:srgbClr val="1E2761"/>
-                          </a:solidFill>
-                          <a:latin typeface="Calibri" pitchFamily="34" charset="0"/>
-                          <a:ea typeface="Calibri" pitchFamily="34" charset="-122"/>
-                          <a:cs typeface="Calibri" pitchFamily="34" charset="-120"/>
-                        </a:rPr>
                         <a:t>1,0</a:t>
                       </a:r>
-                      <a:endParaRPr lang="en-US" sz="1050" dirty="0">
-                        <a:latin typeface="Calibri" charset="0"/>
-                        <a:ea typeface="Calibri" charset="0"/>
-                        <a:cs typeface="Calibri" charset="0"/>
-                      </a:endParaRPr>
                     </a:p>
                   </a:txBody>
                   <a:tcPr anchor="ctr">
@@ -13409,25 +13352,9 @@
                     <a:bodyPr/>
                     <a:lstStyle/>
                     <a:p>
-                      <a:pPr marL="0" indent="0" algn="ctr">
-                        <a:buNone/>
-                      </a:pPr>
                       <a:r>
-                        <a:rPr lang="en-US" sz="1050" dirty="0">
-                          <a:solidFill>
-                            <a:srgbClr val="1E2761"/>
-                          </a:solidFill>
-                          <a:latin typeface="Calibri" pitchFamily="34" charset="0"/>
-                          <a:ea typeface="Calibri" pitchFamily="34" charset="-122"/>
-                          <a:cs typeface="Calibri" pitchFamily="34" charset="-120"/>
-                        </a:rPr>
                         <a:t>12,0</a:t>
                       </a:r>
-                      <a:endParaRPr lang="en-US" sz="1050" dirty="0">
-                        <a:latin typeface="Calibri" charset="0"/>
-                        <a:ea typeface="Calibri" charset="0"/>
-                        <a:cs typeface="Calibri" charset="0"/>
-                      </a:endParaRPr>
                     </a:p>
                   </a:txBody>
                   <a:tcPr anchor="ctr">
@@ -13548,25 +13475,9 @@
                     <a:bodyPr/>
                     <a:lstStyle/>
                     <a:p>
-                      <a:pPr marL="0" indent="0" algn="ctr">
-                        <a:buNone/>
-                      </a:pPr>
                       <a:r>
-                        <a:rPr lang="en-US" sz="1050">
-                          <a:solidFill>
-                            <a:srgbClr val="1E2761"/>
-                          </a:solidFill>
-                          <a:latin typeface="Calibri" pitchFamily="34" charset="0"/>
-                          <a:ea typeface="Calibri" pitchFamily="34" charset="-122"/>
-                          <a:cs typeface="Calibri" pitchFamily="34" charset="-120"/>
-                        </a:rPr>
                         <a:t>R$ 0,75</a:t>
                       </a:r>
-                      <a:endParaRPr lang="en-US" sz="1050" dirty="0">
-                        <a:latin typeface="Calibri" charset="0"/>
-                        <a:ea typeface="Calibri" charset="0"/>
-                        <a:cs typeface="Calibri" charset="0"/>
-                      </a:endParaRPr>
                     </a:p>
                   </a:txBody>
                   <a:tcPr anchor="ctr">
@@ -13687,25 +13598,9 @@
                     <a:bodyPr/>
                     <a:lstStyle/>
                     <a:p>
-                      <a:pPr marL="0" indent="0" algn="ctr">
-                        <a:buNone/>
-                      </a:pPr>
                       <a:r>
-                        <a:rPr lang="en-US" sz="1050" dirty="0">
-                          <a:solidFill>
-                            <a:srgbClr val="1E2761"/>
-                          </a:solidFill>
-                          <a:latin typeface="Calibri" pitchFamily="34" charset="0"/>
-                          <a:ea typeface="Calibri" pitchFamily="34" charset="-122"/>
-                          <a:cs typeface="Calibri" pitchFamily="34" charset="-120"/>
-                        </a:rPr>
-                        <a:t>R$ 301.000,00</a:t>
+                        <a:t>R$ 300.000,00</a:t>
                       </a:r>
-                      <a:endParaRPr lang="en-US" sz="1050" dirty="0">
-                        <a:latin typeface="Calibri" charset="0"/>
-                        <a:ea typeface="Calibri" charset="0"/>
-                        <a:cs typeface="Calibri" charset="0"/>
-                      </a:endParaRPr>
                     </a:p>
                   </a:txBody>
                   <a:tcPr anchor="ctr">
@@ -13826,25 +13721,9 @@
                     <a:bodyPr/>
                     <a:lstStyle/>
                     <a:p>
-                      <a:pPr marL="0" indent="0" algn="ctr">
-                        <a:buNone/>
-                      </a:pPr>
                       <a:r>
-                        <a:rPr lang="en-US" sz="1050">
-                          <a:solidFill>
-                            <a:srgbClr val="1E2761"/>
-                          </a:solidFill>
-                          <a:latin typeface="Calibri" pitchFamily="34" charset="0"/>
-                          <a:ea typeface="Calibri" pitchFamily="34" charset="-122"/>
-                          <a:cs typeface="Calibri" pitchFamily="34" charset="-120"/>
-                        </a:rPr>
                         <a:t>0.70 (70%)</a:t>
                       </a:r>
-                      <a:endParaRPr lang="en-US" sz="1050" dirty="0">
-                        <a:latin typeface="Calibri" charset="0"/>
-                        <a:ea typeface="Calibri" charset="0"/>
-                        <a:cs typeface="Calibri" charset="0"/>
-                      </a:endParaRPr>
                     </a:p>
                   </a:txBody>
                   <a:tcPr anchor="ctr">
@@ -13965,25 +13844,9 @@
                     <a:bodyPr/>
                     <a:lstStyle/>
                     <a:p>
-                      <a:pPr marL="0" indent="0" algn="ctr">
-                        <a:buNone/>
-                      </a:pPr>
                       <a:r>
-                        <a:rPr lang="en-US" sz="1050">
-                          <a:solidFill>
-                            <a:srgbClr val="1E2761"/>
-                          </a:solidFill>
-                          <a:latin typeface="Calibri" pitchFamily="34" charset="0"/>
-                          <a:ea typeface="Calibri" pitchFamily="34" charset="-122"/>
-                          <a:cs typeface="Calibri" pitchFamily="34" charset="-120"/>
-                        </a:rPr>
                         <a:t>0.70 (70%)</a:t>
                       </a:r>
-                      <a:endParaRPr lang="en-US" sz="1050" dirty="0">
-                        <a:latin typeface="Calibri" charset="0"/>
-                        <a:ea typeface="Calibri" charset="0"/>
-                        <a:cs typeface="Calibri" charset="0"/>
-                      </a:endParaRPr>
                     </a:p>
                   </a:txBody>
                   <a:tcPr anchor="ctr">
@@ -14104,25 +13967,9 @@
                     <a:bodyPr/>
                     <a:lstStyle/>
                     <a:p>
-                      <a:pPr marL="0" indent="0" algn="ctr">
-                        <a:buNone/>
-                      </a:pPr>
                       <a:r>
-                        <a:rPr lang="en-US" sz="1050">
-                          <a:solidFill>
-                            <a:srgbClr val="1E2761"/>
-                          </a:solidFill>
-                          <a:latin typeface="Calibri" pitchFamily="34" charset="0"/>
-                          <a:ea typeface="Calibri" pitchFamily="34" charset="-122"/>
-                          <a:cs typeface="Calibri" pitchFamily="34" charset="-120"/>
-                        </a:rPr>
-                        <a:t>0.50 (50%)</a:t>
+                        <a:t>0.55 (55%)</a:t>
                       </a:r>
-                      <a:endParaRPr lang="en-US" sz="1050" dirty="0">
-                        <a:latin typeface="Calibri" charset="0"/>
-                        <a:ea typeface="Calibri" charset="0"/>
-                        <a:cs typeface="Calibri" charset="0"/>
-                      </a:endParaRPr>
                     </a:p>
                   </a:txBody>
                   <a:tcPr anchor="ctr">
@@ -14243,25 +14090,9 @@
                     <a:bodyPr/>
                     <a:lstStyle/>
                     <a:p>
-                      <a:pPr marL="0" indent="0" algn="ctr">
-                        <a:buNone/>
-                      </a:pPr>
                       <a:r>
-                        <a:rPr lang="en-US" sz="1050" dirty="0">
-                          <a:solidFill>
-                            <a:srgbClr val="1E2761"/>
-                          </a:solidFill>
-                          <a:latin typeface="Calibri" pitchFamily="34" charset="0"/>
-                          <a:ea typeface="Calibri" pitchFamily="34" charset="-122"/>
-                          <a:cs typeface="Calibri" pitchFamily="34" charset="-120"/>
-                        </a:rPr>
                         <a:t>12,0</a:t>
                       </a:r>
-                      <a:endParaRPr lang="en-US" sz="1050" dirty="0">
-                        <a:latin typeface="Calibri" charset="0"/>
-                        <a:ea typeface="Calibri" charset="0"/>
-                        <a:cs typeface="Calibri" charset="0"/>
-                      </a:endParaRPr>
                     </a:p>
                   </a:txBody>
                   <a:tcPr anchor="ctr">
@@ -14382,25 +14213,9 @@
                     <a:bodyPr/>
                     <a:lstStyle/>
                     <a:p>
-                      <a:pPr marL="0" indent="0" algn="ctr">
-                        <a:buNone/>
-                      </a:pPr>
                       <a:r>
-                        <a:rPr lang="en-US" sz="1050" dirty="0">
-                          <a:solidFill>
-                            <a:srgbClr val="1E2761"/>
-                          </a:solidFill>
-                          <a:latin typeface="Calibri" pitchFamily="34" charset="0"/>
-                          <a:ea typeface="Calibri" pitchFamily="34" charset="-122"/>
-                          <a:cs typeface="Calibri" pitchFamily="34" charset="-120"/>
-                        </a:rPr>
                         <a:t>1,5</a:t>
                       </a:r>
-                      <a:endParaRPr lang="en-US" sz="1050" dirty="0">
-                        <a:latin typeface="Calibri" charset="0"/>
-                        <a:ea typeface="Calibri" charset="0"/>
-                        <a:cs typeface="Calibri" charset="0"/>
-                      </a:endParaRPr>
                     </a:p>
                   </a:txBody>
                   <a:tcPr anchor="ctr">
@@ -15212,6 +15027,13 @@
           </a:solidFill>
           <a:ln/>
         </p:spPr>
+        <p:txBody>
+          <a:bodyPr/>
+          <a:lstStyle/>
+          <a:p>
+            <a:endParaRPr/>
+          </a:p>
+        </p:txBody>
       </p:sp>
       <p:sp>
         <p:nvSpPr>
@@ -15241,48 +15063,7 @@
               <a:buNone/>
             </a:pPr>
             <a:r>
-              <a:rPr lang="en-US" sz="1050" b="1" dirty="0">
-                <a:solidFill>
-                  <a:srgbClr val="1E2761"/>
-                </a:solidFill>
-                <a:latin typeface="Calibri" pitchFamily="34" charset="0"/>
-                <a:ea typeface="Calibri" pitchFamily="34" charset="-122"/>
-                <a:cs typeface="Calibri" pitchFamily="34" charset="-120"/>
-              </a:rPr>
-              <a:t>Horas de operação: </a:t>
-            </a:r>
-            <a:r>
-              <a:rPr lang="en-US" sz="1050" dirty="0">
-                <a:solidFill>
-                  <a:srgbClr val="5A6472"/>
-                </a:solidFill>
-                <a:latin typeface="Calibri" pitchFamily="34" charset="0"/>
-                <a:ea typeface="Calibri" pitchFamily="34" charset="-122"/>
-                <a:cs typeface="Calibri" pitchFamily="34" charset="-120"/>
-              </a:rPr>
-              <a:t>+2h/dia (Black Friday/Natal) eleva a economia para R$ 259.294,79/ano (payback 13,9 meses).   </a:t>
-            </a:r>
-            <a:r>
-              <a:rPr lang="en-US" sz="1050" b="1" dirty="0">
-                <a:solidFill>
-                  <a:srgbClr val="1E2761"/>
-                </a:solidFill>
-                <a:latin typeface="Calibri" pitchFamily="34" charset="0"/>
-                <a:ea typeface="Calibri" pitchFamily="34" charset="-122"/>
-                <a:cs typeface="Calibri" pitchFamily="34" charset="-120"/>
-              </a:rPr>
-              <a:t>CAPEX: </a:t>
-            </a:r>
-            <a:r>
-              <a:rPr lang="en-US" sz="1050" dirty="0">
-                <a:solidFill>
-                  <a:srgbClr val="5A6472"/>
-                </a:solidFill>
-                <a:latin typeface="Calibri" pitchFamily="34" charset="0"/>
-                <a:ea typeface="Calibri" pitchFamily="34" charset="-122"/>
-                <a:cs typeface="Calibri" pitchFamily="34" charset="-120"/>
-              </a:rPr>
-              <a:t>cada R$ 50 mil a mais/menos desloca o payback em ~2,7 meses, sem alterar a economia física gerada.</a:t>
+              <a:t>Horas de operação: +2h/dia (Black Friday/Natal) eleva a economia para R$ 194.362,88/ano (payback 18,5 meses).   CAPEX: fixado em R$ 300.000,00 para as 38 unidades.</a:t>
             </a:r>
             <a:endParaRPr lang="en-US" sz="1050" dirty="0"/>
           </a:p>
@@ -15309,6 +15090,13 @@
           </a:solidFill>
           <a:ln/>
         </p:spPr>
+        <p:txBody>
+          <a:bodyPr/>
+          <a:lstStyle/>
+          <a:p>
+            <a:endParaRPr/>
+          </a:p>
+        </p:txBody>
       </p:sp>
       <p:sp>
         <p:nvSpPr>
@@ -15338,48 +15126,7 @@
               <a:buNone/>
             </a:pPr>
             <a:r>
-              <a:rPr lang="en-US" sz="1150" b="1" dirty="0">
-                <a:solidFill>
-                  <a:srgbClr val="FFFFFF"/>
-                </a:solidFill>
-                <a:latin typeface="Calibri" pitchFamily="34" charset="0"/>
-                <a:ea typeface="Calibri" pitchFamily="34" charset="-122"/>
-                <a:cs typeface="Calibri" pitchFamily="34" charset="-120"/>
-              </a:rPr>
-              <a:t>Escala linear por máquina retrofitada: </a:t>
-            </a:r>
-            <a:r>
-              <a:rPr lang="en-US" sz="1150" dirty="0">
-                <a:solidFill>
-                  <a:srgbClr val="CADCFC"/>
-                </a:solidFill>
-                <a:latin typeface="Calibri" pitchFamily="34" charset="0"/>
-                <a:ea typeface="Calibri" pitchFamily="34" charset="-122"/>
-                <a:cs typeface="Calibri" pitchFamily="34" charset="-120"/>
-              </a:rPr>
-              <a:t>cada climatizador gera R$ 477,38/mês (R$ 5.728,59/ano) de economia líquida individual — 10 máquinas = R$ 57.285,90/ano; 38 máquinas (parque total) </a:t>
-            </a:r>
-            <a:r>
-              <a:rPr lang="en-US" sz="1150">
-                <a:solidFill>
-                  <a:srgbClr val="CADCFC"/>
-                </a:solidFill>
-                <a:latin typeface="Calibri" pitchFamily="34" charset="0"/>
-                <a:ea typeface="Calibri" pitchFamily="34" charset="-122"/>
-                <a:cs typeface="Calibri" pitchFamily="34" charset="-120"/>
-              </a:rPr>
-              <a:t>= R$ 217.686,42/</a:t>
-            </a:r>
-            <a:r>
-              <a:rPr lang="en-US" sz="1150" dirty="0">
-                <a:solidFill>
-                  <a:srgbClr val="CADCFC"/>
-                </a:solidFill>
-                <a:latin typeface="Calibri" pitchFamily="34" charset="0"/>
-                <a:ea typeface="Calibri" pitchFamily="34" charset="-122"/>
-                <a:cs typeface="Calibri" pitchFamily="34" charset="-120"/>
-              </a:rPr>
-              <a:t>ano.</a:t>
+              <a:t>Escala linear por máquina retrofitada: cada climatizador gera R$ 358,04/mês (R$ 4.296,44/ano) de economia líquida individual — 10 máquinas = R$ 42.964,43/ano; 38 máquinas (parque total) = R$ 163.264,82/ano.</a:t>
             </a:r>
             <a:endParaRPr lang="en-US" sz="1150" dirty="0"/>
           </a:p>
@@ -15563,6 +15310,13 @@
             </a:outerShdw>
           </a:effectLst>
         </p:spPr>
+        <p:txBody>
+          <a:bodyPr/>
+          <a:lstStyle/>
+          <a:p>
+            <a:endParaRPr/>
+          </a:p>
+        </p:txBody>
       </p:sp>
       <p:sp>
         <p:nvSpPr>
@@ -15670,6 +15424,13 @@
             </a:outerShdw>
           </a:effectLst>
         </p:spPr>
+        <p:txBody>
+          <a:bodyPr/>
+          <a:lstStyle/>
+          <a:p>
+            <a:endParaRPr/>
+          </a:p>
+        </p:txBody>
       </p:sp>
       <p:sp>
         <p:nvSpPr>
@@ -15777,6 +15538,13 @@
             </a:outerShdw>
           </a:effectLst>
         </p:spPr>
+        <p:txBody>
+          <a:bodyPr/>
+          <a:lstStyle/>
+          <a:p>
+            <a:endParaRPr/>
+          </a:p>
+        </p:txBody>
       </p:sp>
       <p:sp>
         <p:nvSpPr>
@@ -15884,6 +15652,13 @@
             </a:outerShdw>
           </a:effectLst>
         </p:spPr>
+        <p:txBody>
+          <a:bodyPr/>
+          <a:lstStyle/>
+          <a:p>
+            <a:endParaRPr/>
+          </a:p>
+        </p:txBody>
       </p:sp>
       <p:sp>
         <p:nvSpPr>
@@ -15991,6 +15766,13 @@
             </a:outerShdw>
           </a:effectLst>
         </p:spPr>
+        <p:txBody>
+          <a:bodyPr/>
+          <a:lstStyle/>
+          <a:p>
+            <a:endParaRPr/>
+          </a:p>
+        </p:txBody>
       </p:sp>
       <p:sp>
         <p:nvSpPr>
@@ -17467,6 +17249,13 @@
           </a:solidFill>
           <a:ln/>
         </p:spPr>
+        <p:txBody>
+          <a:bodyPr/>
+          <a:lstStyle/>
+          <a:p>
+            <a:endParaRPr/>
+          </a:p>
+        </p:txBody>
       </p:sp>
       <p:sp>
         <p:nvSpPr>
@@ -19391,6 +19180,13 @@
           </a:solidFill>
           <a:ln/>
         </p:spPr>
+        <p:txBody>
+          <a:bodyPr/>
+          <a:lstStyle/>
+          <a:p>
+            <a:endParaRPr/>
+          </a:p>
+        </p:txBody>
       </p:sp>
       <p:sp>
         <p:nvSpPr>
@@ -19489,6 +19285,13 @@
           </a:solidFill>
           <a:ln/>
         </p:spPr>
+        <p:txBody>
+          <a:bodyPr/>
+          <a:lstStyle/>
+          <a:p>
+            <a:endParaRPr/>
+          </a:p>
+        </p:txBody>
       </p:sp>
       <p:sp>
         <p:nvSpPr>
@@ -19587,6 +19390,13 @@
           </a:solidFill>
           <a:ln/>
         </p:spPr>
+        <p:txBody>
+          <a:bodyPr/>
+          <a:lstStyle/>
+          <a:p>
+            <a:endParaRPr/>
+          </a:p>
+        </p:txBody>
       </p:sp>
       <p:sp>
         <p:nvSpPr>
